--- a/Osis_Presentation_Ibrahim_SAVADOGO_2 [Autosaved].pptx
+++ b/Osis_Presentation_Ibrahim_SAVADOGO_2 [Autosaved].pptx
@@ -990,8 +990,38 @@
                 <a:latin typeface="Arial" panose="020B0604020202020204" pitchFamily="34" charset="0"/>
                 <a:ea typeface="Arial" panose="020B0604020202020204" pitchFamily="34" charset="0"/>
               </a:rPr>
-              <a:t>Avant Java 8, Java était un langage purement orienté objet : toute logique devait être encapsulée dans des classes et des objets. Même pour des tâches simples (trier une liste, filtrer des données), il fallait écrire beaucoup de code.</a:t>
-            </a:r>
+              <a:t>Avant Java 8, Java était un langage purement orienté objet : toute logique devait être encapsulée dans des classes et des objets. Même pour des tâches simples (trier une liste, filtrer des données), il fallait écrire beaucoup de code</a:t>
+            </a:r>
+            <a:r>
+              <a:rPr lang="fr-CI" dirty="0" smtClean="0">
+                <a:latin typeface="Arial" panose="020B0604020202020204" pitchFamily="34" charset="0"/>
+                <a:ea typeface="Arial" panose="020B0604020202020204" pitchFamily="34" charset="0"/>
+              </a:rPr>
+              <a:t>.</a:t>
+            </a:r>
+          </a:p>
+          <a:p>
+            <a:pPr marL="0" marR="0" lvl="0" indent="0" algn="l" defTabSz="914400" rtl="0" eaLnBrk="0" fontAlgn="base" latinLnBrk="0" hangingPunct="0">
+              <a:lnSpc>
+                <a:spcPct val="100000"/>
+              </a:lnSpc>
+              <a:spcBef>
+                <a:spcPct val="30000"/>
+              </a:spcBef>
+              <a:spcAft>
+                <a:spcPct val="0"/>
+              </a:spcAft>
+              <a:buClrTx/>
+              <a:buSzTx/>
+              <a:buFontTx/>
+              <a:buNone/>
+              <a:tabLst/>
+              <a:defRPr/>
+            </a:pPr>
+            <a:endParaRPr lang="fr-CI" dirty="0" smtClean="0">
+              <a:latin typeface="Arial" panose="020B0604020202020204" pitchFamily="34" charset="0"/>
+              <a:ea typeface="Arial" panose="020B0604020202020204" pitchFamily="34" charset="0"/>
+            </a:endParaRPr>
           </a:p>
           <a:p>
             <a:endParaRPr lang="en-US" dirty="0"/>
@@ -1031,6 +1061,130 @@
     <p:extLst>
       <p:ext uri="{BB962C8B-B14F-4D97-AF65-F5344CB8AC3E}">
         <p14:creationId xmlns:p14="http://schemas.microsoft.com/office/powerpoint/2010/main" val="1480895405"/>
+      </p:ext>
+    </p:extLst>
+  </p:cSld>
+  <p:clrMapOvr>
+    <a:masterClrMapping/>
+  </p:clrMapOvr>
+</p:notes>
+</file>
+
+<file path=ppt/notesSlides/notesSlide3.xml><?xml version="1.0" encoding="utf-8"?>
+<p:notes xmlns:a="http://schemas.openxmlformats.org/drawingml/2006/main" xmlns:r="http://schemas.openxmlformats.org/officeDocument/2006/relationships" xmlns:p="http://schemas.openxmlformats.org/presentationml/2006/main">
+  <p:cSld>
+    <p:spTree>
+      <p:nvGrpSpPr>
+        <p:cNvPr id="1" name=""/>
+        <p:cNvGrpSpPr/>
+        <p:nvPr/>
+      </p:nvGrpSpPr>
+      <p:grpSpPr>
+        <a:xfrm>
+          <a:off x="0" y="0"/>
+          <a:ext cx="0" cy="0"/>
+          <a:chOff x="0" y="0"/>
+          <a:chExt cx="0" cy="0"/>
+        </a:xfrm>
+      </p:grpSpPr>
+      <p:sp>
+        <p:nvSpPr>
+          <p:cNvPr id="2" name="Slide Image Placeholder 1"/>
+          <p:cNvSpPr>
+            <a:spLocks noGrp="1" noRot="1" noChangeAspect="1"/>
+          </p:cNvSpPr>
+          <p:nvPr>
+            <p:ph type="sldImg"/>
+          </p:nvPr>
+        </p:nvSpPr>
+        <p:spPr/>
+      </p:sp>
+      <p:sp>
+        <p:nvSpPr>
+          <p:cNvPr id="3" name="Notes Placeholder 2"/>
+          <p:cNvSpPr>
+            <a:spLocks noGrp="1"/>
+          </p:cNvSpPr>
+          <p:nvPr>
+            <p:ph type="body" idx="1"/>
+          </p:nvPr>
+        </p:nvSpPr>
+        <p:spPr/>
+        <p:txBody>
+          <a:bodyPr/>
+          <a:lstStyle/>
+          <a:p>
+            <a:pPr marL="0" marR="0" lvl="0" indent="0" algn="l" defTabSz="914400" rtl="0" eaLnBrk="0" fontAlgn="base" latinLnBrk="0" hangingPunct="0">
+              <a:lnSpc>
+                <a:spcPct val="100000"/>
+              </a:lnSpc>
+              <a:spcBef>
+                <a:spcPct val="30000"/>
+              </a:spcBef>
+              <a:spcAft>
+                <a:spcPct val="0"/>
+              </a:spcAft>
+              <a:buClrTx/>
+              <a:buSzTx/>
+              <a:buFontTx/>
+              <a:buNone/>
+              <a:tabLst/>
+              <a:defRPr/>
+            </a:pPr>
+            <a:r>
+              <a:rPr lang="fr-CI" dirty="0" smtClean="0">
+                <a:latin typeface="Arial" panose="020B0604020202020204" pitchFamily="34" charset="0"/>
+                <a:ea typeface="Arial" panose="020B0604020202020204" pitchFamily="34" charset="0"/>
+              </a:rPr>
+              <a:t>Elle est abstraite parce que certains comportements ne peuvent pas être définis sans connaître la sous-classe concrète.</a:t>
+            </a:r>
+            <a:endParaRPr lang="en-US" sz="1200" dirty="0" smtClean="0">
+              <a:effectLst/>
+              <a:latin typeface="Arial" panose="020B0604020202020204" pitchFamily="34" charset="0"/>
+              <a:ea typeface="Arial" panose="020B0604020202020204" pitchFamily="34" charset="0"/>
+            </a:endParaRPr>
+          </a:p>
+          <a:p>
+            <a:endParaRPr lang="en-US" dirty="0" smtClean="0"/>
+          </a:p>
+          <a:p>
+            <a:endParaRPr lang="en-US" dirty="0" smtClean="0"/>
+          </a:p>
+        </p:txBody>
+      </p:sp>
+      <p:sp>
+        <p:nvSpPr>
+          <p:cNvPr id="4" name="Slide Number Placeholder 3"/>
+          <p:cNvSpPr>
+            <a:spLocks noGrp="1"/>
+          </p:cNvSpPr>
+          <p:nvPr>
+            <p:ph type="sldNum" sz="quarter" idx="10"/>
+          </p:nvPr>
+        </p:nvSpPr>
+        <p:spPr/>
+        <p:txBody>
+          <a:bodyPr/>
+          <a:lstStyle/>
+          <a:p>
+            <a:pPr>
+              <a:defRPr/>
+            </a:pPr>
+            <a:fld id="{4824BCD5-7DB3-4570-95FB-D6BD68920CD5}" type="slidenum">
+              <a:rPr lang="fr-CA" smtClean="0"/>
+              <a:pPr>
+                <a:defRPr/>
+              </a:pPr>
+              <a:t>4</a:t>
+            </a:fld>
+            <a:endParaRPr lang="fr-CA"/>
+          </a:p>
+        </p:txBody>
+      </p:sp>
+    </p:spTree>
+    <p:extLst>
+      <p:ext uri="{BB962C8B-B14F-4D97-AF65-F5344CB8AC3E}">
+        <p14:creationId xmlns:p14="http://schemas.microsoft.com/office/powerpoint/2010/main" val="337845281"/>
       </p:ext>
     </p:extLst>
   </p:cSld>
@@ -4508,6 +4662,13 @@
   <p:clrMapOvr>
     <a:masterClrMapping/>
   </p:clrMapOvr>
+  <p:timing>
+    <p:tnLst>
+      <p:par>
+        <p:cTn id="1" dur="indefinite" restart="never" nodeType="tmRoot"/>
+      </p:par>
+    </p:tnLst>
+  </p:timing>
 </p:sld>
 </file>
 
@@ -5004,15 +5165,7 @@
                   <a:srgbClr val="FF0000"/>
                 </a:solidFill>
               </a:rPr>
-              <a:t>JAVA </a:t>
-            </a:r>
-            <a:r>
-              <a:rPr lang="fr-CA" sz="2400" cap="none" dirty="0" smtClean="0">
-                <a:solidFill>
-                  <a:srgbClr val="FF0000"/>
-                </a:solidFill>
-              </a:rPr>
-              <a:t>8 : Nouveauté du langage</a:t>
+              <a:t>JAVA 8 : Nouveauté du langage</a:t>
             </a:r>
             <a:endParaRPr lang="fr-CA" sz="2400" cap="none" dirty="0">
               <a:solidFill>
@@ -5335,8 +5488,8 @@
         </p:nvSpPr>
         <p:spPr>
           <a:xfrm>
-            <a:off x="395536" y="1196752"/>
-            <a:ext cx="8424936" cy="1364476"/>
+            <a:off x="410749" y="908720"/>
+            <a:ext cx="8424936" cy="456535"/>
           </a:xfrm>
           <a:prstGeom prst="rect">
             <a:avLst/>
@@ -5411,35 +5564,7 @@
               </a:rPr>
               <a:t>.</a:t>
             </a:r>
-          </a:p>
-          <a:p>
-            <a:pPr algn="just">
-              <a:lnSpc>
-                <a:spcPct val="150000"/>
-              </a:lnSpc>
-              <a:spcBef>
-                <a:spcPts val="300"/>
-              </a:spcBef>
-              <a:spcAft>
-                <a:spcPts val="300"/>
-              </a:spcAft>
-            </a:pPr>
-            <a:r>
-              <a:rPr lang="fr-CI" dirty="0" smtClean="0">
-                <a:latin typeface="Arial" panose="020B0604020202020204" pitchFamily="34" charset="0"/>
-                <a:ea typeface="Arial" panose="020B0604020202020204" pitchFamily="34" charset="0"/>
-              </a:rPr>
-              <a:t> </a:t>
-            </a:r>
-            <a:r>
-              <a:rPr lang="fr-CI" dirty="0">
-                <a:latin typeface="Arial" panose="020B0604020202020204" pitchFamily="34" charset="0"/>
-                <a:ea typeface="Arial" panose="020B0604020202020204" pitchFamily="34" charset="0"/>
-              </a:rPr>
-              <a:t>Elle est abstraite parce que certains comportements ne peuvent pas être définis sans connaître la sous-classe concrète.</a:t>
-            </a:r>
-            <a:endParaRPr lang="en-US" sz="1800" dirty="0">
-              <a:effectLst/>
+            <a:endParaRPr lang="fr-CI" dirty="0" smtClean="0">
               <a:latin typeface="Arial" panose="020B0604020202020204" pitchFamily="34" charset="0"/>
               <a:ea typeface="Arial" panose="020B0604020202020204" pitchFamily="34" charset="0"/>
             </a:endParaRPr>
@@ -5454,7 +5579,7 @@
         </p:nvSpPr>
         <p:spPr>
           <a:xfrm>
-            <a:off x="539552" y="3284984"/>
+            <a:off x="410749" y="1479654"/>
             <a:ext cx="8424936" cy="1738938"/>
           </a:xfrm>
           <a:prstGeom prst="rect">
@@ -5690,6 +5815,336 @@
               <a:latin typeface="Arial" panose="020B0604020202020204" pitchFamily="34" charset="0"/>
               <a:ea typeface="Arial" panose="020B0604020202020204" pitchFamily="34" charset="0"/>
             </a:endParaRPr>
+          </a:p>
+        </p:txBody>
+      </p:sp>
+      <p:sp>
+        <p:nvSpPr>
+          <p:cNvPr id="8" name="TextBox 7"/>
+          <p:cNvSpPr txBox="1"/>
+          <p:nvPr/>
+        </p:nvSpPr>
+        <p:spPr>
+          <a:xfrm>
+            <a:off x="467544" y="3429000"/>
+            <a:ext cx="3960440" cy="2585323"/>
+          </a:xfrm>
+          <a:prstGeom prst="rect">
+            <a:avLst/>
+          </a:prstGeom>
+          <a:noFill/>
+        </p:spPr>
+        <p:txBody>
+          <a:bodyPr wrap="square" rtlCol="0">
+            <a:spAutoFit/>
+          </a:bodyPr>
+          <a:lstStyle/>
+          <a:p>
+            <a:r>
+              <a:rPr lang="en-US" dirty="0"/>
+              <a:t>p</a:t>
+            </a:r>
+            <a:r>
+              <a:rPr lang="en-US" dirty="0" smtClean="0"/>
+              <a:t>ublic abstract class </a:t>
+            </a:r>
+            <a:r>
+              <a:rPr lang="en-US" dirty="0" smtClean="0">
+                <a:solidFill>
+                  <a:srgbClr val="FF0000"/>
+                </a:solidFill>
+              </a:rPr>
+              <a:t>Animal</a:t>
+            </a:r>
+            <a:r>
+              <a:rPr lang="en-US" dirty="0" smtClean="0"/>
+              <a:t> (){</a:t>
+            </a:r>
+          </a:p>
+          <a:p>
+            <a:endParaRPr lang="en-US" dirty="0" smtClean="0"/>
+          </a:p>
+          <a:p>
+            <a:r>
+              <a:rPr lang="en-US" dirty="0"/>
+              <a:t> </a:t>
+            </a:r>
+            <a:r>
+              <a:rPr lang="en-US" dirty="0" smtClean="0"/>
+              <a:t>    Protected  String nom;</a:t>
+            </a:r>
+          </a:p>
+          <a:p>
+            <a:endParaRPr lang="en-US" dirty="0" smtClean="0"/>
+          </a:p>
+          <a:p>
+            <a:r>
+              <a:rPr lang="en-US" dirty="0" smtClean="0"/>
+              <a:t>   public Animal (String nom){</a:t>
+            </a:r>
+          </a:p>
+          <a:p>
+            <a:r>
+              <a:rPr lang="en-US" dirty="0"/>
+              <a:t> </a:t>
+            </a:r>
+            <a:r>
+              <a:rPr lang="en-US" dirty="0" smtClean="0"/>
+              <a:t>             </a:t>
+            </a:r>
+            <a:r>
+              <a:rPr lang="en-US" dirty="0" err="1" smtClean="0"/>
+              <a:t>this.nom</a:t>
+            </a:r>
+            <a:r>
+              <a:rPr lang="en-US" dirty="0" smtClean="0"/>
+              <a:t>=nom;</a:t>
+            </a:r>
+          </a:p>
+          <a:p>
+            <a:r>
+              <a:rPr lang="en-US" dirty="0"/>
+              <a:t> </a:t>
+            </a:r>
+            <a:r>
+              <a:rPr lang="en-US" dirty="0" smtClean="0"/>
+              <a:t>            }</a:t>
+            </a:r>
+          </a:p>
+          <a:p>
+            <a:r>
+              <a:rPr lang="en-US" dirty="0"/>
+              <a:t> </a:t>
+            </a:r>
+            <a:r>
+              <a:rPr lang="en-US" dirty="0" smtClean="0"/>
+              <a:t>   public abstract void </a:t>
+            </a:r>
+            <a:r>
+              <a:rPr lang="en-US" dirty="0" err="1" smtClean="0">
+                <a:solidFill>
+                  <a:srgbClr val="FF0000"/>
+                </a:solidFill>
+              </a:rPr>
+              <a:t>Fairedubruit</a:t>
+            </a:r>
+            <a:r>
+              <a:rPr lang="en-US" dirty="0" smtClean="0">
+                <a:solidFill>
+                  <a:srgbClr val="FF0000"/>
+                </a:solidFill>
+              </a:rPr>
+              <a:t>();</a:t>
+            </a:r>
+          </a:p>
+          <a:p>
+            <a:r>
+              <a:rPr lang="en-US" dirty="0" smtClean="0"/>
+              <a:t>}</a:t>
+            </a:r>
+            <a:endParaRPr lang="en-US" dirty="0"/>
+          </a:p>
+        </p:txBody>
+      </p:sp>
+      <p:sp>
+        <p:nvSpPr>
+          <p:cNvPr id="9" name="TextBox 8"/>
+          <p:cNvSpPr txBox="1"/>
+          <p:nvPr/>
+        </p:nvSpPr>
+        <p:spPr>
+          <a:xfrm>
+            <a:off x="4623217" y="3244555"/>
+            <a:ext cx="4299081" cy="3139321"/>
+          </a:xfrm>
+          <a:prstGeom prst="rect">
+            <a:avLst/>
+          </a:prstGeom>
+          <a:noFill/>
+        </p:spPr>
+        <p:txBody>
+          <a:bodyPr wrap="square" rtlCol="0">
+            <a:spAutoFit/>
+          </a:bodyPr>
+          <a:lstStyle/>
+          <a:p>
+            <a:r>
+              <a:rPr lang="en-US" dirty="0"/>
+              <a:t>p</a:t>
+            </a:r>
+            <a:r>
+              <a:rPr lang="en-US" dirty="0" smtClean="0"/>
+              <a:t>ublic class  </a:t>
+            </a:r>
+            <a:r>
+              <a:rPr lang="en-US" dirty="0" err="1" smtClean="0"/>
+              <a:t>chien</a:t>
+            </a:r>
+            <a:r>
+              <a:rPr lang="en-US" dirty="0" smtClean="0"/>
+              <a:t> </a:t>
+            </a:r>
+            <a:r>
+              <a:rPr lang="en-US" dirty="0" smtClean="0">
+                <a:solidFill>
+                  <a:srgbClr val="FF0000"/>
+                </a:solidFill>
+              </a:rPr>
+              <a:t>extends Animal </a:t>
+            </a:r>
+            <a:r>
+              <a:rPr lang="en-US" dirty="0" smtClean="0"/>
+              <a:t>(){</a:t>
+            </a:r>
+          </a:p>
+          <a:p>
+            <a:endParaRPr lang="en-US" dirty="0" smtClean="0"/>
+          </a:p>
+          <a:p>
+            <a:r>
+              <a:rPr lang="en-US" dirty="0" smtClean="0"/>
+              <a:t>   public </a:t>
+            </a:r>
+            <a:r>
+              <a:rPr lang="en-US" dirty="0" err="1" smtClean="0"/>
+              <a:t>chein</a:t>
+            </a:r>
+            <a:r>
+              <a:rPr lang="en-US" dirty="0" smtClean="0"/>
+              <a:t> (String nom){</a:t>
+            </a:r>
+          </a:p>
+          <a:p>
+            <a:r>
+              <a:rPr lang="en-US" dirty="0" smtClean="0"/>
+              <a:t>              super(nom);</a:t>
+            </a:r>
+          </a:p>
+          <a:p>
+            <a:r>
+              <a:rPr lang="en-US" dirty="0" smtClean="0"/>
+              <a:t>  }</a:t>
+            </a:r>
+          </a:p>
+          <a:p>
+            <a:r>
+              <a:rPr lang="en-US" dirty="0"/>
+              <a:t> </a:t>
+            </a:r>
+            <a:r>
+              <a:rPr lang="en-US" dirty="0" smtClean="0"/>
+              <a:t>  @</a:t>
+            </a:r>
+            <a:r>
+              <a:rPr lang="en-US" dirty="0" err="1"/>
+              <a:t>O</a:t>
+            </a:r>
+            <a:r>
+              <a:rPr lang="en-US" dirty="0" err="1" smtClean="0"/>
+              <a:t>verroid</a:t>
+            </a:r>
+            <a:endParaRPr lang="en-US" dirty="0" smtClean="0"/>
+          </a:p>
+          <a:p>
+            <a:r>
+              <a:rPr lang="en-US" dirty="0"/>
+              <a:t> </a:t>
+            </a:r>
+            <a:r>
+              <a:rPr lang="en-US" dirty="0" smtClean="0"/>
+              <a:t>   public abstract void </a:t>
+            </a:r>
+            <a:r>
+              <a:rPr lang="en-US" dirty="0" err="1" smtClean="0">
+                <a:solidFill>
+                  <a:srgbClr val="FF0000"/>
+                </a:solidFill>
+              </a:rPr>
+              <a:t>Fairedubruit</a:t>
+            </a:r>
+            <a:r>
+              <a:rPr lang="en-US" dirty="0" smtClean="0">
+                <a:solidFill>
+                  <a:srgbClr val="FF0000"/>
+                </a:solidFill>
+              </a:rPr>
+              <a:t>(){</a:t>
+            </a:r>
+          </a:p>
+          <a:p>
+            <a:r>
+              <a:rPr lang="en-US" dirty="0" smtClean="0">
+                <a:solidFill>
+                  <a:srgbClr val="FF0000"/>
+                </a:solidFill>
+              </a:rPr>
+              <a:t>         </a:t>
+            </a:r>
+            <a:r>
+              <a:rPr lang="en-US" dirty="0" err="1" smtClean="0">
+                <a:solidFill>
+                  <a:srgbClr val="FF0000"/>
+                </a:solidFill>
+              </a:rPr>
+              <a:t>System.out.println</a:t>
+            </a:r>
+            <a:r>
+              <a:rPr lang="en-US" dirty="0" smtClean="0">
+                <a:solidFill>
+                  <a:srgbClr val="FF0000"/>
+                </a:solidFill>
+              </a:rPr>
+              <a:t>(nom + “ </a:t>
+            </a:r>
+            <a:r>
+              <a:rPr lang="en-US" dirty="0" err="1" smtClean="0">
+                <a:solidFill>
+                  <a:srgbClr val="FF0000"/>
+                </a:solidFill>
+              </a:rPr>
+              <a:t>dit</a:t>
+            </a:r>
+            <a:r>
+              <a:rPr lang="en-US" dirty="0" smtClean="0">
+                <a:solidFill>
+                  <a:srgbClr val="FF0000"/>
+                </a:solidFill>
+              </a:rPr>
+              <a:t> </a:t>
+            </a:r>
+            <a:r>
+              <a:rPr lang="en-US" dirty="0" err="1" smtClean="0">
+                <a:solidFill>
+                  <a:srgbClr val="FF0000"/>
+                </a:solidFill>
+              </a:rPr>
+              <a:t>wouf</a:t>
+            </a:r>
+            <a:r>
+              <a:rPr lang="en-US" dirty="0" smtClean="0">
+                <a:solidFill>
+                  <a:srgbClr val="FF0000"/>
+                </a:solidFill>
+              </a:rPr>
+              <a:t>   “)</a:t>
+            </a:r>
+          </a:p>
+          <a:p>
+            <a:r>
+              <a:rPr lang="en-US" dirty="0" smtClean="0">
+                <a:solidFill>
+                  <a:srgbClr val="FF0000"/>
+                </a:solidFill>
+              </a:rPr>
+              <a:t>        }</a:t>
+            </a:r>
+          </a:p>
+          <a:p>
+            <a:r>
+              <a:rPr lang="en-US" dirty="0" smtClean="0"/>
+              <a:t>}</a:t>
+            </a:r>
+            <a:endParaRPr lang="en-US" dirty="0"/>
           </a:p>
         </p:txBody>
       </p:sp>

--- a/Osis_Presentation_Ibrahim_SAVADOGO_2 [Autosaved].pptx
+++ b/Osis_Presentation_Ibrahim_SAVADOGO_2 [Autosaved].pptx
@@ -5,10 +5,10 @@
     <p:sldMasterId id="2147483650" r:id="rId1"/>
   </p:sldMasterIdLst>
   <p:notesMasterIdLst>
-    <p:notesMasterId r:id="rId13"/>
+    <p:notesMasterId r:id="rId14"/>
   </p:notesMasterIdLst>
   <p:handoutMasterIdLst>
-    <p:handoutMasterId r:id="rId14"/>
+    <p:handoutMasterId r:id="rId15"/>
   </p:handoutMasterIdLst>
   <p:sldIdLst>
     <p:sldId id="256" r:id="rId2"/>
@@ -16,12 +16,13 @@
     <p:sldId id="357" r:id="rId4"/>
     <p:sldId id="371" r:id="rId5"/>
     <p:sldId id="372" r:id="rId6"/>
-    <p:sldId id="373" r:id="rId7"/>
-    <p:sldId id="374" r:id="rId8"/>
-    <p:sldId id="375" r:id="rId9"/>
-    <p:sldId id="376" r:id="rId10"/>
-    <p:sldId id="327" r:id="rId11"/>
-    <p:sldId id="345" r:id="rId12"/>
+    <p:sldId id="374" r:id="rId7"/>
+    <p:sldId id="375" r:id="rId8"/>
+    <p:sldId id="378" r:id="rId9"/>
+    <p:sldId id="379" r:id="rId10"/>
+    <p:sldId id="376" r:id="rId11"/>
+    <p:sldId id="327" r:id="rId12"/>
+    <p:sldId id="345" r:id="rId13"/>
   </p:sldIdLst>
   <p:sldSz cx="9144000" cy="6858000" type="screen4x3"/>
   <p:notesSz cx="7010400" cy="9296400"/>
@@ -990,14 +991,7 @@
                 <a:latin typeface="Arial" panose="020B0604020202020204" pitchFamily="34" charset="0"/>
                 <a:ea typeface="Arial" panose="020B0604020202020204" pitchFamily="34" charset="0"/>
               </a:rPr>
-              <a:t>Avant Java 8, Java était un langage purement orienté objet : toute logique devait être encapsulée dans des classes et des objets. Même pour des tâches simples (trier une liste, filtrer des données), il fallait écrire beaucoup de code</a:t>
-            </a:r>
-            <a:r>
-              <a:rPr lang="fr-CI" dirty="0" smtClean="0">
-                <a:latin typeface="Arial" panose="020B0604020202020204" pitchFamily="34" charset="0"/>
-                <a:ea typeface="Arial" panose="020B0604020202020204" pitchFamily="34" charset="0"/>
-              </a:rPr>
-              <a:t>.</a:t>
+              <a:t>Avant Java 8, Java était un langage purement orienté objet : toute logique devait être encapsulée dans des classes et des objets. Même pour des tâches simples (trier une liste, filtrer des données), il fallait écrire beaucoup de code.</a:t>
             </a:r>
           </a:p>
           <a:p>
@@ -4195,9 +4189,10 @@
           <a:p>
             <a:pPr algn="ctr"/>
             <a:r>
-              <a:rPr lang="fr-FR" sz="4800" dirty="0"/>
-              <a:t>THEME</a:t>
-            </a:r>
+              <a:rPr lang="fr-FR" sz="4800" dirty="0" smtClean="0"/>
+              <a:t>THEME: </a:t>
+            </a:r>
+            <a:endParaRPr lang="fr-FR" sz="4800" dirty="0"/>
           </a:p>
         </p:txBody>
       </p:sp>
@@ -4258,6 +4253,142 @@
 </file>
 
 <file path=ppt/slides/slide10.xml><?xml version="1.0" encoding="utf-8"?>
+<p:sld xmlns:a="http://schemas.openxmlformats.org/drawingml/2006/main" xmlns:r="http://schemas.openxmlformats.org/officeDocument/2006/relationships" xmlns:p="http://schemas.openxmlformats.org/presentationml/2006/main">
+  <p:cSld>
+    <p:spTree>
+      <p:nvGrpSpPr>
+        <p:cNvPr id="1" name=""/>
+        <p:cNvGrpSpPr/>
+        <p:nvPr/>
+      </p:nvGrpSpPr>
+      <p:grpSpPr>
+        <a:xfrm>
+          <a:off x="0" y="0"/>
+          <a:ext cx="0" cy="0"/>
+          <a:chOff x="0" y="0"/>
+          <a:chExt cx="0" cy="0"/>
+        </a:xfrm>
+      </p:grpSpPr>
+      <p:sp>
+        <p:nvSpPr>
+          <p:cNvPr id="2" name="Rectangle 1"/>
+          <p:cNvSpPr/>
+          <p:nvPr/>
+        </p:nvSpPr>
+        <p:spPr>
+          <a:xfrm>
+            <a:off x="827584" y="332656"/>
+            <a:ext cx="3108736" cy="461665"/>
+          </a:xfrm>
+          <a:prstGeom prst="rect">
+            <a:avLst/>
+          </a:prstGeom>
+        </p:spPr>
+        <p:txBody>
+          <a:bodyPr wrap="none">
+            <a:spAutoFit/>
+          </a:bodyPr>
+          <a:lstStyle/>
+          <a:p>
+            <a:r>
+              <a:rPr lang="fr-CI" b="1" dirty="0" smtClean="0">
+                <a:solidFill>
+                  <a:srgbClr val="FF0000"/>
+                </a:solidFill>
+              </a:rPr>
+              <a:t>IV. Tour d’horizon d’un IDE</a:t>
+            </a:r>
+            <a:endParaRPr lang="en-US" sz="2400" dirty="0">
+              <a:solidFill>
+                <a:srgbClr val="FF0000"/>
+              </a:solidFill>
+            </a:endParaRPr>
+          </a:p>
+        </p:txBody>
+      </p:sp>
+      <p:sp>
+        <p:nvSpPr>
+          <p:cNvPr id="3" name="Rectangle 2"/>
+          <p:cNvSpPr/>
+          <p:nvPr/>
+        </p:nvSpPr>
+        <p:spPr>
+          <a:xfrm>
+            <a:off x="179512" y="1268760"/>
+            <a:ext cx="8784976" cy="369332"/>
+          </a:xfrm>
+          <a:prstGeom prst="rect">
+            <a:avLst/>
+          </a:prstGeom>
+        </p:spPr>
+        <p:txBody>
+          <a:bodyPr wrap="square">
+            <a:spAutoFit/>
+          </a:bodyPr>
+          <a:lstStyle/>
+          <a:p>
+            <a:pPr algn="just"/>
+            <a:r>
+              <a:rPr lang="fr-CI" b="1" dirty="0" smtClean="0"/>
+              <a:t>Cas concret :               </a:t>
+            </a:r>
+            <a:r>
+              <a:rPr lang="fr-CI" dirty="0" smtClean="0"/>
+              <a:t>l’exemple d’</a:t>
+            </a:r>
+            <a:r>
+              <a:rPr lang="fr-CI" dirty="0" err="1" smtClean="0"/>
+              <a:t>IntelliJ</a:t>
+            </a:r>
+            <a:endParaRPr lang="en-US" dirty="0"/>
+          </a:p>
+        </p:txBody>
+      </p:sp>
+      <p:pic>
+        <p:nvPicPr>
+          <p:cNvPr id="4" name="Picture 3"/>
+          <p:cNvPicPr>
+            <a:picLocks noChangeAspect="1"/>
+          </p:cNvPicPr>
+          <p:nvPr/>
+        </p:nvPicPr>
+        <p:blipFill>
+          <a:blip r:embed="rId2"/>
+          <a:stretch>
+            <a:fillRect/>
+          </a:stretch>
+        </p:blipFill>
+        <p:spPr>
+          <a:xfrm>
+            <a:off x="1979712" y="1988840"/>
+            <a:ext cx="4320480" cy="3717204"/>
+          </a:xfrm>
+          <a:prstGeom prst="rect">
+            <a:avLst/>
+          </a:prstGeom>
+        </p:spPr>
+      </p:pic>
+    </p:spTree>
+    <p:extLst>
+      <p:ext uri="{BB962C8B-B14F-4D97-AF65-F5344CB8AC3E}">
+        <p14:creationId xmlns:p14="http://schemas.microsoft.com/office/powerpoint/2010/main" val="3217590759"/>
+      </p:ext>
+    </p:extLst>
+  </p:cSld>
+  <p:clrMapOvr>
+    <a:masterClrMapping/>
+  </p:clrMapOvr>
+  <p:timing>
+    <p:tnLst>
+      <p:par>
+        <p:cTn id="1" dur="indefinite" restart="never" nodeType="tmRoot"/>
+      </p:par>
+    </p:tnLst>
+  </p:timing>
+</p:sld>
+</file>
+
+<file path=ppt/slides/slide11.xml><?xml version="1.0" encoding="utf-8"?>
 <p:sld xmlns:a="http://schemas.openxmlformats.org/drawingml/2006/main" xmlns:r="http://schemas.openxmlformats.org/officeDocument/2006/relationships" xmlns:p="http://schemas.openxmlformats.org/presentationml/2006/main">
   <p:cSld>
     <p:spTree>
@@ -4423,7 +4554,7 @@
 </p:sld>
 </file>
 
-<file path=ppt/slides/slide11.xml><?xml version="1.0" encoding="utf-8"?>
+<file path=ppt/slides/slide12.xml><?xml version="1.0" encoding="utf-8"?>
 <p:sld xmlns:a="http://schemas.openxmlformats.org/drawingml/2006/main" xmlns:r="http://schemas.openxmlformats.org/officeDocument/2006/relationships" xmlns:p="http://schemas.openxmlformats.org/presentationml/2006/main">
   <p:cSld>
     <p:spTree>
@@ -4841,31 +4972,15 @@
           <a:lstStyle/>
           <a:p>
             <a:r>
-              <a:rPr lang="fr-FR" b="1" dirty="0">
+              <a:rPr lang="fr-FR" b="1" dirty="0" smtClean="0">
                 <a:solidFill>
                   <a:srgbClr val="000000"/>
                 </a:solidFill>
                 <a:latin typeface="Helvetica Neue"/>
               </a:rPr>
-              <a:t> Plan du cours</a:t>
-            </a:r>
-          </a:p>
-          <a:p>
-            <a:pPr>
-              <a:buFont typeface="+mj-lt"/>
-              <a:buAutoNum type="arabicPeriod"/>
-            </a:pPr>
-            <a:r>
-              <a:rPr lang="fr-FR" dirty="0">
-                <a:solidFill>
-                  <a:srgbClr val="0088CC"/>
-                </a:solidFill>
-                <a:latin typeface="Helvetica Neue"/>
-                <a:hlinkClick r:id="rId4"/>
-              </a:rPr>
-              <a:t>Structure du langage Java</a:t>
-            </a:r>
-            <a:endParaRPr lang="fr-FR" dirty="0">
+              <a:t> </a:t>
+            </a:r>
+            <a:endParaRPr lang="fr-FR" dirty="0" smtClean="0">
               <a:solidFill>
                 <a:srgbClr val="333333"/>
               </a:solidFill>
@@ -4873,154 +4988,86 @@
             </a:endParaRPr>
           </a:p>
           <a:p>
-            <a:pPr marL="742950" lvl="1" indent="-285750">
-              <a:buFont typeface="+mj-lt"/>
-              <a:buAutoNum type="arabicPeriod"/>
+            <a:pPr lvl="1" algn="just">
+              <a:lnSpc>
+                <a:spcPct val="150000"/>
+              </a:lnSpc>
             </a:pPr>
             <a:r>
-              <a:rPr lang="fr-FR" dirty="0">
-                <a:solidFill>
-                  <a:srgbClr val="0088CC"/>
-                </a:solidFill>
-                <a:latin typeface="Helvetica Neue"/>
-                <a:hlinkClick r:id="rId5"/>
-              </a:rPr>
-              <a:t>Java 8 – Nouveautés du langage</a:t>
-            </a:r>
-            <a:endParaRPr lang="fr-FR" dirty="0">
-              <a:solidFill>
-                <a:srgbClr val="333333"/>
-              </a:solidFill>
-              <a:latin typeface="Helvetica Neue"/>
-            </a:endParaRPr>
-          </a:p>
-          <a:p>
-            <a:pPr marL="742950" lvl="1" indent="-285750">
-              <a:buFont typeface="+mj-lt"/>
-              <a:buAutoNum type="arabicPeriod"/>
+              <a:rPr lang="fr-FR" b="1" dirty="0" smtClean="0">
+                <a:solidFill>
+                  <a:srgbClr val="FF0000"/>
+                </a:solidFill>
+                <a:latin typeface="+mn-lt"/>
+              </a:rPr>
+              <a:t> I. Java 8 – Nouveautés du langage</a:t>
+            </a:r>
+          </a:p>
+          <a:p>
+            <a:pPr lvl="1" algn="just">
+              <a:lnSpc>
+                <a:spcPct val="150000"/>
+              </a:lnSpc>
             </a:pPr>
             <a:r>
-              <a:rPr lang="fr-FR" dirty="0" smtClean="0">
-                <a:solidFill>
-                  <a:srgbClr val="0088CC"/>
-                </a:solidFill>
-                <a:latin typeface="Helvetica Neue"/>
-                <a:hlinkClick r:id="rId6"/>
-              </a:rPr>
-              <a:t>Classe </a:t>
-            </a:r>
-            <a:r>
-              <a:rPr lang="fr-FR" dirty="0">
-                <a:solidFill>
-                  <a:srgbClr val="0088CC"/>
-                </a:solidFill>
-                <a:latin typeface="Helvetica Neue"/>
-                <a:hlinkClick r:id="rId6"/>
-              </a:rPr>
-              <a:t>abstraite / Interface / Gestion des exceptions</a:t>
-            </a:r>
-            <a:endParaRPr lang="fr-FR" dirty="0">
-              <a:solidFill>
-                <a:srgbClr val="333333"/>
-              </a:solidFill>
-              <a:latin typeface="Helvetica Neue"/>
-            </a:endParaRPr>
-          </a:p>
-          <a:p>
-            <a:pPr marL="742950" lvl="1" indent="-285750">
-              <a:buFont typeface="+mj-lt"/>
-              <a:buAutoNum type="arabicPeriod"/>
+              <a:rPr lang="fr-FR" b="1" dirty="0" smtClean="0">
+                <a:solidFill>
+                  <a:srgbClr val="FF0000"/>
+                </a:solidFill>
+                <a:latin typeface="+mn-lt"/>
+              </a:rPr>
+              <a:t> II. Classe abstraite / Interface / Gestion des exceptions</a:t>
+            </a:r>
+          </a:p>
+          <a:p>
+            <a:pPr lvl="1" algn="just">
+              <a:lnSpc>
+                <a:spcPct val="150000"/>
+              </a:lnSpc>
             </a:pPr>
             <a:r>
-              <a:rPr lang="fr-FR" dirty="0">
-                <a:solidFill>
-                  <a:srgbClr val="0088CC"/>
-                </a:solidFill>
-                <a:latin typeface="Helvetica Neue"/>
-                <a:hlinkClick r:id="rId7"/>
-              </a:rPr>
-              <a:t>La programmation fonctionnelle – Lambda Expressions</a:t>
-            </a:r>
-            <a:endParaRPr lang="fr-FR" dirty="0">
-              <a:solidFill>
-                <a:srgbClr val="333333"/>
-              </a:solidFill>
-              <a:latin typeface="Helvetica Neue"/>
-            </a:endParaRPr>
-          </a:p>
-          <a:p>
-            <a:pPr>
-              <a:buFont typeface="+mj-lt"/>
-              <a:buAutoNum type="arabicPeriod"/>
+              <a:rPr lang="fr-FR" b="1" dirty="0" smtClean="0">
+                <a:solidFill>
+                  <a:srgbClr val="FF0000"/>
+                </a:solidFill>
+                <a:latin typeface="+mn-lt"/>
+              </a:rPr>
+              <a:t> III. La programmation fonctionnelle – Lambda Expressions</a:t>
+            </a:r>
+          </a:p>
+          <a:p>
+            <a:pPr lvl="1" algn="just">
+              <a:lnSpc>
+                <a:spcPct val="150000"/>
+              </a:lnSpc>
             </a:pPr>
             <a:r>
-              <a:rPr lang="fr-FR" dirty="0">
-                <a:solidFill>
-                  <a:srgbClr val="0088CC"/>
-                </a:solidFill>
-                <a:latin typeface="Helvetica Neue"/>
-                <a:hlinkClick r:id="rId8"/>
-              </a:rPr>
-              <a:t>Tour d'horizon d'un EDI – Premiers pas</a:t>
-            </a:r>
-            <a:endParaRPr lang="fr-FR" dirty="0">
-              <a:solidFill>
-                <a:srgbClr val="333333"/>
-              </a:solidFill>
-              <a:latin typeface="Helvetica Neue"/>
-            </a:endParaRPr>
-          </a:p>
-          <a:p>
-            <a:pPr marL="742950" lvl="1" indent="-285750">
-              <a:buFont typeface="+mj-lt"/>
-              <a:buAutoNum type="arabicPeriod"/>
-            </a:pPr>
-            <a:r>
-              <a:rPr lang="fr-FR" dirty="0">
-                <a:solidFill>
-                  <a:srgbClr val="0088CC"/>
-                </a:solidFill>
-                <a:latin typeface="Helvetica Neue"/>
-                <a:hlinkClick r:id="rId9"/>
-              </a:rPr>
-              <a:t>Eclipse / </a:t>
-            </a:r>
-            <a:r>
-              <a:rPr lang="fr-FR" dirty="0" err="1">
-                <a:solidFill>
-                  <a:srgbClr val="0088CC"/>
-                </a:solidFill>
-                <a:latin typeface="Helvetica Neue"/>
-                <a:hlinkClick r:id="rId9"/>
+              <a:rPr lang="fr-FR" b="1" dirty="0" smtClean="0">
+                <a:solidFill>
+                  <a:srgbClr val="FF0000"/>
+                </a:solidFill>
+                <a:latin typeface="+mn-lt"/>
+              </a:rPr>
+              <a:t> IV. Tour d'horizon d'un EDI – Premiers pas (</a:t>
+            </a:r>
+            <a:r>
+              <a:rPr lang="fr-FR" b="1" dirty="0" err="1" smtClean="0">
+                <a:solidFill>
+                  <a:srgbClr val="FF0000"/>
+                </a:solidFill>
+                <a:latin typeface="+mn-lt"/>
               </a:rPr>
               <a:t>IntelliJ</a:t>
             </a:r>
             <a:r>
-              <a:rPr lang="fr-FR" dirty="0">
-                <a:solidFill>
-                  <a:srgbClr val="0088CC"/>
-                </a:solidFill>
-                <a:latin typeface="Helvetica Neue"/>
-                <a:hlinkClick r:id="rId9"/>
-              </a:rPr>
-              <a:t> / </a:t>
-            </a:r>
-            <a:r>
-              <a:rPr lang="fr-FR" dirty="0" err="1">
-                <a:solidFill>
-                  <a:srgbClr val="0088CC"/>
-                </a:solidFill>
-                <a:latin typeface="Helvetica Neue"/>
-                <a:hlinkClick r:id="rId9"/>
-              </a:rPr>
-              <a:t>NetBeans</a:t>
-            </a:r>
-            <a:endParaRPr lang="fr-FR" dirty="0">
-              <a:solidFill>
-                <a:srgbClr val="333333"/>
-              </a:solidFill>
-              <a:latin typeface="Helvetica Neue"/>
-            </a:endParaRPr>
+              <a:rPr lang="fr-FR" b="1" dirty="0" smtClean="0">
+                <a:solidFill>
+                  <a:srgbClr val="FF0000"/>
+                </a:solidFill>
+                <a:latin typeface="+mn-lt"/>
+              </a:rPr>
+              <a:t> )</a:t>
+            </a:r>
           </a:p>
           <a:p>
             <a:r>
@@ -5165,7 +5212,7 @@
                   <a:srgbClr val="FF0000"/>
                 </a:solidFill>
               </a:rPr>
-              <a:t>JAVA 8 : Nouveauté du langage</a:t>
+              <a:t>I. JAVA 8 : Nouveauté du langage</a:t>
             </a:r>
             <a:endParaRPr lang="fr-CA" sz="2400" cap="none" dirty="0">
               <a:solidFill>
@@ -5219,8 +5266,8 @@
         </p:nvSpPr>
         <p:spPr>
           <a:xfrm>
-            <a:off x="681336" y="980728"/>
-            <a:ext cx="8280920" cy="3477875"/>
+            <a:off x="611560" y="980728"/>
+            <a:ext cx="8350696" cy="3754874"/>
           </a:xfrm>
           <a:prstGeom prst="rect">
             <a:avLst/>
@@ -5241,16 +5288,18 @@
               </a:spcAft>
             </a:pPr>
             <a:r>
-              <a:rPr lang="fr-CI" dirty="0">
-                <a:latin typeface="Arial" panose="020B0604020202020204" pitchFamily="34" charset="0"/>
+              <a:rPr lang="fr-CI" sz="2000" dirty="0">
+                <a:latin typeface="Times New Roman" panose="02020603050405020304" pitchFamily="18" charset="0"/>
                 <a:ea typeface="Arial" panose="020B0604020202020204" pitchFamily="34" charset="0"/>
+                <a:cs typeface="Times New Roman" panose="02020603050405020304" pitchFamily="18" charset="0"/>
               </a:rPr>
               <a:t>Java 8 est sorti en mars 2014 et représente l'une des plus grandes évolutions de Java depuis sa création en 1995</a:t>
             </a:r>
             <a:r>
-              <a:rPr lang="fr-CI" dirty="0" smtClean="0">
-                <a:latin typeface="Arial" panose="020B0604020202020204" pitchFamily="34" charset="0"/>
+              <a:rPr lang="fr-CI" sz="2000" dirty="0" smtClean="0">
+                <a:latin typeface="Times New Roman" panose="02020603050405020304" pitchFamily="18" charset="0"/>
                 <a:ea typeface="Arial" panose="020B0604020202020204" pitchFamily="34" charset="0"/>
+                <a:cs typeface="Times New Roman" panose="02020603050405020304" pitchFamily="18" charset="0"/>
               </a:rPr>
               <a:t>.</a:t>
             </a:r>
@@ -5264,9 +5313,10 @@
                 <a:spcPts val="300"/>
               </a:spcAft>
             </a:pPr>
-            <a:endParaRPr lang="fr-CI" dirty="0" smtClean="0">
-              <a:latin typeface="Arial" panose="020B0604020202020204" pitchFamily="34" charset="0"/>
+            <a:endParaRPr lang="fr-CI" sz="2000" dirty="0" smtClean="0">
+              <a:latin typeface="Times New Roman" panose="02020603050405020304" pitchFamily="18" charset="0"/>
               <a:ea typeface="Arial" panose="020B0604020202020204" pitchFamily="34" charset="0"/>
+              <a:cs typeface="Times New Roman" panose="02020603050405020304" pitchFamily="18" charset="0"/>
             </a:endParaRPr>
           </a:p>
           <a:p>
@@ -5279,9 +5329,10 @@
               </a:spcAft>
             </a:pPr>
             <a:r>
-              <a:rPr lang="fr-CI" dirty="0" smtClean="0">
-                <a:latin typeface="Arial" panose="020B0604020202020204" pitchFamily="34" charset="0"/>
+              <a:rPr lang="fr-CI" sz="2000" dirty="0" smtClean="0">
+                <a:latin typeface="Times New Roman" panose="02020603050405020304" pitchFamily="18" charset="0"/>
                 <a:ea typeface="Arial" panose="020B0604020202020204" pitchFamily="34" charset="0"/>
+                <a:cs typeface="Times New Roman" panose="02020603050405020304" pitchFamily="18" charset="0"/>
               </a:rPr>
               <a:t> </a:t>
             </a:r>
@@ -5295,9 +5346,10 @@
                 <a:spcPts val="300"/>
               </a:spcAft>
             </a:pPr>
-            <a:endParaRPr lang="fr-CI" dirty="0" smtClean="0">
-              <a:latin typeface="Arial" panose="020B0604020202020204" pitchFamily="34" charset="0"/>
+            <a:endParaRPr lang="fr-CI" sz="2000" dirty="0" smtClean="0">
+              <a:latin typeface="Times New Roman" panose="02020603050405020304" pitchFamily="18" charset="0"/>
               <a:ea typeface="Arial" panose="020B0604020202020204" pitchFamily="34" charset="0"/>
+              <a:cs typeface="Times New Roman" panose="02020603050405020304" pitchFamily="18" charset="0"/>
             </a:endParaRPr>
           </a:p>
           <a:p>
@@ -5310,8 +5362,11 @@
               </a:spcAft>
             </a:pPr>
             <a:r>
-              <a:rPr lang="fr-CI" b="1" dirty="0" smtClean="0"/>
-              <a:t>                                       Lambda Expressions</a:t>
+              <a:rPr lang="fr-CI" sz="2000" b="1" dirty="0" smtClean="0">
+                <a:latin typeface="Times New Roman" panose="02020603050405020304" pitchFamily="18" charset="0"/>
+                <a:cs typeface="Times New Roman" panose="02020603050405020304" pitchFamily="18" charset="0"/>
+              </a:rPr>
+              <a:t>                         Lambda Expressions</a:t>
             </a:r>
           </a:p>
           <a:p>
@@ -5324,15 +5379,24 @@
               </a:spcAft>
             </a:pPr>
             <a:r>
-              <a:rPr lang="fr-CI" b="1" dirty="0" smtClean="0"/>
-              <a:t>                                       </a:t>
-            </a:r>
-            <a:r>
-              <a:rPr lang="fr-CI" b="1" dirty="0" err="1" smtClean="0"/>
+              <a:rPr lang="fr-CI" sz="2000" b="1" dirty="0" smtClean="0">
+                <a:latin typeface="Times New Roman" panose="02020603050405020304" pitchFamily="18" charset="0"/>
+                <a:cs typeface="Times New Roman" panose="02020603050405020304" pitchFamily="18" charset="0"/>
+              </a:rPr>
+              <a:t>                          </a:t>
+            </a:r>
+            <a:r>
+              <a:rPr lang="fr-CI" sz="2000" b="1" dirty="0" err="1" smtClean="0">
+                <a:latin typeface="Times New Roman" panose="02020603050405020304" pitchFamily="18" charset="0"/>
+                <a:cs typeface="Times New Roman" panose="02020603050405020304" pitchFamily="18" charset="0"/>
+              </a:rPr>
               <a:t>Streams</a:t>
             </a:r>
             <a:r>
-              <a:rPr lang="fr-CI" b="1" dirty="0" smtClean="0"/>
+              <a:rPr lang="fr-CI" sz="2000" b="1" dirty="0" smtClean="0">
+                <a:latin typeface="Times New Roman" panose="02020603050405020304" pitchFamily="18" charset="0"/>
+                <a:cs typeface="Times New Roman" panose="02020603050405020304" pitchFamily="18" charset="0"/>
+              </a:rPr>
               <a:t> API</a:t>
             </a:r>
           </a:p>
@@ -5346,15 +5410,24 @@
               </a:spcAft>
             </a:pPr>
             <a:r>
-              <a:rPr lang="fr-CI" b="1" dirty="0" smtClean="0"/>
-              <a:t>                                       Nouvelle </a:t>
-            </a:r>
-            <a:r>
-              <a:rPr lang="fr-CI" b="1" dirty="0"/>
+              <a:rPr lang="fr-CI" sz="2000" b="1" dirty="0" smtClean="0">
+                <a:latin typeface="Times New Roman" panose="02020603050405020304" pitchFamily="18" charset="0"/>
+                <a:cs typeface="Times New Roman" panose="02020603050405020304" pitchFamily="18" charset="0"/>
+              </a:rPr>
+              <a:t>                          Nouvelle </a:t>
+            </a:r>
+            <a:r>
+              <a:rPr lang="fr-CI" sz="2000" b="1" dirty="0">
+                <a:latin typeface="Times New Roman" panose="02020603050405020304" pitchFamily="18" charset="0"/>
+                <a:cs typeface="Times New Roman" panose="02020603050405020304" pitchFamily="18" charset="0"/>
+              </a:rPr>
               <a:t>API </a:t>
             </a:r>
             <a:r>
-              <a:rPr lang="fr-CI" b="1" dirty="0" smtClean="0"/>
+              <a:rPr lang="fr-CI" sz="2000" b="1" dirty="0" smtClean="0">
+                <a:latin typeface="Times New Roman" panose="02020603050405020304" pitchFamily="18" charset="0"/>
+                <a:cs typeface="Times New Roman" panose="02020603050405020304" pitchFamily="18" charset="0"/>
+              </a:rPr>
               <a:t>Date/Time</a:t>
             </a:r>
           </a:p>
@@ -5368,22 +5441,37 @@
               </a:spcAft>
             </a:pPr>
             <a:r>
-              <a:rPr lang="fr-CI" b="1" dirty="0" smtClean="0"/>
-              <a:t>                                       Méthodes </a:t>
-            </a:r>
-            <a:r>
-              <a:rPr lang="fr-CI" b="1" dirty="0"/>
+              <a:rPr lang="fr-CI" sz="2000" b="1" dirty="0" smtClean="0">
+                <a:latin typeface="Times New Roman" panose="02020603050405020304" pitchFamily="18" charset="0"/>
+                <a:cs typeface="Times New Roman" panose="02020603050405020304" pitchFamily="18" charset="0"/>
+              </a:rPr>
+              <a:t>                          Méthodes </a:t>
+            </a:r>
+            <a:r>
+              <a:rPr lang="fr-CI" sz="2000" b="1" dirty="0">
+                <a:latin typeface="Times New Roman" panose="02020603050405020304" pitchFamily="18" charset="0"/>
+                <a:cs typeface="Times New Roman" panose="02020603050405020304" pitchFamily="18" charset="0"/>
+              </a:rPr>
               <a:t>default et </a:t>
             </a:r>
             <a:r>
-              <a:rPr lang="fr-CI" b="1" dirty="0" err="1" smtClean="0"/>
+              <a:rPr lang="fr-CI" sz="2000" b="1" dirty="0" err="1" smtClean="0">
+                <a:latin typeface="Times New Roman" panose="02020603050405020304" pitchFamily="18" charset="0"/>
+                <a:cs typeface="Times New Roman" panose="02020603050405020304" pitchFamily="18" charset="0"/>
+              </a:rPr>
               <a:t>static</a:t>
             </a:r>
             <a:r>
-              <a:rPr lang="fr-CI" b="1" dirty="0" smtClean="0"/>
+              <a:rPr lang="fr-CI" sz="2000" b="1" dirty="0" smtClean="0">
+                <a:latin typeface="Times New Roman" panose="02020603050405020304" pitchFamily="18" charset="0"/>
+                <a:cs typeface="Times New Roman" panose="02020603050405020304" pitchFamily="18" charset="0"/>
+              </a:rPr>
               <a:t> dans les interfaces</a:t>
             </a:r>
-            <a:endParaRPr lang="en-US" b="1" dirty="0"/>
+            <a:endParaRPr lang="en-US" sz="2000" b="1" dirty="0">
+              <a:latin typeface="Times New Roman" panose="02020603050405020304" pitchFamily="18" charset="0"/>
+              <a:cs typeface="Times New Roman" panose="02020603050405020304" pitchFamily="18" charset="0"/>
+            </a:endParaRPr>
           </a:p>
           <a:p>
             <a:pPr>
@@ -5423,7 +5511,306 @@
   <p:timing>
     <p:tnLst>
       <p:par>
-        <p:cTn id="1" dur="indefinite" restart="never" nodeType="tmRoot"/>
+        <p:cTn id="1" dur="indefinite" restart="never" nodeType="tmRoot">
+          <p:childTnLst>
+            <p:seq concurrent="1" nextAc="seek">
+              <p:cTn id="2" dur="indefinite" nodeType="mainSeq">
+                <p:childTnLst>
+                  <p:par>
+                    <p:cTn id="3" fill="hold">
+                      <p:stCondLst>
+                        <p:cond delay="indefinite"/>
+                      </p:stCondLst>
+                      <p:childTnLst>
+                        <p:par>
+                          <p:cTn id="4" fill="hold">
+                            <p:stCondLst>
+                              <p:cond delay="0"/>
+                            </p:stCondLst>
+                            <p:childTnLst>
+                              <p:par>
+                                <p:cTn id="5" presetID="1" presetClass="entr" presetSubtype="0" fill="hold" nodeType="clickEffect">
+                                  <p:stCondLst>
+                                    <p:cond delay="0"/>
+                                  </p:stCondLst>
+                                  <p:childTnLst>
+                                    <p:set>
+                                      <p:cBhvr>
+                                        <p:cTn id="6" dur="1" fill="hold">
+                                          <p:stCondLst>
+                                            <p:cond delay="0"/>
+                                          </p:stCondLst>
+                                        </p:cTn>
+                                        <p:tgtEl>
+                                          <p:spTgt spid="2">
+                                            <p:txEl>
+                                              <p:pRg st="0" end="0"/>
+                                            </p:txEl>
+                                          </p:spTgt>
+                                        </p:tgtEl>
+                                        <p:attrNameLst>
+                                          <p:attrName>style.visibility</p:attrName>
+                                        </p:attrNameLst>
+                                      </p:cBhvr>
+                                      <p:to>
+                                        <p:strVal val="visible"/>
+                                      </p:to>
+                                    </p:set>
+                                  </p:childTnLst>
+                                </p:cTn>
+                              </p:par>
+                            </p:childTnLst>
+                          </p:cTn>
+                        </p:par>
+                      </p:childTnLst>
+                    </p:cTn>
+                  </p:par>
+                  <p:par>
+                    <p:cTn id="7" fill="hold">
+                      <p:stCondLst>
+                        <p:cond delay="indefinite"/>
+                      </p:stCondLst>
+                      <p:childTnLst>
+                        <p:par>
+                          <p:cTn id="8" fill="hold">
+                            <p:stCondLst>
+                              <p:cond delay="0"/>
+                            </p:stCondLst>
+                            <p:childTnLst>
+                              <p:par>
+                                <p:cTn id="9" presetID="1" presetClass="entr" presetSubtype="0" fill="hold" nodeType="clickEffect">
+                                  <p:stCondLst>
+                                    <p:cond delay="0"/>
+                                  </p:stCondLst>
+                                  <p:childTnLst>
+                                    <p:set>
+                                      <p:cBhvr>
+                                        <p:cTn id="10" dur="1" fill="hold">
+                                          <p:stCondLst>
+                                            <p:cond delay="0"/>
+                                          </p:stCondLst>
+                                        </p:cTn>
+                                        <p:tgtEl>
+                                          <p:spTgt spid="2">
+                                            <p:txEl>
+                                              <p:pRg st="4" end="4"/>
+                                            </p:txEl>
+                                          </p:spTgt>
+                                        </p:tgtEl>
+                                        <p:attrNameLst>
+                                          <p:attrName>style.visibility</p:attrName>
+                                        </p:attrNameLst>
+                                      </p:cBhvr>
+                                      <p:to>
+                                        <p:strVal val="visible"/>
+                                      </p:to>
+                                    </p:set>
+                                  </p:childTnLst>
+                                </p:cTn>
+                              </p:par>
+                            </p:childTnLst>
+                          </p:cTn>
+                        </p:par>
+                      </p:childTnLst>
+                    </p:cTn>
+                  </p:par>
+                  <p:par>
+                    <p:cTn id="11" fill="hold">
+                      <p:stCondLst>
+                        <p:cond delay="indefinite"/>
+                      </p:stCondLst>
+                      <p:childTnLst>
+                        <p:par>
+                          <p:cTn id="12" fill="hold">
+                            <p:stCondLst>
+                              <p:cond delay="0"/>
+                            </p:stCondLst>
+                            <p:childTnLst>
+                              <p:par>
+                                <p:cTn id="13" presetID="1" presetClass="entr" presetSubtype="0" fill="hold" nodeType="clickEffect">
+                                  <p:stCondLst>
+                                    <p:cond delay="0"/>
+                                  </p:stCondLst>
+                                  <p:childTnLst>
+                                    <p:set>
+                                      <p:cBhvr>
+                                        <p:cTn id="14" dur="1" fill="hold">
+                                          <p:stCondLst>
+                                            <p:cond delay="0"/>
+                                          </p:stCondLst>
+                                        </p:cTn>
+                                        <p:tgtEl>
+                                          <p:spTgt spid="2">
+                                            <p:txEl>
+                                              <p:pRg st="5" end="5"/>
+                                            </p:txEl>
+                                          </p:spTgt>
+                                        </p:tgtEl>
+                                        <p:attrNameLst>
+                                          <p:attrName>style.visibility</p:attrName>
+                                        </p:attrNameLst>
+                                      </p:cBhvr>
+                                      <p:to>
+                                        <p:strVal val="visible"/>
+                                      </p:to>
+                                    </p:set>
+                                  </p:childTnLst>
+                                </p:cTn>
+                              </p:par>
+                            </p:childTnLst>
+                          </p:cTn>
+                        </p:par>
+                      </p:childTnLst>
+                    </p:cTn>
+                  </p:par>
+                  <p:par>
+                    <p:cTn id="15" fill="hold">
+                      <p:stCondLst>
+                        <p:cond delay="indefinite"/>
+                      </p:stCondLst>
+                      <p:childTnLst>
+                        <p:par>
+                          <p:cTn id="16" fill="hold">
+                            <p:stCondLst>
+                              <p:cond delay="0"/>
+                            </p:stCondLst>
+                            <p:childTnLst>
+                              <p:par>
+                                <p:cTn id="17" presetID="1" presetClass="entr" presetSubtype="0" fill="hold" nodeType="clickEffect">
+                                  <p:stCondLst>
+                                    <p:cond delay="0"/>
+                                  </p:stCondLst>
+                                  <p:childTnLst>
+                                    <p:set>
+                                      <p:cBhvr>
+                                        <p:cTn id="18" dur="1" fill="hold">
+                                          <p:stCondLst>
+                                            <p:cond delay="0"/>
+                                          </p:stCondLst>
+                                        </p:cTn>
+                                        <p:tgtEl>
+                                          <p:spTgt spid="2">
+                                            <p:txEl>
+                                              <p:pRg st="6" end="6"/>
+                                            </p:txEl>
+                                          </p:spTgt>
+                                        </p:tgtEl>
+                                        <p:attrNameLst>
+                                          <p:attrName>style.visibility</p:attrName>
+                                        </p:attrNameLst>
+                                      </p:cBhvr>
+                                      <p:to>
+                                        <p:strVal val="visible"/>
+                                      </p:to>
+                                    </p:set>
+                                  </p:childTnLst>
+                                </p:cTn>
+                              </p:par>
+                            </p:childTnLst>
+                          </p:cTn>
+                        </p:par>
+                      </p:childTnLst>
+                    </p:cTn>
+                  </p:par>
+                  <p:par>
+                    <p:cTn id="19" fill="hold">
+                      <p:stCondLst>
+                        <p:cond delay="indefinite"/>
+                      </p:stCondLst>
+                      <p:childTnLst>
+                        <p:par>
+                          <p:cTn id="20" fill="hold">
+                            <p:stCondLst>
+                              <p:cond delay="0"/>
+                            </p:stCondLst>
+                            <p:childTnLst>
+                              <p:par>
+                                <p:cTn id="21" presetID="1" presetClass="entr" presetSubtype="0" fill="hold" nodeType="clickEffect">
+                                  <p:stCondLst>
+                                    <p:cond delay="0"/>
+                                  </p:stCondLst>
+                                  <p:childTnLst>
+                                    <p:set>
+                                      <p:cBhvr>
+                                        <p:cTn id="22" dur="1" fill="hold">
+                                          <p:stCondLst>
+                                            <p:cond delay="0"/>
+                                          </p:stCondLst>
+                                        </p:cTn>
+                                        <p:tgtEl>
+                                          <p:spTgt spid="2">
+                                            <p:txEl>
+                                              <p:pRg st="7" end="7"/>
+                                            </p:txEl>
+                                          </p:spTgt>
+                                        </p:tgtEl>
+                                        <p:attrNameLst>
+                                          <p:attrName>style.visibility</p:attrName>
+                                        </p:attrNameLst>
+                                      </p:cBhvr>
+                                      <p:to>
+                                        <p:strVal val="visible"/>
+                                      </p:to>
+                                    </p:set>
+                                  </p:childTnLst>
+                                </p:cTn>
+                              </p:par>
+                              <p:par>
+                                <p:cTn id="23" presetID="1" presetClass="entr" presetSubtype="0" fill="hold" nodeType="withEffect">
+                                  <p:stCondLst>
+                                    <p:cond delay="0"/>
+                                  </p:stCondLst>
+                                  <p:childTnLst>
+                                    <p:set>
+                                      <p:cBhvr>
+                                        <p:cTn id="24" dur="1" fill="hold">
+                                          <p:stCondLst>
+                                            <p:cond delay="0"/>
+                                          </p:stCondLst>
+                                        </p:cTn>
+                                        <p:tgtEl>
+                                          <p:spTgt spid="2">
+                                            <p:txEl>
+                                              <p:pRg st="8" end="8"/>
+                                            </p:txEl>
+                                          </p:spTgt>
+                                        </p:tgtEl>
+                                        <p:attrNameLst>
+                                          <p:attrName>style.visibility</p:attrName>
+                                        </p:attrNameLst>
+                                      </p:cBhvr>
+                                      <p:to>
+                                        <p:strVal val="visible"/>
+                                      </p:to>
+                                    </p:set>
+                                  </p:childTnLst>
+                                </p:cTn>
+                              </p:par>
+                            </p:childTnLst>
+                          </p:cTn>
+                        </p:par>
+                      </p:childTnLst>
+                    </p:cTn>
+                  </p:par>
+                </p:childTnLst>
+              </p:cTn>
+              <p:prevCondLst>
+                <p:cond evt="onPrev" delay="0">
+                  <p:tgtEl>
+                    <p:sldTgt/>
+                  </p:tgtEl>
+                </p:cond>
+              </p:prevCondLst>
+              <p:nextCondLst>
+                <p:cond evt="onNext" delay="0">
+                  <p:tgtEl>
+                    <p:sldTgt/>
+                  </p:tgtEl>
+                </p:cond>
+              </p:nextCondLst>
+            </p:seq>
+          </p:childTnLst>
+        </p:cTn>
       </p:par>
     </p:tnLst>
   </p:timing>
@@ -5456,7 +5843,7 @@
         <p:spPr>
           <a:xfrm>
             <a:off x="827584" y="332656"/>
-            <a:ext cx="2564163" cy="461665"/>
+            <a:ext cx="3075522" cy="461665"/>
           </a:xfrm>
           <a:prstGeom prst="rect">
             <a:avLst/>
@@ -5474,7 +5861,7 @@
                   <a:srgbClr val="FF0000"/>
                 </a:solidFill>
               </a:rPr>
-              <a:t>Classe Abstraites</a:t>
+              <a:t>II.1 Classe Abstraites</a:t>
             </a:r>
             <a:endParaRPr lang="en-US" sz="2400" dirty="0"/>
           </a:p>
@@ -5488,8 +5875,8 @@
         </p:nvSpPr>
         <p:spPr>
           <a:xfrm>
-            <a:off x="410749" y="908720"/>
-            <a:ext cx="8424936" cy="456535"/>
+            <a:off x="251520" y="908720"/>
+            <a:ext cx="8584165" cy="498342"/>
           </a:xfrm>
           <a:prstGeom prst="rect">
             <a:avLst/>
@@ -5513,61 +5900,63 @@
               </a:spcAft>
             </a:pPr>
             <a:r>
-              <a:rPr lang="fr-CI" dirty="0">
+              <a:rPr lang="fr-CI" sz="2000" dirty="0">
+                <a:latin typeface="Times New Roman" panose="02020603050405020304" pitchFamily="18" charset="0"/>
+                <a:ea typeface="Arial" panose="020B0604020202020204" pitchFamily="34" charset="0"/>
+                <a:cs typeface="Times New Roman" panose="02020603050405020304" pitchFamily="18" charset="0"/>
+              </a:rPr>
+              <a:t>Une classe </a:t>
+            </a:r>
+            <a:r>
+              <a:rPr lang="fr-CI" sz="2000" b="1" dirty="0" smtClean="0">
+                <a:solidFill>
+                  <a:srgbClr val="FF0000"/>
+                </a:solidFill>
+                <a:latin typeface="Times New Roman" panose="02020603050405020304" pitchFamily="18" charset="0"/>
+                <a:ea typeface="Arial" panose="020B0604020202020204" pitchFamily="34" charset="0"/>
+                <a:cs typeface="Times New Roman" panose="02020603050405020304" pitchFamily="18" charset="0"/>
+              </a:rPr>
+              <a:t>abstraite</a:t>
+            </a:r>
+            <a:r>
+              <a:rPr lang="fr-CI" sz="2000" dirty="0" smtClean="0">
+                <a:latin typeface="Times New Roman" panose="02020603050405020304" pitchFamily="18" charset="0"/>
+                <a:ea typeface="Arial" panose="020B0604020202020204" pitchFamily="34" charset="0"/>
+                <a:cs typeface="Times New Roman" panose="02020603050405020304" pitchFamily="18" charset="0"/>
+              </a:rPr>
+              <a:t> = </a:t>
+            </a:r>
+            <a:r>
+              <a:rPr lang="fr-CI" sz="2000" dirty="0">
+                <a:latin typeface="Times New Roman" panose="02020603050405020304" pitchFamily="18" charset="0"/>
+                <a:ea typeface="Arial" panose="020B0604020202020204" pitchFamily="34" charset="0"/>
+                <a:cs typeface="Times New Roman" panose="02020603050405020304" pitchFamily="18" charset="0"/>
+              </a:rPr>
+              <a:t>classe </a:t>
+            </a:r>
+            <a:r>
+              <a:rPr lang="fr-CI" sz="2000" b="1" dirty="0">
+                <a:latin typeface="Times New Roman" panose="02020603050405020304" pitchFamily="18" charset="0"/>
+                <a:ea typeface="Arial" panose="020B0604020202020204" pitchFamily="34" charset="0"/>
+                <a:cs typeface="Times New Roman" panose="02020603050405020304" pitchFamily="18" charset="0"/>
+              </a:rPr>
+              <a:t>INCOMPLÈTE</a:t>
+            </a:r>
+            <a:r>
+              <a:rPr lang="fr-CI" sz="2000" dirty="0">
+                <a:latin typeface="Times New Roman" panose="02020603050405020304" pitchFamily="18" charset="0"/>
+                <a:ea typeface="Arial" panose="020B0604020202020204" pitchFamily="34" charset="0"/>
+                <a:cs typeface="Times New Roman" panose="02020603050405020304" pitchFamily="18" charset="0"/>
+              </a:rPr>
+              <a:t> qui sert de modèle commun</a:t>
+            </a:r>
+            <a:r>
+              <a:rPr lang="fr-CI" sz="2000" dirty="0" smtClean="0">
                 <a:latin typeface="Arial" panose="020B0604020202020204" pitchFamily="34" charset="0"/>
                 <a:ea typeface="Arial" panose="020B0604020202020204" pitchFamily="34" charset="0"/>
               </a:rPr>
-              <a:t>Une classe </a:t>
-            </a:r>
-            <a:r>
-              <a:rPr lang="fr-CI" b="1" dirty="0" smtClean="0">
-                <a:solidFill>
-                  <a:srgbClr val="FF0000"/>
-                </a:solidFill>
-                <a:latin typeface="Arial" panose="020B0604020202020204" pitchFamily="34" charset="0"/>
-                <a:ea typeface="Arial" panose="020B0604020202020204" pitchFamily="34" charset="0"/>
-              </a:rPr>
-              <a:t>abstraite</a:t>
-            </a:r>
-            <a:r>
-              <a:rPr lang="fr-CI" dirty="0" smtClean="0">
-                <a:latin typeface="Arial" panose="020B0604020202020204" pitchFamily="34" charset="0"/>
-                <a:ea typeface="Arial" panose="020B0604020202020204" pitchFamily="34" charset="0"/>
-              </a:rPr>
-              <a:t> = </a:t>
-            </a:r>
-            <a:r>
-              <a:rPr lang="fr-CI" dirty="0">
-                <a:latin typeface="Arial" panose="020B0604020202020204" pitchFamily="34" charset="0"/>
-                <a:ea typeface="Arial" panose="020B0604020202020204" pitchFamily="34" charset="0"/>
-              </a:rPr>
-              <a:t>classe </a:t>
-            </a:r>
-            <a:r>
-              <a:rPr lang="fr-CI" b="1" dirty="0">
-                <a:latin typeface="Arial" panose="020B0604020202020204" pitchFamily="34" charset="0"/>
-                <a:ea typeface="Arial" panose="020B0604020202020204" pitchFamily="34" charset="0"/>
-              </a:rPr>
-              <a:t>INCOMPLÈTE</a:t>
-            </a:r>
-            <a:r>
-              <a:rPr lang="fr-CI" dirty="0">
-                <a:latin typeface="Arial" panose="020B0604020202020204" pitchFamily="34" charset="0"/>
-                <a:ea typeface="Arial" panose="020B0604020202020204" pitchFamily="34" charset="0"/>
-              </a:rPr>
-              <a:t> qui sert de modèle commun</a:t>
-            </a:r>
-            <a:r>
-              <a:rPr lang="fr-CI" dirty="0" smtClean="0">
-                <a:latin typeface="Arial" panose="020B0604020202020204" pitchFamily="34" charset="0"/>
-                <a:ea typeface="Arial" panose="020B0604020202020204" pitchFamily="34" charset="0"/>
-              </a:rPr>
               <a:t>.</a:t>
             </a:r>
-            <a:endParaRPr lang="fr-CI" dirty="0" smtClean="0">
-              <a:latin typeface="Arial" panose="020B0604020202020204" pitchFamily="34" charset="0"/>
-              <a:ea typeface="Arial" panose="020B0604020202020204" pitchFamily="34" charset="0"/>
-            </a:endParaRPr>
           </a:p>
         </p:txBody>
       </p:sp>
@@ -5579,8 +5968,8 @@
         </p:nvSpPr>
         <p:spPr>
           <a:xfrm>
-            <a:off x="410749" y="1479654"/>
-            <a:ext cx="8424936" cy="1738938"/>
+            <a:off x="410749" y="1501381"/>
+            <a:ext cx="8424936" cy="1477328"/>
           </a:xfrm>
           <a:prstGeom prst="rect">
             <a:avLst/>
@@ -5592,40 +5981,6 @@
           </a:bodyPr>
           <a:lstStyle/>
           <a:p>
-            <a:pPr>
-              <a:spcBef>
-                <a:spcPts val="1000"/>
-              </a:spcBef>
-              <a:spcAft>
-                <a:spcPts val="400"/>
-              </a:spcAft>
-            </a:pPr>
-            <a:r>
-              <a:rPr lang="fr-CI" sz="2000" b="1" dirty="0">
-                <a:solidFill>
-                  <a:srgbClr val="1F3864"/>
-                </a:solidFill>
-                <a:latin typeface="Arial" panose="020B0604020202020204" pitchFamily="34" charset="0"/>
-              </a:rPr>
-              <a:t>Règles des </a:t>
-            </a:r>
-            <a:r>
-              <a:rPr lang="fr-CI" sz="2000" b="1" dirty="0" smtClean="0">
-                <a:solidFill>
-                  <a:srgbClr val="1F3864"/>
-                </a:solidFill>
-                <a:latin typeface="Arial" panose="020B0604020202020204" pitchFamily="34" charset="0"/>
-              </a:rPr>
-              <a:t>classes abstraites</a:t>
-            </a:r>
-            <a:endParaRPr lang="en-US" sz="2000" b="1" dirty="0">
-              <a:solidFill>
-                <a:srgbClr val="1F3864"/>
-              </a:solidFill>
-              <a:latin typeface="Arial" panose="020B0604020202020204" pitchFamily="34" charset="0"/>
-            </a:endParaRPr>
-          </a:p>
-          <a:p>
             <a:pPr marL="342900" lvl="0" indent="-342900">
               <a:spcBef>
                 <a:spcPts val="200"/>
@@ -5637,43 +5992,49 @@
               <a:buChar char="•"/>
             </a:pPr>
             <a:r>
-              <a:rPr lang="en-US" dirty="0">
-                <a:latin typeface="Arial" panose="020B0604020202020204" pitchFamily="34" charset="0"/>
+              <a:rPr lang="en-US" sz="2000" dirty="0" smtClean="0">
+                <a:latin typeface="Times New Roman" panose="02020603050405020304" pitchFamily="18" charset="0"/>
                 <a:ea typeface="Arial" panose="020B0604020202020204" pitchFamily="34" charset="0"/>
+                <a:cs typeface="Times New Roman" panose="02020603050405020304" pitchFamily="18" charset="0"/>
               </a:rPr>
               <a:t>Mot-</a:t>
             </a:r>
             <a:r>
-              <a:rPr lang="en-US" dirty="0" err="1">
-                <a:latin typeface="Arial" panose="020B0604020202020204" pitchFamily="34" charset="0"/>
+              <a:rPr lang="en-US" sz="2000" dirty="0" err="1" smtClean="0">
+                <a:latin typeface="Times New Roman" panose="02020603050405020304" pitchFamily="18" charset="0"/>
                 <a:ea typeface="Arial" panose="020B0604020202020204" pitchFamily="34" charset="0"/>
+                <a:cs typeface="Times New Roman" panose="02020603050405020304" pitchFamily="18" charset="0"/>
               </a:rPr>
               <a:t>clé</a:t>
             </a:r>
             <a:r>
-              <a:rPr lang="en-US" dirty="0">
-                <a:latin typeface="Arial" panose="020B0604020202020204" pitchFamily="34" charset="0"/>
+              <a:rPr lang="en-US" sz="2000" dirty="0" smtClean="0">
+                <a:latin typeface="Times New Roman" panose="02020603050405020304" pitchFamily="18" charset="0"/>
                 <a:ea typeface="Arial" panose="020B0604020202020204" pitchFamily="34" charset="0"/>
+                <a:cs typeface="Times New Roman" panose="02020603050405020304" pitchFamily="18" charset="0"/>
               </a:rPr>
               <a:t> </a:t>
             </a:r>
             <a:r>
-              <a:rPr lang="en-US" b="1" dirty="0">
-                <a:latin typeface="Arial" panose="020B0604020202020204" pitchFamily="34" charset="0"/>
+              <a:rPr lang="en-US" sz="2000" b="1" dirty="0">
+                <a:latin typeface="Times New Roman" panose="02020603050405020304" pitchFamily="18" charset="0"/>
                 <a:ea typeface="Arial" panose="020B0604020202020204" pitchFamily="34" charset="0"/>
+                <a:cs typeface="Times New Roman" panose="02020603050405020304" pitchFamily="18" charset="0"/>
               </a:rPr>
               <a:t>abstract</a:t>
             </a:r>
             <a:r>
-              <a:rPr lang="en-US" dirty="0">
-                <a:latin typeface="Arial" panose="020B0604020202020204" pitchFamily="34" charset="0"/>
+              <a:rPr lang="en-US" sz="2000" dirty="0">
+                <a:latin typeface="Times New Roman" panose="02020603050405020304" pitchFamily="18" charset="0"/>
                 <a:ea typeface="Arial" panose="020B0604020202020204" pitchFamily="34" charset="0"/>
+                <a:cs typeface="Times New Roman" panose="02020603050405020304" pitchFamily="18" charset="0"/>
               </a:rPr>
               <a:t> </a:t>
             </a:r>
-            <a:endParaRPr lang="en-US" dirty="0" smtClean="0">
-              <a:latin typeface="Arial" panose="020B0604020202020204" pitchFamily="34" charset="0"/>
+            <a:endParaRPr lang="en-US" sz="2000" dirty="0" smtClean="0">
+              <a:latin typeface="Times New Roman" panose="02020603050405020304" pitchFamily="18" charset="0"/>
               <a:ea typeface="Arial" panose="020B0604020202020204" pitchFamily="34" charset="0"/>
+              <a:cs typeface="Times New Roman" panose="02020603050405020304" pitchFamily="18" charset="0"/>
             </a:endParaRPr>
           </a:p>
           <a:p>
@@ -5688,50 +6049,25 @@
               <a:buChar char="•"/>
             </a:pPr>
             <a:r>
-              <a:rPr lang="fr-CI" b="1" dirty="0" smtClean="0">
-                <a:latin typeface="Arial" panose="020B0604020202020204" pitchFamily="34" charset="0"/>
+              <a:rPr lang="fr-CI" sz="2000" b="1" dirty="0" smtClean="0">
+                <a:latin typeface="Times New Roman" panose="02020603050405020304" pitchFamily="18" charset="0"/>
                 <a:ea typeface="Arial" panose="020B0604020202020204" pitchFamily="34" charset="0"/>
+                <a:cs typeface="Times New Roman" panose="02020603050405020304" pitchFamily="18" charset="0"/>
               </a:rPr>
               <a:t>(</a:t>
             </a:r>
             <a:r>
-              <a:rPr lang="fr-CI" b="1" dirty="0">
-                <a:latin typeface="Arial" panose="020B0604020202020204" pitchFamily="34" charset="0"/>
+              <a:rPr lang="fr-CI" sz="2000" b="1" dirty="0">
+                <a:latin typeface="Times New Roman" panose="02020603050405020304" pitchFamily="18" charset="0"/>
                 <a:ea typeface="Arial" panose="020B0604020202020204" pitchFamily="34" charset="0"/>
+                <a:cs typeface="Times New Roman" panose="02020603050405020304" pitchFamily="18" charset="0"/>
               </a:rPr>
               <a:t>sans corps) </a:t>
             </a:r>
-            <a:r>
-              <a:rPr lang="fr-CI" dirty="0">
-                <a:latin typeface="Arial" panose="020B0604020202020204" pitchFamily="34" charset="0"/>
-                <a:ea typeface="Arial" panose="020B0604020202020204" pitchFamily="34" charset="0"/>
-              </a:rPr>
-              <a:t>→ les </a:t>
-            </a:r>
-            <a:r>
-              <a:rPr lang="fr-CI" dirty="0" smtClean="0">
-                <a:latin typeface="Arial" panose="020B0604020202020204" pitchFamily="34" charset="0"/>
-                <a:ea typeface="Arial" panose="020B0604020202020204" pitchFamily="34" charset="0"/>
-              </a:rPr>
-              <a:t>sous-classes (</a:t>
-            </a:r>
-            <a:r>
-              <a:rPr lang="fr-CI" b="1" dirty="0" smtClean="0">
-                <a:latin typeface="Arial" panose="020B0604020202020204" pitchFamily="34" charset="0"/>
-                <a:ea typeface="Arial" panose="020B0604020202020204" pitchFamily="34" charset="0"/>
-              </a:rPr>
-              <a:t>implémenter</a:t>
-            </a:r>
-            <a:r>
-              <a:rPr lang="fr-CI" dirty="0" smtClean="0">
-                <a:latin typeface="Arial" panose="020B0604020202020204" pitchFamily="34" charset="0"/>
-                <a:ea typeface="Arial" panose="020B0604020202020204" pitchFamily="34" charset="0"/>
-              </a:rPr>
-              <a:t>)</a:t>
-            </a:r>
-            <a:endParaRPr lang="en-US" dirty="0">
-              <a:latin typeface="Arial" panose="020B0604020202020204" pitchFamily="34" charset="0"/>
+            <a:endParaRPr lang="fr-CI" sz="2000" b="1" dirty="0" smtClean="0">
+              <a:latin typeface="Times New Roman" panose="02020603050405020304" pitchFamily="18" charset="0"/>
               <a:ea typeface="Arial" panose="020B0604020202020204" pitchFamily="34" charset="0"/>
+              <a:cs typeface="Times New Roman" panose="02020603050405020304" pitchFamily="18" charset="0"/>
             </a:endParaRPr>
           </a:p>
           <a:p>
@@ -5746,50 +6082,41 @@
               <a:buChar char="•"/>
             </a:pPr>
             <a:r>
-              <a:rPr lang="fr-CI" dirty="0" smtClean="0">
-                <a:latin typeface="Arial" panose="020B0604020202020204" pitchFamily="34" charset="0"/>
+              <a:rPr lang="fr-CI" sz="2000" dirty="0" smtClean="0">
+                <a:latin typeface="Times New Roman" panose="02020603050405020304" pitchFamily="18" charset="0"/>
                 <a:ea typeface="Arial" panose="020B0604020202020204" pitchFamily="34" charset="0"/>
+                <a:cs typeface="Times New Roman" panose="02020603050405020304" pitchFamily="18" charset="0"/>
               </a:rPr>
               <a:t>NE </a:t>
             </a:r>
             <a:r>
-              <a:rPr lang="fr-CI" dirty="0">
-                <a:latin typeface="Arial" panose="020B0604020202020204" pitchFamily="34" charset="0"/>
+              <a:rPr lang="fr-CI" sz="2000" dirty="0">
+                <a:latin typeface="Times New Roman" panose="02020603050405020304" pitchFamily="18" charset="0"/>
                 <a:ea typeface="Arial" panose="020B0604020202020204" pitchFamily="34" charset="0"/>
+                <a:cs typeface="Times New Roman" panose="02020603050405020304" pitchFamily="18" charset="0"/>
               </a:rPr>
               <a:t>PEUT PAS être </a:t>
             </a:r>
             <a:r>
-              <a:rPr lang="fr-CI" b="1" dirty="0">
-                <a:latin typeface="Arial" panose="020B0604020202020204" pitchFamily="34" charset="0"/>
+              <a:rPr lang="fr-CI" sz="2000" b="1" dirty="0">
+                <a:latin typeface="Times New Roman" panose="02020603050405020304" pitchFamily="18" charset="0"/>
                 <a:ea typeface="Arial" panose="020B0604020202020204" pitchFamily="34" charset="0"/>
+                <a:cs typeface="Times New Roman" panose="02020603050405020304" pitchFamily="18" charset="0"/>
               </a:rPr>
               <a:t>instanciée</a:t>
             </a:r>
             <a:r>
-              <a:rPr lang="fr-CI" dirty="0">
-                <a:latin typeface="Arial" panose="020B0604020202020204" pitchFamily="34" charset="0"/>
+              <a:rPr lang="fr-CI" sz="2000" dirty="0">
+                <a:latin typeface="Times New Roman" panose="02020603050405020304" pitchFamily="18" charset="0"/>
                 <a:ea typeface="Arial" panose="020B0604020202020204" pitchFamily="34" charset="0"/>
-              </a:rPr>
-              <a:t> directement (pas de new </a:t>
-            </a:r>
-            <a:r>
-              <a:rPr lang="fr-CI" dirty="0" err="1">
-                <a:latin typeface="Arial" panose="020B0604020202020204" pitchFamily="34" charset="0"/>
-                <a:ea typeface="Arial" panose="020B0604020202020204" pitchFamily="34" charset="0"/>
-              </a:rPr>
-              <a:t>ClasseAbstraite</a:t>
-            </a:r>
-            <a:r>
-              <a:rPr lang="fr-CI" dirty="0">
-                <a:latin typeface="Arial" panose="020B0604020202020204" pitchFamily="34" charset="0"/>
-                <a:ea typeface="Arial" panose="020B0604020202020204" pitchFamily="34" charset="0"/>
-              </a:rPr>
-              <a:t>())</a:t>
-            </a:r>
-            <a:endParaRPr lang="en-US" dirty="0">
-              <a:latin typeface="Arial" panose="020B0604020202020204" pitchFamily="34" charset="0"/>
+                <a:cs typeface="Times New Roman" panose="02020603050405020304" pitchFamily="18" charset="0"/>
+              </a:rPr>
+              <a:t> directement </a:t>
+            </a:r>
+            <a:endParaRPr lang="fr-CI" sz="2000" dirty="0" smtClean="0">
+              <a:latin typeface="Times New Roman" panose="02020603050405020304" pitchFamily="18" charset="0"/>
               <a:ea typeface="Arial" panose="020B0604020202020204" pitchFamily="34" charset="0"/>
+              <a:cs typeface="Times New Roman" panose="02020603050405020304" pitchFamily="18" charset="0"/>
             </a:endParaRPr>
           </a:p>
           <a:p>
@@ -5804,16 +6131,26 @@
               <a:buChar char="•"/>
             </a:pPr>
             <a:r>
-              <a:rPr lang="fr-CI" dirty="0">
-                <a:latin typeface="Arial" panose="020B0604020202020204" pitchFamily="34" charset="0"/>
+              <a:rPr lang="fr-CI" sz="2000" dirty="0" smtClean="0">
+                <a:latin typeface="Times New Roman" panose="02020603050405020304" pitchFamily="18" charset="0"/>
                 <a:ea typeface="Arial" panose="020B0604020202020204" pitchFamily="34" charset="0"/>
-              </a:rPr>
-              <a:t>Peut avoir des attributs, un constructeur, des constantes</a:t>
-            </a:r>
-            <a:endParaRPr lang="en-US" sz="1800" dirty="0">
+                <a:cs typeface="Times New Roman" panose="02020603050405020304" pitchFamily="18" charset="0"/>
+              </a:rPr>
+              <a:t>Peut </a:t>
+            </a:r>
+            <a:r>
+              <a:rPr lang="fr-CI" sz="2000" dirty="0">
+                <a:latin typeface="Times New Roman" panose="02020603050405020304" pitchFamily="18" charset="0"/>
+                <a:ea typeface="Arial" panose="020B0604020202020204" pitchFamily="34" charset="0"/>
+                <a:cs typeface="Times New Roman" panose="02020603050405020304" pitchFamily="18" charset="0"/>
+              </a:rPr>
+              <a:t>avoir des attributs, un constructeur, des constantes</a:t>
+            </a:r>
+            <a:endParaRPr lang="en-US" sz="2000" dirty="0">
               <a:effectLst/>
-              <a:latin typeface="Arial" panose="020B0604020202020204" pitchFamily="34" charset="0"/>
+              <a:latin typeface="Times New Roman" panose="02020603050405020304" pitchFamily="18" charset="0"/>
               <a:ea typeface="Arial" panose="020B0604020202020204" pitchFamily="34" charset="0"/>
+              <a:cs typeface="Times New Roman" panose="02020603050405020304" pitchFamily="18" charset="0"/>
             </a:endParaRPr>
           </a:p>
         </p:txBody>
@@ -5827,7 +6164,7 @@
         <p:spPr>
           <a:xfrm>
             <a:off x="467544" y="3429000"/>
-            <a:ext cx="3960440" cy="2585323"/>
+            <a:ext cx="4248472" cy="2585323"/>
           </a:xfrm>
           <a:prstGeom prst="rect">
             <a:avLst/>
@@ -5841,108 +6178,189 @@
           <a:lstStyle/>
           <a:p>
             <a:r>
-              <a:rPr lang="en-US" dirty="0"/>
+              <a:rPr lang="en-US" dirty="0">
+                <a:latin typeface="Times New Roman" panose="02020603050405020304" pitchFamily="18" charset="0"/>
+                <a:cs typeface="Times New Roman" panose="02020603050405020304" pitchFamily="18" charset="0"/>
+              </a:rPr>
               <a:t>p</a:t>
             </a:r>
             <a:r>
-              <a:rPr lang="en-US" dirty="0" smtClean="0"/>
+              <a:rPr lang="en-US" dirty="0" smtClean="0">
+                <a:latin typeface="Times New Roman" panose="02020603050405020304" pitchFamily="18" charset="0"/>
+                <a:cs typeface="Times New Roman" panose="02020603050405020304" pitchFamily="18" charset="0"/>
+              </a:rPr>
               <a:t>ublic abstract class </a:t>
             </a:r>
             <a:r>
+              <a:rPr lang="en-US" b="1" dirty="0" smtClean="0">
+                <a:solidFill>
+                  <a:srgbClr val="FF0000"/>
+                </a:solidFill>
+                <a:latin typeface="Times New Roman" panose="02020603050405020304" pitchFamily="18" charset="0"/>
+                <a:cs typeface="Times New Roman" panose="02020603050405020304" pitchFamily="18" charset="0"/>
+              </a:rPr>
+              <a:t>Animal</a:t>
+            </a:r>
+            <a:r>
+              <a:rPr lang="en-US" b="1" dirty="0" smtClean="0">
+                <a:latin typeface="Times New Roman" panose="02020603050405020304" pitchFamily="18" charset="0"/>
+                <a:cs typeface="Times New Roman" panose="02020603050405020304" pitchFamily="18" charset="0"/>
+              </a:rPr>
+              <a:t> </a:t>
+            </a:r>
+            <a:r>
               <a:rPr lang="en-US" dirty="0" smtClean="0">
+                <a:latin typeface="Times New Roman" panose="02020603050405020304" pitchFamily="18" charset="0"/>
+                <a:cs typeface="Times New Roman" panose="02020603050405020304" pitchFamily="18" charset="0"/>
+              </a:rPr>
+              <a:t>(){</a:t>
+            </a:r>
+          </a:p>
+          <a:p>
+            <a:endParaRPr lang="en-US" dirty="0" smtClean="0">
+              <a:latin typeface="Times New Roman" panose="02020603050405020304" pitchFamily="18" charset="0"/>
+              <a:cs typeface="Times New Roman" panose="02020603050405020304" pitchFamily="18" charset="0"/>
+            </a:endParaRPr>
+          </a:p>
+          <a:p>
+            <a:r>
+              <a:rPr lang="en-US" dirty="0">
+                <a:latin typeface="Times New Roman" panose="02020603050405020304" pitchFamily="18" charset="0"/>
+                <a:cs typeface="Times New Roman" panose="02020603050405020304" pitchFamily="18" charset="0"/>
+              </a:rPr>
+              <a:t> </a:t>
+            </a:r>
+            <a:r>
+              <a:rPr lang="en-US" dirty="0" smtClean="0">
+                <a:latin typeface="Times New Roman" panose="02020603050405020304" pitchFamily="18" charset="0"/>
+                <a:cs typeface="Times New Roman" panose="02020603050405020304" pitchFamily="18" charset="0"/>
+              </a:rPr>
+              <a:t>    Protected  String nom;</a:t>
+            </a:r>
+          </a:p>
+          <a:p>
+            <a:endParaRPr lang="en-US" dirty="0" smtClean="0">
+              <a:latin typeface="Times New Roman" panose="02020603050405020304" pitchFamily="18" charset="0"/>
+              <a:cs typeface="Times New Roman" panose="02020603050405020304" pitchFamily="18" charset="0"/>
+            </a:endParaRPr>
+          </a:p>
+          <a:p>
+            <a:r>
+              <a:rPr lang="en-US" dirty="0" smtClean="0">
+                <a:latin typeface="Times New Roman" panose="02020603050405020304" pitchFamily="18" charset="0"/>
+                <a:cs typeface="Times New Roman" panose="02020603050405020304" pitchFamily="18" charset="0"/>
+              </a:rPr>
+              <a:t>   public</a:t>
+            </a:r>
+            <a:r>
+              <a:rPr lang="en-US" b="1" dirty="0" smtClean="0">
+                <a:latin typeface="Times New Roman" panose="02020603050405020304" pitchFamily="18" charset="0"/>
+                <a:cs typeface="Times New Roman" panose="02020603050405020304" pitchFamily="18" charset="0"/>
+              </a:rPr>
+              <a:t> Animal </a:t>
+            </a:r>
+            <a:r>
+              <a:rPr lang="en-US" dirty="0" smtClean="0">
+                <a:latin typeface="Times New Roman" panose="02020603050405020304" pitchFamily="18" charset="0"/>
+                <a:cs typeface="Times New Roman" panose="02020603050405020304" pitchFamily="18" charset="0"/>
+              </a:rPr>
+              <a:t>(String nom){</a:t>
+            </a:r>
+          </a:p>
+          <a:p>
+            <a:r>
+              <a:rPr lang="en-US" dirty="0">
+                <a:latin typeface="Times New Roman" panose="02020603050405020304" pitchFamily="18" charset="0"/>
+                <a:cs typeface="Times New Roman" panose="02020603050405020304" pitchFamily="18" charset="0"/>
+              </a:rPr>
+              <a:t> </a:t>
+            </a:r>
+            <a:r>
+              <a:rPr lang="en-US" dirty="0" smtClean="0">
+                <a:latin typeface="Times New Roman" panose="02020603050405020304" pitchFamily="18" charset="0"/>
+                <a:cs typeface="Times New Roman" panose="02020603050405020304" pitchFamily="18" charset="0"/>
+              </a:rPr>
+              <a:t>             </a:t>
+            </a:r>
+            <a:r>
+              <a:rPr lang="en-US" dirty="0" err="1" smtClean="0">
+                <a:latin typeface="Times New Roman" panose="02020603050405020304" pitchFamily="18" charset="0"/>
+                <a:cs typeface="Times New Roman" panose="02020603050405020304" pitchFamily="18" charset="0"/>
+              </a:rPr>
+              <a:t>this.nom</a:t>
+            </a:r>
+            <a:r>
+              <a:rPr lang="en-US" dirty="0" smtClean="0">
+                <a:latin typeface="Times New Roman" panose="02020603050405020304" pitchFamily="18" charset="0"/>
+                <a:cs typeface="Times New Roman" panose="02020603050405020304" pitchFamily="18" charset="0"/>
+              </a:rPr>
+              <a:t>=nom;</a:t>
+            </a:r>
+          </a:p>
+          <a:p>
+            <a:r>
+              <a:rPr lang="en-US" dirty="0">
+                <a:latin typeface="Times New Roman" panose="02020603050405020304" pitchFamily="18" charset="0"/>
+                <a:cs typeface="Times New Roman" panose="02020603050405020304" pitchFamily="18" charset="0"/>
+              </a:rPr>
+              <a:t> </a:t>
+            </a:r>
+            <a:r>
+              <a:rPr lang="en-US" dirty="0" smtClean="0">
+                <a:latin typeface="Times New Roman" panose="02020603050405020304" pitchFamily="18" charset="0"/>
+                <a:cs typeface="Times New Roman" panose="02020603050405020304" pitchFamily="18" charset="0"/>
+              </a:rPr>
+              <a:t>            }</a:t>
+            </a:r>
+          </a:p>
+          <a:p>
+            <a:r>
+              <a:rPr lang="en-US" dirty="0">
+                <a:latin typeface="Times New Roman" panose="02020603050405020304" pitchFamily="18" charset="0"/>
+                <a:cs typeface="Times New Roman" panose="02020603050405020304" pitchFamily="18" charset="0"/>
+              </a:rPr>
+              <a:t> </a:t>
+            </a:r>
+            <a:r>
+              <a:rPr lang="en-US" dirty="0" smtClean="0">
+                <a:latin typeface="Times New Roman" panose="02020603050405020304" pitchFamily="18" charset="0"/>
+                <a:cs typeface="Times New Roman" panose="02020603050405020304" pitchFamily="18" charset="0"/>
+              </a:rPr>
+              <a:t>   public abstract void </a:t>
+            </a:r>
+            <a:r>
+              <a:rPr lang="en-US" b="1" dirty="0" err="1" smtClean="0">
                 <a:solidFill>
                   <a:srgbClr val="FF0000"/>
                 </a:solidFill>
-              </a:rPr>
-              <a:t>Animal</a:t>
-            </a:r>
-            <a:r>
-              <a:rPr lang="en-US" dirty="0" smtClean="0"/>
-              <a:t> (){</a:t>
-            </a:r>
-          </a:p>
-          <a:p>
-            <a:endParaRPr lang="en-US" dirty="0" smtClean="0"/>
-          </a:p>
-          <a:p>
-            <a:r>
-              <a:rPr lang="en-US" dirty="0"/>
-              <a:t> </a:t>
-            </a:r>
-            <a:r>
-              <a:rPr lang="en-US" dirty="0" smtClean="0"/>
-              <a:t>    Protected  String nom;</a:t>
-            </a:r>
-          </a:p>
-          <a:p>
-            <a:endParaRPr lang="en-US" dirty="0" smtClean="0"/>
-          </a:p>
-          <a:p>
-            <a:r>
-              <a:rPr lang="en-US" dirty="0" smtClean="0"/>
-              <a:t>   public Animal (String nom){</a:t>
-            </a:r>
-          </a:p>
-          <a:p>
-            <a:r>
-              <a:rPr lang="en-US" dirty="0"/>
-              <a:t> </a:t>
-            </a:r>
-            <a:r>
-              <a:rPr lang="en-US" dirty="0" smtClean="0"/>
-              <a:t>             </a:t>
-            </a:r>
-            <a:r>
-              <a:rPr lang="en-US" dirty="0" err="1" smtClean="0"/>
-              <a:t>this.nom</a:t>
-            </a:r>
-            <a:r>
-              <a:rPr lang="en-US" dirty="0" smtClean="0"/>
-              <a:t>=nom;</a:t>
-            </a:r>
-          </a:p>
-          <a:p>
-            <a:r>
-              <a:rPr lang="en-US" dirty="0"/>
-              <a:t> </a:t>
-            </a:r>
-            <a:r>
-              <a:rPr lang="en-US" dirty="0" smtClean="0"/>
-              <a:t>            }</a:t>
-            </a:r>
-          </a:p>
-          <a:p>
-            <a:r>
-              <a:rPr lang="en-US" dirty="0"/>
-              <a:t> </a:t>
-            </a:r>
-            <a:r>
-              <a:rPr lang="en-US" dirty="0" smtClean="0"/>
-              <a:t>   public abstract void </a:t>
-            </a:r>
-            <a:r>
-              <a:rPr lang="en-US" dirty="0" err="1" smtClean="0">
+                <a:latin typeface="Times New Roman" panose="02020603050405020304" pitchFamily="18" charset="0"/>
+                <a:cs typeface="Times New Roman" panose="02020603050405020304" pitchFamily="18" charset="0"/>
+              </a:rPr>
+              <a:t>Fairedubruit</a:t>
+            </a:r>
+            <a:r>
+              <a:rPr lang="en-US" b="1" dirty="0" smtClean="0">
                 <a:solidFill>
                   <a:srgbClr val="FF0000"/>
                 </a:solidFill>
-              </a:rPr>
-              <a:t>Fairedubruit</a:t>
-            </a:r>
+                <a:latin typeface="Times New Roman" panose="02020603050405020304" pitchFamily="18" charset="0"/>
+                <a:cs typeface="Times New Roman" panose="02020603050405020304" pitchFamily="18" charset="0"/>
+              </a:rPr>
+              <a:t>();</a:t>
+            </a:r>
+          </a:p>
+          <a:p>
             <a:r>
               <a:rPr lang="en-US" dirty="0" smtClean="0">
-                <a:solidFill>
-                  <a:srgbClr val="FF0000"/>
-                </a:solidFill>
-              </a:rPr>
-              <a:t>();</a:t>
-            </a:r>
-          </a:p>
-          <a:p>
-            <a:r>
-              <a:rPr lang="en-US" dirty="0" smtClean="0"/>
+                <a:latin typeface="Times New Roman" panose="02020603050405020304" pitchFamily="18" charset="0"/>
+                <a:cs typeface="Times New Roman" panose="02020603050405020304" pitchFamily="18" charset="0"/>
+              </a:rPr>
               <a:t>}</a:t>
             </a:r>
-            <a:endParaRPr lang="en-US" dirty="0"/>
+            <a:endParaRPr lang="en-US" dirty="0">
+              <a:latin typeface="Times New Roman" panose="02020603050405020304" pitchFamily="18" charset="0"/>
+              <a:cs typeface="Times New Roman" panose="02020603050405020304" pitchFamily="18" charset="0"/>
+            </a:endParaRPr>
           </a:p>
         </p:txBody>
       </p:sp>
@@ -5955,7 +6373,7 @@
         <p:spPr>
           <a:xfrm>
             <a:off x="4623217" y="3244555"/>
-            <a:ext cx="4299081" cy="3139321"/>
+            <a:ext cx="4299081" cy="3477875"/>
           </a:xfrm>
           <a:prstGeom prst="rect">
             <a:avLst/>
@@ -5969,182 +6387,318 @@
           <a:lstStyle/>
           <a:p>
             <a:r>
-              <a:rPr lang="en-US" dirty="0"/>
+              <a:rPr lang="en-US" sz="2000" dirty="0">
+                <a:latin typeface="Times New Roman" panose="02020603050405020304" pitchFamily="18" charset="0"/>
+                <a:cs typeface="Times New Roman" panose="02020603050405020304" pitchFamily="18" charset="0"/>
+              </a:rPr>
               <a:t>p</a:t>
             </a:r>
             <a:r>
-              <a:rPr lang="en-US" dirty="0" smtClean="0"/>
+              <a:rPr lang="en-US" sz="2000" dirty="0" smtClean="0">
+                <a:latin typeface="Times New Roman" panose="02020603050405020304" pitchFamily="18" charset="0"/>
+                <a:cs typeface="Times New Roman" panose="02020603050405020304" pitchFamily="18" charset="0"/>
+              </a:rPr>
               <a:t>ublic class  </a:t>
             </a:r>
             <a:r>
-              <a:rPr lang="en-US" dirty="0" err="1" smtClean="0"/>
+              <a:rPr lang="en-US" sz="2000" b="1" dirty="0" err="1" smtClean="0">
+                <a:latin typeface="Times New Roman" panose="02020603050405020304" pitchFamily="18" charset="0"/>
+                <a:cs typeface="Times New Roman" panose="02020603050405020304" pitchFamily="18" charset="0"/>
+              </a:rPr>
               <a:t>chien</a:t>
             </a:r>
             <a:r>
-              <a:rPr lang="en-US" dirty="0" smtClean="0"/>
+              <a:rPr lang="en-US" sz="2000" dirty="0" smtClean="0">
+                <a:latin typeface="Times New Roman" panose="02020603050405020304" pitchFamily="18" charset="0"/>
+                <a:cs typeface="Times New Roman" panose="02020603050405020304" pitchFamily="18" charset="0"/>
+              </a:rPr>
               <a:t> </a:t>
             </a:r>
             <a:r>
-              <a:rPr lang="en-US" dirty="0" smtClean="0">
+              <a:rPr lang="en-US" sz="2000" dirty="0" smtClean="0">
                 <a:solidFill>
                   <a:srgbClr val="FF0000"/>
                 </a:solidFill>
-              </a:rPr>
-              <a:t>extends Animal </a:t>
-            </a:r>
-            <a:r>
-              <a:rPr lang="en-US" dirty="0" smtClean="0"/>
+                <a:latin typeface="Times New Roman" panose="02020603050405020304" pitchFamily="18" charset="0"/>
+                <a:cs typeface="Times New Roman" panose="02020603050405020304" pitchFamily="18" charset="0"/>
+              </a:rPr>
+              <a:t>extends </a:t>
+            </a:r>
+            <a:r>
+              <a:rPr lang="en-US" sz="2000" b="1" dirty="0" smtClean="0">
+                <a:latin typeface="Times New Roman" panose="02020603050405020304" pitchFamily="18" charset="0"/>
+                <a:cs typeface="Times New Roman" panose="02020603050405020304" pitchFamily="18" charset="0"/>
+              </a:rPr>
+              <a:t>Animal</a:t>
+            </a:r>
+            <a:r>
+              <a:rPr lang="en-US" sz="2000" dirty="0" smtClean="0">
+                <a:solidFill>
+                  <a:srgbClr val="FF0000"/>
+                </a:solidFill>
+                <a:latin typeface="Times New Roman" panose="02020603050405020304" pitchFamily="18" charset="0"/>
+                <a:cs typeface="Times New Roman" panose="02020603050405020304" pitchFamily="18" charset="0"/>
+              </a:rPr>
+              <a:t> </a:t>
+            </a:r>
+            <a:r>
+              <a:rPr lang="en-US" sz="2000" dirty="0" smtClean="0">
+                <a:latin typeface="Times New Roman" panose="02020603050405020304" pitchFamily="18" charset="0"/>
+                <a:cs typeface="Times New Roman" panose="02020603050405020304" pitchFamily="18" charset="0"/>
+              </a:rPr>
               <a:t>(){</a:t>
             </a:r>
           </a:p>
           <a:p>
-            <a:endParaRPr lang="en-US" dirty="0" smtClean="0"/>
-          </a:p>
-          <a:p>
-            <a:r>
-              <a:rPr lang="en-US" dirty="0" smtClean="0"/>
+            <a:endParaRPr lang="en-US" sz="2000" dirty="0" smtClean="0">
+              <a:latin typeface="Times New Roman" panose="02020603050405020304" pitchFamily="18" charset="0"/>
+              <a:cs typeface="Times New Roman" panose="02020603050405020304" pitchFamily="18" charset="0"/>
+            </a:endParaRPr>
+          </a:p>
+          <a:p>
+            <a:r>
+              <a:rPr lang="en-US" sz="2000" dirty="0" smtClean="0">
+                <a:latin typeface="Times New Roman" panose="02020603050405020304" pitchFamily="18" charset="0"/>
+                <a:cs typeface="Times New Roman" panose="02020603050405020304" pitchFamily="18" charset="0"/>
+              </a:rPr>
               <a:t>   public </a:t>
             </a:r>
             <a:r>
-              <a:rPr lang="en-US" dirty="0" err="1" smtClean="0"/>
+              <a:rPr lang="en-US" sz="2000" b="1" dirty="0" err="1" smtClean="0">
+                <a:latin typeface="Times New Roman" panose="02020603050405020304" pitchFamily="18" charset="0"/>
+                <a:cs typeface="Times New Roman" panose="02020603050405020304" pitchFamily="18" charset="0"/>
+              </a:rPr>
               <a:t>chein</a:t>
             </a:r>
             <a:r>
-              <a:rPr lang="en-US" dirty="0" smtClean="0"/>
+              <a:rPr lang="en-US" sz="2000" dirty="0" smtClean="0">
+                <a:latin typeface="Times New Roman" panose="02020603050405020304" pitchFamily="18" charset="0"/>
+                <a:cs typeface="Times New Roman" panose="02020603050405020304" pitchFamily="18" charset="0"/>
+              </a:rPr>
               <a:t> (String nom){</a:t>
             </a:r>
           </a:p>
           <a:p>
             <a:r>
-              <a:rPr lang="en-US" dirty="0" smtClean="0"/>
+              <a:rPr lang="en-US" sz="2000" dirty="0" smtClean="0">
+                <a:latin typeface="Times New Roman" panose="02020603050405020304" pitchFamily="18" charset="0"/>
+                <a:cs typeface="Times New Roman" panose="02020603050405020304" pitchFamily="18" charset="0"/>
+              </a:rPr>
               <a:t>              super(nom);</a:t>
             </a:r>
           </a:p>
           <a:p>
             <a:r>
-              <a:rPr lang="en-US" dirty="0" smtClean="0"/>
+              <a:rPr lang="en-US" sz="2000" dirty="0" smtClean="0">
+                <a:latin typeface="Times New Roman" panose="02020603050405020304" pitchFamily="18" charset="0"/>
+                <a:cs typeface="Times New Roman" panose="02020603050405020304" pitchFamily="18" charset="0"/>
+              </a:rPr>
               <a:t>  }</a:t>
             </a:r>
           </a:p>
           <a:p>
             <a:r>
-              <a:rPr lang="en-US" dirty="0"/>
+              <a:rPr lang="en-US" sz="2000" dirty="0">
+                <a:latin typeface="Times New Roman" panose="02020603050405020304" pitchFamily="18" charset="0"/>
+                <a:cs typeface="Times New Roman" panose="02020603050405020304" pitchFamily="18" charset="0"/>
+              </a:rPr>
               <a:t> </a:t>
             </a:r>
             <a:r>
-              <a:rPr lang="en-US" dirty="0" smtClean="0"/>
+              <a:rPr lang="en-US" sz="2000" dirty="0" smtClean="0">
+                <a:latin typeface="Times New Roman" panose="02020603050405020304" pitchFamily="18" charset="0"/>
+                <a:cs typeface="Times New Roman" panose="02020603050405020304" pitchFamily="18" charset="0"/>
+              </a:rPr>
               <a:t>  @</a:t>
             </a:r>
             <a:r>
-              <a:rPr lang="en-US" dirty="0" err="1"/>
+              <a:rPr lang="en-US" sz="2000" dirty="0" err="1">
+                <a:latin typeface="Times New Roman" panose="02020603050405020304" pitchFamily="18" charset="0"/>
+                <a:cs typeface="Times New Roman" panose="02020603050405020304" pitchFamily="18" charset="0"/>
+              </a:rPr>
               <a:t>O</a:t>
             </a:r>
             <a:r>
-              <a:rPr lang="en-US" dirty="0" err="1" smtClean="0"/>
+              <a:rPr lang="en-US" sz="2000" dirty="0" err="1" smtClean="0">
+                <a:latin typeface="Times New Roman" panose="02020603050405020304" pitchFamily="18" charset="0"/>
+                <a:cs typeface="Times New Roman" panose="02020603050405020304" pitchFamily="18" charset="0"/>
+              </a:rPr>
               <a:t>verroid</a:t>
             </a:r>
-            <a:endParaRPr lang="en-US" dirty="0" smtClean="0"/>
-          </a:p>
-          <a:p>
-            <a:r>
-              <a:rPr lang="en-US" dirty="0"/>
+            <a:endParaRPr lang="en-US" sz="2000" dirty="0" smtClean="0">
+              <a:latin typeface="Times New Roman" panose="02020603050405020304" pitchFamily="18" charset="0"/>
+              <a:cs typeface="Times New Roman" panose="02020603050405020304" pitchFamily="18" charset="0"/>
+            </a:endParaRPr>
+          </a:p>
+          <a:p>
+            <a:r>
+              <a:rPr lang="en-US" sz="2000" dirty="0">
+                <a:latin typeface="Times New Roman" panose="02020603050405020304" pitchFamily="18" charset="0"/>
+                <a:cs typeface="Times New Roman" panose="02020603050405020304" pitchFamily="18" charset="0"/>
+              </a:rPr>
               <a:t> </a:t>
             </a:r>
             <a:r>
-              <a:rPr lang="en-US" dirty="0" smtClean="0"/>
+              <a:rPr lang="en-US" sz="2000" dirty="0" smtClean="0">
+                <a:latin typeface="Times New Roman" panose="02020603050405020304" pitchFamily="18" charset="0"/>
+                <a:cs typeface="Times New Roman" panose="02020603050405020304" pitchFamily="18" charset="0"/>
+              </a:rPr>
               <a:t>   public abstract void </a:t>
             </a:r>
             <a:r>
-              <a:rPr lang="en-US" dirty="0" err="1" smtClean="0">
+              <a:rPr lang="en-US" sz="2000" dirty="0" err="1" smtClean="0">
                 <a:solidFill>
                   <a:srgbClr val="FF0000"/>
                 </a:solidFill>
+                <a:latin typeface="Times New Roman" panose="02020603050405020304" pitchFamily="18" charset="0"/>
+                <a:cs typeface="Times New Roman" panose="02020603050405020304" pitchFamily="18" charset="0"/>
               </a:rPr>
               <a:t>Fairedubruit</a:t>
             </a:r>
             <a:r>
-              <a:rPr lang="en-US" dirty="0" smtClean="0">
+              <a:rPr lang="en-US" sz="2000" dirty="0" smtClean="0">
                 <a:solidFill>
                   <a:srgbClr val="FF0000"/>
                 </a:solidFill>
+                <a:latin typeface="Times New Roman" panose="02020603050405020304" pitchFamily="18" charset="0"/>
+                <a:cs typeface="Times New Roman" panose="02020603050405020304" pitchFamily="18" charset="0"/>
               </a:rPr>
               <a:t>(){</a:t>
             </a:r>
           </a:p>
           <a:p>
             <a:r>
-              <a:rPr lang="en-US" dirty="0" smtClean="0">
+              <a:rPr lang="en-US" sz="2000" dirty="0" smtClean="0">
                 <a:solidFill>
                   <a:srgbClr val="FF0000"/>
                 </a:solidFill>
+                <a:latin typeface="Times New Roman" panose="02020603050405020304" pitchFamily="18" charset="0"/>
+                <a:cs typeface="Times New Roman" panose="02020603050405020304" pitchFamily="18" charset="0"/>
               </a:rPr>
               <a:t>         </a:t>
             </a:r>
             <a:r>
-              <a:rPr lang="en-US" dirty="0" err="1" smtClean="0">
+              <a:rPr lang="en-US" sz="2000" b="1" dirty="0" err="1" smtClean="0">
+                <a:latin typeface="Times New Roman" panose="02020603050405020304" pitchFamily="18" charset="0"/>
+                <a:cs typeface="Times New Roman" panose="02020603050405020304" pitchFamily="18" charset="0"/>
+              </a:rPr>
+              <a:t>System.out.println</a:t>
+            </a:r>
+            <a:r>
+              <a:rPr lang="en-US" sz="2000" dirty="0" smtClean="0">
                 <a:solidFill>
                   <a:srgbClr val="FF0000"/>
                 </a:solidFill>
-              </a:rPr>
-              <a:t>System.out.println</a:t>
-            </a:r>
-            <a:r>
-              <a:rPr lang="en-US" dirty="0" smtClean="0">
+                <a:latin typeface="Times New Roman" panose="02020603050405020304" pitchFamily="18" charset="0"/>
+                <a:cs typeface="Times New Roman" panose="02020603050405020304" pitchFamily="18" charset="0"/>
+              </a:rPr>
+              <a:t>(nom + “ </a:t>
+            </a:r>
+            <a:r>
+              <a:rPr lang="en-US" sz="2000" dirty="0" err="1" smtClean="0">
                 <a:solidFill>
                   <a:srgbClr val="FF0000"/>
                 </a:solidFill>
-              </a:rPr>
-              <a:t>(nom + “ </a:t>
-            </a:r>
-            <a:r>
-              <a:rPr lang="en-US" dirty="0" err="1" smtClean="0">
+                <a:latin typeface="Times New Roman" panose="02020603050405020304" pitchFamily="18" charset="0"/>
+                <a:cs typeface="Times New Roman" panose="02020603050405020304" pitchFamily="18" charset="0"/>
+              </a:rPr>
+              <a:t>dit</a:t>
+            </a:r>
+            <a:r>
+              <a:rPr lang="en-US" sz="2000" dirty="0" smtClean="0">
                 <a:solidFill>
                   <a:srgbClr val="FF0000"/>
                 </a:solidFill>
-              </a:rPr>
-              <a:t>dit</a:t>
-            </a:r>
-            <a:r>
-              <a:rPr lang="en-US" dirty="0" smtClean="0">
+                <a:latin typeface="Times New Roman" panose="02020603050405020304" pitchFamily="18" charset="0"/>
+                <a:cs typeface="Times New Roman" panose="02020603050405020304" pitchFamily="18" charset="0"/>
+              </a:rPr>
+              <a:t> </a:t>
+            </a:r>
+            <a:r>
+              <a:rPr lang="en-US" sz="2000" dirty="0" err="1" smtClean="0">
                 <a:solidFill>
                   <a:srgbClr val="FF0000"/>
                 </a:solidFill>
-              </a:rPr>
-              <a:t> </a:t>
-            </a:r>
-            <a:r>
-              <a:rPr lang="en-US" dirty="0" err="1" smtClean="0">
+                <a:latin typeface="Times New Roman" panose="02020603050405020304" pitchFamily="18" charset="0"/>
+                <a:cs typeface="Times New Roman" panose="02020603050405020304" pitchFamily="18" charset="0"/>
+              </a:rPr>
+              <a:t>wouf</a:t>
+            </a:r>
+            <a:r>
+              <a:rPr lang="en-US" sz="2000" dirty="0" smtClean="0">
                 <a:solidFill>
                   <a:srgbClr val="FF0000"/>
                 </a:solidFill>
-              </a:rPr>
-              <a:t>wouf</a:t>
-            </a:r>
-            <a:r>
-              <a:rPr lang="en-US" dirty="0" smtClean="0">
+                <a:latin typeface="Times New Roman" panose="02020603050405020304" pitchFamily="18" charset="0"/>
+                <a:cs typeface="Times New Roman" panose="02020603050405020304" pitchFamily="18" charset="0"/>
+              </a:rPr>
+              <a:t>   “)</a:t>
+            </a:r>
+          </a:p>
+          <a:p>
+            <a:r>
+              <a:rPr lang="en-US" sz="2000" dirty="0" smtClean="0">
                 <a:solidFill>
                   <a:srgbClr val="FF0000"/>
                 </a:solidFill>
-              </a:rPr>
-              <a:t>   “)</a:t>
-            </a:r>
-          </a:p>
-          <a:p>
-            <a:r>
-              <a:rPr lang="en-US" dirty="0" smtClean="0">
-                <a:solidFill>
-                  <a:srgbClr val="FF0000"/>
-                </a:solidFill>
+                <a:latin typeface="Times New Roman" panose="02020603050405020304" pitchFamily="18" charset="0"/>
+                <a:cs typeface="Times New Roman" panose="02020603050405020304" pitchFamily="18" charset="0"/>
               </a:rPr>
               <a:t>        }</a:t>
             </a:r>
           </a:p>
           <a:p>
             <a:r>
-              <a:rPr lang="en-US" dirty="0" smtClean="0"/>
+              <a:rPr lang="en-US" sz="2000" dirty="0" smtClean="0">
+                <a:latin typeface="Times New Roman" panose="02020603050405020304" pitchFamily="18" charset="0"/>
+                <a:cs typeface="Times New Roman" panose="02020603050405020304" pitchFamily="18" charset="0"/>
+              </a:rPr>
               <a:t>}</a:t>
             </a:r>
-            <a:endParaRPr lang="en-US" dirty="0"/>
+            <a:endParaRPr lang="en-US" sz="2000" dirty="0">
+              <a:latin typeface="Times New Roman" panose="02020603050405020304" pitchFamily="18" charset="0"/>
+              <a:cs typeface="Times New Roman" panose="02020603050405020304" pitchFamily="18" charset="0"/>
+            </a:endParaRPr>
+          </a:p>
+        </p:txBody>
+      </p:sp>
+      <p:sp>
+        <p:nvSpPr>
+          <p:cNvPr id="11" name="Right Arrow 10"/>
+          <p:cNvSpPr/>
+          <p:nvPr/>
+        </p:nvSpPr>
+        <p:spPr>
+          <a:xfrm>
+            <a:off x="3779912" y="4329583"/>
+            <a:ext cx="978408" cy="484632"/>
+          </a:xfrm>
+          <a:prstGeom prst="rightArrow">
+            <a:avLst/>
+          </a:prstGeom>
+        </p:spPr>
+        <p:style>
+          <a:lnRef idx="2">
+            <a:schemeClr val="dk1">
+              <a:shade val="50000"/>
+            </a:schemeClr>
+          </a:lnRef>
+          <a:fillRef idx="1">
+            <a:schemeClr val="dk1"/>
+          </a:fillRef>
+          <a:effectRef idx="0">
+            <a:schemeClr val="dk1"/>
+          </a:effectRef>
+          <a:fontRef idx="minor">
+            <a:schemeClr val="lt1"/>
+          </a:fontRef>
+        </p:style>
+        <p:txBody>
+          <a:bodyPr rtlCol="0" anchor="ctr"/>
+          <a:lstStyle/>
+          <a:p>
+            <a:pPr algn="ctr"/>
+            <a:endParaRPr lang="en-US"/>
           </a:p>
         </p:txBody>
       </p:sp>
@@ -6161,9 +6715,264 @@
   <p:timing>
     <p:tnLst>
       <p:par>
-        <p:cTn id="1" dur="indefinite" restart="never" nodeType="tmRoot"/>
+        <p:cTn id="1" dur="indefinite" restart="never" nodeType="tmRoot">
+          <p:childTnLst>
+            <p:seq concurrent="1" nextAc="seek">
+              <p:cTn id="2" dur="indefinite" nodeType="mainSeq">
+                <p:childTnLst>
+                  <p:par>
+                    <p:cTn id="3" fill="hold">
+                      <p:stCondLst>
+                        <p:cond delay="indefinite"/>
+                      </p:stCondLst>
+                      <p:childTnLst>
+                        <p:par>
+                          <p:cTn id="4" fill="hold">
+                            <p:stCondLst>
+                              <p:cond delay="0"/>
+                            </p:stCondLst>
+                            <p:childTnLst>
+                              <p:par>
+                                <p:cTn id="5" presetID="1" presetClass="entr" presetSubtype="0" fill="hold" grpId="0" nodeType="clickEffect">
+                                  <p:stCondLst>
+                                    <p:cond delay="0"/>
+                                  </p:stCondLst>
+                                  <p:childTnLst>
+                                    <p:set>
+                                      <p:cBhvr>
+                                        <p:cTn id="6" dur="1" fill="hold">
+                                          <p:stCondLst>
+                                            <p:cond delay="0"/>
+                                          </p:stCondLst>
+                                        </p:cTn>
+                                        <p:tgtEl>
+                                          <p:spTgt spid="3"/>
+                                        </p:tgtEl>
+                                        <p:attrNameLst>
+                                          <p:attrName>style.visibility</p:attrName>
+                                        </p:attrNameLst>
+                                      </p:cBhvr>
+                                      <p:to>
+                                        <p:strVal val="visible"/>
+                                      </p:to>
+                                    </p:set>
+                                  </p:childTnLst>
+                                </p:cTn>
+                              </p:par>
+                            </p:childTnLst>
+                          </p:cTn>
+                        </p:par>
+                      </p:childTnLst>
+                    </p:cTn>
+                  </p:par>
+                  <p:par>
+                    <p:cTn id="7" fill="hold">
+                      <p:stCondLst>
+                        <p:cond delay="indefinite"/>
+                      </p:stCondLst>
+                      <p:childTnLst>
+                        <p:par>
+                          <p:cTn id="8" fill="hold">
+                            <p:stCondLst>
+                              <p:cond delay="0"/>
+                            </p:stCondLst>
+                            <p:childTnLst>
+                              <p:par>
+                                <p:cTn id="9" presetID="1" presetClass="entr" presetSubtype="0" fill="hold" grpId="0" nodeType="clickEffect">
+                                  <p:stCondLst>
+                                    <p:cond delay="0"/>
+                                  </p:stCondLst>
+                                  <p:childTnLst>
+                                    <p:set>
+                                      <p:cBhvr>
+                                        <p:cTn id="10" dur="1" fill="hold">
+                                          <p:stCondLst>
+                                            <p:cond delay="0"/>
+                                          </p:stCondLst>
+                                        </p:cTn>
+                                        <p:tgtEl>
+                                          <p:spTgt spid="4"/>
+                                        </p:tgtEl>
+                                        <p:attrNameLst>
+                                          <p:attrName>style.visibility</p:attrName>
+                                        </p:attrNameLst>
+                                      </p:cBhvr>
+                                      <p:to>
+                                        <p:strVal val="visible"/>
+                                      </p:to>
+                                    </p:set>
+                                  </p:childTnLst>
+                                </p:cTn>
+                              </p:par>
+                            </p:childTnLst>
+                          </p:cTn>
+                        </p:par>
+                      </p:childTnLst>
+                    </p:cTn>
+                  </p:par>
+                  <p:par>
+                    <p:cTn id="11" fill="hold">
+                      <p:stCondLst>
+                        <p:cond delay="indefinite"/>
+                      </p:stCondLst>
+                      <p:childTnLst>
+                        <p:par>
+                          <p:cTn id="12" fill="hold">
+                            <p:stCondLst>
+                              <p:cond delay="0"/>
+                            </p:stCondLst>
+                            <p:childTnLst>
+                              <p:par>
+                                <p:cTn id="13" presetID="1" presetClass="entr" presetSubtype="0" fill="hold" grpId="0" nodeType="clickEffect">
+                                  <p:stCondLst>
+                                    <p:cond delay="0"/>
+                                  </p:stCondLst>
+                                  <p:childTnLst>
+                                    <p:set>
+                                      <p:cBhvr>
+                                        <p:cTn id="14" dur="1" fill="hold">
+                                          <p:stCondLst>
+                                            <p:cond delay="0"/>
+                                          </p:stCondLst>
+                                        </p:cTn>
+                                        <p:tgtEl>
+                                          <p:spTgt spid="8"/>
+                                        </p:tgtEl>
+                                        <p:attrNameLst>
+                                          <p:attrName>style.visibility</p:attrName>
+                                        </p:attrNameLst>
+                                      </p:cBhvr>
+                                      <p:to>
+                                        <p:strVal val="visible"/>
+                                      </p:to>
+                                    </p:set>
+                                  </p:childTnLst>
+                                </p:cTn>
+                              </p:par>
+                            </p:childTnLst>
+                          </p:cTn>
+                        </p:par>
+                      </p:childTnLst>
+                    </p:cTn>
+                  </p:par>
+                  <p:par>
+                    <p:cTn id="15" fill="hold">
+                      <p:stCondLst>
+                        <p:cond delay="indefinite"/>
+                      </p:stCondLst>
+                      <p:childTnLst>
+                        <p:par>
+                          <p:cTn id="16" fill="hold">
+                            <p:stCondLst>
+                              <p:cond delay="0"/>
+                            </p:stCondLst>
+                            <p:childTnLst>
+                              <p:par>
+                                <p:cTn id="17" presetID="1" presetClass="entr" presetSubtype="0" fill="hold" grpId="0" nodeType="clickEffect">
+                                  <p:stCondLst>
+                                    <p:cond delay="0"/>
+                                  </p:stCondLst>
+                                  <p:childTnLst>
+                                    <p:set>
+                                      <p:cBhvr>
+                                        <p:cTn id="18" dur="1" fill="hold">
+                                          <p:stCondLst>
+                                            <p:cond delay="0"/>
+                                          </p:stCondLst>
+                                        </p:cTn>
+                                        <p:tgtEl>
+                                          <p:spTgt spid="11"/>
+                                        </p:tgtEl>
+                                        <p:attrNameLst>
+                                          <p:attrName>style.visibility</p:attrName>
+                                        </p:attrNameLst>
+                                      </p:cBhvr>
+                                      <p:to>
+                                        <p:strVal val="visible"/>
+                                      </p:to>
+                                    </p:set>
+                                  </p:childTnLst>
+                                </p:cTn>
+                              </p:par>
+                            </p:childTnLst>
+                          </p:cTn>
+                        </p:par>
+                      </p:childTnLst>
+                    </p:cTn>
+                  </p:par>
+                  <p:par>
+                    <p:cTn id="19" fill="hold">
+                      <p:stCondLst>
+                        <p:cond delay="indefinite"/>
+                      </p:stCondLst>
+                      <p:childTnLst>
+                        <p:par>
+                          <p:cTn id="20" fill="hold">
+                            <p:stCondLst>
+                              <p:cond delay="0"/>
+                            </p:stCondLst>
+                            <p:childTnLst>
+                              <p:par>
+                                <p:cTn id="21" presetID="1" presetClass="entr" presetSubtype="0" fill="hold" grpId="0" nodeType="clickEffect">
+                                  <p:stCondLst>
+                                    <p:cond delay="0"/>
+                                  </p:stCondLst>
+                                  <p:childTnLst>
+                                    <p:set>
+                                      <p:cBhvr>
+                                        <p:cTn id="22" dur="1" fill="hold">
+                                          <p:stCondLst>
+                                            <p:cond delay="0"/>
+                                          </p:stCondLst>
+                                        </p:cTn>
+                                        <p:tgtEl>
+                                          <p:spTgt spid="9"/>
+                                        </p:tgtEl>
+                                        <p:attrNameLst>
+                                          <p:attrName>style.visibility</p:attrName>
+                                        </p:attrNameLst>
+                                      </p:cBhvr>
+                                      <p:to>
+                                        <p:strVal val="visible"/>
+                                      </p:to>
+                                    </p:set>
+                                  </p:childTnLst>
+                                </p:cTn>
+                              </p:par>
+                            </p:childTnLst>
+                          </p:cTn>
+                        </p:par>
+                      </p:childTnLst>
+                    </p:cTn>
+                  </p:par>
+                </p:childTnLst>
+              </p:cTn>
+              <p:prevCondLst>
+                <p:cond evt="onPrev" delay="0">
+                  <p:tgtEl>
+                    <p:sldTgt/>
+                  </p:tgtEl>
+                </p:cond>
+              </p:prevCondLst>
+              <p:nextCondLst>
+                <p:cond evt="onNext" delay="0">
+                  <p:tgtEl>
+                    <p:sldTgt/>
+                  </p:tgtEl>
+                </p:cond>
+              </p:nextCondLst>
+            </p:seq>
+          </p:childTnLst>
+        </p:cTn>
       </p:par>
     </p:tnLst>
+    <p:bldLst>
+      <p:bldP spid="3" grpId="0"/>
+      <p:bldP spid="4" grpId="0"/>
+      <p:bldP spid="8" grpId="0"/>
+      <p:bldP spid="9" grpId="0"/>
+      <p:bldP spid="11" grpId="0" animBg="1"/>
+    </p:bldLst>
   </p:timing>
 </p:sld>
 </file>
@@ -6194,7 +7003,7 @@
         <p:spPr>
           <a:xfrm>
             <a:off x="827584" y="332656"/>
-            <a:ext cx="2563522" cy="461665"/>
+            <a:ext cx="3074881" cy="461665"/>
           </a:xfrm>
           <a:prstGeom prst="rect">
             <a:avLst/>
@@ -6212,7 +7021,7 @@
                   <a:srgbClr val="FF0000"/>
                 </a:solidFill>
               </a:rPr>
-              <a:t>Classe Interfaces</a:t>
+              <a:t>II.2 Classe Interfaces</a:t>
             </a:r>
             <a:endParaRPr lang="en-US" sz="2400" dirty="0"/>
           </a:p>
@@ -6226,8 +7035,8 @@
         </p:nvSpPr>
         <p:spPr>
           <a:xfrm>
-            <a:off x="323528" y="1196752"/>
-            <a:ext cx="8496944" cy="1338828"/>
+            <a:off x="539552" y="710298"/>
+            <a:ext cx="8496944" cy="1421992"/>
           </a:xfrm>
           <a:prstGeom prst="rect">
             <a:avLst/>
@@ -6251,29 +7060,542 @@
               </a:spcAft>
             </a:pPr>
             <a:r>
-              <a:rPr lang="fr-CI" dirty="0"/>
+              <a:rPr lang="fr-CI" sz="2000" dirty="0">
+                <a:latin typeface="Times New Roman" panose="02020603050405020304" pitchFamily="18" charset="0"/>
+                <a:cs typeface="Times New Roman" panose="02020603050405020304" pitchFamily="18" charset="0"/>
+              </a:rPr>
               <a:t>Une </a:t>
             </a:r>
             <a:r>
-              <a:rPr lang="fr-CI" dirty="0">
+              <a:rPr lang="fr-CI" sz="2000" dirty="0">
                 <a:solidFill>
                   <a:srgbClr val="FF0000"/>
                 </a:solidFill>
+                <a:latin typeface="Times New Roman" panose="02020603050405020304" pitchFamily="18" charset="0"/>
+                <a:cs typeface="Times New Roman" panose="02020603050405020304" pitchFamily="18" charset="0"/>
               </a:rPr>
               <a:t>interface</a:t>
             </a:r>
             <a:r>
-              <a:rPr lang="fr-CI" dirty="0"/>
+              <a:rPr lang="fr-CI" sz="2000" dirty="0">
+                <a:latin typeface="Times New Roman" panose="02020603050405020304" pitchFamily="18" charset="0"/>
+                <a:cs typeface="Times New Roman" panose="02020603050405020304" pitchFamily="18" charset="0"/>
+              </a:rPr>
               <a:t> est un CONTRAT PUR : elle dit ce qu'un objet sait faire, sans dire comment. Contrairement à l'héritage (une seule classe parent), une classe peut implémenter plusieurs interfaces</a:t>
             </a:r>
-            <a:endParaRPr lang="en-US" sz="1800" dirty="0">
+            <a:endParaRPr lang="en-US" sz="2000" dirty="0">
               <a:effectLst/>
-              <a:latin typeface="Arial" panose="020B0604020202020204" pitchFamily="34" charset="0"/>
+              <a:latin typeface="Times New Roman" panose="02020603050405020304" pitchFamily="18" charset="0"/>
               <a:ea typeface="Arial" panose="020B0604020202020204" pitchFamily="34" charset="0"/>
+              <a:cs typeface="Times New Roman" panose="02020603050405020304" pitchFamily="18" charset="0"/>
             </a:endParaRPr>
           </a:p>
         </p:txBody>
       </p:sp>
+      <p:sp>
+        <p:nvSpPr>
+          <p:cNvPr id="4" name="TextBox 3"/>
+          <p:cNvSpPr txBox="1"/>
+          <p:nvPr/>
+        </p:nvSpPr>
+        <p:spPr>
+          <a:xfrm>
+            <a:off x="2104781" y="2066072"/>
+            <a:ext cx="5616624" cy="2554545"/>
+          </a:xfrm>
+          <a:prstGeom prst="rect">
+            <a:avLst/>
+          </a:prstGeom>
+          <a:noFill/>
+        </p:spPr>
+        <p:txBody>
+          <a:bodyPr wrap="square" rtlCol="0">
+            <a:spAutoFit/>
+          </a:bodyPr>
+          <a:lstStyle/>
+          <a:p>
+            <a:r>
+              <a:rPr lang="en-US" sz="2000" dirty="0" smtClean="0">
+                <a:latin typeface="Times New Roman" panose="02020603050405020304" pitchFamily="18" charset="0"/>
+                <a:cs typeface="Times New Roman" panose="02020603050405020304" pitchFamily="18" charset="0"/>
+              </a:rPr>
+              <a:t>Public interface </a:t>
+            </a:r>
+            <a:r>
+              <a:rPr lang="en-US" sz="2000" b="1" dirty="0" smtClean="0">
+                <a:solidFill>
+                  <a:srgbClr val="FF0000"/>
+                </a:solidFill>
+                <a:latin typeface="Times New Roman" panose="02020603050405020304" pitchFamily="18" charset="0"/>
+                <a:cs typeface="Times New Roman" panose="02020603050405020304" pitchFamily="18" charset="0"/>
+              </a:rPr>
+              <a:t>Volant</a:t>
+            </a:r>
+            <a:r>
+              <a:rPr lang="en-US" sz="2000" dirty="0" smtClean="0">
+                <a:latin typeface="Times New Roman" panose="02020603050405020304" pitchFamily="18" charset="0"/>
+                <a:cs typeface="Times New Roman" panose="02020603050405020304" pitchFamily="18" charset="0"/>
+              </a:rPr>
+              <a:t> (){</a:t>
+            </a:r>
+          </a:p>
+          <a:p>
+            <a:r>
+              <a:rPr lang="en-US" sz="2000" dirty="0">
+                <a:latin typeface="Times New Roman" panose="02020603050405020304" pitchFamily="18" charset="0"/>
+                <a:cs typeface="Times New Roman" panose="02020603050405020304" pitchFamily="18" charset="0"/>
+              </a:rPr>
+              <a:t> </a:t>
+            </a:r>
+            <a:r>
+              <a:rPr lang="en-US" sz="2000" dirty="0" smtClean="0">
+                <a:latin typeface="Times New Roman" panose="02020603050405020304" pitchFamily="18" charset="0"/>
+                <a:cs typeface="Times New Roman" panose="02020603050405020304" pitchFamily="18" charset="0"/>
+              </a:rPr>
+              <a:t>          void </a:t>
+            </a:r>
+            <a:r>
+              <a:rPr lang="en-US" sz="2000" b="1" dirty="0" err="1" smtClean="0">
+                <a:solidFill>
+                  <a:srgbClr val="FF0000"/>
+                </a:solidFill>
+                <a:latin typeface="Times New Roman" panose="02020603050405020304" pitchFamily="18" charset="0"/>
+                <a:cs typeface="Times New Roman" panose="02020603050405020304" pitchFamily="18" charset="0"/>
+              </a:rPr>
+              <a:t>voler</a:t>
+            </a:r>
+            <a:r>
+              <a:rPr lang="en-US" sz="2000" dirty="0" smtClean="0">
+                <a:latin typeface="Times New Roman" panose="02020603050405020304" pitchFamily="18" charset="0"/>
+                <a:cs typeface="Times New Roman" panose="02020603050405020304" pitchFamily="18" charset="0"/>
+              </a:rPr>
+              <a:t>()</a:t>
+            </a:r>
+          </a:p>
+          <a:p>
+            <a:r>
+              <a:rPr lang="en-US" sz="2000" dirty="0">
+                <a:latin typeface="Times New Roman" panose="02020603050405020304" pitchFamily="18" charset="0"/>
+                <a:cs typeface="Times New Roman" panose="02020603050405020304" pitchFamily="18" charset="0"/>
+              </a:rPr>
+              <a:t> </a:t>
+            </a:r>
+            <a:r>
+              <a:rPr lang="en-US" sz="2000" dirty="0" smtClean="0">
+                <a:latin typeface="Times New Roman" panose="02020603050405020304" pitchFamily="18" charset="0"/>
+                <a:cs typeface="Times New Roman" panose="02020603050405020304" pitchFamily="18" charset="0"/>
+              </a:rPr>
+              <a:t>   </a:t>
+            </a:r>
+            <a:r>
+              <a:rPr lang="en-US" sz="2000" b="1" dirty="0" smtClean="0">
+                <a:latin typeface="Times New Roman" panose="02020603050405020304" pitchFamily="18" charset="0"/>
+                <a:cs typeface="Times New Roman" panose="02020603050405020304" pitchFamily="18" charset="0"/>
+              </a:rPr>
+              <a:t>// java 8</a:t>
+            </a:r>
+          </a:p>
+          <a:p>
+            <a:r>
+              <a:rPr lang="en-US" sz="2000" b="1" dirty="0">
+                <a:latin typeface="Times New Roman" panose="02020603050405020304" pitchFamily="18" charset="0"/>
+                <a:cs typeface="Times New Roman" panose="02020603050405020304" pitchFamily="18" charset="0"/>
+              </a:rPr>
+              <a:t> </a:t>
+            </a:r>
+            <a:r>
+              <a:rPr lang="en-US" sz="2000" b="1" dirty="0" smtClean="0">
+                <a:latin typeface="Times New Roman" panose="02020603050405020304" pitchFamily="18" charset="0"/>
+                <a:cs typeface="Times New Roman" panose="02020603050405020304" pitchFamily="18" charset="0"/>
+              </a:rPr>
+              <a:t>   </a:t>
+            </a:r>
+            <a:r>
+              <a:rPr lang="en-US" sz="2000" dirty="0" smtClean="0">
+                <a:latin typeface="Times New Roman" panose="02020603050405020304" pitchFamily="18" charset="0"/>
+                <a:cs typeface="Times New Roman" panose="02020603050405020304" pitchFamily="18" charset="0"/>
+              </a:rPr>
+              <a:t>Default void </a:t>
+            </a:r>
+            <a:r>
+              <a:rPr lang="en-US" sz="2000" dirty="0" err="1" smtClean="0">
+                <a:solidFill>
+                  <a:srgbClr val="FF0000"/>
+                </a:solidFill>
+                <a:latin typeface="Times New Roman" panose="02020603050405020304" pitchFamily="18" charset="0"/>
+                <a:cs typeface="Times New Roman" panose="02020603050405020304" pitchFamily="18" charset="0"/>
+              </a:rPr>
+              <a:t>atterir</a:t>
+            </a:r>
+            <a:r>
+              <a:rPr lang="en-US" sz="2000" dirty="0" smtClean="0">
+                <a:latin typeface="Times New Roman" panose="02020603050405020304" pitchFamily="18" charset="0"/>
+                <a:cs typeface="Times New Roman" panose="02020603050405020304" pitchFamily="18" charset="0"/>
+              </a:rPr>
+              <a:t> (){</a:t>
+            </a:r>
+          </a:p>
+          <a:p>
+            <a:endParaRPr lang="en-US" sz="2000" dirty="0" smtClean="0">
+              <a:latin typeface="Times New Roman" panose="02020603050405020304" pitchFamily="18" charset="0"/>
+              <a:cs typeface="Times New Roman" panose="02020603050405020304" pitchFamily="18" charset="0"/>
+            </a:endParaRPr>
+          </a:p>
+          <a:p>
+            <a:r>
+              <a:rPr lang="en-US" sz="2000" dirty="0">
+                <a:latin typeface="Times New Roman" panose="02020603050405020304" pitchFamily="18" charset="0"/>
+                <a:cs typeface="Times New Roman" panose="02020603050405020304" pitchFamily="18" charset="0"/>
+              </a:rPr>
+              <a:t> </a:t>
+            </a:r>
+            <a:r>
+              <a:rPr lang="en-US" sz="2000" dirty="0" smtClean="0">
+                <a:latin typeface="Times New Roman" panose="02020603050405020304" pitchFamily="18" charset="0"/>
+                <a:cs typeface="Times New Roman" panose="02020603050405020304" pitchFamily="18" charset="0"/>
+              </a:rPr>
+              <a:t>    </a:t>
+            </a:r>
+            <a:r>
+              <a:rPr lang="en-US" sz="2000" dirty="0" err="1" smtClean="0">
+                <a:latin typeface="Times New Roman" panose="02020603050405020304" pitchFamily="18" charset="0"/>
+                <a:cs typeface="Times New Roman" panose="02020603050405020304" pitchFamily="18" charset="0"/>
+              </a:rPr>
+              <a:t>System.out.println</a:t>
+            </a:r>
+            <a:r>
+              <a:rPr lang="en-US" sz="2000" dirty="0" smtClean="0">
+                <a:latin typeface="Times New Roman" panose="02020603050405020304" pitchFamily="18" charset="0"/>
+                <a:cs typeface="Times New Roman" panose="02020603050405020304" pitchFamily="18" charset="0"/>
+              </a:rPr>
+              <a:t>(“</a:t>
+            </a:r>
+            <a:r>
+              <a:rPr lang="en-US" sz="2000" dirty="0" err="1" smtClean="0">
+                <a:latin typeface="Times New Roman" panose="02020603050405020304" pitchFamily="18" charset="0"/>
+                <a:cs typeface="Times New Roman" panose="02020603050405020304" pitchFamily="18" charset="0"/>
+              </a:rPr>
+              <a:t>Atterrissage</a:t>
+            </a:r>
+            <a:r>
+              <a:rPr lang="en-US" sz="2000" dirty="0" smtClean="0">
+                <a:latin typeface="Times New Roman" panose="02020603050405020304" pitchFamily="18" charset="0"/>
+                <a:cs typeface="Times New Roman" panose="02020603050405020304" pitchFamily="18" charset="0"/>
+              </a:rPr>
+              <a:t> </a:t>
+            </a:r>
+            <a:r>
+              <a:rPr lang="en-US" sz="2000" dirty="0" err="1" smtClean="0">
+                <a:latin typeface="Times New Roman" panose="02020603050405020304" pitchFamily="18" charset="0"/>
+                <a:cs typeface="Times New Roman" panose="02020603050405020304" pitchFamily="18" charset="0"/>
+              </a:rPr>
+              <a:t>en</a:t>
+            </a:r>
+            <a:r>
+              <a:rPr lang="en-US" sz="2000" dirty="0" smtClean="0">
+                <a:latin typeface="Times New Roman" panose="02020603050405020304" pitchFamily="18" charset="0"/>
+                <a:cs typeface="Times New Roman" panose="02020603050405020304" pitchFamily="18" charset="0"/>
+              </a:rPr>
+              <a:t> douceur …”)</a:t>
+            </a:r>
+          </a:p>
+          <a:p>
+            <a:r>
+              <a:rPr lang="en-US" sz="2000" dirty="0">
+                <a:latin typeface="Times New Roman" panose="02020603050405020304" pitchFamily="18" charset="0"/>
+                <a:cs typeface="Times New Roman" panose="02020603050405020304" pitchFamily="18" charset="0"/>
+              </a:rPr>
+              <a:t> </a:t>
+            </a:r>
+            <a:r>
+              <a:rPr lang="en-US" sz="2000" dirty="0" smtClean="0">
+                <a:latin typeface="Times New Roman" panose="02020603050405020304" pitchFamily="18" charset="0"/>
+                <a:cs typeface="Times New Roman" panose="02020603050405020304" pitchFamily="18" charset="0"/>
+              </a:rPr>
+              <a:t>      }</a:t>
+            </a:r>
+          </a:p>
+          <a:p>
+            <a:r>
+              <a:rPr lang="en-US" sz="2000" dirty="0" smtClean="0">
+                <a:latin typeface="Times New Roman" panose="02020603050405020304" pitchFamily="18" charset="0"/>
+                <a:cs typeface="Times New Roman" panose="02020603050405020304" pitchFamily="18" charset="0"/>
+              </a:rPr>
+              <a:t>}</a:t>
+            </a:r>
+            <a:endParaRPr lang="en-US" sz="2000" dirty="0">
+              <a:latin typeface="Times New Roman" panose="02020603050405020304" pitchFamily="18" charset="0"/>
+              <a:cs typeface="Times New Roman" panose="02020603050405020304" pitchFamily="18" charset="0"/>
+            </a:endParaRPr>
+          </a:p>
+        </p:txBody>
+      </p:sp>
+      <p:sp>
+        <p:nvSpPr>
+          <p:cNvPr id="5" name="TextBox 4"/>
+          <p:cNvSpPr txBox="1"/>
+          <p:nvPr/>
+        </p:nvSpPr>
+        <p:spPr>
+          <a:xfrm>
+            <a:off x="2267744" y="4725144"/>
+            <a:ext cx="4956635" cy="1938992"/>
+          </a:xfrm>
+          <a:prstGeom prst="rect">
+            <a:avLst/>
+          </a:prstGeom>
+          <a:noFill/>
+        </p:spPr>
+        <p:txBody>
+          <a:bodyPr wrap="square" rtlCol="0">
+            <a:spAutoFit/>
+          </a:bodyPr>
+          <a:lstStyle/>
+          <a:p>
+            <a:r>
+              <a:rPr lang="en-US" sz="2000" dirty="0" smtClean="0">
+                <a:latin typeface="Times New Roman" panose="02020603050405020304" pitchFamily="18" charset="0"/>
+                <a:cs typeface="Times New Roman" panose="02020603050405020304" pitchFamily="18" charset="0"/>
+              </a:rPr>
+              <a:t>Public class </a:t>
+            </a:r>
+            <a:r>
+              <a:rPr lang="en-US" sz="2000" b="1" dirty="0" err="1" smtClean="0">
+                <a:solidFill>
+                  <a:srgbClr val="FF0000"/>
+                </a:solidFill>
+                <a:latin typeface="Times New Roman" panose="02020603050405020304" pitchFamily="18" charset="0"/>
+                <a:cs typeface="Times New Roman" panose="02020603050405020304" pitchFamily="18" charset="0"/>
+              </a:rPr>
+              <a:t>Oiseau</a:t>
+            </a:r>
+            <a:r>
+              <a:rPr lang="en-US" sz="2000" dirty="0" smtClean="0">
+                <a:latin typeface="Times New Roman" panose="02020603050405020304" pitchFamily="18" charset="0"/>
+                <a:cs typeface="Times New Roman" panose="02020603050405020304" pitchFamily="18" charset="0"/>
+              </a:rPr>
+              <a:t> </a:t>
+            </a:r>
+            <a:r>
+              <a:rPr lang="en-US" sz="2000" b="1" dirty="0" smtClean="0">
+                <a:latin typeface="Times New Roman" panose="02020603050405020304" pitchFamily="18" charset="0"/>
+                <a:cs typeface="Times New Roman" panose="02020603050405020304" pitchFamily="18" charset="0"/>
+              </a:rPr>
+              <a:t>implements</a:t>
+            </a:r>
+            <a:r>
+              <a:rPr lang="en-US" sz="2000" dirty="0" smtClean="0">
+                <a:latin typeface="Times New Roman" panose="02020603050405020304" pitchFamily="18" charset="0"/>
+                <a:cs typeface="Times New Roman" panose="02020603050405020304" pitchFamily="18" charset="0"/>
+              </a:rPr>
+              <a:t> </a:t>
+            </a:r>
+            <a:r>
+              <a:rPr lang="en-US" sz="2000" b="1" dirty="0" smtClean="0">
+                <a:solidFill>
+                  <a:srgbClr val="FF0000"/>
+                </a:solidFill>
+                <a:latin typeface="Times New Roman" panose="02020603050405020304" pitchFamily="18" charset="0"/>
+                <a:cs typeface="Times New Roman" panose="02020603050405020304" pitchFamily="18" charset="0"/>
+              </a:rPr>
+              <a:t>Volant</a:t>
+            </a:r>
+            <a:r>
+              <a:rPr lang="en-US" sz="2000" dirty="0" smtClean="0">
+                <a:latin typeface="Times New Roman" panose="02020603050405020304" pitchFamily="18" charset="0"/>
+                <a:cs typeface="Times New Roman" panose="02020603050405020304" pitchFamily="18" charset="0"/>
+              </a:rPr>
+              <a:t>(){</a:t>
+            </a:r>
+          </a:p>
+          <a:p>
+            <a:r>
+              <a:rPr lang="en-US" sz="2000" dirty="0" smtClean="0">
+                <a:latin typeface="Times New Roman" panose="02020603050405020304" pitchFamily="18" charset="0"/>
+                <a:cs typeface="Times New Roman" panose="02020603050405020304" pitchFamily="18" charset="0"/>
+              </a:rPr>
+              <a:t>@Override</a:t>
+            </a:r>
+          </a:p>
+          <a:p>
+            <a:r>
+              <a:rPr lang="en-US" sz="2000" dirty="0">
+                <a:latin typeface="Times New Roman" panose="02020603050405020304" pitchFamily="18" charset="0"/>
+                <a:cs typeface="Times New Roman" panose="02020603050405020304" pitchFamily="18" charset="0"/>
+              </a:rPr>
+              <a:t> </a:t>
+            </a:r>
+            <a:r>
+              <a:rPr lang="en-US" sz="2000" dirty="0" smtClean="0">
+                <a:latin typeface="Times New Roman" panose="02020603050405020304" pitchFamily="18" charset="0"/>
+                <a:cs typeface="Times New Roman" panose="02020603050405020304" pitchFamily="18" charset="0"/>
+              </a:rPr>
+              <a:t>public void </a:t>
+            </a:r>
+            <a:r>
+              <a:rPr lang="en-US" sz="2000" dirty="0" err="1" smtClean="0">
+                <a:latin typeface="Times New Roman" panose="02020603050405020304" pitchFamily="18" charset="0"/>
+                <a:cs typeface="Times New Roman" panose="02020603050405020304" pitchFamily="18" charset="0"/>
+              </a:rPr>
+              <a:t>voler</a:t>
+            </a:r>
+            <a:r>
+              <a:rPr lang="en-US" sz="2000" dirty="0" smtClean="0">
+                <a:latin typeface="Times New Roman" panose="02020603050405020304" pitchFamily="18" charset="0"/>
+                <a:cs typeface="Times New Roman" panose="02020603050405020304" pitchFamily="18" charset="0"/>
+              </a:rPr>
+              <a:t>(){</a:t>
+            </a:r>
+          </a:p>
+          <a:p>
+            <a:r>
+              <a:rPr lang="en-US" sz="2000" dirty="0" err="1" smtClean="0">
+                <a:latin typeface="Times New Roman" panose="02020603050405020304" pitchFamily="18" charset="0"/>
+                <a:cs typeface="Times New Roman" panose="02020603050405020304" pitchFamily="18" charset="0"/>
+              </a:rPr>
+              <a:t>System.out.println</a:t>
+            </a:r>
+            <a:r>
+              <a:rPr lang="en-US" sz="2000" dirty="0" smtClean="0">
+                <a:latin typeface="Times New Roman" panose="02020603050405020304" pitchFamily="18" charset="0"/>
+                <a:cs typeface="Times New Roman" panose="02020603050405020304" pitchFamily="18" charset="0"/>
+              </a:rPr>
+              <a:t>(“</a:t>
+            </a:r>
+            <a:r>
+              <a:rPr lang="en-US" sz="2000" b="1" dirty="0" err="1" smtClean="0">
+                <a:latin typeface="Times New Roman" panose="02020603050405020304" pitchFamily="18" charset="0"/>
+                <a:cs typeface="Times New Roman" panose="02020603050405020304" pitchFamily="18" charset="0"/>
+              </a:rPr>
+              <a:t>L’oiseau</a:t>
+            </a:r>
+            <a:r>
+              <a:rPr lang="en-US" sz="2000" b="1" dirty="0" smtClean="0">
+                <a:latin typeface="Times New Roman" panose="02020603050405020304" pitchFamily="18" charset="0"/>
+                <a:cs typeface="Times New Roman" panose="02020603050405020304" pitchFamily="18" charset="0"/>
+              </a:rPr>
+              <a:t> bat des </a:t>
+            </a:r>
+            <a:r>
+              <a:rPr lang="en-US" sz="2000" b="1" dirty="0" err="1" smtClean="0">
+                <a:latin typeface="Times New Roman" panose="02020603050405020304" pitchFamily="18" charset="0"/>
+                <a:cs typeface="Times New Roman" panose="02020603050405020304" pitchFamily="18" charset="0"/>
+              </a:rPr>
+              <a:t>ailes</a:t>
+            </a:r>
+            <a:r>
+              <a:rPr lang="en-US" sz="2000" b="1" dirty="0" smtClean="0">
+                <a:latin typeface="Times New Roman" panose="02020603050405020304" pitchFamily="18" charset="0"/>
+                <a:cs typeface="Times New Roman" panose="02020603050405020304" pitchFamily="18" charset="0"/>
+              </a:rPr>
+              <a:t> et </a:t>
+            </a:r>
+            <a:r>
+              <a:rPr lang="en-US" sz="2000" b="1" dirty="0" err="1" smtClean="0">
+                <a:latin typeface="Times New Roman" panose="02020603050405020304" pitchFamily="18" charset="0"/>
+                <a:cs typeface="Times New Roman" panose="02020603050405020304" pitchFamily="18" charset="0"/>
+              </a:rPr>
+              <a:t>s’envole</a:t>
+            </a:r>
+            <a:r>
+              <a:rPr lang="en-US" sz="2000" dirty="0" smtClean="0">
+                <a:latin typeface="Times New Roman" panose="02020603050405020304" pitchFamily="18" charset="0"/>
+                <a:cs typeface="Times New Roman" panose="02020603050405020304" pitchFamily="18" charset="0"/>
+              </a:rPr>
+              <a:t>”)  }</a:t>
+            </a:r>
+          </a:p>
+          <a:p>
+            <a:r>
+              <a:rPr lang="en-US" sz="2000" dirty="0" smtClean="0">
+                <a:latin typeface="Times New Roman" panose="02020603050405020304" pitchFamily="18" charset="0"/>
+                <a:cs typeface="Times New Roman" panose="02020603050405020304" pitchFamily="18" charset="0"/>
+              </a:rPr>
+              <a:t>}</a:t>
+            </a:r>
+            <a:endParaRPr lang="en-US" sz="2000" dirty="0">
+              <a:latin typeface="Times New Roman" panose="02020603050405020304" pitchFamily="18" charset="0"/>
+              <a:cs typeface="Times New Roman" panose="02020603050405020304" pitchFamily="18" charset="0"/>
+            </a:endParaRPr>
+          </a:p>
+        </p:txBody>
+      </p:sp>
+      <p:sp>
+        <p:nvSpPr>
+          <p:cNvPr id="7" name="Down Arrow 6"/>
+          <p:cNvSpPr/>
+          <p:nvPr/>
+        </p:nvSpPr>
+        <p:spPr>
+          <a:xfrm>
+            <a:off x="4355976" y="4005064"/>
+            <a:ext cx="606109" cy="615553"/>
+          </a:xfrm>
+          <a:prstGeom prst="downArrow">
+            <a:avLst/>
+          </a:prstGeom>
+        </p:spPr>
+        <p:style>
+          <a:lnRef idx="2">
+            <a:schemeClr val="dk1">
+              <a:shade val="50000"/>
+            </a:schemeClr>
+          </a:lnRef>
+          <a:fillRef idx="1">
+            <a:schemeClr val="dk1"/>
+          </a:fillRef>
+          <a:effectRef idx="0">
+            <a:schemeClr val="dk1"/>
+          </a:effectRef>
+          <a:fontRef idx="minor">
+            <a:schemeClr val="lt1"/>
+          </a:fontRef>
+        </p:style>
+        <p:txBody>
+          <a:bodyPr rtlCol="0" anchor="ctr"/>
+          <a:lstStyle/>
+          <a:p>
+            <a:pPr algn="ctr"/>
+            <a:endParaRPr lang="en-US"/>
+          </a:p>
+        </p:txBody>
+      </p:sp>
+      <p:pic>
+        <p:nvPicPr>
+          <p:cNvPr id="8" name="Image 5">
+            <a:extLst>
+              <a:ext uri="{FF2B5EF4-FFF2-40B4-BE49-F238E27FC236}">
+                <a16:creationId xmlns:a16="http://schemas.microsoft.com/office/drawing/2014/main" id="{AC68D4D3-B500-4716-B843-F3048BF30CA2}"/>
+              </a:ext>
+            </a:extLst>
+          </p:cNvPr>
+          <p:cNvPicPr>
+            <a:picLocks noChangeAspect="1"/>
+          </p:cNvPicPr>
+          <p:nvPr/>
+        </p:nvPicPr>
+        <p:blipFill>
+          <a:blip r:embed="rId2" cstate="print">
+            <a:extLst>
+              <a:ext uri="{28A0092B-C50C-407E-A947-70E740481C1C}">
+                <a14:useLocalDpi xmlns:a14="http://schemas.microsoft.com/office/drawing/2010/main" val="0"/>
+              </a:ext>
+            </a:extLst>
+          </a:blip>
+          <a:stretch>
+            <a:fillRect/>
+          </a:stretch>
+        </p:blipFill>
+        <p:spPr>
+          <a:xfrm>
+            <a:off x="7596336" y="6307338"/>
+            <a:ext cx="1296144" cy="515307"/>
+          </a:xfrm>
+          <a:prstGeom prst="rect">
+            <a:avLst/>
+          </a:prstGeom>
+        </p:spPr>
+      </p:pic>
     </p:spTree>
     <p:extLst>
       <p:ext uri="{BB962C8B-B14F-4D97-AF65-F5344CB8AC3E}">
@@ -6287,9 +7609,218 @@
   <p:timing>
     <p:tnLst>
       <p:par>
-        <p:cTn id="1" dur="indefinite" restart="never" nodeType="tmRoot"/>
+        <p:cTn id="1" dur="indefinite" restart="never" nodeType="tmRoot">
+          <p:childTnLst>
+            <p:seq concurrent="1" nextAc="seek">
+              <p:cTn id="2" dur="indefinite" nodeType="mainSeq">
+                <p:childTnLst>
+                  <p:par>
+                    <p:cTn id="3" fill="hold">
+                      <p:stCondLst>
+                        <p:cond delay="indefinite"/>
+                      </p:stCondLst>
+                      <p:childTnLst>
+                        <p:par>
+                          <p:cTn id="4" fill="hold">
+                            <p:stCondLst>
+                              <p:cond delay="0"/>
+                            </p:stCondLst>
+                            <p:childTnLst>
+                              <p:par>
+                                <p:cTn id="5" presetID="1" presetClass="entr" presetSubtype="0" fill="hold" grpId="0" nodeType="clickEffect">
+                                  <p:stCondLst>
+                                    <p:cond delay="0"/>
+                                  </p:stCondLst>
+                                  <p:childTnLst>
+                                    <p:set>
+                                      <p:cBhvr>
+                                        <p:cTn id="6" dur="1" fill="hold">
+                                          <p:stCondLst>
+                                            <p:cond delay="0"/>
+                                          </p:stCondLst>
+                                        </p:cTn>
+                                        <p:tgtEl>
+                                          <p:spTgt spid="3"/>
+                                        </p:tgtEl>
+                                        <p:attrNameLst>
+                                          <p:attrName>style.visibility</p:attrName>
+                                        </p:attrNameLst>
+                                      </p:cBhvr>
+                                      <p:to>
+                                        <p:strVal val="visible"/>
+                                      </p:to>
+                                    </p:set>
+                                  </p:childTnLst>
+                                </p:cTn>
+                              </p:par>
+                            </p:childTnLst>
+                          </p:cTn>
+                        </p:par>
+                      </p:childTnLst>
+                    </p:cTn>
+                  </p:par>
+                  <p:par>
+                    <p:cTn id="7" fill="hold">
+                      <p:stCondLst>
+                        <p:cond delay="indefinite"/>
+                      </p:stCondLst>
+                      <p:childTnLst>
+                        <p:par>
+                          <p:cTn id="8" fill="hold">
+                            <p:stCondLst>
+                              <p:cond delay="0"/>
+                            </p:stCondLst>
+                            <p:childTnLst>
+                              <p:par>
+                                <p:cTn id="9" presetID="1" presetClass="entr" presetSubtype="0" fill="hold" grpId="0" nodeType="clickEffect">
+                                  <p:stCondLst>
+                                    <p:cond delay="0"/>
+                                  </p:stCondLst>
+                                  <p:childTnLst>
+                                    <p:set>
+                                      <p:cBhvr>
+                                        <p:cTn id="10" dur="1" fill="hold">
+                                          <p:stCondLst>
+                                            <p:cond delay="0"/>
+                                          </p:stCondLst>
+                                        </p:cTn>
+                                        <p:tgtEl>
+                                          <p:spTgt spid="4"/>
+                                        </p:tgtEl>
+                                        <p:attrNameLst>
+                                          <p:attrName>style.visibility</p:attrName>
+                                        </p:attrNameLst>
+                                      </p:cBhvr>
+                                      <p:to>
+                                        <p:strVal val="visible"/>
+                                      </p:to>
+                                    </p:set>
+                                  </p:childTnLst>
+                                </p:cTn>
+                              </p:par>
+                            </p:childTnLst>
+                          </p:cTn>
+                        </p:par>
+                      </p:childTnLst>
+                    </p:cTn>
+                  </p:par>
+                  <p:par>
+                    <p:cTn id="11" fill="hold">
+                      <p:stCondLst>
+                        <p:cond delay="indefinite"/>
+                      </p:stCondLst>
+                      <p:childTnLst>
+                        <p:par>
+                          <p:cTn id="12" fill="hold">
+                            <p:stCondLst>
+                              <p:cond delay="0"/>
+                            </p:stCondLst>
+                            <p:childTnLst>
+                              <p:par>
+                                <p:cTn id="13" presetID="1" presetClass="entr" presetSubtype="0" fill="hold" grpId="0" nodeType="clickEffect">
+                                  <p:stCondLst>
+                                    <p:cond delay="0"/>
+                                  </p:stCondLst>
+                                  <p:childTnLst>
+                                    <p:set>
+                                      <p:cBhvr>
+                                        <p:cTn id="14" dur="1" fill="hold">
+                                          <p:stCondLst>
+                                            <p:cond delay="0"/>
+                                          </p:stCondLst>
+                                        </p:cTn>
+                                        <p:tgtEl>
+                                          <p:spTgt spid="7"/>
+                                        </p:tgtEl>
+                                        <p:attrNameLst>
+                                          <p:attrName>style.visibility</p:attrName>
+                                        </p:attrNameLst>
+                                      </p:cBhvr>
+                                      <p:to>
+                                        <p:strVal val="visible"/>
+                                      </p:to>
+                                    </p:set>
+                                  </p:childTnLst>
+                                </p:cTn>
+                              </p:par>
+                            </p:childTnLst>
+                          </p:cTn>
+                        </p:par>
+                      </p:childTnLst>
+                    </p:cTn>
+                  </p:par>
+                  <p:par>
+                    <p:cTn id="15" fill="hold">
+                      <p:stCondLst>
+                        <p:cond delay="indefinite"/>
+                      </p:stCondLst>
+                      <p:childTnLst>
+                        <p:par>
+                          <p:cTn id="16" fill="hold">
+                            <p:stCondLst>
+                              <p:cond delay="0"/>
+                            </p:stCondLst>
+                            <p:childTnLst>
+                              <p:par>
+                                <p:cTn id="17" presetID="1" presetClass="entr" presetSubtype="0" fill="hold" grpId="0" nodeType="clickEffect">
+                                  <p:stCondLst>
+                                    <p:cond delay="0"/>
+                                  </p:stCondLst>
+                                  <p:childTnLst>
+                                    <p:set>
+                                      <p:cBhvr>
+                                        <p:cTn id="18" dur="1" fill="hold">
+                                          <p:stCondLst>
+                                            <p:cond delay="0"/>
+                                          </p:stCondLst>
+                                        </p:cTn>
+                                        <p:tgtEl>
+                                          <p:spTgt spid="5"/>
+                                        </p:tgtEl>
+                                        <p:attrNameLst>
+                                          <p:attrName>style.visibility</p:attrName>
+                                        </p:attrNameLst>
+                                      </p:cBhvr>
+                                      <p:to>
+                                        <p:strVal val="visible"/>
+                                      </p:to>
+                                    </p:set>
+                                  </p:childTnLst>
+                                </p:cTn>
+                              </p:par>
+                            </p:childTnLst>
+                          </p:cTn>
+                        </p:par>
+                      </p:childTnLst>
+                    </p:cTn>
+                  </p:par>
+                </p:childTnLst>
+              </p:cTn>
+              <p:prevCondLst>
+                <p:cond evt="onPrev" delay="0">
+                  <p:tgtEl>
+                    <p:sldTgt/>
+                  </p:tgtEl>
+                </p:cond>
+              </p:prevCondLst>
+              <p:nextCondLst>
+                <p:cond evt="onNext" delay="0">
+                  <p:tgtEl>
+                    <p:sldTgt/>
+                  </p:tgtEl>
+                </p:cond>
+              </p:nextCondLst>
+            </p:seq>
+          </p:childTnLst>
+        </p:cTn>
       </p:par>
     </p:tnLst>
+    <p:bldLst>
+      <p:bldP spid="3" grpId="0"/>
+      <p:bldP spid="4" grpId="0"/>
+      <p:bldP spid="5" grpId="0"/>
+      <p:bldP spid="7" grpId="0" animBg="1"/>
+    </p:bldLst>
   </p:timing>
 </p:sld>
 </file>
@@ -6320,7 +7851,7 @@
         <p:spPr>
           <a:xfrm>
             <a:off x="827584" y="332656"/>
-            <a:ext cx="2864887" cy="461665"/>
+            <a:ext cx="3249608" cy="461665"/>
           </a:xfrm>
           <a:prstGeom prst="rect">
             <a:avLst/>
@@ -6333,12 +7864,20 @@
           <a:lstStyle/>
           <a:p>
             <a:r>
+              <a:rPr lang="fr-CI" b="1" dirty="0" smtClean="0">
+                <a:solidFill>
+                  <a:srgbClr val="FF0000"/>
+                </a:solidFill>
+              </a:rPr>
+              <a:t>II.3 Gestion </a:t>
+            </a:r>
+            <a:r>
               <a:rPr lang="fr-CI" b="1" dirty="0">
                 <a:solidFill>
                   <a:srgbClr val="FF0000"/>
                 </a:solidFill>
               </a:rPr>
-              <a:t>Gestion des Exceptions </a:t>
+              <a:t>des Exceptions </a:t>
             </a:r>
             <a:endParaRPr lang="en-US" sz="2400" dirty="0">
               <a:solidFill>
@@ -6356,8 +7895,8 @@
         </p:nvSpPr>
         <p:spPr>
           <a:xfrm>
-            <a:off x="323528" y="1196752"/>
-            <a:ext cx="8496944" cy="1338828"/>
+            <a:off x="251520" y="984367"/>
+            <a:ext cx="8784976" cy="707886"/>
           </a:xfrm>
           <a:prstGeom prst="rect">
             <a:avLst/>
@@ -6369,45 +7908,1361 @@
           </a:bodyPr>
           <a:lstStyle/>
           <a:p>
-            <a:pPr algn="just">
-              <a:lnSpc>
-                <a:spcPct val="150000"/>
-              </a:lnSpc>
-              <a:spcBef>
-                <a:spcPts val="300"/>
-              </a:spcBef>
-              <a:spcAft>
-                <a:spcPts val="300"/>
-              </a:spcAft>
-            </a:pPr>
-            <a:r>
-              <a:rPr lang="fr-CI" dirty="0"/>
+            <a:pPr algn="just"/>
+            <a:r>
+              <a:rPr lang="fr-CI" sz="2000" dirty="0">
+                <a:latin typeface="Times New Roman" panose="02020603050405020304" pitchFamily="18" charset="0"/>
+                <a:cs typeface="Times New Roman" panose="02020603050405020304" pitchFamily="18" charset="0"/>
+              </a:rPr>
               <a:t>Une </a:t>
             </a:r>
             <a:r>
-              <a:rPr lang="fr-CI" dirty="0">
-                <a:solidFill>
-                  <a:srgbClr val="FF0000"/>
-                </a:solidFill>
-              </a:rPr>
-              <a:t>interface</a:t>
-            </a:r>
-            <a:r>
-              <a:rPr lang="fr-CI" dirty="0"/>
-              <a:t> est un CONTRAT PUR : elle dit ce qu'un objet sait faire, sans dire comment. Contrairement à l'héritage (une seule classe parent), une classe peut implémenter plusieurs interfaces</a:t>
-            </a:r>
-            <a:endParaRPr lang="en-US" sz="1800" dirty="0">
-              <a:effectLst/>
-              <a:latin typeface="Arial" panose="020B0604020202020204" pitchFamily="34" charset="0"/>
-              <a:ea typeface="Arial" panose="020B0604020202020204" pitchFamily="34" charset="0"/>
+              <a:rPr lang="fr-CI" sz="2000" b="1" dirty="0">
+                <a:latin typeface="Times New Roman" panose="02020603050405020304" pitchFamily="18" charset="0"/>
+                <a:cs typeface="Times New Roman" panose="02020603050405020304" pitchFamily="18" charset="0"/>
+              </a:rPr>
+              <a:t>exception</a:t>
+            </a:r>
+            <a:r>
+              <a:rPr lang="fr-CI" sz="2000" dirty="0">
+                <a:latin typeface="Times New Roman" panose="02020603050405020304" pitchFamily="18" charset="0"/>
+                <a:cs typeface="Times New Roman" panose="02020603050405020304" pitchFamily="18" charset="0"/>
+              </a:rPr>
+              <a:t> est un événement anormal qui interrompt le déroulement normal d'un programme. Java fournit un mécanisme pour les capturer et les gérer proprement.</a:t>
+            </a:r>
+            <a:endParaRPr lang="en-US" sz="2000" dirty="0">
+              <a:latin typeface="Times New Roman" panose="02020603050405020304" pitchFamily="18" charset="0"/>
+              <a:cs typeface="Times New Roman" panose="02020603050405020304" pitchFamily="18" charset="0"/>
             </a:endParaRPr>
           </a:p>
         </p:txBody>
       </p:sp>
+      <p:graphicFrame>
+        <p:nvGraphicFramePr>
+          <p:cNvPr id="4" name="Table 3"/>
+          <p:cNvGraphicFramePr>
+            <a:graphicFrameLocks noGrp="1"/>
+          </p:cNvGraphicFramePr>
+          <p:nvPr>
+            <p:extLst>
+              <p:ext uri="{D42A27DB-BD31-4B8C-83A1-F6EECF244321}">
+                <p14:modId xmlns:p14="http://schemas.microsoft.com/office/powerpoint/2010/main" val="1817564517"/>
+              </p:ext>
+            </p:extLst>
+          </p:nvPr>
+        </p:nvGraphicFramePr>
+        <p:xfrm>
+          <a:off x="395536" y="1692253"/>
+          <a:ext cx="4680519" cy="4078097"/>
+        </p:xfrm>
+        <a:graphic>
+          <a:graphicData uri="http://schemas.openxmlformats.org/drawingml/2006/table">
+            <a:tbl>
+              <a:tblPr/>
+              <a:tblGrid>
+                <a:gridCol w="1560173">
+                  <a:extLst>
+                    <a:ext uri="{9D8B030D-6E8A-4147-A177-3AD203B41FA5}">
+                      <a16:colId xmlns:a16="http://schemas.microsoft.com/office/drawing/2014/main" val="3441068424"/>
+                    </a:ext>
+                  </a:extLst>
+                </a:gridCol>
+                <a:gridCol w="1560173">
+                  <a:extLst>
+                    <a:ext uri="{9D8B030D-6E8A-4147-A177-3AD203B41FA5}">
+                      <a16:colId xmlns:a16="http://schemas.microsoft.com/office/drawing/2014/main" val="1273748805"/>
+                    </a:ext>
+                  </a:extLst>
+                </a:gridCol>
+                <a:gridCol w="1560173">
+                  <a:extLst>
+                    <a:ext uri="{9D8B030D-6E8A-4147-A177-3AD203B41FA5}">
+                      <a16:colId xmlns:a16="http://schemas.microsoft.com/office/drawing/2014/main" val="297998505"/>
+                    </a:ext>
+                  </a:extLst>
+                </a:gridCol>
+              </a:tblGrid>
+              <a:tr h="396224">
+                <a:tc>
+                  <a:txBody>
+                    <a:bodyPr/>
+                    <a:lstStyle/>
+                    <a:p>
+                      <a:r>
+                        <a:rPr lang="en-US" sz="2000" b="1" dirty="0" err="1">
+                          <a:solidFill>
+                            <a:srgbClr val="000000"/>
+                          </a:solidFill>
+                          <a:effectLst/>
+                          <a:latin typeface="Times New Roman" panose="02020603050405020304" pitchFamily="18" charset="0"/>
+                          <a:cs typeface="Times New Roman" panose="02020603050405020304" pitchFamily="18" charset="0"/>
+                        </a:rPr>
+                        <a:t>Catégorie</a:t>
+                      </a:r>
+                      <a:endParaRPr lang="en-US" sz="2000" b="1" dirty="0">
+                        <a:solidFill>
+                          <a:srgbClr val="000000"/>
+                        </a:solidFill>
+                        <a:effectLst/>
+                        <a:latin typeface="Times New Roman" panose="02020603050405020304" pitchFamily="18" charset="0"/>
+                        <a:cs typeface="Times New Roman" panose="02020603050405020304" pitchFamily="18" charset="0"/>
+                      </a:endParaRPr>
+                    </a:p>
+                  </a:txBody>
+                  <a:tcPr marL="56940" marR="56940" marT="26280" marB="26280" anchor="ctr">
+                    <a:lnL w="6350" cap="flat" cmpd="sng" algn="ctr">
+                      <a:solidFill>
+                        <a:srgbClr val="D6D6D6"/>
+                      </a:solidFill>
+                      <a:prstDash val="solid"/>
+                      <a:round/>
+                      <a:headEnd type="none" w="med" len="med"/>
+                      <a:tailEnd type="none" w="med" len="med"/>
+                    </a:lnL>
+                    <a:lnR w="6350" cap="flat" cmpd="sng" algn="ctr">
+                      <a:solidFill>
+                        <a:srgbClr val="D6D6D6"/>
+                      </a:solidFill>
+                      <a:prstDash val="solid"/>
+                      <a:round/>
+                      <a:headEnd type="none" w="med" len="med"/>
+                      <a:tailEnd type="none" w="med" len="med"/>
+                    </a:lnR>
+                    <a:lnT w="6350" cap="flat" cmpd="sng" algn="ctr">
+                      <a:solidFill>
+                        <a:srgbClr val="D6D6D6"/>
+                      </a:solidFill>
+                      <a:prstDash val="solid"/>
+                      <a:round/>
+                      <a:headEnd type="none" w="med" len="med"/>
+                      <a:tailEnd type="none" w="med" len="med"/>
+                    </a:lnT>
+                    <a:lnB w="6350" cap="flat" cmpd="sng" algn="ctr">
+                      <a:solidFill>
+                        <a:srgbClr val="D6D6D6"/>
+                      </a:solidFill>
+                      <a:prstDash val="solid"/>
+                      <a:round/>
+                      <a:headEnd type="none" w="med" len="med"/>
+                      <a:tailEnd type="none" w="med" len="med"/>
+                    </a:lnB>
+                    <a:solidFill>
+                      <a:srgbClr val="FFFFFF"/>
+                    </a:solidFill>
+                  </a:tcPr>
+                </a:tc>
+                <a:tc>
+                  <a:txBody>
+                    <a:bodyPr/>
+                    <a:lstStyle/>
+                    <a:p>
+                      <a:r>
+                        <a:rPr lang="en-US" sz="2000" b="1" dirty="0" err="1">
+                          <a:solidFill>
+                            <a:srgbClr val="000000"/>
+                          </a:solidFill>
+                          <a:effectLst/>
+                          <a:latin typeface="Times New Roman" panose="02020603050405020304" pitchFamily="18" charset="0"/>
+                          <a:cs typeface="Times New Roman" panose="02020603050405020304" pitchFamily="18" charset="0"/>
+                        </a:rPr>
+                        <a:t>Exemples</a:t>
+                      </a:r>
+                      <a:endParaRPr lang="en-US" sz="2000" b="1" dirty="0">
+                        <a:solidFill>
+                          <a:srgbClr val="000000"/>
+                        </a:solidFill>
+                        <a:effectLst/>
+                        <a:latin typeface="Times New Roman" panose="02020603050405020304" pitchFamily="18" charset="0"/>
+                        <a:cs typeface="Times New Roman" panose="02020603050405020304" pitchFamily="18" charset="0"/>
+                      </a:endParaRPr>
+                    </a:p>
+                  </a:txBody>
+                  <a:tcPr marL="56940" marR="56940" marT="26280" marB="26280" anchor="ctr">
+                    <a:lnL w="6350" cap="flat" cmpd="sng" algn="ctr">
+                      <a:solidFill>
+                        <a:srgbClr val="D6D6D6"/>
+                      </a:solidFill>
+                      <a:prstDash val="solid"/>
+                      <a:round/>
+                      <a:headEnd type="none" w="med" len="med"/>
+                      <a:tailEnd type="none" w="med" len="med"/>
+                    </a:lnL>
+                    <a:lnR w="6350" cap="flat" cmpd="sng" algn="ctr">
+                      <a:solidFill>
+                        <a:srgbClr val="D6D6D6"/>
+                      </a:solidFill>
+                      <a:prstDash val="solid"/>
+                      <a:round/>
+                      <a:headEnd type="none" w="med" len="med"/>
+                      <a:tailEnd type="none" w="med" len="med"/>
+                    </a:lnR>
+                    <a:lnT w="6350" cap="flat" cmpd="sng" algn="ctr">
+                      <a:solidFill>
+                        <a:srgbClr val="D6D6D6"/>
+                      </a:solidFill>
+                      <a:prstDash val="solid"/>
+                      <a:round/>
+                      <a:headEnd type="none" w="med" len="med"/>
+                      <a:tailEnd type="none" w="med" len="med"/>
+                    </a:lnT>
+                    <a:lnB w="6350" cap="flat" cmpd="sng" algn="ctr">
+                      <a:solidFill>
+                        <a:srgbClr val="D6D6D6"/>
+                      </a:solidFill>
+                      <a:prstDash val="solid"/>
+                      <a:round/>
+                      <a:headEnd type="none" w="med" len="med"/>
+                      <a:tailEnd type="none" w="med" len="med"/>
+                    </a:lnB>
+                    <a:solidFill>
+                      <a:srgbClr val="FFFFFF"/>
+                    </a:solidFill>
+                  </a:tcPr>
+                </a:tc>
+                <a:tc>
+                  <a:txBody>
+                    <a:bodyPr/>
+                    <a:lstStyle/>
+                    <a:p>
+                      <a:r>
+                        <a:rPr lang="en-US" sz="2000" b="1" dirty="0" err="1">
+                          <a:solidFill>
+                            <a:srgbClr val="000000"/>
+                          </a:solidFill>
+                          <a:effectLst/>
+                          <a:latin typeface="Times New Roman" panose="02020603050405020304" pitchFamily="18" charset="0"/>
+                          <a:cs typeface="Times New Roman" panose="02020603050405020304" pitchFamily="18" charset="0"/>
+                        </a:rPr>
+                        <a:t>Obligatoire</a:t>
+                      </a:r>
+                      <a:r>
+                        <a:rPr lang="en-US" sz="2000" b="1" dirty="0">
+                          <a:solidFill>
+                            <a:srgbClr val="000000"/>
+                          </a:solidFill>
+                          <a:effectLst/>
+                          <a:latin typeface="Times New Roman" panose="02020603050405020304" pitchFamily="18" charset="0"/>
+                          <a:cs typeface="Times New Roman" panose="02020603050405020304" pitchFamily="18" charset="0"/>
+                        </a:rPr>
+                        <a:t> à </a:t>
+                      </a:r>
+                      <a:r>
+                        <a:rPr lang="en-US" sz="2000" b="1" dirty="0" err="1">
+                          <a:solidFill>
+                            <a:srgbClr val="000000"/>
+                          </a:solidFill>
+                          <a:effectLst/>
+                          <a:latin typeface="Times New Roman" panose="02020603050405020304" pitchFamily="18" charset="0"/>
+                          <a:cs typeface="Times New Roman" panose="02020603050405020304" pitchFamily="18" charset="0"/>
+                        </a:rPr>
+                        <a:t>gérer</a:t>
+                      </a:r>
+                      <a:r>
+                        <a:rPr lang="en-US" sz="2000" b="1" dirty="0">
+                          <a:solidFill>
+                            <a:srgbClr val="000000"/>
+                          </a:solidFill>
+                          <a:effectLst/>
+                          <a:latin typeface="Times New Roman" panose="02020603050405020304" pitchFamily="18" charset="0"/>
+                          <a:cs typeface="Times New Roman" panose="02020603050405020304" pitchFamily="18" charset="0"/>
+                        </a:rPr>
+                        <a:t> ?</a:t>
+                      </a:r>
+                    </a:p>
+                  </a:txBody>
+                  <a:tcPr marL="56940" marR="56940" marT="26280" marB="26280" anchor="ctr">
+                    <a:lnL w="6350" cap="flat" cmpd="sng" algn="ctr">
+                      <a:solidFill>
+                        <a:srgbClr val="D6D6D6"/>
+                      </a:solidFill>
+                      <a:prstDash val="solid"/>
+                      <a:round/>
+                      <a:headEnd type="none" w="med" len="med"/>
+                      <a:tailEnd type="none" w="med" len="med"/>
+                    </a:lnL>
+                    <a:lnR w="6350" cap="flat" cmpd="sng" algn="ctr">
+                      <a:solidFill>
+                        <a:srgbClr val="D6D6D6"/>
+                      </a:solidFill>
+                      <a:prstDash val="solid"/>
+                      <a:round/>
+                      <a:headEnd type="none" w="med" len="med"/>
+                      <a:tailEnd type="none" w="med" len="med"/>
+                    </a:lnR>
+                    <a:lnT w="6350" cap="flat" cmpd="sng" algn="ctr">
+                      <a:solidFill>
+                        <a:srgbClr val="D6D6D6"/>
+                      </a:solidFill>
+                      <a:prstDash val="solid"/>
+                      <a:round/>
+                      <a:headEnd type="none" w="med" len="med"/>
+                      <a:tailEnd type="none" w="med" len="med"/>
+                    </a:lnT>
+                    <a:lnB w="6350" cap="flat" cmpd="sng" algn="ctr">
+                      <a:solidFill>
+                        <a:srgbClr val="D6D6D6"/>
+                      </a:solidFill>
+                      <a:prstDash val="solid"/>
+                      <a:round/>
+                      <a:headEnd type="none" w="med" len="med"/>
+                      <a:tailEnd type="none" w="med" len="med"/>
+                    </a:lnB>
+                    <a:solidFill>
+                      <a:srgbClr val="FFFFFF"/>
+                    </a:solidFill>
+                  </a:tcPr>
+                </a:tc>
+                <a:extLst>
+                  <a:ext uri="{0D108BD9-81ED-4DB2-BD59-A6C34878D82A}">
+                    <a16:rowId xmlns:a16="http://schemas.microsoft.com/office/drawing/2014/main" val="2491109231"/>
+                  </a:ext>
+                </a:extLst>
+              </a:tr>
+              <a:tr h="1259960">
+                <a:tc>
+                  <a:txBody>
+                    <a:bodyPr/>
+                    <a:lstStyle/>
+                    <a:p>
+                      <a:r>
+                        <a:rPr lang="en-US" sz="2000" dirty="0" err="1">
+                          <a:effectLst/>
+                          <a:latin typeface="Times New Roman" panose="02020603050405020304" pitchFamily="18" charset="0"/>
+                          <a:cs typeface="Times New Roman" panose="02020603050405020304" pitchFamily="18" charset="0"/>
+                        </a:rPr>
+                        <a:t>RuntimeException</a:t>
+                      </a:r>
+                      <a:endParaRPr lang="en-US" sz="2000" dirty="0">
+                        <a:effectLst/>
+                        <a:latin typeface="Times New Roman" panose="02020603050405020304" pitchFamily="18" charset="0"/>
+                        <a:cs typeface="Times New Roman" panose="02020603050405020304" pitchFamily="18" charset="0"/>
+                      </a:endParaRPr>
+                    </a:p>
+                  </a:txBody>
+                  <a:tcPr marL="56940" marR="56940" marT="26280" marB="26280" anchor="ctr">
+                    <a:lnL w="6350" cap="flat" cmpd="sng" algn="ctr">
+                      <a:solidFill>
+                        <a:srgbClr val="D6D6D6"/>
+                      </a:solidFill>
+                      <a:prstDash val="solid"/>
+                      <a:round/>
+                      <a:headEnd type="none" w="med" len="med"/>
+                      <a:tailEnd type="none" w="med" len="med"/>
+                    </a:lnL>
+                    <a:lnR w="6350" cap="flat" cmpd="sng" algn="ctr">
+                      <a:solidFill>
+                        <a:srgbClr val="D6D6D6"/>
+                      </a:solidFill>
+                      <a:prstDash val="solid"/>
+                      <a:round/>
+                      <a:headEnd type="none" w="med" len="med"/>
+                      <a:tailEnd type="none" w="med" len="med"/>
+                    </a:lnR>
+                    <a:lnT w="6350" cap="flat" cmpd="sng" algn="ctr">
+                      <a:solidFill>
+                        <a:srgbClr val="D6D6D6"/>
+                      </a:solidFill>
+                      <a:prstDash val="solid"/>
+                      <a:round/>
+                      <a:headEnd type="none" w="med" len="med"/>
+                      <a:tailEnd type="none" w="med" len="med"/>
+                    </a:lnT>
+                    <a:lnB w="6350" cap="flat" cmpd="sng" algn="ctr">
+                      <a:solidFill>
+                        <a:srgbClr val="D6D6D6"/>
+                      </a:solidFill>
+                      <a:prstDash val="solid"/>
+                      <a:round/>
+                      <a:headEnd type="none" w="med" len="med"/>
+                      <a:tailEnd type="none" w="med" len="med"/>
+                    </a:lnB>
+                    <a:solidFill>
+                      <a:srgbClr val="FFFFFF"/>
+                    </a:solidFill>
+                  </a:tcPr>
+                </a:tc>
+                <a:tc>
+                  <a:txBody>
+                    <a:bodyPr/>
+                    <a:lstStyle/>
+                    <a:p>
+                      <a:r>
+                        <a:rPr lang="en-US" sz="2000" dirty="0" err="1">
+                          <a:effectLst/>
+                          <a:latin typeface="Times New Roman" panose="02020603050405020304" pitchFamily="18" charset="0"/>
+                          <a:cs typeface="Times New Roman" panose="02020603050405020304" pitchFamily="18" charset="0"/>
+                        </a:rPr>
+                        <a:t>NullPointerException</a:t>
+                      </a:r>
+                      <a:r>
+                        <a:rPr lang="en-US" sz="2000" dirty="0">
+                          <a:effectLst/>
+                          <a:latin typeface="Times New Roman" panose="02020603050405020304" pitchFamily="18" charset="0"/>
+                          <a:cs typeface="Times New Roman" panose="02020603050405020304" pitchFamily="18" charset="0"/>
+                        </a:rPr>
+                        <a:t>, </a:t>
+                      </a:r>
+                      <a:r>
+                        <a:rPr lang="en-US" sz="2000" dirty="0" err="1" smtClean="0">
+                          <a:effectLst/>
+                          <a:latin typeface="Times New Roman" panose="02020603050405020304" pitchFamily="18" charset="0"/>
+                          <a:cs typeface="Times New Roman" panose="02020603050405020304" pitchFamily="18" charset="0"/>
+                        </a:rPr>
+                        <a:t>ArrayIndexOutOfBoundsException</a:t>
+                      </a:r>
+                      <a:endParaRPr lang="en-US" sz="2000" dirty="0">
+                        <a:effectLst/>
+                        <a:latin typeface="Times New Roman" panose="02020603050405020304" pitchFamily="18" charset="0"/>
+                        <a:cs typeface="Times New Roman" panose="02020603050405020304" pitchFamily="18" charset="0"/>
+                      </a:endParaRPr>
+                    </a:p>
+                  </a:txBody>
+                  <a:tcPr marL="56940" marR="56940" marT="26280" marB="26280" anchor="ctr">
+                    <a:lnL w="6350" cap="flat" cmpd="sng" algn="ctr">
+                      <a:solidFill>
+                        <a:srgbClr val="D6D6D6"/>
+                      </a:solidFill>
+                      <a:prstDash val="solid"/>
+                      <a:round/>
+                      <a:headEnd type="none" w="med" len="med"/>
+                      <a:tailEnd type="none" w="med" len="med"/>
+                    </a:lnL>
+                    <a:lnR w="6350" cap="flat" cmpd="sng" algn="ctr">
+                      <a:solidFill>
+                        <a:srgbClr val="D6D6D6"/>
+                      </a:solidFill>
+                      <a:prstDash val="solid"/>
+                      <a:round/>
+                      <a:headEnd type="none" w="med" len="med"/>
+                      <a:tailEnd type="none" w="med" len="med"/>
+                    </a:lnR>
+                    <a:lnT w="6350" cap="flat" cmpd="sng" algn="ctr">
+                      <a:solidFill>
+                        <a:srgbClr val="D6D6D6"/>
+                      </a:solidFill>
+                      <a:prstDash val="solid"/>
+                      <a:round/>
+                      <a:headEnd type="none" w="med" len="med"/>
+                      <a:tailEnd type="none" w="med" len="med"/>
+                    </a:lnT>
+                    <a:lnB w="6350" cap="flat" cmpd="sng" algn="ctr">
+                      <a:solidFill>
+                        <a:srgbClr val="D6D6D6"/>
+                      </a:solidFill>
+                      <a:prstDash val="solid"/>
+                      <a:round/>
+                      <a:headEnd type="none" w="med" len="med"/>
+                      <a:tailEnd type="none" w="med" len="med"/>
+                    </a:lnB>
+                    <a:solidFill>
+                      <a:srgbClr val="FFFFFF"/>
+                    </a:solidFill>
+                  </a:tcPr>
+                </a:tc>
+                <a:tc>
+                  <a:txBody>
+                    <a:bodyPr/>
+                    <a:lstStyle/>
+                    <a:p>
+                      <a:r>
+                        <a:rPr lang="en-US" sz="2000" dirty="0">
+                          <a:effectLst/>
+                          <a:latin typeface="Times New Roman" panose="02020603050405020304" pitchFamily="18" charset="0"/>
+                          <a:cs typeface="Times New Roman" panose="02020603050405020304" pitchFamily="18" charset="0"/>
+                        </a:rPr>
+                        <a:t>Non (unchecked)</a:t>
+                      </a:r>
+                    </a:p>
+                  </a:txBody>
+                  <a:tcPr marL="56940" marR="56940" marT="26280" marB="26280" anchor="ctr">
+                    <a:lnL w="6350" cap="flat" cmpd="sng" algn="ctr">
+                      <a:solidFill>
+                        <a:srgbClr val="D6D6D6"/>
+                      </a:solidFill>
+                      <a:prstDash val="solid"/>
+                      <a:round/>
+                      <a:headEnd type="none" w="med" len="med"/>
+                      <a:tailEnd type="none" w="med" len="med"/>
+                    </a:lnL>
+                    <a:lnR w="6350" cap="flat" cmpd="sng" algn="ctr">
+                      <a:solidFill>
+                        <a:srgbClr val="D6D6D6"/>
+                      </a:solidFill>
+                      <a:prstDash val="solid"/>
+                      <a:round/>
+                      <a:headEnd type="none" w="med" len="med"/>
+                      <a:tailEnd type="none" w="med" len="med"/>
+                    </a:lnR>
+                    <a:lnT w="6350" cap="flat" cmpd="sng" algn="ctr">
+                      <a:solidFill>
+                        <a:srgbClr val="D6D6D6"/>
+                      </a:solidFill>
+                      <a:prstDash val="solid"/>
+                      <a:round/>
+                      <a:headEnd type="none" w="med" len="med"/>
+                      <a:tailEnd type="none" w="med" len="med"/>
+                    </a:lnT>
+                    <a:lnB w="6350" cap="flat" cmpd="sng" algn="ctr">
+                      <a:solidFill>
+                        <a:srgbClr val="D6D6D6"/>
+                      </a:solidFill>
+                      <a:prstDash val="solid"/>
+                      <a:round/>
+                      <a:headEnd type="none" w="med" len="med"/>
+                      <a:tailEnd type="none" w="med" len="med"/>
+                    </a:lnB>
+                    <a:solidFill>
+                      <a:srgbClr val="FFFFFF"/>
+                    </a:solidFill>
+                  </a:tcPr>
+                </a:tc>
+                <a:extLst>
+                  <a:ext uri="{0D108BD9-81ED-4DB2-BD59-A6C34878D82A}">
+                    <a16:rowId xmlns:a16="http://schemas.microsoft.com/office/drawing/2014/main" val="1922358032"/>
+                  </a:ext>
+                </a:extLst>
+              </a:tr>
+              <a:tr h="968497">
+                <a:tc>
+                  <a:txBody>
+                    <a:bodyPr/>
+                    <a:lstStyle/>
+                    <a:p>
+                      <a:r>
+                        <a:rPr lang="en-US" sz="2000" dirty="0">
+                          <a:effectLst/>
+                          <a:latin typeface="Times New Roman" panose="02020603050405020304" pitchFamily="18" charset="0"/>
+                          <a:cs typeface="Times New Roman" panose="02020603050405020304" pitchFamily="18" charset="0"/>
+                        </a:rPr>
+                        <a:t>Exception (checked)</a:t>
+                      </a:r>
+                    </a:p>
+                  </a:txBody>
+                  <a:tcPr marL="56940" marR="56940" marT="26280" marB="26280" anchor="ctr">
+                    <a:lnL w="6350" cap="flat" cmpd="sng" algn="ctr">
+                      <a:solidFill>
+                        <a:srgbClr val="D6D6D6"/>
+                      </a:solidFill>
+                      <a:prstDash val="solid"/>
+                      <a:round/>
+                      <a:headEnd type="none" w="med" len="med"/>
+                      <a:tailEnd type="none" w="med" len="med"/>
+                    </a:lnL>
+                    <a:lnR w="6350" cap="flat" cmpd="sng" algn="ctr">
+                      <a:solidFill>
+                        <a:srgbClr val="D6D6D6"/>
+                      </a:solidFill>
+                      <a:prstDash val="solid"/>
+                      <a:round/>
+                      <a:headEnd type="none" w="med" len="med"/>
+                      <a:tailEnd type="none" w="med" len="med"/>
+                    </a:lnR>
+                    <a:lnT w="6350" cap="flat" cmpd="sng" algn="ctr">
+                      <a:solidFill>
+                        <a:srgbClr val="D6D6D6"/>
+                      </a:solidFill>
+                      <a:prstDash val="solid"/>
+                      <a:round/>
+                      <a:headEnd type="none" w="med" len="med"/>
+                      <a:tailEnd type="none" w="med" len="med"/>
+                    </a:lnT>
+                    <a:lnB w="6350" cap="flat" cmpd="sng" algn="ctr">
+                      <a:solidFill>
+                        <a:srgbClr val="D6D6D6"/>
+                      </a:solidFill>
+                      <a:prstDash val="solid"/>
+                      <a:round/>
+                      <a:headEnd type="none" w="med" len="med"/>
+                      <a:tailEnd type="none" w="med" len="med"/>
+                    </a:lnB>
+                    <a:solidFill>
+                      <a:srgbClr val="FFFFFF"/>
+                    </a:solidFill>
+                  </a:tcPr>
+                </a:tc>
+                <a:tc>
+                  <a:txBody>
+                    <a:bodyPr/>
+                    <a:lstStyle/>
+                    <a:p>
+                      <a:r>
+                        <a:rPr lang="en-US" sz="2000" dirty="0">
+                          <a:effectLst/>
+                          <a:latin typeface="Times New Roman" panose="02020603050405020304" pitchFamily="18" charset="0"/>
+                          <a:cs typeface="Times New Roman" panose="02020603050405020304" pitchFamily="18" charset="0"/>
+                        </a:rPr>
+                        <a:t> </a:t>
+                      </a:r>
+                      <a:r>
+                        <a:rPr lang="en-US" sz="2000" dirty="0" err="1">
+                          <a:effectLst/>
+                          <a:latin typeface="Times New Roman" panose="02020603050405020304" pitchFamily="18" charset="0"/>
+                          <a:cs typeface="Times New Roman" panose="02020603050405020304" pitchFamily="18" charset="0"/>
+                        </a:rPr>
+                        <a:t>SQLException</a:t>
+                      </a:r>
+                      <a:r>
+                        <a:rPr lang="en-US" sz="2000" dirty="0">
+                          <a:effectLst/>
+                          <a:latin typeface="Times New Roman" panose="02020603050405020304" pitchFamily="18" charset="0"/>
+                          <a:cs typeface="Times New Roman" panose="02020603050405020304" pitchFamily="18" charset="0"/>
+                        </a:rPr>
+                        <a:t>, exception </a:t>
+                      </a:r>
+                      <a:r>
+                        <a:rPr lang="en-US" sz="2000" dirty="0" err="1">
+                          <a:effectLst/>
+                          <a:latin typeface="Times New Roman" panose="02020603050405020304" pitchFamily="18" charset="0"/>
+                          <a:cs typeface="Times New Roman" panose="02020603050405020304" pitchFamily="18" charset="0"/>
+                        </a:rPr>
+                        <a:t>personnalisée</a:t>
+                      </a:r>
+                      <a:endParaRPr lang="en-US" sz="2000" dirty="0">
+                        <a:effectLst/>
+                        <a:latin typeface="Times New Roman" panose="02020603050405020304" pitchFamily="18" charset="0"/>
+                        <a:cs typeface="Times New Roman" panose="02020603050405020304" pitchFamily="18" charset="0"/>
+                      </a:endParaRPr>
+                    </a:p>
+                  </a:txBody>
+                  <a:tcPr marL="56940" marR="56940" marT="26280" marB="26280" anchor="ctr">
+                    <a:lnL w="6350" cap="flat" cmpd="sng" algn="ctr">
+                      <a:solidFill>
+                        <a:srgbClr val="D6D6D6"/>
+                      </a:solidFill>
+                      <a:prstDash val="solid"/>
+                      <a:round/>
+                      <a:headEnd type="none" w="med" len="med"/>
+                      <a:tailEnd type="none" w="med" len="med"/>
+                    </a:lnL>
+                    <a:lnR w="6350" cap="flat" cmpd="sng" algn="ctr">
+                      <a:solidFill>
+                        <a:srgbClr val="D6D6D6"/>
+                      </a:solidFill>
+                      <a:prstDash val="solid"/>
+                      <a:round/>
+                      <a:headEnd type="none" w="med" len="med"/>
+                      <a:tailEnd type="none" w="med" len="med"/>
+                    </a:lnR>
+                    <a:lnT w="6350" cap="flat" cmpd="sng" algn="ctr">
+                      <a:solidFill>
+                        <a:srgbClr val="D6D6D6"/>
+                      </a:solidFill>
+                      <a:prstDash val="solid"/>
+                      <a:round/>
+                      <a:headEnd type="none" w="med" len="med"/>
+                      <a:tailEnd type="none" w="med" len="med"/>
+                    </a:lnT>
+                    <a:lnB w="6350" cap="flat" cmpd="sng" algn="ctr">
+                      <a:solidFill>
+                        <a:srgbClr val="D6D6D6"/>
+                      </a:solidFill>
+                      <a:prstDash val="solid"/>
+                      <a:round/>
+                      <a:headEnd type="none" w="med" len="med"/>
+                      <a:tailEnd type="none" w="med" len="med"/>
+                    </a:lnB>
+                    <a:solidFill>
+                      <a:srgbClr val="FFFFFF"/>
+                    </a:solidFill>
+                  </a:tcPr>
+                </a:tc>
+                <a:tc>
+                  <a:txBody>
+                    <a:bodyPr/>
+                    <a:lstStyle/>
+                    <a:p>
+                      <a:r>
+                        <a:rPr lang="en-US" sz="2000" b="0" dirty="0">
+                          <a:solidFill>
+                            <a:srgbClr val="000000"/>
+                          </a:solidFill>
+                          <a:effectLst/>
+                          <a:latin typeface="Times New Roman" panose="02020603050405020304" pitchFamily="18" charset="0"/>
+                          <a:cs typeface="Times New Roman" panose="02020603050405020304" pitchFamily="18" charset="0"/>
+                        </a:rPr>
+                        <a:t>OUI</a:t>
+                      </a:r>
+                      <a:endParaRPr lang="en-US" sz="2000" b="0" dirty="0">
+                        <a:effectLst/>
+                        <a:latin typeface="Times New Roman" panose="02020603050405020304" pitchFamily="18" charset="0"/>
+                        <a:cs typeface="Times New Roman" panose="02020603050405020304" pitchFamily="18" charset="0"/>
+                      </a:endParaRPr>
+                    </a:p>
+                  </a:txBody>
+                  <a:tcPr marL="56940" marR="56940" marT="26280" marB="26280" anchor="ctr">
+                    <a:lnL w="6350" cap="flat" cmpd="sng" algn="ctr">
+                      <a:solidFill>
+                        <a:srgbClr val="D6D6D6"/>
+                      </a:solidFill>
+                      <a:prstDash val="solid"/>
+                      <a:round/>
+                      <a:headEnd type="none" w="med" len="med"/>
+                      <a:tailEnd type="none" w="med" len="med"/>
+                    </a:lnL>
+                    <a:lnR w="6350" cap="flat" cmpd="sng" algn="ctr">
+                      <a:solidFill>
+                        <a:srgbClr val="D6D6D6"/>
+                      </a:solidFill>
+                      <a:prstDash val="solid"/>
+                      <a:round/>
+                      <a:headEnd type="none" w="med" len="med"/>
+                      <a:tailEnd type="none" w="med" len="med"/>
+                    </a:lnR>
+                    <a:lnT w="6350" cap="flat" cmpd="sng" algn="ctr">
+                      <a:solidFill>
+                        <a:srgbClr val="D6D6D6"/>
+                      </a:solidFill>
+                      <a:prstDash val="solid"/>
+                      <a:round/>
+                      <a:headEnd type="none" w="med" len="med"/>
+                      <a:tailEnd type="none" w="med" len="med"/>
+                    </a:lnT>
+                    <a:lnB w="6350" cap="flat" cmpd="sng" algn="ctr">
+                      <a:solidFill>
+                        <a:srgbClr val="D6D6D6"/>
+                      </a:solidFill>
+                      <a:prstDash val="solid"/>
+                      <a:round/>
+                      <a:headEnd type="none" w="med" len="med"/>
+                      <a:tailEnd type="none" w="med" len="med"/>
+                    </a:lnB>
+                    <a:solidFill>
+                      <a:srgbClr val="FFFFFF"/>
+                    </a:solidFill>
+                  </a:tcPr>
+                </a:tc>
+                <a:extLst>
+                  <a:ext uri="{0D108BD9-81ED-4DB2-BD59-A6C34878D82A}">
+                    <a16:rowId xmlns:a16="http://schemas.microsoft.com/office/drawing/2014/main" val="332577747"/>
+                  </a:ext>
+                </a:extLst>
+              </a:tr>
+              <a:tr h="870880">
+                <a:tc>
+                  <a:txBody>
+                    <a:bodyPr/>
+                    <a:lstStyle/>
+                    <a:p>
+                      <a:r>
+                        <a:rPr lang="en-US" sz="2000" dirty="0">
+                          <a:effectLst/>
+                          <a:latin typeface="Times New Roman" panose="02020603050405020304" pitchFamily="18" charset="0"/>
+                          <a:cs typeface="Times New Roman" panose="02020603050405020304" pitchFamily="18" charset="0"/>
+                        </a:rPr>
+                        <a:t>Error</a:t>
+                      </a:r>
+                    </a:p>
+                  </a:txBody>
+                  <a:tcPr marL="56940" marR="56940" marT="26280" marB="26280" anchor="ctr">
+                    <a:lnL w="6350" cap="flat" cmpd="sng" algn="ctr">
+                      <a:solidFill>
+                        <a:srgbClr val="D6D6D6"/>
+                      </a:solidFill>
+                      <a:prstDash val="solid"/>
+                      <a:round/>
+                      <a:headEnd type="none" w="med" len="med"/>
+                      <a:tailEnd type="none" w="med" len="med"/>
+                    </a:lnL>
+                    <a:lnR w="6350" cap="flat" cmpd="sng" algn="ctr">
+                      <a:solidFill>
+                        <a:srgbClr val="D6D6D6"/>
+                      </a:solidFill>
+                      <a:prstDash val="solid"/>
+                      <a:round/>
+                      <a:headEnd type="none" w="med" len="med"/>
+                      <a:tailEnd type="none" w="med" len="med"/>
+                    </a:lnR>
+                    <a:lnT w="6350" cap="flat" cmpd="sng" algn="ctr">
+                      <a:solidFill>
+                        <a:srgbClr val="D6D6D6"/>
+                      </a:solidFill>
+                      <a:prstDash val="solid"/>
+                      <a:round/>
+                      <a:headEnd type="none" w="med" len="med"/>
+                      <a:tailEnd type="none" w="med" len="med"/>
+                    </a:lnT>
+                    <a:lnB w="6350" cap="flat" cmpd="sng" algn="ctr">
+                      <a:solidFill>
+                        <a:srgbClr val="D6D6D6"/>
+                      </a:solidFill>
+                      <a:prstDash val="solid"/>
+                      <a:round/>
+                      <a:headEnd type="none" w="med" len="med"/>
+                      <a:tailEnd type="none" w="med" len="med"/>
+                    </a:lnB>
+                    <a:solidFill>
+                      <a:srgbClr val="FFFFFF"/>
+                    </a:solidFill>
+                  </a:tcPr>
+                </a:tc>
+                <a:tc>
+                  <a:txBody>
+                    <a:bodyPr/>
+                    <a:lstStyle/>
+                    <a:p>
+                      <a:r>
+                        <a:rPr lang="en-US" sz="2000" dirty="0" err="1" smtClean="0">
+                          <a:effectLst/>
+                          <a:latin typeface="Times New Roman" panose="02020603050405020304" pitchFamily="18" charset="0"/>
+                          <a:cs typeface="Times New Roman" panose="02020603050405020304" pitchFamily="18" charset="0"/>
+                        </a:rPr>
+                        <a:t>OutOfMemoryError</a:t>
+                      </a:r>
+                      <a:endParaRPr lang="en-US" sz="2000" dirty="0">
+                        <a:effectLst/>
+                        <a:latin typeface="Times New Roman" panose="02020603050405020304" pitchFamily="18" charset="0"/>
+                        <a:cs typeface="Times New Roman" panose="02020603050405020304" pitchFamily="18" charset="0"/>
+                      </a:endParaRPr>
+                    </a:p>
+                  </a:txBody>
+                  <a:tcPr marL="56940" marR="56940" marT="26280" marB="26280" anchor="ctr">
+                    <a:lnL w="6350" cap="flat" cmpd="sng" algn="ctr">
+                      <a:solidFill>
+                        <a:srgbClr val="D6D6D6"/>
+                      </a:solidFill>
+                      <a:prstDash val="solid"/>
+                      <a:round/>
+                      <a:headEnd type="none" w="med" len="med"/>
+                      <a:tailEnd type="none" w="med" len="med"/>
+                    </a:lnL>
+                    <a:lnR w="6350" cap="flat" cmpd="sng" algn="ctr">
+                      <a:solidFill>
+                        <a:srgbClr val="D6D6D6"/>
+                      </a:solidFill>
+                      <a:prstDash val="solid"/>
+                      <a:round/>
+                      <a:headEnd type="none" w="med" len="med"/>
+                      <a:tailEnd type="none" w="med" len="med"/>
+                    </a:lnR>
+                    <a:lnT w="6350" cap="flat" cmpd="sng" algn="ctr">
+                      <a:solidFill>
+                        <a:srgbClr val="D6D6D6"/>
+                      </a:solidFill>
+                      <a:prstDash val="solid"/>
+                      <a:round/>
+                      <a:headEnd type="none" w="med" len="med"/>
+                      <a:tailEnd type="none" w="med" len="med"/>
+                    </a:lnT>
+                    <a:lnB w="6350" cap="flat" cmpd="sng" algn="ctr">
+                      <a:solidFill>
+                        <a:srgbClr val="D6D6D6"/>
+                      </a:solidFill>
+                      <a:prstDash val="solid"/>
+                      <a:round/>
+                      <a:headEnd type="none" w="med" len="med"/>
+                      <a:tailEnd type="none" w="med" len="med"/>
+                    </a:lnB>
+                    <a:solidFill>
+                      <a:srgbClr val="FFFFFF"/>
+                    </a:solidFill>
+                  </a:tcPr>
+                </a:tc>
+                <a:tc>
+                  <a:txBody>
+                    <a:bodyPr/>
+                    <a:lstStyle/>
+                    <a:p>
+                      <a:r>
+                        <a:rPr lang="en-US" sz="2000" dirty="0">
+                          <a:effectLst/>
+                          <a:latin typeface="Times New Roman" panose="02020603050405020304" pitchFamily="18" charset="0"/>
+                          <a:cs typeface="Times New Roman" panose="02020603050405020304" pitchFamily="18" charset="0"/>
+                        </a:rPr>
+                        <a:t>Non (ne pas essayer)</a:t>
+                      </a:r>
+                    </a:p>
+                  </a:txBody>
+                  <a:tcPr marL="56940" marR="56940" marT="26280" marB="26280" anchor="ctr">
+                    <a:lnL w="6350" cap="flat" cmpd="sng" algn="ctr">
+                      <a:solidFill>
+                        <a:srgbClr val="D6D6D6"/>
+                      </a:solidFill>
+                      <a:prstDash val="solid"/>
+                      <a:round/>
+                      <a:headEnd type="none" w="med" len="med"/>
+                      <a:tailEnd type="none" w="med" len="med"/>
+                    </a:lnL>
+                    <a:lnR w="6350" cap="flat" cmpd="sng" algn="ctr">
+                      <a:solidFill>
+                        <a:srgbClr val="D6D6D6"/>
+                      </a:solidFill>
+                      <a:prstDash val="solid"/>
+                      <a:round/>
+                      <a:headEnd type="none" w="med" len="med"/>
+                      <a:tailEnd type="none" w="med" len="med"/>
+                    </a:lnR>
+                    <a:lnT w="6350" cap="flat" cmpd="sng" algn="ctr">
+                      <a:solidFill>
+                        <a:srgbClr val="D6D6D6"/>
+                      </a:solidFill>
+                      <a:prstDash val="solid"/>
+                      <a:round/>
+                      <a:headEnd type="none" w="med" len="med"/>
+                      <a:tailEnd type="none" w="med" len="med"/>
+                    </a:lnT>
+                    <a:lnB w="6350" cap="flat" cmpd="sng" algn="ctr">
+                      <a:solidFill>
+                        <a:srgbClr val="D6D6D6"/>
+                      </a:solidFill>
+                      <a:prstDash val="solid"/>
+                      <a:round/>
+                      <a:headEnd type="none" w="med" len="med"/>
+                      <a:tailEnd type="none" w="med" len="med"/>
+                    </a:lnB>
+                    <a:solidFill>
+                      <a:srgbClr val="FFFFFF"/>
+                    </a:solidFill>
+                  </a:tcPr>
+                </a:tc>
+                <a:extLst>
+                  <a:ext uri="{0D108BD9-81ED-4DB2-BD59-A6C34878D82A}">
+                    <a16:rowId xmlns:a16="http://schemas.microsoft.com/office/drawing/2014/main" val="3042667724"/>
+                  </a:ext>
+                </a:extLst>
+              </a:tr>
+            </a:tbl>
+          </a:graphicData>
+        </a:graphic>
+      </p:graphicFrame>
+      <p:sp>
+        <p:nvSpPr>
+          <p:cNvPr id="7" name="TextBox 6"/>
+          <p:cNvSpPr txBox="1"/>
+          <p:nvPr/>
+        </p:nvSpPr>
+        <p:spPr>
+          <a:xfrm>
+            <a:off x="5292080" y="1692253"/>
+            <a:ext cx="4032448" cy="4401205"/>
+          </a:xfrm>
+          <a:prstGeom prst="rect">
+            <a:avLst/>
+          </a:prstGeom>
+          <a:noFill/>
+        </p:spPr>
+        <p:txBody>
+          <a:bodyPr wrap="square" rtlCol="0">
+            <a:spAutoFit/>
+          </a:bodyPr>
+          <a:lstStyle/>
+          <a:p>
+            <a:pPr lvl="0" eaLnBrk="0" hangingPunct="0"/>
+            <a:r>
+              <a:rPr lang="en-US" sz="2000" dirty="0" smtClean="0">
+                <a:latin typeface="Times New Roman" panose="02020603050405020304" pitchFamily="18" charset="0"/>
+                <a:cs typeface="Times New Roman" panose="02020603050405020304" pitchFamily="18" charset="0"/>
+              </a:rPr>
+              <a:t>5 </a:t>
+            </a:r>
+            <a:r>
+              <a:rPr lang="en-US" altLang="en-US" sz="2000" b="1" dirty="0">
+                <a:solidFill>
+                  <a:srgbClr val="0A0A0A"/>
+                </a:solidFill>
+                <a:latin typeface="Times New Roman" panose="02020603050405020304" pitchFamily="18" charset="0"/>
+                <a:cs typeface="Times New Roman" panose="02020603050405020304" pitchFamily="18" charset="0"/>
+              </a:rPr>
+              <a:t>mots-</a:t>
+            </a:r>
+            <a:r>
+              <a:rPr lang="en-US" altLang="en-US" sz="2000" b="1" dirty="0" err="1">
+                <a:solidFill>
+                  <a:srgbClr val="0A0A0A"/>
+                </a:solidFill>
+                <a:latin typeface="Times New Roman" panose="02020603050405020304" pitchFamily="18" charset="0"/>
+                <a:cs typeface="Times New Roman" panose="02020603050405020304" pitchFamily="18" charset="0"/>
+              </a:rPr>
+              <a:t>clés</a:t>
+            </a:r>
+            <a:r>
+              <a:rPr lang="en-US" altLang="en-US" sz="2000" b="1" dirty="0">
+                <a:solidFill>
+                  <a:srgbClr val="0A0A0A"/>
+                </a:solidFill>
+                <a:latin typeface="Times New Roman" panose="02020603050405020304" pitchFamily="18" charset="0"/>
+                <a:cs typeface="Times New Roman" panose="02020603050405020304" pitchFamily="18" charset="0"/>
+              </a:rPr>
+              <a:t> </a:t>
+            </a:r>
+            <a:r>
+              <a:rPr lang="en-US" altLang="en-US" sz="2000" b="1" dirty="0" err="1" smtClean="0">
+                <a:solidFill>
+                  <a:srgbClr val="0A0A0A"/>
+                </a:solidFill>
+                <a:latin typeface="Times New Roman" panose="02020603050405020304" pitchFamily="18" charset="0"/>
+                <a:cs typeface="Times New Roman" panose="02020603050405020304" pitchFamily="18" charset="0"/>
+              </a:rPr>
+              <a:t>fondamentaux</a:t>
+            </a:r>
+            <a:endParaRPr lang="en-US" altLang="en-US" sz="2000" b="1" dirty="0">
+              <a:solidFill>
+                <a:srgbClr val="0A0A0A"/>
+              </a:solidFill>
+              <a:latin typeface="Times New Roman" panose="02020603050405020304" pitchFamily="18" charset="0"/>
+              <a:cs typeface="Times New Roman" panose="02020603050405020304" pitchFamily="18" charset="0"/>
+            </a:endParaRPr>
+          </a:p>
+          <a:p>
+            <a:pPr lvl="0" eaLnBrk="0" hangingPunct="0"/>
+            <a:endParaRPr lang="en-US" altLang="en-US" sz="2000" b="1" dirty="0">
+              <a:solidFill>
+                <a:srgbClr val="0A0A0A"/>
+              </a:solidFill>
+              <a:latin typeface="Times New Roman" panose="02020603050405020304" pitchFamily="18" charset="0"/>
+              <a:cs typeface="Times New Roman" panose="02020603050405020304" pitchFamily="18" charset="0"/>
+            </a:endParaRPr>
+          </a:p>
+          <a:p>
+            <a:pPr lvl="0" eaLnBrk="0" hangingPunct="0"/>
+            <a:r>
+              <a:rPr lang="en-US" altLang="en-US" sz="2000" b="1" dirty="0" smtClean="0">
+                <a:solidFill>
+                  <a:srgbClr val="0A0A0A"/>
+                </a:solidFill>
+                <a:latin typeface="Times New Roman" panose="02020603050405020304" pitchFamily="18" charset="0"/>
+                <a:cs typeface="Times New Roman" panose="02020603050405020304" pitchFamily="18" charset="0"/>
+              </a:rPr>
+              <a:t>TRY</a:t>
+            </a:r>
+          </a:p>
+          <a:p>
+            <a:pPr lvl="0" eaLnBrk="0" hangingPunct="0"/>
+            <a:endParaRPr lang="en-US" altLang="en-US" sz="2000" b="1" dirty="0" smtClean="0">
+              <a:solidFill>
+                <a:srgbClr val="0A0A0A"/>
+              </a:solidFill>
+              <a:latin typeface="Times New Roman" panose="02020603050405020304" pitchFamily="18" charset="0"/>
+              <a:cs typeface="Times New Roman" panose="02020603050405020304" pitchFamily="18" charset="0"/>
+            </a:endParaRPr>
+          </a:p>
+          <a:p>
+            <a:pPr lvl="0" eaLnBrk="0" hangingPunct="0"/>
+            <a:r>
+              <a:rPr lang="en-US" altLang="en-US" sz="2000" b="1" dirty="0" smtClean="0">
+                <a:solidFill>
+                  <a:srgbClr val="0A0A0A"/>
+                </a:solidFill>
+                <a:latin typeface="Times New Roman" panose="02020603050405020304" pitchFamily="18" charset="0"/>
+                <a:cs typeface="Times New Roman" panose="02020603050405020304" pitchFamily="18" charset="0"/>
+              </a:rPr>
+              <a:t>CATCH</a:t>
+            </a:r>
+          </a:p>
+          <a:p>
+            <a:pPr lvl="0" eaLnBrk="0" hangingPunct="0"/>
+            <a:endParaRPr lang="en-US" altLang="en-US" sz="2000" b="1" dirty="0" smtClean="0">
+              <a:solidFill>
+                <a:srgbClr val="0A0A0A"/>
+              </a:solidFill>
+              <a:latin typeface="Times New Roman" panose="02020603050405020304" pitchFamily="18" charset="0"/>
+              <a:cs typeface="Times New Roman" panose="02020603050405020304" pitchFamily="18" charset="0"/>
+            </a:endParaRPr>
+          </a:p>
+          <a:p>
+            <a:pPr lvl="0" eaLnBrk="0" hangingPunct="0"/>
+            <a:r>
+              <a:rPr lang="en-US" altLang="en-US" sz="2000" b="1" dirty="0" smtClean="0">
+                <a:solidFill>
+                  <a:srgbClr val="0A0A0A"/>
+                </a:solidFill>
+                <a:latin typeface="Times New Roman" panose="02020603050405020304" pitchFamily="18" charset="0"/>
+                <a:cs typeface="Times New Roman" panose="02020603050405020304" pitchFamily="18" charset="0"/>
+              </a:rPr>
+              <a:t>FINALLY  (</a:t>
+            </a:r>
+            <a:r>
+              <a:rPr lang="en-US" altLang="en-US" sz="2000" b="1" dirty="0" err="1" smtClean="0">
+                <a:solidFill>
+                  <a:srgbClr val="0A0A0A"/>
+                </a:solidFill>
+                <a:latin typeface="Times New Roman" panose="02020603050405020304" pitchFamily="18" charset="0"/>
+                <a:cs typeface="Times New Roman" panose="02020603050405020304" pitchFamily="18" charset="0"/>
+              </a:rPr>
+              <a:t>toujours</a:t>
+            </a:r>
+            <a:r>
+              <a:rPr lang="en-US" altLang="en-US" sz="2000" b="1" dirty="0" smtClean="0">
+                <a:solidFill>
+                  <a:srgbClr val="0A0A0A"/>
+                </a:solidFill>
+                <a:latin typeface="Times New Roman" panose="02020603050405020304" pitchFamily="18" charset="0"/>
+                <a:cs typeface="Times New Roman" panose="02020603050405020304" pitchFamily="18" charset="0"/>
+              </a:rPr>
+              <a:t> </a:t>
+            </a:r>
+            <a:r>
+              <a:rPr lang="en-US" altLang="en-US" sz="2000" b="1" dirty="0" err="1" smtClean="0">
+                <a:solidFill>
+                  <a:srgbClr val="0A0A0A"/>
+                </a:solidFill>
+                <a:latin typeface="Times New Roman" panose="02020603050405020304" pitchFamily="18" charset="0"/>
+                <a:cs typeface="Times New Roman" panose="02020603050405020304" pitchFamily="18" charset="0"/>
+              </a:rPr>
+              <a:t>s’execute</a:t>
+            </a:r>
+            <a:r>
+              <a:rPr lang="en-US" altLang="en-US" sz="2000" b="1" dirty="0" smtClean="0">
+                <a:solidFill>
+                  <a:srgbClr val="0A0A0A"/>
+                </a:solidFill>
+                <a:latin typeface="Times New Roman" panose="02020603050405020304" pitchFamily="18" charset="0"/>
+                <a:cs typeface="Times New Roman" panose="02020603050405020304" pitchFamily="18" charset="0"/>
+              </a:rPr>
+              <a:t>)</a:t>
+            </a:r>
+          </a:p>
+          <a:p>
+            <a:pPr lvl="0" eaLnBrk="0" hangingPunct="0"/>
+            <a:endParaRPr lang="en-US" altLang="en-US" sz="2000" b="1" dirty="0" smtClean="0">
+              <a:solidFill>
+                <a:srgbClr val="0A0A0A"/>
+              </a:solidFill>
+              <a:latin typeface="Times New Roman" panose="02020603050405020304" pitchFamily="18" charset="0"/>
+              <a:cs typeface="Times New Roman" panose="02020603050405020304" pitchFamily="18" charset="0"/>
+            </a:endParaRPr>
+          </a:p>
+          <a:p>
+            <a:pPr lvl="0" eaLnBrk="0" hangingPunct="0"/>
+            <a:r>
+              <a:rPr lang="en-US" altLang="en-US" sz="2000" b="1" dirty="0" smtClean="0">
+                <a:solidFill>
+                  <a:srgbClr val="0A0A0A"/>
+                </a:solidFill>
+                <a:latin typeface="Times New Roman" panose="02020603050405020304" pitchFamily="18" charset="0"/>
+                <a:cs typeface="Times New Roman" panose="02020603050405020304" pitchFamily="18" charset="0"/>
+              </a:rPr>
+              <a:t>THROW  </a:t>
+            </a:r>
+            <a:r>
+              <a:rPr lang="en-US" altLang="en-US" sz="2000" b="1" dirty="0" err="1" smtClean="0">
+                <a:solidFill>
+                  <a:srgbClr val="0A0A0A"/>
+                </a:solidFill>
+                <a:latin typeface="Times New Roman" panose="02020603050405020304" pitchFamily="18" charset="0"/>
+                <a:cs typeface="Times New Roman" panose="02020603050405020304" pitchFamily="18" charset="0"/>
+              </a:rPr>
+              <a:t>declenche</a:t>
+            </a:r>
+            <a:r>
+              <a:rPr lang="en-US" altLang="en-US" sz="2000" b="1" dirty="0" smtClean="0">
+                <a:solidFill>
+                  <a:srgbClr val="0A0A0A"/>
+                </a:solidFill>
+                <a:latin typeface="Times New Roman" panose="02020603050405020304" pitchFamily="18" charset="0"/>
+                <a:cs typeface="Times New Roman" panose="02020603050405020304" pitchFamily="18" charset="0"/>
+              </a:rPr>
+              <a:t> </a:t>
+            </a:r>
+            <a:r>
+              <a:rPr lang="en-US" altLang="en-US" sz="2000" b="1" dirty="0" err="1" smtClean="0">
+                <a:solidFill>
+                  <a:srgbClr val="0A0A0A"/>
+                </a:solidFill>
+                <a:latin typeface="Times New Roman" panose="02020603050405020304" pitchFamily="18" charset="0"/>
+                <a:cs typeface="Times New Roman" panose="02020603050405020304" pitchFamily="18" charset="0"/>
+              </a:rPr>
+              <a:t>manuellement</a:t>
+            </a:r>
+            <a:r>
+              <a:rPr lang="en-US" altLang="en-US" sz="2000" b="1" dirty="0" smtClean="0">
+                <a:solidFill>
+                  <a:srgbClr val="0A0A0A"/>
+                </a:solidFill>
+                <a:latin typeface="Times New Roman" panose="02020603050405020304" pitchFamily="18" charset="0"/>
+                <a:cs typeface="Times New Roman" panose="02020603050405020304" pitchFamily="18" charset="0"/>
+              </a:rPr>
+              <a:t> </a:t>
+            </a:r>
+            <a:r>
+              <a:rPr lang="en-US" altLang="en-US" sz="2000" b="1" dirty="0" err="1" smtClean="0">
+                <a:solidFill>
+                  <a:srgbClr val="0A0A0A"/>
+                </a:solidFill>
+                <a:latin typeface="Times New Roman" panose="02020603050405020304" pitchFamily="18" charset="0"/>
+                <a:cs typeface="Times New Roman" panose="02020603050405020304" pitchFamily="18" charset="0"/>
+              </a:rPr>
+              <a:t>une</a:t>
+            </a:r>
+            <a:r>
+              <a:rPr lang="en-US" altLang="en-US" sz="2000" b="1" dirty="0" smtClean="0">
+                <a:solidFill>
+                  <a:srgbClr val="0A0A0A"/>
+                </a:solidFill>
+                <a:latin typeface="Times New Roman" panose="02020603050405020304" pitchFamily="18" charset="0"/>
+                <a:cs typeface="Times New Roman" panose="02020603050405020304" pitchFamily="18" charset="0"/>
+              </a:rPr>
+              <a:t> exception)</a:t>
+            </a:r>
+          </a:p>
+          <a:p>
+            <a:pPr lvl="0" eaLnBrk="0" hangingPunct="0"/>
+            <a:endParaRPr lang="en-US" altLang="en-US" sz="2000" b="1" dirty="0" smtClean="0">
+              <a:solidFill>
+                <a:srgbClr val="0A0A0A"/>
+              </a:solidFill>
+              <a:latin typeface="Times New Roman" panose="02020603050405020304" pitchFamily="18" charset="0"/>
+              <a:cs typeface="Times New Roman" panose="02020603050405020304" pitchFamily="18" charset="0"/>
+            </a:endParaRPr>
+          </a:p>
+          <a:p>
+            <a:pPr lvl="0" eaLnBrk="0" hangingPunct="0"/>
+            <a:r>
+              <a:rPr lang="en-US" altLang="en-US" sz="2000" b="1" dirty="0" smtClean="0">
+                <a:solidFill>
+                  <a:srgbClr val="0A0A0A"/>
+                </a:solidFill>
+                <a:latin typeface="Times New Roman" panose="02020603050405020304" pitchFamily="18" charset="0"/>
+                <a:cs typeface="Times New Roman" panose="02020603050405020304" pitchFamily="18" charset="0"/>
+              </a:rPr>
+              <a:t>THROWS ( </a:t>
+            </a:r>
+            <a:r>
+              <a:rPr lang="en-US" altLang="en-US" sz="2000" b="1" dirty="0" err="1" smtClean="0">
+                <a:solidFill>
+                  <a:srgbClr val="0A0A0A"/>
+                </a:solidFill>
+                <a:latin typeface="Times New Roman" panose="02020603050405020304" pitchFamily="18" charset="0"/>
+                <a:cs typeface="Times New Roman" panose="02020603050405020304" pitchFamily="18" charset="0"/>
+              </a:rPr>
+              <a:t>indique</a:t>
+            </a:r>
+            <a:r>
+              <a:rPr lang="en-US" altLang="en-US" sz="2000" b="1" dirty="0" smtClean="0">
+                <a:solidFill>
+                  <a:srgbClr val="0A0A0A"/>
+                </a:solidFill>
+                <a:latin typeface="Times New Roman" panose="02020603050405020304" pitchFamily="18" charset="0"/>
+                <a:cs typeface="Times New Roman" panose="02020603050405020304" pitchFamily="18" charset="0"/>
+              </a:rPr>
+              <a:t> </a:t>
+            </a:r>
+            <a:r>
+              <a:rPr lang="en-US" altLang="en-US" sz="2000" b="1" dirty="0" err="1" smtClean="0">
+                <a:solidFill>
+                  <a:srgbClr val="0A0A0A"/>
+                </a:solidFill>
+                <a:latin typeface="Times New Roman" panose="02020603050405020304" pitchFamily="18" charset="0"/>
+                <a:cs typeface="Times New Roman" panose="02020603050405020304" pitchFamily="18" charset="0"/>
+              </a:rPr>
+              <a:t>qu’une</a:t>
+            </a:r>
+            <a:r>
+              <a:rPr lang="en-US" altLang="en-US" sz="2000" b="1" dirty="0" smtClean="0">
+                <a:solidFill>
+                  <a:srgbClr val="0A0A0A"/>
+                </a:solidFill>
+                <a:latin typeface="Times New Roman" panose="02020603050405020304" pitchFamily="18" charset="0"/>
+                <a:cs typeface="Times New Roman" panose="02020603050405020304" pitchFamily="18" charset="0"/>
+              </a:rPr>
+              <a:t> method </a:t>
+            </a:r>
+            <a:r>
+              <a:rPr lang="en-US" altLang="en-US" sz="2000" b="1" dirty="0" err="1" smtClean="0">
+                <a:solidFill>
+                  <a:srgbClr val="0A0A0A"/>
+                </a:solidFill>
+                <a:latin typeface="Times New Roman" panose="02020603050405020304" pitchFamily="18" charset="0"/>
+                <a:cs typeface="Times New Roman" panose="02020603050405020304" pitchFamily="18" charset="0"/>
+              </a:rPr>
+              <a:t>peut</a:t>
+            </a:r>
+            <a:r>
+              <a:rPr lang="en-US" altLang="en-US" sz="2000" b="1" dirty="0" smtClean="0">
+                <a:solidFill>
+                  <a:srgbClr val="0A0A0A"/>
+                </a:solidFill>
+                <a:latin typeface="Times New Roman" panose="02020603050405020304" pitchFamily="18" charset="0"/>
+                <a:cs typeface="Times New Roman" panose="02020603050405020304" pitchFamily="18" charset="0"/>
+              </a:rPr>
+              <a:t> </a:t>
+            </a:r>
+            <a:r>
+              <a:rPr lang="en-US" altLang="en-US" sz="2000" b="1" dirty="0" err="1" smtClean="0">
+                <a:solidFill>
+                  <a:srgbClr val="0A0A0A"/>
+                </a:solidFill>
+                <a:latin typeface="Times New Roman" panose="02020603050405020304" pitchFamily="18" charset="0"/>
+                <a:cs typeface="Times New Roman" panose="02020603050405020304" pitchFamily="18" charset="0"/>
+              </a:rPr>
+              <a:t>propager</a:t>
+            </a:r>
+            <a:r>
+              <a:rPr lang="en-US" altLang="en-US" sz="2000" b="1" dirty="0" smtClean="0">
+                <a:solidFill>
+                  <a:srgbClr val="0A0A0A"/>
+                </a:solidFill>
+                <a:latin typeface="Times New Roman" panose="02020603050405020304" pitchFamily="18" charset="0"/>
+                <a:cs typeface="Times New Roman" panose="02020603050405020304" pitchFamily="18" charset="0"/>
+              </a:rPr>
+              <a:t> </a:t>
+            </a:r>
+            <a:r>
+              <a:rPr lang="en-US" altLang="en-US" sz="2000" b="1" dirty="0" err="1" smtClean="0">
+                <a:solidFill>
+                  <a:srgbClr val="0A0A0A"/>
+                </a:solidFill>
+                <a:latin typeface="Times New Roman" panose="02020603050405020304" pitchFamily="18" charset="0"/>
+                <a:cs typeface="Times New Roman" panose="02020603050405020304" pitchFamily="18" charset="0"/>
+              </a:rPr>
+              <a:t>une</a:t>
+            </a:r>
+            <a:r>
+              <a:rPr lang="en-US" altLang="en-US" sz="2000" b="1" dirty="0" smtClean="0">
+                <a:solidFill>
+                  <a:srgbClr val="0A0A0A"/>
+                </a:solidFill>
+                <a:latin typeface="Times New Roman" panose="02020603050405020304" pitchFamily="18" charset="0"/>
+                <a:cs typeface="Times New Roman" panose="02020603050405020304" pitchFamily="18" charset="0"/>
+              </a:rPr>
+              <a:t> exception )</a:t>
+            </a:r>
+            <a:endParaRPr lang="en-US" altLang="en-US" sz="2000" dirty="0">
+              <a:latin typeface="Times New Roman" panose="02020603050405020304" pitchFamily="18" charset="0"/>
+              <a:cs typeface="Times New Roman" panose="02020603050405020304" pitchFamily="18" charset="0"/>
+            </a:endParaRPr>
+          </a:p>
+        </p:txBody>
+      </p:sp>
+      <p:pic>
+        <p:nvPicPr>
+          <p:cNvPr id="6" name="Image 5">
+            <a:extLst>
+              <a:ext uri="{FF2B5EF4-FFF2-40B4-BE49-F238E27FC236}">
+                <a16:creationId xmlns:a16="http://schemas.microsoft.com/office/drawing/2014/main" id="{AC68D4D3-B500-4716-B843-F3048BF30CA2}"/>
+              </a:ext>
+            </a:extLst>
+          </p:cNvPr>
+          <p:cNvPicPr>
+            <a:picLocks noChangeAspect="1"/>
+          </p:cNvPicPr>
+          <p:nvPr/>
+        </p:nvPicPr>
+        <p:blipFill>
+          <a:blip r:embed="rId2" cstate="print">
+            <a:extLst>
+              <a:ext uri="{28A0092B-C50C-407E-A947-70E740481C1C}">
+                <a14:useLocalDpi xmlns:a14="http://schemas.microsoft.com/office/drawing/2010/main" val="0"/>
+              </a:ext>
+            </a:extLst>
+          </a:blip>
+          <a:stretch>
+            <a:fillRect/>
+          </a:stretch>
+        </p:blipFill>
+        <p:spPr>
+          <a:xfrm>
+            <a:off x="7596336" y="6307338"/>
+            <a:ext cx="1296144" cy="515307"/>
+          </a:xfrm>
+          <a:prstGeom prst="rect">
+            <a:avLst/>
+          </a:prstGeom>
+        </p:spPr>
+      </p:pic>
     </p:spTree>
     <p:extLst>
       <p:ext uri="{BB962C8B-B14F-4D97-AF65-F5344CB8AC3E}">
-        <p14:creationId xmlns:p14="http://schemas.microsoft.com/office/powerpoint/2010/main" val="218467806"/>
+        <p14:creationId xmlns:p14="http://schemas.microsoft.com/office/powerpoint/2010/main" val="3415958722"/>
       </p:ext>
     </p:extLst>
   </p:cSld>
@@ -6417,9 +9272,171 @@
   <p:timing>
     <p:tnLst>
       <p:par>
-        <p:cTn id="1" dur="indefinite" restart="never" nodeType="tmRoot"/>
+        <p:cTn id="1" dur="indefinite" restart="never" nodeType="tmRoot">
+          <p:childTnLst>
+            <p:seq concurrent="1" nextAc="seek">
+              <p:cTn id="2" dur="indefinite" nodeType="mainSeq">
+                <p:childTnLst>
+                  <p:par>
+                    <p:cTn id="3" fill="hold">
+                      <p:stCondLst>
+                        <p:cond delay="indefinite"/>
+                      </p:stCondLst>
+                      <p:childTnLst>
+                        <p:par>
+                          <p:cTn id="4" fill="hold">
+                            <p:stCondLst>
+                              <p:cond delay="0"/>
+                            </p:stCondLst>
+                            <p:childTnLst>
+                              <p:par>
+                                <p:cTn id="5" presetID="1" presetClass="entr" presetSubtype="0" fill="hold" grpId="0" nodeType="clickEffect">
+                                  <p:stCondLst>
+                                    <p:cond delay="0"/>
+                                  </p:stCondLst>
+                                  <p:childTnLst>
+                                    <p:set>
+                                      <p:cBhvr>
+                                        <p:cTn id="6" dur="1" fill="hold">
+                                          <p:stCondLst>
+                                            <p:cond delay="0"/>
+                                          </p:stCondLst>
+                                        </p:cTn>
+                                        <p:tgtEl>
+                                          <p:spTgt spid="3"/>
+                                        </p:tgtEl>
+                                        <p:attrNameLst>
+                                          <p:attrName>style.visibility</p:attrName>
+                                        </p:attrNameLst>
+                                      </p:cBhvr>
+                                      <p:to>
+                                        <p:strVal val="visible"/>
+                                      </p:to>
+                                    </p:set>
+                                  </p:childTnLst>
+                                </p:cTn>
+                              </p:par>
+                            </p:childTnLst>
+                          </p:cTn>
+                        </p:par>
+                      </p:childTnLst>
+                    </p:cTn>
+                  </p:par>
+                  <p:par>
+                    <p:cTn id="7" fill="hold">
+                      <p:stCondLst>
+                        <p:cond delay="indefinite"/>
+                      </p:stCondLst>
+                      <p:childTnLst>
+                        <p:par>
+                          <p:cTn id="8" fill="hold">
+                            <p:stCondLst>
+                              <p:cond delay="0"/>
+                            </p:stCondLst>
+                            <p:childTnLst>
+                              <p:par>
+                                <p:cTn id="9" presetID="1" presetClass="entr" presetSubtype="0" fill="hold" nodeType="clickEffect">
+                                  <p:stCondLst>
+                                    <p:cond delay="0"/>
+                                  </p:stCondLst>
+                                  <p:childTnLst>
+                                    <p:set>
+                                      <p:cBhvr>
+                                        <p:cTn id="10" dur="1" fill="hold">
+                                          <p:stCondLst>
+                                            <p:cond delay="0"/>
+                                          </p:stCondLst>
+                                        </p:cTn>
+                                        <p:tgtEl>
+                                          <p:spTgt spid="4"/>
+                                        </p:tgtEl>
+                                        <p:attrNameLst>
+                                          <p:attrName>style.visibility</p:attrName>
+                                        </p:attrNameLst>
+                                      </p:cBhvr>
+                                      <p:to>
+                                        <p:strVal val="visible"/>
+                                      </p:to>
+                                    </p:set>
+                                  </p:childTnLst>
+                                </p:cTn>
+                              </p:par>
+                            </p:childTnLst>
+                          </p:cTn>
+                        </p:par>
+                      </p:childTnLst>
+                    </p:cTn>
+                  </p:par>
+                  <p:par>
+                    <p:cTn id="11" fill="hold">
+                      <p:stCondLst>
+                        <p:cond delay="indefinite"/>
+                      </p:stCondLst>
+                      <p:childTnLst>
+                        <p:par>
+                          <p:cTn id="12" fill="hold">
+                            <p:stCondLst>
+                              <p:cond delay="0"/>
+                            </p:stCondLst>
+                            <p:childTnLst>
+                              <p:par>
+                                <p:cTn id="13" presetID="1" presetClass="entr" presetSubtype="0" fill="hold" grpId="0" nodeType="clickEffect">
+                                  <p:stCondLst>
+                                    <p:cond delay="0"/>
+                                  </p:stCondLst>
+                                  <p:childTnLst>
+                                    <p:set>
+                                      <p:cBhvr>
+                                        <p:cTn id="14" dur="1" fill="hold">
+                                          <p:stCondLst>
+                                            <p:cond delay="0"/>
+                                          </p:stCondLst>
+                                        </p:cTn>
+                                        <p:tgtEl>
+                                          <p:spTgt spid="7"/>
+                                        </p:tgtEl>
+                                        <p:attrNameLst>
+                                          <p:attrName>style.visibility</p:attrName>
+                                        </p:attrNameLst>
+                                      </p:cBhvr>
+                                      <p:to>
+                                        <p:strVal val="visible"/>
+                                      </p:to>
+                                    </p:set>
+                                  </p:childTnLst>
+                                </p:cTn>
+                              </p:par>
+                            </p:childTnLst>
+                          </p:cTn>
+                        </p:par>
+                      </p:childTnLst>
+                    </p:cTn>
+                  </p:par>
+                </p:childTnLst>
+              </p:cTn>
+              <p:prevCondLst>
+                <p:cond evt="onPrev" delay="0">
+                  <p:tgtEl>
+                    <p:sldTgt/>
+                  </p:tgtEl>
+                </p:cond>
+              </p:prevCondLst>
+              <p:nextCondLst>
+                <p:cond evt="onNext" delay="0">
+                  <p:tgtEl>
+                    <p:sldTgt/>
+                  </p:tgtEl>
+                </p:cond>
+              </p:nextCondLst>
+            </p:seq>
+          </p:childTnLst>
+        </p:cTn>
       </p:par>
     </p:tnLst>
+    <p:bldLst>
+      <p:bldP spid="3" grpId="0"/>
+      <p:bldP spid="7" grpId="0"/>
+    </p:bldLst>
   </p:timing>
 </p:sld>
 </file>
@@ -6450,7 +9467,7 @@
         <p:spPr>
           <a:xfrm>
             <a:off x="827584" y="332656"/>
-            <a:ext cx="2864887" cy="461665"/>
+            <a:ext cx="5878532" cy="461665"/>
           </a:xfrm>
           <a:prstGeom prst="rect">
             <a:avLst/>
@@ -6463,12 +9480,28 @@
           <a:lstStyle/>
           <a:p>
             <a:r>
-              <a:rPr lang="fr-CI" b="1" dirty="0">
+              <a:rPr lang="fr-CI" b="1" dirty="0" smtClean="0">
                 <a:solidFill>
                   <a:srgbClr val="FF0000"/>
                 </a:solidFill>
               </a:rPr>
-              <a:t>Gestion des Exceptions </a:t>
+              <a:t>III. Programmation fonctionnelle (</a:t>
+            </a:r>
+            <a:r>
+              <a:rPr lang="fr-CI" b="1" dirty="0" err="1" smtClean="0">
+                <a:solidFill>
+                  <a:srgbClr val="FF0000"/>
+                </a:solidFill>
+              </a:rPr>
+              <a:t>lamda</a:t>
+            </a:r>
+            <a:r>
+              <a:rPr lang="fr-CI" b="1" dirty="0" smtClean="0">
+                <a:solidFill>
+                  <a:srgbClr val="FF0000"/>
+                </a:solidFill>
+              </a:rPr>
+              <a:t> expression)</a:t>
             </a:r>
             <a:endParaRPr lang="en-US" sz="2400" dirty="0">
               <a:solidFill>
@@ -6480,14 +9513,201 @@
       </p:sp>
       <p:sp>
         <p:nvSpPr>
-          <p:cNvPr id="3" name="Rectangle 2"/>
+          <p:cNvPr id="5" name="TextBox 4"/>
+          <p:cNvSpPr txBox="1"/>
+          <p:nvPr/>
+        </p:nvSpPr>
+        <p:spPr>
+          <a:xfrm>
+            <a:off x="601773" y="894564"/>
+            <a:ext cx="8712968" cy="677108"/>
+          </a:xfrm>
+          <a:prstGeom prst="rect">
+            <a:avLst/>
+          </a:prstGeom>
+          <a:noFill/>
+        </p:spPr>
+        <p:txBody>
+          <a:bodyPr wrap="square" rtlCol="0">
+            <a:spAutoFit/>
+          </a:bodyPr>
+          <a:lstStyle/>
+          <a:p>
+            <a:r>
+              <a:rPr lang="fr-FR" sz="2000" dirty="0">
+                <a:latin typeface="Times New Roman" panose="02020603050405020304" pitchFamily="18" charset="0"/>
+                <a:cs typeface="Times New Roman" panose="02020603050405020304" pitchFamily="18" charset="0"/>
+              </a:rPr>
+              <a:t>Une </a:t>
+            </a:r>
+            <a:r>
+              <a:rPr lang="fr-FR" sz="2000" b="1" dirty="0">
+                <a:latin typeface="Times New Roman" panose="02020603050405020304" pitchFamily="18" charset="0"/>
+                <a:cs typeface="Times New Roman" panose="02020603050405020304" pitchFamily="18" charset="0"/>
+              </a:rPr>
+              <a:t>expression Lambda</a:t>
+            </a:r>
+            <a:r>
+              <a:rPr lang="fr-FR" sz="2000" dirty="0">
+                <a:latin typeface="Times New Roman" panose="02020603050405020304" pitchFamily="18" charset="0"/>
+                <a:cs typeface="Times New Roman" panose="02020603050405020304" pitchFamily="18" charset="0"/>
+              </a:rPr>
+              <a:t> permet d’écrire du code plus lisible et concis.</a:t>
+            </a:r>
+          </a:p>
+          <a:p>
+            <a:endParaRPr lang="en-US" dirty="0">
+              <a:latin typeface="Times New Roman" panose="02020603050405020304" pitchFamily="18" charset="0"/>
+              <a:cs typeface="Times New Roman" panose="02020603050405020304" pitchFamily="18" charset="0"/>
+            </a:endParaRPr>
+          </a:p>
+        </p:txBody>
+      </p:sp>
+      <p:sp>
+        <p:nvSpPr>
+          <p:cNvPr id="7" name="TextBox 6"/>
+          <p:cNvSpPr txBox="1"/>
+          <p:nvPr/>
+        </p:nvSpPr>
+        <p:spPr>
+          <a:xfrm>
+            <a:off x="633314" y="1870394"/>
+            <a:ext cx="5184576" cy="707886"/>
+          </a:xfrm>
+          <a:prstGeom prst="rect">
+            <a:avLst/>
+          </a:prstGeom>
+          <a:noFill/>
+        </p:spPr>
+        <p:txBody>
+          <a:bodyPr wrap="square" rtlCol="0">
+            <a:spAutoFit/>
+          </a:bodyPr>
+          <a:lstStyle/>
+          <a:p>
+            <a:r>
+              <a:rPr lang="en-US" sz="2000" b="1" dirty="0" err="1" smtClean="0">
+                <a:latin typeface="Times New Roman" panose="02020603050405020304" pitchFamily="18" charset="0"/>
+                <a:cs typeface="Times New Roman" panose="02020603050405020304" pitchFamily="18" charset="0"/>
+              </a:rPr>
+              <a:t>Syntaxe</a:t>
+            </a:r>
+            <a:r>
+              <a:rPr lang="en-US" sz="2000" b="1" dirty="0" smtClean="0">
+                <a:latin typeface="Times New Roman" panose="02020603050405020304" pitchFamily="18" charset="0"/>
+                <a:cs typeface="Times New Roman" panose="02020603050405020304" pitchFamily="18" charset="0"/>
+              </a:rPr>
+              <a:t> </a:t>
+            </a:r>
+            <a:endParaRPr lang="en-US" sz="2000" dirty="0" smtClean="0">
+              <a:latin typeface="Times New Roman" panose="02020603050405020304" pitchFamily="18" charset="0"/>
+              <a:cs typeface="Times New Roman" panose="02020603050405020304" pitchFamily="18" charset="0"/>
+            </a:endParaRPr>
+          </a:p>
+          <a:p>
+            <a:r>
+              <a:rPr lang="en-US" sz="2000" dirty="0" smtClean="0">
+                <a:latin typeface="Times New Roman" panose="02020603050405020304" pitchFamily="18" charset="0"/>
+                <a:cs typeface="Times New Roman" panose="02020603050405020304" pitchFamily="18" charset="0"/>
+              </a:rPr>
+              <a:t>(</a:t>
+            </a:r>
+            <a:r>
+              <a:rPr lang="en-US" sz="2000" dirty="0" err="1" smtClean="0">
+                <a:latin typeface="Times New Roman" panose="02020603050405020304" pitchFamily="18" charset="0"/>
+                <a:cs typeface="Times New Roman" panose="02020603050405020304" pitchFamily="18" charset="0"/>
+              </a:rPr>
+              <a:t>parametres</a:t>
+            </a:r>
+            <a:r>
+              <a:rPr lang="en-US" sz="2000" dirty="0" smtClean="0">
+                <a:latin typeface="Times New Roman" panose="02020603050405020304" pitchFamily="18" charset="0"/>
+                <a:cs typeface="Times New Roman" panose="02020603050405020304" pitchFamily="18" charset="0"/>
+              </a:rPr>
+              <a:t>)-&gt; {corps}</a:t>
+            </a:r>
+            <a:endParaRPr lang="en-US" sz="2000" dirty="0">
+              <a:latin typeface="Times New Roman" panose="02020603050405020304" pitchFamily="18" charset="0"/>
+              <a:cs typeface="Times New Roman" panose="02020603050405020304" pitchFamily="18" charset="0"/>
+            </a:endParaRPr>
+          </a:p>
+        </p:txBody>
+      </p:sp>
+      <p:sp>
+        <p:nvSpPr>
+          <p:cNvPr id="8" name="Rectangle 7"/>
           <p:cNvSpPr/>
           <p:nvPr/>
         </p:nvSpPr>
         <p:spPr>
           <a:xfrm>
-            <a:off x="179512" y="1268760"/>
-            <a:ext cx="8784976" cy="923330"/>
+            <a:off x="611560" y="3573016"/>
+            <a:ext cx="4572000" cy="1631216"/>
+          </a:xfrm>
+          <a:prstGeom prst="rect">
+            <a:avLst/>
+          </a:prstGeom>
+        </p:spPr>
+        <p:txBody>
+          <a:bodyPr>
+            <a:spAutoFit/>
+          </a:bodyPr>
+          <a:lstStyle/>
+          <a:p>
+            <a:r>
+              <a:rPr lang="en-US" dirty="0" smtClean="0"/>
+              <a:t> </a:t>
+            </a:r>
+            <a:r>
+              <a:rPr lang="en-US" sz="2000" b="1" dirty="0" smtClean="0">
+                <a:latin typeface="+mn-lt"/>
+              </a:rPr>
+              <a:t>Avant java 8</a:t>
+            </a:r>
+          </a:p>
+          <a:p>
+            <a:endParaRPr lang="en-US" sz="2000" b="1" dirty="0" smtClean="0">
+              <a:latin typeface="+mn-lt"/>
+            </a:endParaRPr>
+          </a:p>
+          <a:p>
+            <a:r>
+              <a:rPr lang="en-US" sz="2000" dirty="0" smtClean="0">
+                <a:latin typeface="+mn-lt"/>
+              </a:rPr>
+              <a:t>Runnable </a:t>
+            </a:r>
+            <a:r>
+              <a:rPr lang="en-US" sz="2000" dirty="0">
+                <a:latin typeface="+mn-lt"/>
+              </a:rPr>
+              <a:t>r = new Runnable() {    @Override    public void run() {        </a:t>
+            </a:r>
+            <a:r>
+              <a:rPr lang="en-US" sz="2000" dirty="0" err="1">
+                <a:latin typeface="+mn-lt"/>
+              </a:rPr>
+              <a:t>System.out.println</a:t>
+            </a:r>
+            <a:r>
+              <a:rPr lang="en-US" sz="2000" dirty="0">
+                <a:latin typeface="+mn-lt"/>
+              </a:rPr>
+              <a:t>("Hello !");    }};</a:t>
+            </a:r>
+          </a:p>
+        </p:txBody>
+      </p:sp>
+      <p:sp>
+        <p:nvSpPr>
+          <p:cNvPr id="9" name="Rectangle 8"/>
+          <p:cNvSpPr/>
+          <p:nvPr/>
+        </p:nvSpPr>
+        <p:spPr>
+          <a:xfrm>
+            <a:off x="601773" y="2858563"/>
+            <a:ext cx="6336704" cy="400110"/>
           </a:xfrm>
           <a:prstGeom prst="rect">
             <a:avLst/>
@@ -6499,27 +9719,84 @@
           </a:bodyPr>
           <a:lstStyle/>
           <a:p>
-            <a:pPr algn="just"/>
-            <a:r>
-              <a:rPr lang="fr-CI" dirty="0"/>
-              <a:t>Une </a:t>
-            </a:r>
-            <a:r>
-              <a:rPr lang="fr-CI" b="1" dirty="0"/>
-              <a:t>exception</a:t>
-            </a:r>
-            <a:r>
-              <a:rPr lang="fr-CI" dirty="0"/>
-              <a:t> est un événement anormal qui interrompt le déroulement normal d'un programme. Java fournit un mécanisme pour les capturer et les gérer proprement.</a:t>
-            </a:r>
-            <a:endParaRPr lang="en-US" dirty="0"/>
+            <a:r>
+              <a:rPr lang="en-US" sz="2000" b="1" dirty="0">
+                <a:latin typeface="Times New Roman" panose="02020603050405020304" pitchFamily="18" charset="0"/>
+                <a:cs typeface="Times New Roman" panose="02020603050405020304" pitchFamily="18" charset="0"/>
+              </a:rPr>
+              <a:t>Runnable r = </a:t>
+            </a:r>
+            <a:r>
+              <a:rPr lang="en-US" sz="2000" b="1" dirty="0" smtClean="0">
+                <a:latin typeface="Times New Roman" panose="02020603050405020304" pitchFamily="18" charset="0"/>
+                <a:cs typeface="Times New Roman" panose="02020603050405020304" pitchFamily="18" charset="0"/>
+              </a:rPr>
+              <a:t>( ) </a:t>
+            </a:r>
+            <a:r>
+              <a:rPr lang="en-US" sz="2000" b="1" dirty="0">
+                <a:latin typeface="Times New Roman" panose="02020603050405020304" pitchFamily="18" charset="0"/>
+                <a:cs typeface="Times New Roman" panose="02020603050405020304" pitchFamily="18" charset="0"/>
+              </a:rPr>
+              <a:t>-&gt; </a:t>
+            </a:r>
+            <a:r>
+              <a:rPr lang="en-US" sz="2000" b="1" dirty="0" err="1">
+                <a:latin typeface="Times New Roman" panose="02020603050405020304" pitchFamily="18" charset="0"/>
+                <a:cs typeface="Times New Roman" panose="02020603050405020304" pitchFamily="18" charset="0"/>
+              </a:rPr>
+              <a:t>System.out.println</a:t>
+            </a:r>
+            <a:r>
+              <a:rPr lang="en-US" sz="2000" b="1" dirty="0">
+                <a:latin typeface="Times New Roman" panose="02020603050405020304" pitchFamily="18" charset="0"/>
+                <a:cs typeface="Times New Roman" panose="02020603050405020304" pitchFamily="18" charset="0"/>
+              </a:rPr>
+              <a:t>("Hello !");</a:t>
+            </a:r>
           </a:p>
         </p:txBody>
       </p:sp>
+      <p:pic>
+        <p:nvPicPr>
+          <p:cNvPr id="10" name="Image 5">
+            <a:extLst>
+              <a:ext uri="{FF2B5EF4-FFF2-40B4-BE49-F238E27FC236}">
+                <a16:creationId xmlns:a16="http://schemas.microsoft.com/office/drawing/2014/main" id="{AC68D4D3-B500-4716-B843-F3048BF30CA2}"/>
+              </a:ext>
+            </a:extLst>
+          </p:cNvPr>
+          <p:cNvPicPr>
+            <a:picLocks noChangeAspect="1"/>
+          </p:cNvPicPr>
+          <p:nvPr/>
+        </p:nvPicPr>
+        <p:blipFill>
+          <a:blip r:embed="rId2" cstate="print">
+            <a:extLst>
+              <a:ext uri="{28A0092B-C50C-407E-A947-70E740481C1C}">
+                <a14:useLocalDpi xmlns:a14="http://schemas.microsoft.com/office/drawing/2010/main" val="0"/>
+              </a:ext>
+            </a:extLst>
+          </a:blip>
+          <a:stretch>
+            <a:fillRect/>
+          </a:stretch>
+        </p:blipFill>
+        <p:spPr>
+          <a:xfrm>
+            <a:off x="7596336" y="6307338"/>
+            <a:ext cx="1296144" cy="515307"/>
+          </a:xfrm>
+          <a:prstGeom prst="rect">
+            <a:avLst/>
+          </a:prstGeom>
+        </p:spPr>
+      </p:pic>
     </p:spTree>
     <p:extLst>
       <p:ext uri="{BB962C8B-B14F-4D97-AF65-F5344CB8AC3E}">
-        <p14:creationId xmlns:p14="http://schemas.microsoft.com/office/powerpoint/2010/main" val="3415958722"/>
+        <p14:creationId xmlns:p14="http://schemas.microsoft.com/office/powerpoint/2010/main" val="1055937304"/>
       </p:ext>
     </p:extLst>
   </p:cSld>
@@ -6562,7 +9839,7 @@
         <p:spPr>
           <a:xfrm>
             <a:off x="827584" y="332656"/>
-            <a:ext cx="5557932" cy="461665"/>
+            <a:ext cx="5878532" cy="461665"/>
           </a:xfrm>
           <a:prstGeom prst="rect">
             <a:avLst/>
@@ -6580,7 +9857,7 @@
                   <a:srgbClr val="FF0000"/>
                 </a:solidFill>
               </a:rPr>
-              <a:t>Programmation fonctionnelle (</a:t>
+              <a:t>III. Programmation fonctionnelle (</a:t>
             </a:r>
             <a:r>
               <a:rPr lang="fr-CI" b="1" dirty="0" err="1" smtClean="0">
@@ -6608,46 +9885,806 @@
       </p:sp>
       <p:sp>
         <p:nvSpPr>
-          <p:cNvPr id="3" name="Rectangle 2"/>
-          <p:cNvSpPr/>
+          <p:cNvPr id="3" name="Rectangle 1"/>
+          <p:cNvSpPr>
+            <a:spLocks noChangeArrowheads="1"/>
+          </p:cNvSpPr>
           <p:nvPr/>
         </p:nvSpPr>
+        <p:spPr bwMode="auto">
+          <a:xfrm>
+            <a:off x="395536" y="1464461"/>
+            <a:ext cx="8748464" cy="2862322"/>
+          </a:xfrm>
+          <a:prstGeom prst="rect">
+            <a:avLst/>
+          </a:prstGeom>
+          <a:solidFill>
+            <a:srgbClr val="FFFFFF"/>
+          </a:solidFill>
+          <a:ln>
+            <a:noFill/>
+          </a:ln>
+          <a:effectLst/>
+          <a:extLst>
+            <a:ext uri="{91240B29-F687-4F45-9708-019B960494DF}">
+              <a14:hiddenLine xmlns:a14="http://schemas.microsoft.com/office/drawing/2010/main" w="9525">
+                <a:solidFill>
+                  <a:schemeClr val="tx1"/>
+                </a:solidFill>
+                <a:miter lim="800000"/>
+                <a:headEnd/>
+                <a:tailEnd/>
+              </a14:hiddenLine>
+            </a:ext>
+            <a:ext uri="{AF507438-7753-43E0-B8FC-AC1667EBCBE1}">
+              <a14:hiddenEffects xmlns:a14="http://schemas.microsoft.com/office/drawing/2010/main">
+                <a:effectLst>
+                  <a:outerShdw dist="35921" dir="2700000" algn="ctr" rotWithShape="0">
+                    <a:schemeClr val="bg2"/>
+                  </a:outerShdw>
+                </a:effectLst>
+              </a14:hiddenEffects>
+            </a:ext>
+          </a:extLst>
+        </p:spPr>
+        <p:txBody>
+          <a:bodyPr vert="horz" wrap="square" lIns="91440" tIns="45720" rIns="91440" bIns="45720" numCol="1" anchor="ctr" anchorCtr="0" compatLnSpc="1">
+            <a:prstTxWarp prst="textNoShape">
+              <a:avLst/>
+            </a:prstTxWarp>
+            <a:spAutoFit/>
+          </a:bodyPr>
+          <a:lstStyle>
+            <a:lvl1pPr eaLnBrk="0" hangingPunct="0">
+              <a:defRPr>
+                <a:solidFill>
+                  <a:schemeClr val="tx1"/>
+                </a:solidFill>
+                <a:latin typeface="Arial" panose="020B0604020202020204" pitchFamily="34" charset="0"/>
+              </a:defRPr>
+            </a:lvl1pPr>
+            <a:lvl2pPr eaLnBrk="0" hangingPunct="0">
+              <a:defRPr>
+                <a:solidFill>
+                  <a:schemeClr val="tx1"/>
+                </a:solidFill>
+                <a:latin typeface="Arial" panose="020B0604020202020204" pitchFamily="34" charset="0"/>
+              </a:defRPr>
+            </a:lvl2pPr>
+            <a:lvl3pPr eaLnBrk="0" hangingPunct="0">
+              <a:defRPr>
+                <a:solidFill>
+                  <a:schemeClr val="tx1"/>
+                </a:solidFill>
+                <a:latin typeface="Arial" panose="020B0604020202020204" pitchFamily="34" charset="0"/>
+              </a:defRPr>
+            </a:lvl3pPr>
+            <a:lvl4pPr eaLnBrk="0" hangingPunct="0">
+              <a:defRPr>
+                <a:solidFill>
+                  <a:schemeClr val="tx1"/>
+                </a:solidFill>
+                <a:latin typeface="Arial" panose="020B0604020202020204" pitchFamily="34" charset="0"/>
+              </a:defRPr>
+            </a:lvl4pPr>
+            <a:lvl5pPr eaLnBrk="0" hangingPunct="0">
+              <a:defRPr>
+                <a:solidFill>
+                  <a:schemeClr val="tx1"/>
+                </a:solidFill>
+                <a:latin typeface="Arial" panose="020B0604020202020204" pitchFamily="34" charset="0"/>
+              </a:defRPr>
+            </a:lvl5pPr>
+            <a:lvl6pPr eaLnBrk="0" fontAlgn="base" hangingPunct="0">
+              <a:spcBef>
+                <a:spcPct val="0"/>
+              </a:spcBef>
+              <a:spcAft>
+                <a:spcPct val="0"/>
+              </a:spcAft>
+              <a:defRPr>
+                <a:solidFill>
+                  <a:schemeClr val="tx1"/>
+                </a:solidFill>
+                <a:latin typeface="Arial" panose="020B0604020202020204" pitchFamily="34" charset="0"/>
+              </a:defRPr>
+            </a:lvl6pPr>
+            <a:lvl7pPr eaLnBrk="0" fontAlgn="base" hangingPunct="0">
+              <a:spcBef>
+                <a:spcPct val="0"/>
+              </a:spcBef>
+              <a:spcAft>
+                <a:spcPct val="0"/>
+              </a:spcAft>
+              <a:defRPr>
+                <a:solidFill>
+                  <a:schemeClr val="tx1"/>
+                </a:solidFill>
+                <a:latin typeface="Arial" panose="020B0604020202020204" pitchFamily="34" charset="0"/>
+              </a:defRPr>
+            </a:lvl7pPr>
+            <a:lvl8pPr eaLnBrk="0" fontAlgn="base" hangingPunct="0">
+              <a:spcBef>
+                <a:spcPct val="0"/>
+              </a:spcBef>
+              <a:spcAft>
+                <a:spcPct val="0"/>
+              </a:spcAft>
+              <a:defRPr>
+                <a:solidFill>
+                  <a:schemeClr val="tx1"/>
+                </a:solidFill>
+                <a:latin typeface="Arial" panose="020B0604020202020204" pitchFamily="34" charset="0"/>
+              </a:defRPr>
+            </a:lvl8pPr>
+            <a:lvl9pPr eaLnBrk="0" fontAlgn="base" hangingPunct="0">
+              <a:spcBef>
+                <a:spcPct val="0"/>
+              </a:spcBef>
+              <a:spcAft>
+                <a:spcPct val="0"/>
+              </a:spcAft>
+              <a:defRPr>
+                <a:solidFill>
+                  <a:schemeClr val="tx1"/>
+                </a:solidFill>
+                <a:latin typeface="Arial" panose="020B0604020202020204" pitchFamily="34" charset="0"/>
+              </a:defRPr>
+            </a:lvl9pPr>
+          </a:lstStyle>
+          <a:p>
+            <a:pPr marL="0" marR="0" lvl="0" indent="0" algn="l" defTabSz="914400" rtl="0" eaLnBrk="0" fontAlgn="base" latinLnBrk="0" hangingPunct="0">
+              <a:lnSpc>
+                <a:spcPct val="100000"/>
+              </a:lnSpc>
+              <a:spcBef>
+                <a:spcPct val="0"/>
+              </a:spcBef>
+              <a:spcAft>
+                <a:spcPct val="0"/>
+              </a:spcAft>
+              <a:buClrTx/>
+              <a:buSzTx/>
+              <a:buFontTx/>
+              <a:buNone/>
+              <a:tabLst/>
+            </a:pPr>
+            <a:r>
+              <a:rPr kumimoji="0" lang="en-US" altLang="en-US" sz="2000" b="1" i="0" u="none" strike="noStrike" cap="none" normalizeH="0" baseline="0" dirty="0" err="1" smtClean="0">
+                <a:ln>
+                  <a:noFill/>
+                </a:ln>
+                <a:solidFill>
+                  <a:srgbClr val="0A0A0A"/>
+                </a:solidFill>
+                <a:effectLst/>
+                <a:latin typeface="Times New Roman" panose="02020603050405020304" pitchFamily="18" charset="0"/>
+                <a:cs typeface="Times New Roman" panose="02020603050405020304" pitchFamily="18" charset="0"/>
+              </a:rPr>
+              <a:t>Exemple</a:t>
+            </a:r>
+            <a:r>
+              <a:rPr kumimoji="0" lang="en-US" altLang="en-US" sz="2000" b="1" i="0" u="none" strike="noStrike" cap="none" normalizeH="0" baseline="0" dirty="0" smtClean="0">
+                <a:ln>
+                  <a:noFill/>
+                </a:ln>
+                <a:solidFill>
+                  <a:srgbClr val="0A0A0A"/>
+                </a:solidFill>
+                <a:effectLst/>
+                <a:latin typeface="Times New Roman" panose="02020603050405020304" pitchFamily="18" charset="0"/>
+                <a:cs typeface="Times New Roman" panose="02020603050405020304" pitchFamily="18" charset="0"/>
+              </a:rPr>
+              <a:t> avec les Streams</a:t>
+            </a:r>
+          </a:p>
+          <a:p>
+            <a:pPr marL="0" marR="0" lvl="0" indent="0" algn="l" defTabSz="914400" rtl="0" eaLnBrk="0" fontAlgn="base" latinLnBrk="0" hangingPunct="0">
+              <a:lnSpc>
+                <a:spcPct val="100000"/>
+              </a:lnSpc>
+              <a:spcBef>
+                <a:spcPct val="0"/>
+              </a:spcBef>
+              <a:spcAft>
+                <a:spcPct val="0"/>
+              </a:spcAft>
+              <a:buClrTx/>
+              <a:buSzTx/>
+              <a:buFontTx/>
+              <a:buNone/>
+              <a:tabLst/>
+            </a:pPr>
+            <a:endParaRPr kumimoji="0" lang="en-US" altLang="en-US" sz="2000" b="0" i="0" u="none" strike="noStrike" cap="none" normalizeH="0" baseline="0" dirty="0" smtClean="0">
+              <a:ln>
+                <a:noFill/>
+              </a:ln>
+              <a:solidFill>
+                <a:schemeClr val="tx1"/>
+              </a:solidFill>
+              <a:effectLst/>
+              <a:latin typeface="Times New Roman" panose="02020603050405020304" pitchFamily="18" charset="0"/>
+              <a:cs typeface="Times New Roman" panose="02020603050405020304" pitchFamily="18" charset="0"/>
+            </a:endParaRPr>
+          </a:p>
+          <a:p>
+            <a:pPr marL="0" marR="0" lvl="0" indent="0" algn="l" defTabSz="914400" rtl="0" eaLnBrk="0" fontAlgn="base" latinLnBrk="0" hangingPunct="0">
+              <a:lnSpc>
+                <a:spcPct val="100000"/>
+              </a:lnSpc>
+              <a:spcBef>
+                <a:spcPct val="0"/>
+              </a:spcBef>
+              <a:spcAft>
+                <a:spcPct val="0"/>
+              </a:spcAft>
+              <a:buClrTx/>
+              <a:buSzTx/>
+              <a:buFontTx/>
+              <a:buNone/>
+              <a:tabLst/>
+            </a:pPr>
+            <a:r>
+              <a:rPr kumimoji="0" lang="en-US" altLang="en-US" sz="2000" b="0" i="0" u="none" strike="noStrike" cap="none" normalizeH="0" baseline="0" dirty="0" smtClean="0">
+                <a:ln>
+                  <a:noFill/>
+                </a:ln>
+                <a:solidFill>
+                  <a:srgbClr val="0A0A0A"/>
+                </a:solidFill>
+                <a:effectLst/>
+                <a:latin typeface="Times New Roman" panose="02020603050405020304" pitchFamily="18" charset="0"/>
+                <a:cs typeface="Times New Roman" panose="02020603050405020304" pitchFamily="18" charset="0"/>
+              </a:rPr>
+              <a:t>Les lambdas </a:t>
+            </a:r>
+            <a:r>
+              <a:rPr kumimoji="0" lang="en-US" altLang="en-US" sz="2000" b="0" i="0" u="none" strike="noStrike" cap="none" normalizeH="0" baseline="0" dirty="0" err="1" smtClean="0">
+                <a:ln>
+                  <a:noFill/>
+                </a:ln>
+                <a:solidFill>
+                  <a:srgbClr val="0A0A0A"/>
+                </a:solidFill>
+                <a:effectLst/>
+                <a:latin typeface="Times New Roman" panose="02020603050405020304" pitchFamily="18" charset="0"/>
+                <a:cs typeface="Times New Roman" panose="02020603050405020304" pitchFamily="18" charset="0"/>
+              </a:rPr>
+              <a:t>révèlent</a:t>
+            </a:r>
+            <a:r>
+              <a:rPr kumimoji="0" lang="en-US" altLang="en-US" sz="2000" b="0" i="0" u="none" strike="noStrike" cap="none" normalizeH="0" baseline="0" dirty="0" smtClean="0">
+                <a:ln>
+                  <a:noFill/>
+                </a:ln>
+                <a:solidFill>
+                  <a:srgbClr val="0A0A0A"/>
+                </a:solidFill>
+                <a:effectLst/>
+                <a:latin typeface="Times New Roman" panose="02020603050405020304" pitchFamily="18" charset="0"/>
+                <a:cs typeface="Times New Roman" panose="02020603050405020304" pitchFamily="18" charset="0"/>
+              </a:rPr>
+              <a:t> tout </a:t>
+            </a:r>
+            <a:r>
+              <a:rPr kumimoji="0" lang="en-US" altLang="en-US" sz="2000" b="0" i="0" u="none" strike="noStrike" cap="none" normalizeH="0" baseline="0" dirty="0" err="1" smtClean="0">
+                <a:ln>
+                  <a:noFill/>
+                </a:ln>
+                <a:solidFill>
+                  <a:srgbClr val="0A0A0A"/>
+                </a:solidFill>
+                <a:effectLst/>
+                <a:latin typeface="Times New Roman" panose="02020603050405020304" pitchFamily="18" charset="0"/>
+                <a:cs typeface="Times New Roman" panose="02020603050405020304" pitchFamily="18" charset="0"/>
+              </a:rPr>
+              <a:t>leur</a:t>
+            </a:r>
+            <a:r>
+              <a:rPr kumimoji="0" lang="en-US" altLang="en-US" sz="2000" b="0" i="0" u="none" strike="noStrike" cap="none" normalizeH="0" baseline="0" dirty="0" smtClean="0">
+                <a:ln>
+                  <a:noFill/>
+                </a:ln>
+                <a:solidFill>
+                  <a:srgbClr val="0A0A0A"/>
+                </a:solidFill>
+                <a:effectLst/>
+                <a:latin typeface="Times New Roman" panose="02020603050405020304" pitchFamily="18" charset="0"/>
+                <a:cs typeface="Times New Roman" panose="02020603050405020304" pitchFamily="18" charset="0"/>
+              </a:rPr>
+              <a:t> </a:t>
+            </a:r>
+            <a:r>
+              <a:rPr kumimoji="0" lang="en-US" altLang="en-US" sz="2000" b="0" i="0" u="none" strike="noStrike" cap="none" normalizeH="0" baseline="0" dirty="0" err="1" smtClean="0">
+                <a:ln>
+                  <a:noFill/>
+                </a:ln>
+                <a:solidFill>
+                  <a:srgbClr val="0A0A0A"/>
+                </a:solidFill>
+                <a:effectLst/>
+                <a:latin typeface="Times New Roman" panose="02020603050405020304" pitchFamily="18" charset="0"/>
+                <a:cs typeface="Times New Roman" panose="02020603050405020304" pitchFamily="18" charset="0"/>
+              </a:rPr>
+              <a:t>potentiel</a:t>
+            </a:r>
+            <a:r>
+              <a:rPr kumimoji="0" lang="en-US" altLang="en-US" sz="2000" b="0" i="0" u="none" strike="noStrike" cap="none" normalizeH="0" baseline="0" dirty="0" smtClean="0">
+                <a:ln>
+                  <a:noFill/>
+                </a:ln>
+                <a:solidFill>
+                  <a:srgbClr val="0A0A0A"/>
+                </a:solidFill>
+                <a:effectLst/>
+                <a:latin typeface="Times New Roman" panose="02020603050405020304" pitchFamily="18" charset="0"/>
+                <a:cs typeface="Times New Roman" panose="02020603050405020304" pitchFamily="18" charset="0"/>
+              </a:rPr>
+              <a:t> avec </a:t>
+            </a:r>
+            <a:r>
+              <a:rPr kumimoji="0" lang="en-US" altLang="en-US" sz="2000" b="0" i="0" u="none" strike="noStrike" cap="none" normalizeH="0" baseline="0" dirty="0" err="1" smtClean="0">
+                <a:ln>
+                  <a:noFill/>
+                </a:ln>
+                <a:solidFill>
+                  <a:srgbClr val="0A0A0A"/>
+                </a:solidFill>
+                <a:effectLst/>
+                <a:latin typeface="Times New Roman" panose="02020603050405020304" pitchFamily="18" charset="0"/>
+                <a:cs typeface="Times New Roman" panose="02020603050405020304" pitchFamily="18" charset="0"/>
+              </a:rPr>
+              <a:t>l'API</a:t>
+            </a:r>
+            <a:r>
+              <a:rPr kumimoji="0" lang="en-US" altLang="en-US" sz="2000" b="0" i="0" u="none" strike="noStrike" cap="none" normalizeH="0" baseline="0" dirty="0" smtClean="0">
+                <a:ln>
+                  <a:noFill/>
+                </a:ln>
+                <a:solidFill>
+                  <a:srgbClr val="0A0A0A"/>
+                </a:solidFill>
+                <a:effectLst/>
+                <a:latin typeface="Times New Roman" panose="02020603050405020304" pitchFamily="18" charset="0"/>
+                <a:cs typeface="Times New Roman" panose="02020603050405020304" pitchFamily="18" charset="0"/>
+              </a:rPr>
+              <a:t> Stream pour </a:t>
+            </a:r>
+            <a:r>
+              <a:rPr kumimoji="0" lang="en-US" altLang="en-US" sz="2000" b="0" i="0" u="none" strike="noStrike" cap="none" normalizeH="0" baseline="0" dirty="0" err="1" smtClean="0">
+                <a:ln>
+                  <a:noFill/>
+                </a:ln>
+                <a:solidFill>
+                  <a:srgbClr val="0A0A0A"/>
+                </a:solidFill>
+                <a:effectLst/>
+                <a:latin typeface="Times New Roman" panose="02020603050405020304" pitchFamily="18" charset="0"/>
+                <a:cs typeface="Times New Roman" panose="02020603050405020304" pitchFamily="18" charset="0"/>
+              </a:rPr>
+              <a:t>manipuler</a:t>
+            </a:r>
+            <a:r>
+              <a:rPr kumimoji="0" lang="en-US" altLang="en-US" sz="2000" b="0" i="0" u="none" strike="noStrike" cap="none" normalizeH="0" baseline="0" dirty="0" smtClean="0">
+                <a:ln>
+                  <a:noFill/>
+                </a:ln>
+                <a:solidFill>
+                  <a:srgbClr val="0A0A0A"/>
+                </a:solidFill>
+                <a:effectLst/>
+                <a:latin typeface="Times New Roman" panose="02020603050405020304" pitchFamily="18" charset="0"/>
+                <a:cs typeface="Times New Roman" panose="02020603050405020304" pitchFamily="18" charset="0"/>
+              </a:rPr>
+              <a:t> des </a:t>
+            </a:r>
+            <a:r>
+              <a:rPr kumimoji="0" lang="en-US" altLang="en-US" sz="2000" b="0" i="0" u="none" strike="noStrike" cap="none" normalizeH="0" baseline="0" dirty="0" err="1" smtClean="0">
+                <a:ln>
+                  <a:noFill/>
+                </a:ln>
+                <a:solidFill>
+                  <a:srgbClr val="0A0A0A"/>
+                </a:solidFill>
+                <a:effectLst/>
+                <a:latin typeface="Times New Roman" panose="02020603050405020304" pitchFamily="18" charset="0"/>
+                <a:cs typeface="Times New Roman" panose="02020603050405020304" pitchFamily="18" charset="0"/>
+              </a:rPr>
+              <a:t>listes</a:t>
+            </a:r>
+            <a:r>
+              <a:rPr kumimoji="0" lang="en-US" altLang="en-US" sz="2000" b="0" i="0" u="none" strike="noStrike" cap="none" normalizeH="0" baseline="0" dirty="0" smtClean="0">
+                <a:ln>
+                  <a:noFill/>
+                </a:ln>
+                <a:solidFill>
+                  <a:srgbClr val="0A0A0A"/>
+                </a:solidFill>
+                <a:effectLst/>
+                <a:latin typeface="Times New Roman" panose="02020603050405020304" pitchFamily="18" charset="0"/>
+                <a:cs typeface="Times New Roman" panose="02020603050405020304" pitchFamily="18" charset="0"/>
+              </a:rPr>
+              <a:t> </a:t>
+            </a:r>
+            <a:endParaRPr kumimoji="0" lang="en-US" altLang="en-US" sz="2000" b="0" i="0" u="none" strike="noStrike" cap="none" normalizeH="0" baseline="0" dirty="0" smtClean="0">
+              <a:ln>
+                <a:noFill/>
+              </a:ln>
+              <a:solidFill>
+                <a:schemeClr val="tx1"/>
+              </a:solidFill>
+              <a:effectLst/>
+              <a:latin typeface="Times New Roman" panose="02020603050405020304" pitchFamily="18" charset="0"/>
+              <a:cs typeface="Times New Roman" panose="02020603050405020304" pitchFamily="18" charset="0"/>
+            </a:endParaRPr>
+          </a:p>
+          <a:p>
+            <a:pPr marL="0" marR="0" lvl="0" indent="0" algn="l" defTabSz="914400" rtl="0" eaLnBrk="0" fontAlgn="base" latinLnBrk="0" hangingPunct="0">
+              <a:lnSpc>
+                <a:spcPct val="100000"/>
+              </a:lnSpc>
+              <a:spcBef>
+                <a:spcPct val="0"/>
+              </a:spcBef>
+              <a:spcAft>
+                <a:spcPct val="0"/>
+              </a:spcAft>
+              <a:buClrTx/>
+              <a:buSzTx/>
+              <a:buFontTx/>
+              <a:buNone/>
+              <a:tabLst/>
+            </a:pPr>
+            <a:r>
+              <a:rPr kumimoji="0" lang="en-US" altLang="en-US" sz="2000" b="0" i="0" u="none" strike="noStrike" cap="none" normalizeH="0" baseline="0" dirty="0" smtClean="0">
+                <a:ln>
+                  <a:noFill/>
+                </a:ln>
+                <a:solidFill>
+                  <a:srgbClr val="0A0A0A"/>
+                </a:solidFill>
+                <a:effectLst/>
+                <a:latin typeface="Times New Roman" panose="02020603050405020304" pitchFamily="18" charset="0"/>
+                <a:cs typeface="Times New Roman" panose="02020603050405020304" pitchFamily="18" charset="0"/>
+              </a:rPr>
+              <a:t>Java</a:t>
+            </a:r>
+          </a:p>
+          <a:p>
+            <a:pPr marL="0" marR="0" lvl="0" indent="0" algn="l" defTabSz="914400" rtl="0" eaLnBrk="0" fontAlgn="base" latinLnBrk="0" hangingPunct="0">
+              <a:lnSpc>
+                <a:spcPct val="100000"/>
+              </a:lnSpc>
+              <a:spcBef>
+                <a:spcPct val="0"/>
+              </a:spcBef>
+              <a:spcAft>
+                <a:spcPct val="0"/>
+              </a:spcAft>
+              <a:buClrTx/>
+              <a:buSzTx/>
+              <a:buFontTx/>
+              <a:buNone/>
+              <a:tabLst/>
+            </a:pPr>
+            <a:endParaRPr lang="en-US" altLang="en-US" sz="2000" dirty="0">
+              <a:solidFill>
+                <a:srgbClr val="0A0A0A"/>
+              </a:solidFill>
+              <a:latin typeface="Times New Roman" panose="02020603050405020304" pitchFamily="18" charset="0"/>
+              <a:cs typeface="Times New Roman" panose="02020603050405020304" pitchFamily="18" charset="0"/>
+            </a:endParaRPr>
+          </a:p>
+          <a:p>
+            <a:pPr lvl="0"/>
+            <a:r>
+              <a:rPr lang="en-US" altLang="en-US" sz="2000" dirty="0">
+                <a:solidFill>
+                  <a:srgbClr val="0A0A0A"/>
+                </a:solidFill>
+                <a:latin typeface="Times New Roman" panose="02020603050405020304" pitchFamily="18" charset="0"/>
+                <a:cs typeface="Times New Roman" panose="02020603050405020304" pitchFamily="18" charset="0"/>
+              </a:rPr>
+              <a:t>List&lt;String&gt; </a:t>
+            </a:r>
+            <a:r>
+              <a:rPr lang="en-US" altLang="en-US" sz="2000" dirty="0" smtClean="0">
+                <a:solidFill>
+                  <a:srgbClr val="0A0A0A"/>
+                </a:solidFill>
+                <a:latin typeface="Times New Roman" panose="02020603050405020304" pitchFamily="18" charset="0"/>
+                <a:cs typeface="Times New Roman" panose="02020603050405020304" pitchFamily="18" charset="0"/>
+              </a:rPr>
+              <a:t>     </a:t>
+            </a:r>
+            <a:r>
+              <a:rPr lang="en-US" altLang="en-US" sz="2000" dirty="0" err="1" smtClean="0">
+                <a:solidFill>
+                  <a:srgbClr val="0A0A0A"/>
+                </a:solidFill>
+                <a:latin typeface="Times New Roman" panose="02020603050405020304" pitchFamily="18" charset="0"/>
+                <a:cs typeface="Times New Roman" panose="02020603050405020304" pitchFamily="18" charset="0"/>
+              </a:rPr>
+              <a:t>noms</a:t>
+            </a:r>
+            <a:r>
+              <a:rPr lang="en-US" altLang="en-US" sz="2000" dirty="0" smtClean="0">
+                <a:solidFill>
+                  <a:srgbClr val="0A0A0A"/>
+                </a:solidFill>
+                <a:latin typeface="Times New Roman" panose="02020603050405020304" pitchFamily="18" charset="0"/>
+                <a:cs typeface="Times New Roman" panose="02020603050405020304" pitchFamily="18" charset="0"/>
+              </a:rPr>
+              <a:t> </a:t>
+            </a:r>
+            <a:r>
+              <a:rPr lang="en-US" altLang="en-US" sz="2000" dirty="0">
+                <a:solidFill>
+                  <a:srgbClr val="0A0A0A"/>
+                </a:solidFill>
+                <a:latin typeface="Times New Roman" panose="02020603050405020304" pitchFamily="18" charset="0"/>
+                <a:cs typeface="Times New Roman" panose="02020603050405020304" pitchFamily="18" charset="0"/>
+              </a:rPr>
+              <a:t>= </a:t>
+            </a:r>
+            <a:r>
+              <a:rPr lang="en-US" altLang="en-US" sz="2000" dirty="0" err="1">
+                <a:solidFill>
+                  <a:srgbClr val="0A0A0A"/>
+                </a:solidFill>
+                <a:latin typeface="Times New Roman" panose="02020603050405020304" pitchFamily="18" charset="0"/>
+                <a:cs typeface="Times New Roman" panose="02020603050405020304" pitchFamily="18" charset="0"/>
+              </a:rPr>
+              <a:t>Arrays.asList</a:t>
+            </a:r>
+            <a:r>
+              <a:rPr lang="en-US" altLang="en-US" sz="2000" dirty="0">
+                <a:solidFill>
+                  <a:srgbClr val="0A0A0A"/>
+                </a:solidFill>
+                <a:latin typeface="Times New Roman" panose="02020603050405020304" pitchFamily="18" charset="0"/>
+                <a:cs typeface="Times New Roman" panose="02020603050405020304" pitchFamily="18" charset="0"/>
+              </a:rPr>
+              <a:t>("Alice", "Bob", "Charlie</a:t>
+            </a:r>
+            <a:r>
+              <a:rPr lang="en-US" altLang="en-US" sz="2000" dirty="0" smtClean="0">
+                <a:solidFill>
+                  <a:srgbClr val="0A0A0A"/>
+                </a:solidFill>
+                <a:latin typeface="Times New Roman" panose="02020603050405020304" pitchFamily="18" charset="0"/>
+                <a:cs typeface="Times New Roman" panose="02020603050405020304" pitchFamily="18" charset="0"/>
+              </a:rPr>
+              <a:t>");</a:t>
+            </a:r>
+          </a:p>
+          <a:p>
+            <a:pPr lvl="0"/>
+            <a:endParaRPr lang="en-US" altLang="en-US" sz="2000" dirty="0" smtClean="0">
+              <a:solidFill>
+                <a:srgbClr val="0A0A0A"/>
+              </a:solidFill>
+              <a:latin typeface="Times New Roman" panose="02020603050405020304" pitchFamily="18" charset="0"/>
+              <a:cs typeface="Times New Roman" panose="02020603050405020304" pitchFamily="18" charset="0"/>
+            </a:endParaRPr>
+          </a:p>
+          <a:p>
+            <a:pPr lvl="0"/>
+            <a:r>
+              <a:rPr lang="en-US" altLang="en-US" sz="2000" b="1" dirty="0" err="1" smtClean="0">
+                <a:solidFill>
+                  <a:srgbClr val="0A0A0A"/>
+                </a:solidFill>
+                <a:latin typeface="Times New Roman" panose="02020603050405020304" pitchFamily="18" charset="0"/>
+                <a:cs typeface="Times New Roman" panose="02020603050405020304" pitchFamily="18" charset="0"/>
+              </a:rPr>
+              <a:t>noms.stream</a:t>
+            </a:r>
+            <a:r>
+              <a:rPr lang="en-US" altLang="en-US" sz="2000" b="1" dirty="0">
+                <a:solidFill>
+                  <a:srgbClr val="0A0A0A"/>
+                </a:solidFill>
+                <a:latin typeface="Times New Roman" panose="02020603050405020304" pitchFamily="18" charset="0"/>
+                <a:cs typeface="Times New Roman" panose="02020603050405020304" pitchFamily="18" charset="0"/>
+              </a:rPr>
+              <a:t>() </a:t>
+            </a:r>
+            <a:r>
+              <a:rPr lang="en-US" altLang="en-US" sz="2000" b="1" dirty="0" smtClean="0">
+                <a:solidFill>
+                  <a:srgbClr val="0A0A0A"/>
+                </a:solidFill>
+                <a:latin typeface="Times New Roman" panose="02020603050405020304" pitchFamily="18" charset="0"/>
+                <a:cs typeface="Times New Roman" panose="02020603050405020304" pitchFamily="18" charset="0"/>
+              </a:rPr>
+              <a:t> </a:t>
+            </a:r>
+            <a:r>
+              <a:rPr lang="en-US" altLang="en-US" sz="2000" b="1" dirty="0">
+                <a:solidFill>
+                  <a:srgbClr val="0A0A0A"/>
+                </a:solidFill>
+                <a:latin typeface="Times New Roman" panose="02020603050405020304" pitchFamily="18" charset="0"/>
+                <a:cs typeface="Times New Roman" panose="02020603050405020304" pitchFamily="18" charset="0"/>
+              </a:rPr>
+              <a:t>.filter(nom -&gt; </a:t>
+            </a:r>
+            <a:r>
+              <a:rPr lang="en-US" altLang="en-US" sz="2000" b="1" dirty="0" err="1">
+                <a:solidFill>
+                  <a:srgbClr val="0A0A0A"/>
+                </a:solidFill>
+                <a:latin typeface="Times New Roman" panose="02020603050405020304" pitchFamily="18" charset="0"/>
+                <a:cs typeface="Times New Roman" panose="02020603050405020304" pitchFamily="18" charset="0"/>
+              </a:rPr>
+              <a:t>nom.startsWith</a:t>
+            </a:r>
+            <a:r>
+              <a:rPr lang="en-US" altLang="en-US" sz="2000" b="1" dirty="0">
+                <a:solidFill>
+                  <a:srgbClr val="0A0A0A"/>
+                </a:solidFill>
+                <a:latin typeface="Times New Roman" panose="02020603050405020304" pitchFamily="18" charset="0"/>
+                <a:cs typeface="Times New Roman" panose="02020603050405020304" pitchFamily="18" charset="0"/>
+              </a:rPr>
+              <a:t>("A</a:t>
+            </a:r>
+            <a:r>
+              <a:rPr lang="en-US" altLang="en-US" sz="2000" b="1" dirty="0" smtClean="0">
+                <a:solidFill>
+                  <a:srgbClr val="0A0A0A"/>
+                </a:solidFill>
+                <a:latin typeface="Times New Roman" panose="02020603050405020304" pitchFamily="18" charset="0"/>
+                <a:cs typeface="Times New Roman" panose="02020603050405020304" pitchFamily="18" charset="0"/>
+              </a:rPr>
+              <a:t>")).</a:t>
+            </a:r>
+            <a:r>
+              <a:rPr lang="en-US" altLang="en-US" sz="2000" b="1" dirty="0">
+                <a:solidFill>
+                  <a:srgbClr val="0A0A0A"/>
+                </a:solidFill>
+                <a:latin typeface="Times New Roman" panose="02020603050405020304" pitchFamily="18" charset="0"/>
+                <a:cs typeface="Times New Roman" panose="02020603050405020304" pitchFamily="18" charset="0"/>
+              </a:rPr>
+              <a:t>map(nom -&gt; </a:t>
+            </a:r>
+            <a:r>
+              <a:rPr lang="en-US" altLang="en-US" sz="2000" b="1" dirty="0" err="1">
+                <a:solidFill>
+                  <a:srgbClr val="0A0A0A"/>
+                </a:solidFill>
+                <a:latin typeface="Times New Roman" panose="02020603050405020304" pitchFamily="18" charset="0"/>
+                <a:cs typeface="Times New Roman" panose="02020603050405020304" pitchFamily="18" charset="0"/>
+              </a:rPr>
+              <a:t>nom.toUpperCase</a:t>
+            </a:r>
+            <a:r>
+              <a:rPr lang="en-US" altLang="en-US" sz="2000" b="1" dirty="0" smtClean="0">
+                <a:solidFill>
+                  <a:srgbClr val="0A0A0A"/>
+                </a:solidFill>
+                <a:latin typeface="Times New Roman" panose="02020603050405020304" pitchFamily="18" charset="0"/>
+                <a:cs typeface="Times New Roman" panose="02020603050405020304" pitchFamily="18" charset="0"/>
+              </a:rPr>
+              <a:t>()).</a:t>
+            </a:r>
+            <a:r>
+              <a:rPr lang="en-US" altLang="en-US" sz="2000" b="1" dirty="0" err="1">
+                <a:solidFill>
+                  <a:srgbClr val="0A0A0A"/>
+                </a:solidFill>
+                <a:latin typeface="Times New Roman" panose="02020603050405020304" pitchFamily="18" charset="0"/>
+                <a:cs typeface="Times New Roman" panose="02020603050405020304" pitchFamily="18" charset="0"/>
+              </a:rPr>
+              <a:t>forEach</a:t>
+            </a:r>
+            <a:r>
+              <a:rPr lang="en-US" altLang="en-US" sz="2000" b="1" dirty="0">
+                <a:solidFill>
+                  <a:srgbClr val="0A0A0A"/>
+                </a:solidFill>
+                <a:latin typeface="Times New Roman" panose="02020603050405020304" pitchFamily="18" charset="0"/>
+                <a:cs typeface="Times New Roman" panose="02020603050405020304" pitchFamily="18" charset="0"/>
+              </a:rPr>
+              <a:t>(</a:t>
+            </a:r>
+            <a:r>
+              <a:rPr lang="en-US" altLang="en-US" sz="2000" b="1" dirty="0" err="1">
+                <a:solidFill>
+                  <a:srgbClr val="0A0A0A"/>
+                </a:solidFill>
+                <a:latin typeface="Times New Roman" panose="02020603050405020304" pitchFamily="18" charset="0"/>
+                <a:cs typeface="Times New Roman" panose="02020603050405020304" pitchFamily="18" charset="0"/>
+              </a:rPr>
+              <a:t>System.out</a:t>
+            </a:r>
+            <a:r>
+              <a:rPr lang="en-US" altLang="en-US" sz="2000" b="1" dirty="0">
+                <a:solidFill>
+                  <a:srgbClr val="0A0A0A"/>
+                </a:solidFill>
+                <a:latin typeface="Times New Roman" panose="02020603050405020304" pitchFamily="18" charset="0"/>
+                <a:cs typeface="Times New Roman" panose="02020603050405020304" pitchFamily="18" charset="0"/>
+              </a:rPr>
+              <a:t>::</a:t>
+            </a:r>
+            <a:r>
+              <a:rPr lang="en-US" altLang="en-US" sz="2000" b="1" dirty="0" err="1">
+                <a:solidFill>
+                  <a:srgbClr val="0A0A0A"/>
+                </a:solidFill>
+                <a:latin typeface="Times New Roman" panose="02020603050405020304" pitchFamily="18" charset="0"/>
+                <a:cs typeface="Times New Roman" panose="02020603050405020304" pitchFamily="18" charset="0"/>
+              </a:rPr>
+              <a:t>println</a:t>
+            </a:r>
+            <a:r>
+              <a:rPr lang="en-US" altLang="en-US" sz="2000" b="1" dirty="0">
+                <a:solidFill>
+                  <a:srgbClr val="0A0A0A"/>
+                </a:solidFill>
+                <a:latin typeface="Times New Roman" panose="02020603050405020304" pitchFamily="18" charset="0"/>
+                <a:cs typeface="Times New Roman" panose="02020603050405020304" pitchFamily="18" charset="0"/>
+              </a:rPr>
+              <a:t>);      </a:t>
+            </a:r>
+            <a:endParaRPr kumimoji="0" lang="en-US" altLang="en-US" sz="2000" b="1" i="0" u="none" strike="noStrike" cap="none" normalizeH="0" baseline="0" dirty="0" smtClean="0">
+              <a:ln>
+                <a:noFill/>
+              </a:ln>
+              <a:solidFill>
+                <a:srgbClr val="0A0A0A"/>
+              </a:solidFill>
+              <a:effectLst/>
+              <a:latin typeface="Times New Roman" panose="02020603050405020304" pitchFamily="18" charset="0"/>
+              <a:cs typeface="Times New Roman" panose="02020603050405020304" pitchFamily="18" charset="0"/>
+            </a:endParaRPr>
+          </a:p>
+        </p:txBody>
+      </p:sp>
+      <p:pic>
+        <p:nvPicPr>
+          <p:cNvPr id="4" name="Image 5">
+            <a:extLst>
+              <a:ext uri="{FF2B5EF4-FFF2-40B4-BE49-F238E27FC236}">
+                <a16:creationId xmlns:a16="http://schemas.microsoft.com/office/drawing/2014/main" id="{AC68D4D3-B500-4716-B843-F3048BF30CA2}"/>
+              </a:ext>
+            </a:extLst>
+          </p:cNvPr>
+          <p:cNvPicPr>
+            <a:picLocks noChangeAspect="1"/>
+          </p:cNvPicPr>
+          <p:nvPr/>
+        </p:nvPicPr>
+        <p:blipFill>
+          <a:blip r:embed="rId2" cstate="print">
+            <a:extLst>
+              <a:ext uri="{28A0092B-C50C-407E-A947-70E740481C1C}">
+                <a14:useLocalDpi xmlns:a14="http://schemas.microsoft.com/office/drawing/2010/main" val="0"/>
+              </a:ext>
+            </a:extLst>
+          </a:blip>
+          <a:stretch>
+            <a:fillRect/>
+          </a:stretch>
+        </p:blipFill>
         <p:spPr>
           <a:xfrm>
-            <a:off x="179512" y="1268760"/>
-            <a:ext cx="8784976" cy="923330"/>
+            <a:off x="7596336" y="6307338"/>
+            <a:ext cx="1296144" cy="515307"/>
           </a:xfrm>
           <a:prstGeom prst="rect">
             <a:avLst/>
           </a:prstGeom>
         </p:spPr>
-        <p:txBody>
-          <a:bodyPr wrap="square">
-            <a:spAutoFit/>
-          </a:bodyPr>
-          <a:lstStyle/>
-          <a:p>
-            <a:pPr algn="just"/>
-            <a:r>
-              <a:rPr lang="fr-CI" dirty="0"/>
-              <a:t>Une </a:t>
-            </a:r>
-            <a:r>
-              <a:rPr lang="fr-CI" b="1" dirty="0"/>
-              <a:t>exception</a:t>
-            </a:r>
-            <a:r>
-              <a:rPr lang="fr-CI" dirty="0"/>
-              <a:t> est un événement anormal qui interrompt le déroulement normal d'un programme. Java fournit un mécanisme pour les capturer et les gérer proprement.</a:t>
-            </a:r>
-            <a:endParaRPr lang="en-US" dirty="0"/>
-          </a:p>
-        </p:txBody>
-      </p:sp>
+      </p:pic>
     </p:spTree>
     <p:extLst>
       <p:ext uri="{BB962C8B-B14F-4D97-AF65-F5344CB8AC3E}">
-        <p14:creationId xmlns:p14="http://schemas.microsoft.com/office/powerpoint/2010/main" val="1055937304"/>
+        <p14:creationId xmlns:p14="http://schemas.microsoft.com/office/powerpoint/2010/main" val="2149428995"/>
       </p:ext>
     </p:extLst>
   </p:cSld>
@@ -6690,7 +10727,7 @@
         <p:spPr>
           <a:xfrm>
             <a:off x="827584" y="332656"/>
-            <a:ext cx="2783647" cy="461665"/>
+            <a:ext cx="5878532" cy="461665"/>
           </a:xfrm>
           <a:prstGeom prst="rect">
             <a:avLst/>
@@ -6708,7 +10745,23 @@
                   <a:srgbClr val="FF0000"/>
                 </a:solidFill>
               </a:rPr>
-              <a:t>Tour d’horizon d’un IDE</a:t>
+              <a:t>III. Programmation fonctionnelle (</a:t>
+            </a:r>
+            <a:r>
+              <a:rPr lang="fr-CI" b="1" dirty="0" err="1" smtClean="0">
+                <a:solidFill>
+                  <a:srgbClr val="FF0000"/>
+                </a:solidFill>
+              </a:rPr>
+              <a:t>lamda</a:t>
+            </a:r>
+            <a:r>
+              <a:rPr lang="fr-CI" b="1" dirty="0" smtClean="0">
+                <a:solidFill>
+                  <a:srgbClr val="FF0000"/>
+                </a:solidFill>
+              </a:rPr>
+              <a:t> expression)</a:t>
             </a:r>
             <a:endParaRPr lang="en-US" sz="2400" dirty="0">
               <a:solidFill>
@@ -6718,39 +10771,1110 @@
           </a:p>
         </p:txBody>
       </p:sp>
+      <p:graphicFrame>
+        <p:nvGraphicFramePr>
+          <p:cNvPr id="4" name="Table 3"/>
+          <p:cNvGraphicFramePr>
+            <a:graphicFrameLocks noGrp="1"/>
+          </p:cNvGraphicFramePr>
+          <p:nvPr>
+            <p:extLst>
+              <p:ext uri="{D42A27DB-BD31-4B8C-83A1-F6EECF244321}">
+                <p14:modId xmlns:p14="http://schemas.microsoft.com/office/powerpoint/2010/main" val="4266263096"/>
+              </p:ext>
+            </p:extLst>
+          </p:nvPr>
+        </p:nvGraphicFramePr>
+        <p:xfrm>
+          <a:off x="1331640" y="1654017"/>
+          <a:ext cx="6696748" cy="3987540"/>
+        </p:xfrm>
+        <a:graphic>
+          <a:graphicData uri="http://schemas.openxmlformats.org/drawingml/2006/table">
+            <a:tbl>
+              <a:tblPr/>
+              <a:tblGrid>
+                <a:gridCol w="1674187">
+                  <a:extLst>
+                    <a:ext uri="{9D8B030D-6E8A-4147-A177-3AD203B41FA5}">
+                      <a16:colId xmlns:a16="http://schemas.microsoft.com/office/drawing/2014/main" val="3886729575"/>
+                    </a:ext>
+                  </a:extLst>
+                </a:gridCol>
+                <a:gridCol w="1674187">
+                  <a:extLst>
+                    <a:ext uri="{9D8B030D-6E8A-4147-A177-3AD203B41FA5}">
+                      <a16:colId xmlns:a16="http://schemas.microsoft.com/office/drawing/2014/main" val="647650561"/>
+                    </a:ext>
+                  </a:extLst>
+                </a:gridCol>
+                <a:gridCol w="1674187">
+                  <a:extLst>
+                    <a:ext uri="{9D8B030D-6E8A-4147-A177-3AD203B41FA5}">
+                      <a16:colId xmlns:a16="http://schemas.microsoft.com/office/drawing/2014/main" val="1767356684"/>
+                    </a:ext>
+                  </a:extLst>
+                </a:gridCol>
+                <a:gridCol w="1674187">
+                  <a:extLst>
+                    <a:ext uri="{9D8B030D-6E8A-4147-A177-3AD203B41FA5}">
+                      <a16:colId xmlns:a16="http://schemas.microsoft.com/office/drawing/2014/main" val="2444873677"/>
+                    </a:ext>
+                  </a:extLst>
+                </a:gridCol>
+              </a:tblGrid>
+              <a:tr h="530809">
+                <a:tc>
+                  <a:txBody>
+                    <a:bodyPr/>
+                    <a:lstStyle/>
+                    <a:p>
+                      <a:r>
+                        <a:rPr lang="en-US" sz="1500" b="1" dirty="0">
+                          <a:solidFill>
+                            <a:srgbClr val="000000"/>
+                          </a:solidFill>
+                          <a:effectLst/>
+                        </a:rPr>
+                        <a:t>Interface</a:t>
+                      </a:r>
+                    </a:p>
+                  </a:txBody>
+                  <a:tcPr marL="70127" marR="70127" marT="32366" marB="32366" anchor="ctr">
+                    <a:lnL w="6350" cap="flat" cmpd="sng" algn="ctr">
+                      <a:solidFill>
+                        <a:srgbClr val="D6D6D6"/>
+                      </a:solidFill>
+                      <a:prstDash val="solid"/>
+                      <a:round/>
+                      <a:headEnd type="none" w="med" len="med"/>
+                      <a:tailEnd type="none" w="med" len="med"/>
+                    </a:lnL>
+                    <a:lnR w="6350" cap="flat" cmpd="sng" algn="ctr">
+                      <a:solidFill>
+                        <a:srgbClr val="D6D6D6"/>
+                      </a:solidFill>
+                      <a:prstDash val="solid"/>
+                      <a:round/>
+                      <a:headEnd type="none" w="med" len="med"/>
+                      <a:tailEnd type="none" w="med" len="med"/>
+                    </a:lnR>
+                    <a:lnT w="6350" cap="flat" cmpd="sng" algn="ctr">
+                      <a:solidFill>
+                        <a:srgbClr val="D6D6D6"/>
+                      </a:solidFill>
+                      <a:prstDash val="solid"/>
+                      <a:round/>
+                      <a:headEnd type="none" w="med" len="med"/>
+                      <a:tailEnd type="none" w="med" len="med"/>
+                    </a:lnT>
+                    <a:lnB w="6350" cap="flat" cmpd="sng" algn="ctr">
+                      <a:solidFill>
+                        <a:srgbClr val="D6D6D6"/>
+                      </a:solidFill>
+                      <a:prstDash val="solid"/>
+                      <a:round/>
+                      <a:headEnd type="none" w="med" len="med"/>
+                      <a:tailEnd type="none" w="med" len="med"/>
+                    </a:lnB>
+                    <a:solidFill>
+                      <a:srgbClr val="FFFFFF"/>
+                    </a:solidFill>
+                  </a:tcPr>
+                </a:tc>
+                <a:tc>
+                  <a:txBody>
+                    <a:bodyPr/>
+                    <a:lstStyle/>
+                    <a:p>
+                      <a:r>
+                        <a:rPr lang="en-US" sz="1500" b="1">
+                          <a:solidFill>
+                            <a:srgbClr val="000000"/>
+                          </a:solidFill>
+                          <a:effectLst/>
+                        </a:rPr>
+                        <a:t>Entrée</a:t>
+                      </a:r>
+                    </a:p>
+                  </a:txBody>
+                  <a:tcPr marL="70127" marR="70127" marT="32366" marB="32366" anchor="ctr">
+                    <a:lnL w="6350" cap="flat" cmpd="sng" algn="ctr">
+                      <a:solidFill>
+                        <a:srgbClr val="D6D6D6"/>
+                      </a:solidFill>
+                      <a:prstDash val="solid"/>
+                      <a:round/>
+                      <a:headEnd type="none" w="med" len="med"/>
+                      <a:tailEnd type="none" w="med" len="med"/>
+                    </a:lnL>
+                    <a:lnR w="6350" cap="flat" cmpd="sng" algn="ctr">
+                      <a:solidFill>
+                        <a:srgbClr val="D6D6D6"/>
+                      </a:solidFill>
+                      <a:prstDash val="solid"/>
+                      <a:round/>
+                      <a:headEnd type="none" w="med" len="med"/>
+                      <a:tailEnd type="none" w="med" len="med"/>
+                    </a:lnR>
+                    <a:lnT w="6350" cap="flat" cmpd="sng" algn="ctr">
+                      <a:solidFill>
+                        <a:srgbClr val="D6D6D6"/>
+                      </a:solidFill>
+                      <a:prstDash val="solid"/>
+                      <a:round/>
+                      <a:headEnd type="none" w="med" len="med"/>
+                      <a:tailEnd type="none" w="med" len="med"/>
+                    </a:lnT>
+                    <a:lnB w="6350" cap="flat" cmpd="sng" algn="ctr">
+                      <a:solidFill>
+                        <a:srgbClr val="D6D6D6"/>
+                      </a:solidFill>
+                      <a:prstDash val="solid"/>
+                      <a:round/>
+                      <a:headEnd type="none" w="med" len="med"/>
+                      <a:tailEnd type="none" w="med" len="med"/>
+                    </a:lnB>
+                    <a:solidFill>
+                      <a:srgbClr val="FFFFFF"/>
+                    </a:solidFill>
+                  </a:tcPr>
+                </a:tc>
+                <a:tc>
+                  <a:txBody>
+                    <a:bodyPr/>
+                    <a:lstStyle/>
+                    <a:p>
+                      <a:r>
+                        <a:rPr lang="en-US" sz="1500" b="1">
+                          <a:solidFill>
+                            <a:srgbClr val="000000"/>
+                          </a:solidFill>
+                          <a:effectLst/>
+                        </a:rPr>
+                        <a:t>Sortie</a:t>
+                      </a:r>
+                    </a:p>
+                  </a:txBody>
+                  <a:tcPr marL="70127" marR="70127" marT="32366" marB="32366" anchor="ctr">
+                    <a:lnL w="6350" cap="flat" cmpd="sng" algn="ctr">
+                      <a:solidFill>
+                        <a:srgbClr val="D6D6D6"/>
+                      </a:solidFill>
+                      <a:prstDash val="solid"/>
+                      <a:round/>
+                      <a:headEnd type="none" w="med" len="med"/>
+                      <a:tailEnd type="none" w="med" len="med"/>
+                    </a:lnL>
+                    <a:lnR w="6350" cap="flat" cmpd="sng" algn="ctr">
+                      <a:solidFill>
+                        <a:srgbClr val="D6D6D6"/>
+                      </a:solidFill>
+                      <a:prstDash val="solid"/>
+                      <a:round/>
+                      <a:headEnd type="none" w="med" len="med"/>
+                      <a:tailEnd type="none" w="med" len="med"/>
+                    </a:lnR>
+                    <a:lnT w="6350" cap="flat" cmpd="sng" algn="ctr">
+                      <a:solidFill>
+                        <a:srgbClr val="D6D6D6"/>
+                      </a:solidFill>
+                      <a:prstDash val="solid"/>
+                      <a:round/>
+                      <a:headEnd type="none" w="med" len="med"/>
+                      <a:tailEnd type="none" w="med" len="med"/>
+                    </a:lnT>
+                    <a:lnB w="6350" cap="flat" cmpd="sng" algn="ctr">
+                      <a:solidFill>
+                        <a:srgbClr val="D6D6D6"/>
+                      </a:solidFill>
+                      <a:prstDash val="solid"/>
+                      <a:round/>
+                      <a:headEnd type="none" w="med" len="med"/>
+                      <a:tailEnd type="none" w="med" len="med"/>
+                    </a:lnB>
+                    <a:solidFill>
+                      <a:srgbClr val="FFFFFF"/>
+                    </a:solidFill>
+                  </a:tcPr>
+                </a:tc>
+                <a:tc>
+                  <a:txBody>
+                    <a:bodyPr/>
+                    <a:lstStyle/>
+                    <a:p>
+                      <a:r>
+                        <a:rPr lang="en-US" sz="1500" b="1">
+                          <a:solidFill>
+                            <a:srgbClr val="000000"/>
+                          </a:solidFill>
+                          <a:effectLst/>
+                        </a:rPr>
+                        <a:t>Usage</a:t>
+                      </a:r>
+                    </a:p>
+                  </a:txBody>
+                  <a:tcPr marL="70127" marR="70127" marT="32366" marB="32366" anchor="ctr">
+                    <a:lnL w="6350" cap="flat" cmpd="sng" algn="ctr">
+                      <a:solidFill>
+                        <a:srgbClr val="D6D6D6"/>
+                      </a:solidFill>
+                      <a:prstDash val="solid"/>
+                      <a:round/>
+                      <a:headEnd type="none" w="med" len="med"/>
+                      <a:tailEnd type="none" w="med" len="med"/>
+                    </a:lnL>
+                    <a:lnR w="6350" cap="flat" cmpd="sng" algn="ctr">
+                      <a:solidFill>
+                        <a:srgbClr val="D6D6D6"/>
+                      </a:solidFill>
+                      <a:prstDash val="solid"/>
+                      <a:round/>
+                      <a:headEnd type="none" w="med" len="med"/>
+                      <a:tailEnd type="none" w="med" len="med"/>
+                    </a:lnR>
+                    <a:lnT w="6350" cap="flat" cmpd="sng" algn="ctr">
+                      <a:solidFill>
+                        <a:srgbClr val="D6D6D6"/>
+                      </a:solidFill>
+                      <a:prstDash val="solid"/>
+                      <a:round/>
+                      <a:headEnd type="none" w="med" len="med"/>
+                      <a:tailEnd type="none" w="med" len="med"/>
+                    </a:lnT>
+                    <a:lnB w="6350" cap="flat" cmpd="sng" algn="ctr">
+                      <a:solidFill>
+                        <a:srgbClr val="D6D6D6"/>
+                      </a:solidFill>
+                      <a:prstDash val="solid"/>
+                      <a:round/>
+                      <a:headEnd type="none" w="med" len="med"/>
+                      <a:tailEnd type="none" w="med" len="med"/>
+                    </a:lnB>
+                    <a:solidFill>
+                      <a:srgbClr val="FFFFFF"/>
+                    </a:solidFill>
+                  </a:tcPr>
+                </a:tc>
+                <a:extLst>
+                  <a:ext uri="{0D108BD9-81ED-4DB2-BD59-A6C34878D82A}">
+                    <a16:rowId xmlns:a16="http://schemas.microsoft.com/office/drawing/2014/main" val="347353883"/>
+                  </a:ext>
+                </a:extLst>
+              </a:tr>
+              <a:tr h="996885">
+                <a:tc>
+                  <a:txBody>
+                    <a:bodyPr/>
+                    <a:lstStyle/>
+                    <a:p>
+                      <a:r>
+                        <a:rPr lang="en-US" sz="1500" b="1" dirty="0">
+                          <a:effectLst/>
+                        </a:rPr>
+                        <a:t>Predicate&lt;T&gt;</a:t>
+                      </a:r>
+                    </a:p>
+                  </a:txBody>
+                  <a:tcPr marL="70127" marR="70127" marT="32366" marB="32366" anchor="ctr">
+                    <a:lnL w="6350" cap="flat" cmpd="sng" algn="ctr">
+                      <a:solidFill>
+                        <a:srgbClr val="D6D6D6"/>
+                      </a:solidFill>
+                      <a:prstDash val="solid"/>
+                      <a:round/>
+                      <a:headEnd type="none" w="med" len="med"/>
+                      <a:tailEnd type="none" w="med" len="med"/>
+                    </a:lnL>
+                    <a:lnR w="6350" cap="flat" cmpd="sng" algn="ctr">
+                      <a:solidFill>
+                        <a:srgbClr val="D6D6D6"/>
+                      </a:solidFill>
+                      <a:prstDash val="solid"/>
+                      <a:round/>
+                      <a:headEnd type="none" w="med" len="med"/>
+                      <a:tailEnd type="none" w="med" len="med"/>
+                    </a:lnR>
+                    <a:lnT w="6350" cap="flat" cmpd="sng" algn="ctr">
+                      <a:solidFill>
+                        <a:srgbClr val="D6D6D6"/>
+                      </a:solidFill>
+                      <a:prstDash val="solid"/>
+                      <a:round/>
+                      <a:headEnd type="none" w="med" len="med"/>
+                      <a:tailEnd type="none" w="med" len="med"/>
+                    </a:lnT>
+                    <a:lnB w="6350" cap="flat" cmpd="sng" algn="ctr">
+                      <a:solidFill>
+                        <a:srgbClr val="D6D6D6"/>
+                      </a:solidFill>
+                      <a:prstDash val="solid"/>
+                      <a:round/>
+                      <a:headEnd type="none" w="med" len="med"/>
+                      <a:tailEnd type="none" w="med" len="med"/>
+                    </a:lnB>
+                    <a:solidFill>
+                      <a:srgbClr val="FFFFFF"/>
+                    </a:solidFill>
+                  </a:tcPr>
+                </a:tc>
+                <a:tc>
+                  <a:txBody>
+                    <a:bodyPr/>
+                    <a:lstStyle/>
+                    <a:p>
+                      <a:r>
+                        <a:rPr lang="en-US" sz="1500" dirty="0">
+                          <a:effectLst/>
+                        </a:rPr>
+                        <a:t>T</a:t>
+                      </a:r>
+                    </a:p>
+                  </a:txBody>
+                  <a:tcPr marL="70127" marR="70127" marT="32366" marB="32366" anchor="ctr">
+                    <a:lnL w="6350" cap="flat" cmpd="sng" algn="ctr">
+                      <a:solidFill>
+                        <a:srgbClr val="D6D6D6"/>
+                      </a:solidFill>
+                      <a:prstDash val="solid"/>
+                      <a:round/>
+                      <a:headEnd type="none" w="med" len="med"/>
+                      <a:tailEnd type="none" w="med" len="med"/>
+                    </a:lnL>
+                    <a:lnR w="6350" cap="flat" cmpd="sng" algn="ctr">
+                      <a:solidFill>
+                        <a:srgbClr val="D6D6D6"/>
+                      </a:solidFill>
+                      <a:prstDash val="solid"/>
+                      <a:round/>
+                      <a:headEnd type="none" w="med" len="med"/>
+                      <a:tailEnd type="none" w="med" len="med"/>
+                    </a:lnR>
+                    <a:lnT w="6350" cap="flat" cmpd="sng" algn="ctr">
+                      <a:solidFill>
+                        <a:srgbClr val="D6D6D6"/>
+                      </a:solidFill>
+                      <a:prstDash val="solid"/>
+                      <a:round/>
+                      <a:headEnd type="none" w="med" len="med"/>
+                      <a:tailEnd type="none" w="med" len="med"/>
+                    </a:lnT>
+                    <a:lnB w="6350" cap="flat" cmpd="sng" algn="ctr">
+                      <a:solidFill>
+                        <a:srgbClr val="D6D6D6"/>
+                      </a:solidFill>
+                      <a:prstDash val="solid"/>
+                      <a:round/>
+                      <a:headEnd type="none" w="med" len="med"/>
+                      <a:tailEnd type="none" w="med" len="med"/>
+                    </a:lnB>
+                    <a:solidFill>
+                      <a:srgbClr val="FFFFFF"/>
+                    </a:solidFill>
+                  </a:tcPr>
+                </a:tc>
+                <a:tc>
+                  <a:txBody>
+                    <a:bodyPr/>
+                    <a:lstStyle/>
+                    <a:p>
+                      <a:r>
+                        <a:rPr lang="en-US" sz="1500" dirty="0" err="1">
+                          <a:effectLst/>
+                        </a:rPr>
+                        <a:t>boolean</a:t>
+                      </a:r>
+                      <a:endParaRPr lang="en-US" sz="1500" dirty="0">
+                        <a:effectLst/>
+                      </a:endParaRPr>
+                    </a:p>
+                  </a:txBody>
+                  <a:tcPr marL="70127" marR="70127" marT="32366" marB="32366" anchor="ctr">
+                    <a:lnL w="6350" cap="flat" cmpd="sng" algn="ctr">
+                      <a:solidFill>
+                        <a:srgbClr val="D6D6D6"/>
+                      </a:solidFill>
+                      <a:prstDash val="solid"/>
+                      <a:round/>
+                      <a:headEnd type="none" w="med" len="med"/>
+                      <a:tailEnd type="none" w="med" len="med"/>
+                    </a:lnL>
+                    <a:lnR w="6350" cap="flat" cmpd="sng" algn="ctr">
+                      <a:solidFill>
+                        <a:srgbClr val="D6D6D6"/>
+                      </a:solidFill>
+                      <a:prstDash val="solid"/>
+                      <a:round/>
+                      <a:headEnd type="none" w="med" len="med"/>
+                      <a:tailEnd type="none" w="med" len="med"/>
+                    </a:lnR>
+                    <a:lnT w="6350" cap="flat" cmpd="sng" algn="ctr">
+                      <a:solidFill>
+                        <a:srgbClr val="D6D6D6"/>
+                      </a:solidFill>
+                      <a:prstDash val="solid"/>
+                      <a:round/>
+                      <a:headEnd type="none" w="med" len="med"/>
+                      <a:tailEnd type="none" w="med" len="med"/>
+                    </a:lnT>
+                    <a:lnB w="6350" cap="flat" cmpd="sng" algn="ctr">
+                      <a:solidFill>
+                        <a:srgbClr val="D6D6D6"/>
+                      </a:solidFill>
+                      <a:prstDash val="solid"/>
+                      <a:round/>
+                      <a:headEnd type="none" w="med" len="med"/>
+                      <a:tailEnd type="none" w="med" len="med"/>
+                    </a:lnB>
+                    <a:solidFill>
+                      <a:srgbClr val="FFFFFF"/>
+                    </a:solidFill>
+                  </a:tcPr>
+                </a:tc>
+                <a:tc>
+                  <a:txBody>
+                    <a:bodyPr/>
+                    <a:lstStyle/>
+                    <a:p>
+                      <a:r>
+                        <a:rPr lang="en-US" sz="1500">
+                          <a:effectLst/>
+                        </a:rPr>
+                        <a:t>Tester une condition</a:t>
+                      </a:r>
+                    </a:p>
+                  </a:txBody>
+                  <a:tcPr marL="70127" marR="70127" marT="32366" marB="32366" anchor="ctr">
+                    <a:lnL w="6350" cap="flat" cmpd="sng" algn="ctr">
+                      <a:solidFill>
+                        <a:srgbClr val="D6D6D6"/>
+                      </a:solidFill>
+                      <a:prstDash val="solid"/>
+                      <a:round/>
+                      <a:headEnd type="none" w="med" len="med"/>
+                      <a:tailEnd type="none" w="med" len="med"/>
+                    </a:lnL>
+                    <a:lnR w="6350" cap="flat" cmpd="sng" algn="ctr">
+                      <a:solidFill>
+                        <a:srgbClr val="D6D6D6"/>
+                      </a:solidFill>
+                      <a:prstDash val="solid"/>
+                      <a:round/>
+                      <a:headEnd type="none" w="med" len="med"/>
+                      <a:tailEnd type="none" w="med" len="med"/>
+                    </a:lnR>
+                    <a:lnT w="6350" cap="flat" cmpd="sng" algn="ctr">
+                      <a:solidFill>
+                        <a:srgbClr val="D6D6D6"/>
+                      </a:solidFill>
+                      <a:prstDash val="solid"/>
+                      <a:round/>
+                      <a:headEnd type="none" w="med" len="med"/>
+                      <a:tailEnd type="none" w="med" len="med"/>
+                    </a:lnT>
+                    <a:lnB w="6350" cap="flat" cmpd="sng" algn="ctr">
+                      <a:solidFill>
+                        <a:srgbClr val="D6D6D6"/>
+                      </a:solidFill>
+                      <a:prstDash val="solid"/>
+                      <a:round/>
+                      <a:headEnd type="none" w="med" len="med"/>
+                      <a:tailEnd type="none" w="med" len="med"/>
+                    </a:lnB>
+                    <a:solidFill>
+                      <a:srgbClr val="FFFFFF"/>
+                    </a:solidFill>
+                  </a:tcPr>
+                </a:tc>
+                <a:extLst>
+                  <a:ext uri="{0D108BD9-81ED-4DB2-BD59-A6C34878D82A}">
+                    <a16:rowId xmlns:a16="http://schemas.microsoft.com/office/drawing/2014/main" val="3226352889"/>
+                  </a:ext>
+                </a:extLst>
+              </a:tr>
+              <a:tr h="1229923">
+                <a:tc>
+                  <a:txBody>
+                    <a:bodyPr/>
+                    <a:lstStyle/>
+                    <a:p>
+                      <a:r>
+                        <a:rPr lang="en-US" sz="1500" b="1" dirty="0">
+                          <a:effectLst/>
+                        </a:rPr>
+                        <a:t>Function&lt;T,R&gt;</a:t>
+                      </a:r>
+                    </a:p>
+                  </a:txBody>
+                  <a:tcPr marL="70127" marR="70127" marT="32366" marB="32366" anchor="ctr">
+                    <a:lnL w="6350" cap="flat" cmpd="sng" algn="ctr">
+                      <a:solidFill>
+                        <a:srgbClr val="D6D6D6"/>
+                      </a:solidFill>
+                      <a:prstDash val="solid"/>
+                      <a:round/>
+                      <a:headEnd type="none" w="med" len="med"/>
+                      <a:tailEnd type="none" w="med" len="med"/>
+                    </a:lnL>
+                    <a:lnR w="6350" cap="flat" cmpd="sng" algn="ctr">
+                      <a:solidFill>
+                        <a:srgbClr val="D6D6D6"/>
+                      </a:solidFill>
+                      <a:prstDash val="solid"/>
+                      <a:round/>
+                      <a:headEnd type="none" w="med" len="med"/>
+                      <a:tailEnd type="none" w="med" len="med"/>
+                    </a:lnR>
+                    <a:lnT w="6350" cap="flat" cmpd="sng" algn="ctr">
+                      <a:solidFill>
+                        <a:srgbClr val="D6D6D6"/>
+                      </a:solidFill>
+                      <a:prstDash val="solid"/>
+                      <a:round/>
+                      <a:headEnd type="none" w="med" len="med"/>
+                      <a:tailEnd type="none" w="med" len="med"/>
+                    </a:lnT>
+                    <a:lnB w="6350" cap="flat" cmpd="sng" algn="ctr">
+                      <a:solidFill>
+                        <a:srgbClr val="D6D6D6"/>
+                      </a:solidFill>
+                      <a:prstDash val="solid"/>
+                      <a:round/>
+                      <a:headEnd type="none" w="med" len="med"/>
+                      <a:tailEnd type="none" w="med" len="med"/>
+                    </a:lnB>
+                    <a:solidFill>
+                      <a:srgbClr val="FFFFFF"/>
+                    </a:solidFill>
+                  </a:tcPr>
+                </a:tc>
+                <a:tc>
+                  <a:txBody>
+                    <a:bodyPr/>
+                    <a:lstStyle/>
+                    <a:p>
+                      <a:r>
+                        <a:rPr lang="en-US" sz="1500" dirty="0">
+                          <a:effectLst/>
+                        </a:rPr>
+                        <a:t>T</a:t>
+                      </a:r>
+                    </a:p>
+                  </a:txBody>
+                  <a:tcPr marL="70127" marR="70127" marT="32366" marB="32366" anchor="ctr">
+                    <a:lnL w="6350" cap="flat" cmpd="sng" algn="ctr">
+                      <a:solidFill>
+                        <a:srgbClr val="D6D6D6"/>
+                      </a:solidFill>
+                      <a:prstDash val="solid"/>
+                      <a:round/>
+                      <a:headEnd type="none" w="med" len="med"/>
+                      <a:tailEnd type="none" w="med" len="med"/>
+                    </a:lnL>
+                    <a:lnR w="6350" cap="flat" cmpd="sng" algn="ctr">
+                      <a:solidFill>
+                        <a:srgbClr val="D6D6D6"/>
+                      </a:solidFill>
+                      <a:prstDash val="solid"/>
+                      <a:round/>
+                      <a:headEnd type="none" w="med" len="med"/>
+                      <a:tailEnd type="none" w="med" len="med"/>
+                    </a:lnR>
+                    <a:lnT w="6350" cap="flat" cmpd="sng" algn="ctr">
+                      <a:solidFill>
+                        <a:srgbClr val="D6D6D6"/>
+                      </a:solidFill>
+                      <a:prstDash val="solid"/>
+                      <a:round/>
+                      <a:headEnd type="none" w="med" len="med"/>
+                      <a:tailEnd type="none" w="med" len="med"/>
+                    </a:lnT>
+                    <a:lnB w="6350" cap="flat" cmpd="sng" algn="ctr">
+                      <a:solidFill>
+                        <a:srgbClr val="D6D6D6"/>
+                      </a:solidFill>
+                      <a:prstDash val="solid"/>
+                      <a:round/>
+                      <a:headEnd type="none" w="med" len="med"/>
+                      <a:tailEnd type="none" w="med" len="med"/>
+                    </a:lnB>
+                    <a:solidFill>
+                      <a:srgbClr val="FFFFFF"/>
+                    </a:solidFill>
+                  </a:tcPr>
+                </a:tc>
+                <a:tc>
+                  <a:txBody>
+                    <a:bodyPr/>
+                    <a:lstStyle/>
+                    <a:p>
+                      <a:r>
+                        <a:rPr lang="en-US" sz="1500" dirty="0">
+                          <a:effectLst/>
+                        </a:rPr>
+                        <a:t>R</a:t>
+                      </a:r>
+                    </a:p>
+                  </a:txBody>
+                  <a:tcPr marL="70127" marR="70127" marT="32366" marB="32366" anchor="ctr">
+                    <a:lnL w="6350" cap="flat" cmpd="sng" algn="ctr">
+                      <a:solidFill>
+                        <a:srgbClr val="D6D6D6"/>
+                      </a:solidFill>
+                      <a:prstDash val="solid"/>
+                      <a:round/>
+                      <a:headEnd type="none" w="med" len="med"/>
+                      <a:tailEnd type="none" w="med" len="med"/>
+                    </a:lnL>
+                    <a:lnR w="6350" cap="flat" cmpd="sng" algn="ctr">
+                      <a:solidFill>
+                        <a:srgbClr val="D6D6D6"/>
+                      </a:solidFill>
+                      <a:prstDash val="solid"/>
+                      <a:round/>
+                      <a:headEnd type="none" w="med" len="med"/>
+                      <a:tailEnd type="none" w="med" len="med"/>
+                    </a:lnR>
+                    <a:lnT w="6350" cap="flat" cmpd="sng" algn="ctr">
+                      <a:solidFill>
+                        <a:srgbClr val="D6D6D6"/>
+                      </a:solidFill>
+                      <a:prstDash val="solid"/>
+                      <a:round/>
+                      <a:headEnd type="none" w="med" len="med"/>
+                      <a:tailEnd type="none" w="med" len="med"/>
+                    </a:lnT>
+                    <a:lnB w="6350" cap="flat" cmpd="sng" algn="ctr">
+                      <a:solidFill>
+                        <a:srgbClr val="D6D6D6"/>
+                      </a:solidFill>
+                      <a:prstDash val="solid"/>
+                      <a:round/>
+                      <a:headEnd type="none" w="med" len="med"/>
+                      <a:tailEnd type="none" w="med" len="med"/>
+                    </a:lnB>
+                    <a:solidFill>
+                      <a:srgbClr val="FFFFFF"/>
+                    </a:solidFill>
+                  </a:tcPr>
+                </a:tc>
+                <a:tc>
+                  <a:txBody>
+                    <a:bodyPr/>
+                    <a:lstStyle/>
+                    <a:p>
+                      <a:r>
+                        <a:rPr lang="en-US" sz="1500">
+                          <a:effectLst/>
+                        </a:rPr>
+                        <a:t>Transformer un élément</a:t>
+                      </a:r>
+                    </a:p>
+                  </a:txBody>
+                  <a:tcPr marL="70127" marR="70127" marT="32366" marB="32366" anchor="ctr">
+                    <a:lnL w="6350" cap="flat" cmpd="sng" algn="ctr">
+                      <a:solidFill>
+                        <a:srgbClr val="D6D6D6"/>
+                      </a:solidFill>
+                      <a:prstDash val="solid"/>
+                      <a:round/>
+                      <a:headEnd type="none" w="med" len="med"/>
+                      <a:tailEnd type="none" w="med" len="med"/>
+                    </a:lnL>
+                    <a:lnR w="6350" cap="flat" cmpd="sng" algn="ctr">
+                      <a:solidFill>
+                        <a:srgbClr val="D6D6D6"/>
+                      </a:solidFill>
+                      <a:prstDash val="solid"/>
+                      <a:round/>
+                      <a:headEnd type="none" w="med" len="med"/>
+                      <a:tailEnd type="none" w="med" len="med"/>
+                    </a:lnR>
+                    <a:lnT w="6350" cap="flat" cmpd="sng" algn="ctr">
+                      <a:solidFill>
+                        <a:srgbClr val="D6D6D6"/>
+                      </a:solidFill>
+                      <a:prstDash val="solid"/>
+                      <a:round/>
+                      <a:headEnd type="none" w="med" len="med"/>
+                      <a:tailEnd type="none" w="med" len="med"/>
+                    </a:lnT>
+                    <a:lnB w="6350" cap="flat" cmpd="sng" algn="ctr">
+                      <a:solidFill>
+                        <a:srgbClr val="D6D6D6"/>
+                      </a:solidFill>
+                      <a:prstDash val="solid"/>
+                      <a:round/>
+                      <a:headEnd type="none" w="med" len="med"/>
+                      <a:tailEnd type="none" w="med" len="med"/>
+                    </a:lnB>
+                    <a:solidFill>
+                      <a:srgbClr val="FFFFFF"/>
+                    </a:solidFill>
+                  </a:tcPr>
+                </a:tc>
+                <a:extLst>
+                  <a:ext uri="{0D108BD9-81ED-4DB2-BD59-A6C34878D82A}">
+                    <a16:rowId xmlns:a16="http://schemas.microsoft.com/office/drawing/2014/main" val="3343540537"/>
+                  </a:ext>
+                </a:extLst>
+              </a:tr>
+              <a:tr h="1229923">
+                <a:tc>
+                  <a:txBody>
+                    <a:bodyPr/>
+                    <a:lstStyle/>
+                    <a:p>
+                      <a:r>
+                        <a:rPr lang="en-US" sz="1500" b="1" dirty="0">
+                          <a:effectLst/>
+                        </a:rPr>
+                        <a:t>Consumer&lt;T&gt;</a:t>
+                      </a:r>
+                    </a:p>
+                  </a:txBody>
+                  <a:tcPr marL="70127" marR="70127" marT="32366" marB="32366" anchor="ctr">
+                    <a:lnL w="6350" cap="flat" cmpd="sng" algn="ctr">
+                      <a:solidFill>
+                        <a:srgbClr val="D6D6D6"/>
+                      </a:solidFill>
+                      <a:prstDash val="solid"/>
+                      <a:round/>
+                      <a:headEnd type="none" w="med" len="med"/>
+                      <a:tailEnd type="none" w="med" len="med"/>
+                    </a:lnL>
+                    <a:lnR w="6350" cap="flat" cmpd="sng" algn="ctr">
+                      <a:solidFill>
+                        <a:srgbClr val="D6D6D6"/>
+                      </a:solidFill>
+                      <a:prstDash val="solid"/>
+                      <a:round/>
+                      <a:headEnd type="none" w="med" len="med"/>
+                      <a:tailEnd type="none" w="med" len="med"/>
+                    </a:lnR>
+                    <a:lnT w="6350" cap="flat" cmpd="sng" algn="ctr">
+                      <a:solidFill>
+                        <a:srgbClr val="D6D6D6"/>
+                      </a:solidFill>
+                      <a:prstDash val="solid"/>
+                      <a:round/>
+                      <a:headEnd type="none" w="med" len="med"/>
+                      <a:tailEnd type="none" w="med" len="med"/>
+                    </a:lnT>
+                    <a:lnB w="6350" cap="flat" cmpd="sng" algn="ctr">
+                      <a:solidFill>
+                        <a:srgbClr val="D6D6D6"/>
+                      </a:solidFill>
+                      <a:prstDash val="solid"/>
+                      <a:round/>
+                      <a:headEnd type="none" w="med" len="med"/>
+                      <a:tailEnd type="none" w="med" len="med"/>
+                    </a:lnB>
+                    <a:solidFill>
+                      <a:srgbClr val="FFFFFF"/>
+                    </a:solidFill>
+                  </a:tcPr>
+                </a:tc>
+                <a:tc>
+                  <a:txBody>
+                    <a:bodyPr/>
+                    <a:lstStyle/>
+                    <a:p>
+                      <a:r>
+                        <a:rPr lang="en-US" sz="1500">
+                          <a:effectLst/>
+                        </a:rPr>
+                        <a:t>T</a:t>
+                      </a:r>
+                    </a:p>
+                  </a:txBody>
+                  <a:tcPr marL="70127" marR="70127" marT="32366" marB="32366" anchor="ctr">
+                    <a:lnL w="6350" cap="flat" cmpd="sng" algn="ctr">
+                      <a:solidFill>
+                        <a:srgbClr val="D6D6D6"/>
+                      </a:solidFill>
+                      <a:prstDash val="solid"/>
+                      <a:round/>
+                      <a:headEnd type="none" w="med" len="med"/>
+                      <a:tailEnd type="none" w="med" len="med"/>
+                    </a:lnL>
+                    <a:lnR w="6350" cap="flat" cmpd="sng" algn="ctr">
+                      <a:solidFill>
+                        <a:srgbClr val="D6D6D6"/>
+                      </a:solidFill>
+                      <a:prstDash val="solid"/>
+                      <a:round/>
+                      <a:headEnd type="none" w="med" len="med"/>
+                      <a:tailEnd type="none" w="med" len="med"/>
+                    </a:lnR>
+                    <a:lnT w="6350" cap="flat" cmpd="sng" algn="ctr">
+                      <a:solidFill>
+                        <a:srgbClr val="D6D6D6"/>
+                      </a:solidFill>
+                      <a:prstDash val="solid"/>
+                      <a:round/>
+                      <a:headEnd type="none" w="med" len="med"/>
+                      <a:tailEnd type="none" w="med" len="med"/>
+                    </a:lnT>
+                    <a:lnB w="6350" cap="flat" cmpd="sng" algn="ctr">
+                      <a:solidFill>
+                        <a:srgbClr val="D6D6D6"/>
+                      </a:solidFill>
+                      <a:prstDash val="solid"/>
+                      <a:round/>
+                      <a:headEnd type="none" w="med" len="med"/>
+                      <a:tailEnd type="none" w="med" len="med"/>
+                    </a:lnB>
+                    <a:solidFill>
+                      <a:srgbClr val="FFFFFF"/>
+                    </a:solidFill>
+                  </a:tcPr>
+                </a:tc>
+                <a:tc>
+                  <a:txBody>
+                    <a:bodyPr/>
+                    <a:lstStyle/>
+                    <a:p>
+                      <a:r>
+                        <a:rPr lang="en-US" sz="1500" dirty="0">
+                          <a:effectLst/>
+                        </a:rPr>
+                        <a:t>void</a:t>
+                      </a:r>
+                    </a:p>
+                  </a:txBody>
+                  <a:tcPr marL="70127" marR="70127" marT="32366" marB="32366" anchor="ctr">
+                    <a:lnL w="6350" cap="flat" cmpd="sng" algn="ctr">
+                      <a:solidFill>
+                        <a:srgbClr val="D6D6D6"/>
+                      </a:solidFill>
+                      <a:prstDash val="solid"/>
+                      <a:round/>
+                      <a:headEnd type="none" w="med" len="med"/>
+                      <a:tailEnd type="none" w="med" len="med"/>
+                    </a:lnL>
+                    <a:lnR w="6350" cap="flat" cmpd="sng" algn="ctr">
+                      <a:solidFill>
+                        <a:srgbClr val="D6D6D6"/>
+                      </a:solidFill>
+                      <a:prstDash val="solid"/>
+                      <a:round/>
+                      <a:headEnd type="none" w="med" len="med"/>
+                      <a:tailEnd type="none" w="med" len="med"/>
+                    </a:lnR>
+                    <a:lnT w="6350" cap="flat" cmpd="sng" algn="ctr">
+                      <a:solidFill>
+                        <a:srgbClr val="D6D6D6"/>
+                      </a:solidFill>
+                      <a:prstDash val="solid"/>
+                      <a:round/>
+                      <a:headEnd type="none" w="med" len="med"/>
+                      <a:tailEnd type="none" w="med" len="med"/>
+                    </a:lnT>
+                    <a:lnB w="6350" cap="flat" cmpd="sng" algn="ctr">
+                      <a:solidFill>
+                        <a:srgbClr val="D6D6D6"/>
+                      </a:solidFill>
+                      <a:prstDash val="solid"/>
+                      <a:round/>
+                      <a:headEnd type="none" w="med" len="med"/>
+                      <a:tailEnd type="none" w="med" len="med"/>
+                    </a:lnB>
+                    <a:solidFill>
+                      <a:srgbClr val="FFFFFF"/>
+                    </a:solidFill>
+                  </a:tcPr>
+                </a:tc>
+                <a:tc>
+                  <a:txBody>
+                    <a:bodyPr/>
+                    <a:lstStyle/>
+                    <a:p>
+                      <a:r>
+                        <a:rPr lang="en-US" sz="1500" dirty="0" err="1">
+                          <a:effectLst/>
+                        </a:rPr>
+                        <a:t>Consommer</a:t>
+                      </a:r>
+                      <a:r>
+                        <a:rPr lang="en-US" sz="1500" dirty="0">
+                          <a:effectLst/>
+                        </a:rPr>
+                        <a:t> (ex: </a:t>
+                      </a:r>
+                      <a:r>
+                        <a:rPr lang="en-US" sz="1500" dirty="0" err="1">
+                          <a:effectLst/>
+                        </a:rPr>
+                        <a:t>afficher</a:t>
+                      </a:r>
+                      <a:r>
+                        <a:rPr lang="en-US" sz="1500" dirty="0">
+                          <a:effectLst/>
+                        </a:rPr>
+                        <a:t>)</a:t>
+                      </a:r>
+                    </a:p>
+                  </a:txBody>
+                  <a:tcPr marL="70127" marR="70127" marT="32366" marB="32366" anchor="ctr">
+                    <a:lnL w="6350" cap="flat" cmpd="sng" algn="ctr">
+                      <a:solidFill>
+                        <a:srgbClr val="D6D6D6"/>
+                      </a:solidFill>
+                      <a:prstDash val="solid"/>
+                      <a:round/>
+                      <a:headEnd type="none" w="med" len="med"/>
+                      <a:tailEnd type="none" w="med" len="med"/>
+                    </a:lnL>
+                    <a:lnR w="6350" cap="flat" cmpd="sng" algn="ctr">
+                      <a:solidFill>
+                        <a:srgbClr val="D6D6D6"/>
+                      </a:solidFill>
+                      <a:prstDash val="solid"/>
+                      <a:round/>
+                      <a:headEnd type="none" w="med" len="med"/>
+                      <a:tailEnd type="none" w="med" len="med"/>
+                    </a:lnR>
+                    <a:lnT w="6350" cap="flat" cmpd="sng" algn="ctr">
+                      <a:solidFill>
+                        <a:srgbClr val="D6D6D6"/>
+                      </a:solidFill>
+                      <a:prstDash val="solid"/>
+                      <a:round/>
+                      <a:headEnd type="none" w="med" len="med"/>
+                      <a:tailEnd type="none" w="med" len="med"/>
+                    </a:lnT>
+                    <a:lnB w="6350" cap="flat" cmpd="sng" algn="ctr">
+                      <a:solidFill>
+                        <a:srgbClr val="D6D6D6"/>
+                      </a:solidFill>
+                      <a:prstDash val="solid"/>
+                      <a:round/>
+                      <a:headEnd type="none" w="med" len="med"/>
+                      <a:tailEnd type="none" w="med" len="med"/>
+                    </a:lnB>
+                    <a:solidFill>
+                      <a:srgbClr val="FFFFFF"/>
+                    </a:solidFill>
+                  </a:tcPr>
+                </a:tc>
+                <a:extLst>
+                  <a:ext uri="{0D108BD9-81ED-4DB2-BD59-A6C34878D82A}">
+                    <a16:rowId xmlns:a16="http://schemas.microsoft.com/office/drawing/2014/main" val="1292434906"/>
+                  </a:ext>
+                </a:extLst>
+              </a:tr>
+            </a:tbl>
+          </a:graphicData>
+        </a:graphic>
+      </p:graphicFrame>
       <p:sp>
         <p:nvSpPr>
-          <p:cNvPr id="3" name="Rectangle 2"/>
-          <p:cNvSpPr/>
+          <p:cNvPr id="5" name="TextBox 4"/>
+          <p:cNvSpPr txBox="1"/>
           <p:nvPr/>
         </p:nvSpPr>
         <p:spPr>
           <a:xfrm>
-            <a:off x="179512" y="1268760"/>
-            <a:ext cx="8784976" cy="369332"/>
+            <a:off x="826316" y="910461"/>
+            <a:ext cx="8064896" cy="646331"/>
           </a:xfrm>
           <a:prstGeom prst="rect">
             <a:avLst/>
           </a:prstGeom>
+          <a:noFill/>
         </p:spPr>
         <p:txBody>
-          <a:bodyPr wrap="square">
+          <a:bodyPr wrap="square" rtlCol="0">
             <a:spAutoFit/>
           </a:bodyPr>
           <a:lstStyle/>
           <a:p>
-            <a:pPr algn="just"/>
-            <a:r>
-              <a:rPr lang="fr-CI" b="1" dirty="0" smtClean="0"/>
-              <a:t>Cas concret :               </a:t>
-            </a:r>
-            <a:r>
-              <a:rPr lang="fr-CI" dirty="0" smtClean="0"/>
-              <a:t>l’exemple d’</a:t>
-            </a:r>
-            <a:r>
-              <a:rPr lang="fr-CI" dirty="0" err="1" smtClean="0"/>
-              <a:t>IntelliJ</a:t>
+            <a:r>
+              <a:rPr lang="en-US" b="1" dirty="0" smtClean="0"/>
+              <a:t>Interface </a:t>
+            </a:r>
+            <a:r>
+              <a:rPr lang="en-US" b="1" dirty="0" err="1" smtClean="0"/>
+              <a:t>Fonctionelles</a:t>
+            </a:r>
+            <a:r>
+              <a:rPr lang="en-US" b="1" dirty="0" smtClean="0"/>
+              <a:t> (</a:t>
+            </a:r>
+            <a:r>
+              <a:rPr lang="en-US" b="1" dirty="0" err="1" smtClean="0"/>
+              <a:t>possede</a:t>
+            </a:r>
+            <a:r>
+              <a:rPr lang="en-US" b="1" dirty="0" smtClean="0"/>
+              <a:t> </a:t>
+            </a:r>
+            <a:r>
+              <a:rPr lang="en-US" b="1" dirty="0" err="1" smtClean="0"/>
+              <a:t>une</a:t>
+            </a:r>
+            <a:r>
+              <a:rPr lang="en-US" b="1" dirty="0" smtClean="0"/>
+              <a:t> </a:t>
+            </a:r>
+            <a:r>
+              <a:rPr lang="en-US" b="1" dirty="0" err="1" smtClean="0"/>
+              <a:t>seule</a:t>
+            </a:r>
+            <a:r>
+              <a:rPr lang="en-US" b="1" dirty="0" smtClean="0"/>
+              <a:t> </a:t>
+            </a:r>
+            <a:r>
+              <a:rPr lang="en-US" b="1" dirty="0" err="1" smtClean="0"/>
+              <a:t>methode</a:t>
+            </a:r>
+            <a:r>
+              <a:rPr lang="en-US" b="1" dirty="0" smtClean="0"/>
+              <a:t> </a:t>
+            </a:r>
+            <a:r>
+              <a:rPr lang="en-US" b="1" dirty="0" err="1" smtClean="0"/>
+              <a:t>abstariate</a:t>
+            </a:r>
+            <a:r>
+              <a:rPr lang="en-US" b="1" dirty="0" smtClean="0"/>
+              <a:t>) </a:t>
+            </a:r>
+          </a:p>
+          <a:p>
+            <a:r>
+              <a:rPr lang="en-US" dirty="0" smtClean="0"/>
+              <a:t>Java 8 </a:t>
+            </a:r>
+            <a:r>
+              <a:rPr lang="en-US" dirty="0" err="1" smtClean="0"/>
+              <a:t>fournit</a:t>
+            </a:r>
+            <a:r>
+              <a:rPr lang="en-US" dirty="0" smtClean="0"/>
+              <a:t> des interfaces </a:t>
+            </a:r>
+            <a:r>
+              <a:rPr lang="en-US" dirty="0" err="1" smtClean="0"/>
+              <a:t>pretes</a:t>
+            </a:r>
+            <a:r>
+              <a:rPr lang="en-US" dirty="0" smtClean="0"/>
+              <a:t> a </a:t>
+            </a:r>
+            <a:r>
+              <a:rPr lang="en-US" dirty="0" err="1" smtClean="0"/>
+              <a:t>etre</a:t>
+            </a:r>
+            <a:r>
+              <a:rPr lang="en-US" dirty="0" smtClean="0"/>
+              <a:t> employees avec </a:t>
+            </a:r>
+            <a:r>
+              <a:rPr lang="en-US" dirty="0" err="1" smtClean="0"/>
+              <a:t>lamda</a:t>
             </a:r>
             <a:endParaRPr lang="en-US" dirty="0"/>
           </a:p>
@@ -6758,22 +11882,34 @@
       </p:sp>
       <p:pic>
         <p:nvPicPr>
-          <p:cNvPr id="4" name="Picture 3"/>
+          <p:cNvPr id="6" name="Image 5">
+            <a:extLst>
+              <a:ext uri="{FF2B5EF4-FFF2-40B4-BE49-F238E27FC236}">
+                <a16:creationId xmlns:a16="http://schemas.microsoft.com/office/drawing/2014/main" id="{AC68D4D3-B500-4716-B843-F3048BF30CA2}"/>
+              </a:ext>
+            </a:extLst>
+          </p:cNvPr>
           <p:cNvPicPr>
             <a:picLocks noChangeAspect="1"/>
           </p:cNvPicPr>
           <p:nvPr/>
         </p:nvPicPr>
         <p:blipFill>
-          <a:blip r:embed="rId2"/>
+          <a:blip r:embed="rId2" cstate="print">
+            <a:extLst>
+              <a:ext uri="{28A0092B-C50C-407E-A947-70E740481C1C}">
+                <a14:useLocalDpi xmlns:a14="http://schemas.microsoft.com/office/drawing/2010/main" val="0"/>
+              </a:ext>
+            </a:extLst>
+          </a:blip>
           <a:stretch>
             <a:fillRect/>
           </a:stretch>
         </p:blipFill>
         <p:spPr>
           <a:xfrm>
-            <a:off x="1979712" y="1988840"/>
-            <a:ext cx="4320480" cy="3717204"/>
+            <a:off x="7596336" y="6307338"/>
+            <a:ext cx="1296144" cy="515307"/>
           </a:xfrm>
           <a:prstGeom prst="rect">
             <a:avLst/>
@@ -6783,7 +11919,7 @@
     </p:spTree>
     <p:extLst>
       <p:ext uri="{BB962C8B-B14F-4D97-AF65-F5344CB8AC3E}">
-        <p14:creationId xmlns:p14="http://schemas.microsoft.com/office/powerpoint/2010/main" val="3217590759"/>
+        <p14:creationId xmlns:p14="http://schemas.microsoft.com/office/powerpoint/2010/main" val="2194937007"/>
       </p:ext>
     </p:extLst>
   </p:cSld>

--- a/Osis_Presentation_Ibrahim_SAVADOGO_2 [Autosaved].pptx
+++ b/Osis_Presentation_Ibrahim_SAVADOGO_2 [Autosaved].pptx
@@ -1179,6 +1179,481 @@
     <p:extLst>
       <p:ext uri="{BB962C8B-B14F-4D97-AF65-F5344CB8AC3E}">
         <p14:creationId xmlns:p14="http://schemas.microsoft.com/office/powerpoint/2010/main" val="337845281"/>
+      </p:ext>
+    </p:extLst>
+  </p:cSld>
+  <p:clrMapOvr>
+    <a:masterClrMapping/>
+  </p:clrMapOvr>
+</p:notes>
+</file>
+
+<file path=ppt/notesSlides/notesSlide4.xml><?xml version="1.0" encoding="utf-8"?>
+<p:notes xmlns:a="http://schemas.openxmlformats.org/drawingml/2006/main" xmlns:r="http://schemas.openxmlformats.org/officeDocument/2006/relationships" xmlns:p="http://schemas.openxmlformats.org/presentationml/2006/main">
+  <p:cSld>
+    <p:spTree>
+      <p:nvGrpSpPr>
+        <p:cNvPr id="1" name=""/>
+        <p:cNvGrpSpPr/>
+        <p:nvPr/>
+      </p:nvGrpSpPr>
+      <p:grpSpPr>
+        <a:xfrm>
+          <a:off x="0" y="0"/>
+          <a:ext cx="0" cy="0"/>
+          <a:chOff x="0" y="0"/>
+          <a:chExt cx="0" cy="0"/>
+        </a:xfrm>
+      </p:grpSpPr>
+      <p:sp>
+        <p:nvSpPr>
+          <p:cNvPr id="2" name="Slide Image Placeholder 1"/>
+          <p:cNvSpPr>
+            <a:spLocks noGrp="1" noRot="1" noChangeAspect="1"/>
+          </p:cNvSpPr>
+          <p:nvPr>
+            <p:ph type="sldImg"/>
+          </p:nvPr>
+        </p:nvSpPr>
+        <p:spPr/>
+      </p:sp>
+      <p:sp>
+        <p:nvSpPr>
+          <p:cNvPr id="3" name="Notes Placeholder 2"/>
+          <p:cNvSpPr>
+            <a:spLocks noGrp="1"/>
+          </p:cNvSpPr>
+          <p:nvPr>
+            <p:ph type="body" idx="1"/>
+          </p:nvPr>
+        </p:nvSpPr>
+        <p:spPr/>
+        <p:txBody>
+          <a:bodyPr/>
+          <a:lstStyle/>
+          <a:p>
+            <a:r>
+              <a:rPr lang="en-US" dirty="0" err="1" smtClean="0"/>
+              <a:t>Prorgammation</a:t>
+            </a:r>
+            <a:r>
+              <a:rPr lang="en-US" dirty="0" smtClean="0"/>
+              <a:t> </a:t>
+            </a:r>
+            <a:r>
+              <a:rPr lang="en-US" dirty="0" err="1" smtClean="0"/>
+              <a:t>fonctionnelle</a:t>
+            </a:r>
+            <a:r>
+              <a:rPr lang="en-US" baseline="0" dirty="0" smtClean="0"/>
+              <a:t> </a:t>
+            </a:r>
+            <a:r>
+              <a:rPr lang="en-US" baseline="0" dirty="0" err="1" smtClean="0"/>
+              <a:t>est</a:t>
+            </a:r>
+            <a:r>
+              <a:rPr lang="en-US" baseline="0" dirty="0" smtClean="0"/>
+              <a:t> un style de </a:t>
+            </a:r>
+            <a:r>
+              <a:rPr lang="en-US" baseline="0" dirty="0" err="1" smtClean="0"/>
+              <a:t>programmation</a:t>
+            </a:r>
+            <a:r>
+              <a:rPr lang="en-US" baseline="0" dirty="0" smtClean="0"/>
+              <a:t> </a:t>
+            </a:r>
+            <a:r>
+              <a:rPr lang="en-US" baseline="0" dirty="0" err="1" smtClean="0"/>
+              <a:t>en</a:t>
+            </a:r>
+            <a:r>
+              <a:rPr lang="en-US" baseline="0" dirty="0" smtClean="0"/>
+              <a:t> </a:t>
+            </a:r>
+            <a:r>
+              <a:rPr lang="en-US" baseline="0" dirty="0" err="1" smtClean="0"/>
+              <a:t>utilisant</a:t>
+            </a:r>
+            <a:r>
+              <a:rPr lang="en-US" baseline="0" dirty="0" smtClean="0"/>
+              <a:t> des </a:t>
+            </a:r>
+            <a:r>
+              <a:rPr lang="en-US" baseline="0" dirty="0" err="1" smtClean="0"/>
+              <a:t>fonctions</a:t>
+            </a:r>
+            <a:r>
+              <a:rPr lang="en-US" baseline="0" dirty="0" smtClean="0"/>
+              <a:t> </a:t>
+            </a:r>
+            <a:r>
+              <a:rPr lang="en-US" baseline="0" dirty="0" err="1" smtClean="0"/>
+              <a:t>mathematiques</a:t>
+            </a:r>
+            <a:r>
+              <a:rPr lang="en-US" baseline="0" dirty="0" smtClean="0"/>
+              <a:t> </a:t>
+            </a:r>
+            <a:r>
+              <a:rPr lang="en-US" baseline="0" dirty="0" err="1" smtClean="0"/>
+              <a:t>pures</a:t>
+            </a:r>
+            <a:r>
+              <a:rPr lang="en-US" baseline="0" dirty="0" smtClean="0"/>
+              <a:t> sans modifier </a:t>
+            </a:r>
+            <a:r>
+              <a:rPr lang="en-US" baseline="0" dirty="0" err="1" smtClean="0"/>
+              <a:t>l’eta</a:t>
+            </a:r>
+            <a:r>
+              <a:rPr lang="en-US" baseline="0" dirty="0" smtClean="0"/>
+              <a:t> du </a:t>
+            </a:r>
+            <a:r>
+              <a:rPr lang="en-US" baseline="0" dirty="0" err="1" smtClean="0"/>
+              <a:t>programmes</a:t>
+            </a:r>
+            <a:r>
+              <a:rPr lang="en-US" baseline="0" smtClean="0"/>
+              <a:t> </a:t>
+            </a:r>
+            <a:endParaRPr lang="en-US"/>
+          </a:p>
+        </p:txBody>
+      </p:sp>
+      <p:sp>
+        <p:nvSpPr>
+          <p:cNvPr id="4" name="Slide Number Placeholder 3"/>
+          <p:cNvSpPr>
+            <a:spLocks noGrp="1"/>
+          </p:cNvSpPr>
+          <p:nvPr>
+            <p:ph type="sldNum" sz="quarter" idx="10"/>
+          </p:nvPr>
+        </p:nvSpPr>
+        <p:spPr/>
+        <p:txBody>
+          <a:bodyPr/>
+          <a:lstStyle/>
+          <a:p>
+            <a:pPr>
+              <a:defRPr/>
+            </a:pPr>
+            <a:fld id="{4824BCD5-7DB3-4570-95FB-D6BD68920CD5}" type="slidenum">
+              <a:rPr lang="fr-CA" smtClean="0"/>
+              <a:pPr>
+                <a:defRPr/>
+              </a:pPr>
+              <a:t>7</a:t>
+            </a:fld>
+            <a:endParaRPr lang="fr-CA"/>
+          </a:p>
+        </p:txBody>
+      </p:sp>
+    </p:spTree>
+    <p:extLst>
+      <p:ext uri="{BB962C8B-B14F-4D97-AF65-F5344CB8AC3E}">
+        <p14:creationId xmlns:p14="http://schemas.microsoft.com/office/powerpoint/2010/main" val="2173265054"/>
+      </p:ext>
+    </p:extLst>
+  </p:cSld>
+  <p:clrMapOvr>
+    <a:masterClrMapping/>
+  </p:clrMapOvr>
+</p:notes>
+</file>
+
+<file path=ppt/notesSlides/notesSlide5.xml><?xml version="1.0" encoding="utf-8"?>
+<p:notes xmlns:a="http://schemas.openxmlformats.org/drawingml/2006/main" xmlns:r="http://schemas.openxmlformats.org/officeDocument/2006/relationships" xmlns:p="http://schemas.openxmlformats.org/presentationml/2006/main">
+  <p:cSld>
+    <p:spTree>
+      <p:nvGrpSpPr>
+        <p:cNvPr id="1" name=""/>
+        <p:cNvGrpSpPr/>
+        <p:nvPr/>
+      </p:nvGrpSpPr>
+      <p:grpSpPr>
+        <a:xfrm>
+          <a:off x="0" y="0"/>
+          <a:ext cx="0" cy="0"/>
+          <a:chOff x="0" y="0"/>
+          <a:chExt cx="0" cy="0"/>
+        </a:xfrm>
+      </p:grpSpPr>
+      <p:sp>
+        <p:nvSpPr>
+          <p:cNvPr id="2" name="Slide Image Placeholder 1"/>
+          <p:cNvSpPr>
+            <a:spLocks noGrp="1" noRot="1" noChangeAspect="1"/>
+          </p:cNvSpPr>
+          <p:nvPr>
+            <p:ph type="sldImg"/>
+          </p:nvPr>
+        </p:nvSpPr>
+        <p:spPr/>
+      </p:sp>
+      <p:sp>
+        <p:nvSpPr>
+          <p:cNvPr id="3" name="Notes Placeholder 2"/>
+          <p:cNvSpPr>
+            <a:spLocks noGrp="1"/>
+          </p:cNvSpPr>
+          <p:nvPr>
+            <p:ph type="body" idx="1"/>
+          </p:nvPr>
+        </p:nvSpPr>
+        <p:spPr/>
+        <p:txBody>
+          <a:bodyPr/>
+          <a:lstStyle/>
+          <a:p>
+            <a:r>
+              <a:rPr lang="fr-FR" dirty="0" smtClean="0"/>
+              <a:t>C'est une interface qui n'a </a:t>
+            </a:r>
+            <a:r>
+              <a:rPr lang="fr-FR" b="1" dirty="0" smtClean="0"/>
+              <a:t>qu'une seule méthode à implémenter</a:t>
+            </a:r>
+            <a:r>
+              <a:rPr lang="fr-FR" dirty="0" smtClean="0"/>
+              <a:t> — une seule obligation. Ni plus, ni moins.</a:t>
+            </a:r>
+          </a:p>
+          <a:p>
+            <a:r>
+              <a:rPr lang="fr-FR" dirty="0" smtClean="0"/>
+              <a:t>java</a:t>
+            </a:r>
+          </a:p>
+          <a:p>
+            <a:r>
+              <a:rPr lang="fr-FR" sz="1200" kern="1200" dirty="0" smtClean="0">
+                <a:solidFill>
+                  <a:schemeClr val="tx1"/>
+                </a:solidFill>
+                <a:effectLst/>
+                <a:latin typeface="Arial" charset="0"/>
+                <a:ea typeface="+mn-ea"/>
+                <a:cs typeface="+mn-cs"/>
+              </a:rPr>
+              <a:t>@</a:t>
+            </a:r>
+            <a:r>
+              <a:rPr lang="fr-FR" sz="1200" kern="1200" dirty="0" err="1" smtClean="0">
+                <a:solidFill>
+                  <a:schemeClr val="tx1"/>
+                </a:solidFill>
+                <a:effectLst/>
+                <a:latin typeface="Arial" charset="0"/>
+                <a:ea typeface="+mn-ea"/>
+                <a:cs typeface="+mn-cs"/>
+              </a:rPr>
+              <a:t>FunctionalInterface</a:t>
+            </a:r>
+            <a:r>
+              <a:rPr lang="fr-FR" dirty="0" smtClean="0"/>
+              <a:t> </a:t>
+            </a:r>
+            <a:r>
+              <a:rPr lang="fr-FR" sz="1200" kern="1200" dirty="0" smtClean="0">
+                <a:solidFill>
+                  <a:schemeClr val="tx1"/>
+                </a:solidFill>
+                <a:effectLst/>
+                <a:latin typeface="Arial" charset="0"/>
+                <a:ea typeface="+mn-ea"/>
+                <a:cs typeface="+mn-cs"/>
+              </a:rPr>
+              <a:t>interface</a:t>
+            </a:r>
+            <a:r>
+              <a:rPr lang="fr-FR" dirty="0" smtClean="0"/>
+              <a:t> </a:t>
+            </a:r>
+            <a:r>
+              <a:rPr lang="fr-FR" sz="1200" kern="1200" dirty="0" smtClean="0">
+                <a:solidFill>
+                  <a:schemeClr val="tx1"/>
+                </a:solidFill>
+                <a:effectLst/>
+                <a:latin typeface="Arial" charset="0"/>
+                <a:ea typeface="+mn-ea"/>
+                <a:cs typeface="+mn-cs"/>
+              </a:rPr>
+              <a:t>Calculateur</a:t>
+            </a:r>
+            <a:r>
+              <a:rPr lang="fr-FR" dirty="0" smtClean="0"/>
+              <a:t> </a:t>
+            </a:r>
+            <a:r>
+              <a:rPr lang="fr-FR" sz="1200" kern="1200" dirty="0" smtClean="0">
+                <a:solidFill>
+                  <a:schemeClr val="tx1"/>
+                </a:solidFill>
+                <a:effectLst/>
+                <a:latin typeface="Arial" charset="0"/>
+                <a:ea typeface="+mn-ea"/>
+                <a:cs typeface="+mn-cs"/>
+              </a:rPr>
+              <a:t>{</a:t>
+            </a:r>
+            <a:r>
+              <a:rPr lang="fr-FR" dirty="0" smtClean="0"/>
+              <a:t> </a:t>
+            </a:r>
+            <a:r>
+              <a:rPr lang="fr-FR" sz="1200" kern="1200" dirty="0" smtClean="0">
+                <a:solidFill>
+                  <a:schemeClr val="tx1"/>
+                </a:solidFill>
+                <a:effectLst/>
+                <a:latin typeface="Arial" charset="0"/>
+                <a:ea typeface="+mn-ea"/>
+                <a:cs typeface="+mn-cs"/>
+              </a:rPr>
+              <a:t>double</a:t>
+            </a:r>
+            <a:r>
+              <a:rPr lang="fr-FR" dirty="0" smtClean="0"/>
+              <a:t> </a:t>
+            </a:r>
+            <a:r>
+              <a:rPr lang="fr-FR" sz="1200" kern="1200" dirty="0" smtClean="0">
+                <a:solidFill>
+                  <a:schemeClr val="tx1"/>
+                </a:solidFill>
+                <a:effectLst/>
+                <a:latin typeface="Arial" charset="0"/>
+                <a:ea typeface="+mn-ea"/>
+                <a:cs typeface="+mn-cs"/>
+              </a:rPr>
+              <a:t>calculer(double</a:t>
+            </a:r>
+            <a:r>
+              <a:rPr lang="fr-FR" dirty="0" smtClean="0"/>
+              <a:t> a</a:t>
+            </a:r>
+            <a:r>
+              <a:rPr lang="fr-FR" sz="1200" kern="1200" dirty="0" smtClean="0">
+                <a:solidFill>
+                  <a:schemeClr val="tx1"/>
+                </a:solidFill>
+                <a:effectLst/>
+                <a:latin typeface="Arial" charset="0"/>
+                <a:ea typeface="+mn-ea"/>
+                <a:cs typeface="+mn-cs"/>
+              </a:rPr>
+              <a:t>,</a:t>
+            </a:r>
+            <a:r>
+              <a:rPr lang="fr-FR" dirty="0" smtClean="0"/>
+              <a:t> </a:t>
+            </a:r>
+            <a:r>
+              <a:rPr lang="fr-FR" sz="1200" kern="1200" dirty="0" smtClean="0">
+                <a:solidFill>
+                  <a:schemeClr val="tx1"/>
+                </a:solidFill>
+                <a:effectLst/>
+                <a:latin typeface="Arial" charset="0"/>
+                <a:ea typeface="+mn-ea"/>
+                <a:cs typeface="+mn-cs"/>
+              </a:rPr>
+              <a:t>double</a:t>
+            </a:r>
+            <a:r>
+              <a:rPr lang="fr-FR" dirty="0" smtClean="0"/>
+              <a:t> b</a:t>
+            </a:r>
+            <a:r>
+              <a:rPr lang="fr-FR" sz="1200" kern="1200" dirty="0" smtClean="0">
+                <a:solidFill>
+                  <a:schemeClr val="tx1"/>
+                </a:solidFill>
+                <a:effectLst/>
+                <a:latin typeface="Arial" charset="0"/>
+                <a:ea typeface="+mn-ea"/>
+                <a:cs typeface="+mn-cs"/>
+              </a:rPr>
+              <a:t>);</a:t>
+            </a:r>
+            <a:r>
+              <a:rPr lang="fr-FR" dirty="0" smtClean="0"/>
+              <a:t> </a:t>
+            </a:r>
+            <a:r>
+              <a:rPr lang="fr-FR" sz="1200" kern="1200" dirty="0" smtClean="0">
+                <a:solidFill>
+                  <a:schemeClr val="tx1"/>
+                </a:solidFill>
+                <a:effectLst/>
+                <a:latin typeface="Arial" charset="0"/>
+                <a:ea typeface="+mn-ea"/>
+                <a:cs typeface="+mn-cs"/>
+              </a:rPr>
+              <a:t>// la seule méthode obligatoire</a:t>
+            </a:r>
+            <a:r>
+              <a:rPr lang="fr-FR" dirty="0" smtClean="0"/>
+              <a:t> </a:t>
+            </a:r>
+            <a:r>
+              <a:rPr lang="fr-FR" sz="1200" kern="1200" dirty="0" smtClean="0">
+                <a:solidFill>
+                  <a:schemeClr val="tx1"/>
+                </a:solidFill>
+                <a:effectLst/>
+                <a:latin typeface="Arial" charset="0"/>
+                <a:ea typeface="+mn-ea"/>
+                <a:cs typeface="+mn-cs"/>
+              </a:rPr>
+              <a:t>}</a:t>
+            </a:r>
+            <a:endParaRPr lang="fr-FR" dirty="0" smtClean="0"/>
+          </a:p>
+          <a:p>
+            <a:endParaRPr lang="en-US" dirty="0"/>
+          </a:p>
+        </p:txBody>
+      </p:sp>
+      <p:sp>
+        <p:nvSpPr>
+          <p:cNvPr id="4" name="Slide Number Placeholder 3"/>
+          <p:cNvSpPr>
+            <a:spLocks noGrp="1"/>
+          </p:cNvSpPr>
+          <p:nvPr>
+            <p:ph type="sldNum" sz="quarter" idx="10"/>
+          </p:nvPr>
+        </p:nvSpPr>
+        <p:spPr/>
+        <p:txBody>
+          <a:bodyPr/>
+          <a:lstStyle/>
+          <a:p>
+            <a:pPr>
+              <a:defRPr/>
+            </a:pPr>
+            <a:fld id="{4824BCD5-7DB3-4570-95FB-D6BD68920CD5}" type="slidenum">
+              <a:rPr lang="fr-CA" smtClean="0"/>
+              <a:pPr>
+                <a:defRPr/>
+              </a:pPr>
+              <a:t>9</a:t>
+            </a:fld>
+            <a:endParaRPr lang="fr-CA"/>
+          </a:p>
+        </p:txBody>
+      </p:sp>
+    </p:spTree>
+    <p:extLst>
+      <p:ext uri="{BB962C8B-B14F-4D97-AF65-F5344CB8AC3E}">
+        <p14:creationId xmlns:p14="http://schemas.microsoft.com/office/powerpoint/2010/main" val="3338016904"/>
       </p:ext>
     </p:extLst>
   </p:cSld>
@@ -4278,7 +4753,7 @@
         <p:spPr>
           <a:xfrm>
             <a:off x="827584" y="332656"/>
-            <a:ext cx="3108736" cy="461665"/>
+            <a:ext cx="4048096" cy="461665"/>
           </a:xfrm>
           <a:prstGeom prst="rect">
             <a:avLst/>
@@ -4291,10 +4766,11 @@
           <a:lstStyle/>
           <a:p>
             <a:r>
-              <a:rPr lang="fr-CI" b="1" dirty="0" smtClean="0">
+              <a:rPr lang="fr-CI" sz="2400" b="1" dirty="0" smtClean="0">
                 <a:solidFill>
                   <a:srgbClr val="FF0000"/>
                 </a:solidFill>
+                <a:latin typeface="+mn-lt"/>
               </a:rPr>
               <a:t>IV. Tour d’horizon d’un IDE</a:t>
             </a:r>
@@ -4302,6 +4778,7 @@
               <a:solidFill>
                 <a:srgbClr val="FF0000"/>
               </a:solidFill>
+              <a:latin typeface="+mn-lt"/>
             </a:endParaRPr>
           </a:p>
         </p:txBody>
@@ -5211,6 +5688,7 @@
                 <a:solidFill>
                   <a:srgbClr val="FF0000"/>
                 </a:solidFill>
+                <a:latin typeface="+mn-lt"/>
               </a:rPr>
               <a:t>I. JAVA 8 : Nouveauté du langage</a:t>
             </a:r>
@@ -5218,6 +5696,7 @@
               <a:solidFill>
                 <a:srgbClr val="FF0000"/>
               </a:solidFill>
+              <a:latin typeface="+mn-lt"/>
             </a:endParaRPr>
           </a:p>
         </p:txBody>
@@ -5860,10 +6339,13 @@
                 <a:solidFill>
                   <a:srgbClr val="FF0000"/>
                 </a:solidFill>
+                <a:latin typeface="+mn-lt"/>
               </a:rPr>
               <a:t>II.1 Classe Abstraites</a:t>
             </a:r>
-            <a:endParaRPr lang="en-US" sz="2400" dirty="0"/>
+            <a:endParaRPr lang="en-US" sz="2400" dirty="0">
+              <a:latin typeface="+mn-lt"/>
+            </a:endParaRPr>
           </a:p>
         </p:txBody>
       </p:sp>
@@ -7020,10 +7502,13 @@
                 <a:solidFill>
                   <a:srgbClr val="FF0000"/>
                 </a:solidFill>
+                <a:latin typeface="+mn-lt"/>
               </a:rPr>
               <a:t>II.2 Classe Interfaces</a:t>
             </a:r>
-            <a:endParaRPr lang="en-US" sz="2400" dirty="0"/>
+            <a:endParaRPr lang="en-US" sz="2400" dirty="0">
+              <a:latin typeface="+mn-lt"/>
+            </a:endParaRPr>
           </a:p>
         </p:txBody>
       </p:sp>
@@ -7851,7 +8336,7 @@
         <p:spPr>
           <a:xfrm>
             <a:off x="827584" y="332656"/>
-            <a:ext cx="3249608" cy="461665"/>
+            <a:ext cx="4153701" cy="461665"/>
           </a:xfrm>
           <a:prstGeom prst="rect">
             <a:avLst/>
@@ -7864,18 +8349,20 @@
           <a:lstStyle/>
           <a:p>
             <a:r>
-              <a:rPr lang="fr-CI" b="1" dirty="0" smtClean="0">
+              <a:rPr lang="fr-CI" sz="2400" b="1" dirty="0" smtClean="0">
                 <a:solidFill>
                   <a:srgbClr val="FF0000"/>
                 </a:solidFill>
+                <a:latin typeface="+mn-lt"/>
               </a:rPr>
               <a:t>II.3 Gestion </a:t>
             </a:r>
             <a:r>
-              <a:rPr lang="fr-CI" b="1" dirty="0">
+              <a:rPr lang="fr-CI" sz="2400" b="1" dirty="0">
                 <a:solidFill>
                   <a:srgbClr val="FF0000"/>
                 </a:solidFill>
+                <a:latin typeface="+mn-lt"/>
               </a:rPr>
               <a:t>des Exceptions </a:t>
             </a:r>
@@ -7883,6 +8370,7 @@
               <a:solidFill>
                 <a:srgbClr val="FF0000"/>
               </a:solidFill>
+              <a:latin typeface="+mn-lt"/>
             </a:endParaRPr>
           </a:p>
         </p:txBody>
@@ -9467,7 +9955,7 @@
         <p:spPr>
           <a:xfrm>
             <a:off x="827584" y="332656"/>
-            <a:ext cx="5878532" cy="461665"/>
+            <a:ext cx="7661072" cy="461665"/>
           </a:xfrm>
           <a:prstGeom prst="rect">
             <a:avLst/>
@@ -9480,26 +9968,29 @@
           <a:lstStyle/>
           <a:p>
             <a:r>
-              <a:rPr lang="fr-CI" b="1" dirty="0" smtClean="0">
+              <a:rPr lang="fr-CI" sz="2400" b="1" dirty="0" smtClean="0">
                 <a:solidFill>
                   <a:srgbClr val="FF0000"/>
                 </a:solidFill>
+                <a:latin typeface="+mn-lt"/>
               </a:rPr>
               <a:t>III. Programmation fonctionnelle (</a:t>
             </a:r>
             <a:r>
-              <a:rPr lang="fr-CI" b="1" dirty="0" err="1" smtClean="0">
+              <a:rPr lang="fr-CI" sz="2400" b="1" dirty="0" err="1" smtClean="0">
                 <a:solidFill>
                   <a:srgbClr val="FF0000"/>
                 </a:solidFill>
+                <a:latin typeface="+mn-lt"/>
               </a:rPr>
               <a:t>lamda</a:t>
             </a:r>
             <a:r>
-              <a:rPr lang="fr-CI" b="1" dirty="0" smtClean="0">
+              <a:rPr lang="fr-CI" sz="2400" b="1" dirty="0" smtClean="0">
                 <a:solidFill>
                   <a:srgbClr val="FF0000"/>
                 </a:solidFill>
+                <a:latin typeface="+mn-lt"/>
               </a:rPr>
               <a:t> expression)</a:t>
             </a:r>
@@ -9507,6 +9998,7 @@
               <a:solidFill>
                 <a:srgbClr val="FF0000"/>
               </a:solidFill>
+              <a:latin typeface="+mn-lt"/>
             </a:endParaRPr>
           </a:p>
         </p:txBody>
@@ -9772,7 +10264,7 @@
           <p:nvPr/>
         </p:nvPicPr>
         <p:blipFill>
-          <a:blip r:embed="rId2" cstate="print">
+          <a:blip r:embed="rId3" cstate="print">
             <a:extLst>
               <a:ext uri="{28A0092B-C50C-407E-A947-70E740481C1C}">
                 <a14:useLocalDpi xmlns:a14="http://schemas.microsoft.com/office/drawing/2010/main" val="0"/>
@@ -9838,8 +10330,8 @@
         </p:nvSpPr>
         <p:spPr>
           <a:xfrm>
-            <a:off x="827584" y="332656"/>
-            <a:ext cx="5878532" cy="461665"/>
+            <a:off x="755576" y="188640"/>
+            <a:ext cx="7661072" cy="461665"/>
           </a:xfrm>
           <a:prstGeom prst="rect">
             <a:avLst/>
@@ -9852,26 +10344,29 @@
           <a:lstStyle/>
           <a:p>
             <a:r>
-              <a:rPr lang="fr-CI" b="1" dirty="0" smtClean="0">
+              <a:rPr lang="fr-CI" sz="2400" b="1" dirty="0" smtClean="0">
                 <a:solidFill>
                   <a:srgbClr val="FF0000"/>
                 </a:solidFill>
+                <a:latin typeface="+mn-lt"/>
               </a:rPr>
               <a:t>III. Programmation fonctionnelle (</a:t>
             </a:r>
             <a:r>
-              <a:rPr lang="fr-CI" b="1" dirty="0" err="1" smtClean="0">
+              <a:rPr lang="fr-CI" sz="2400" b="1" dirty="0" err="1" smtClean="0">
                 <a:solidFill>
                   <a:srgbClr val="FF0000"/>
                 </a:solidFill>
+                <a:latin typeface="+mn-lt"/>
               </a:rPr>
               <a:t>lamda</a:t>
             </a:r>
             <a:r>
-              <a:rPr lang="fr-CI" b="1" dirty="0" smtClean="0">
+              <a:rPr lang="fr-CI" sz="2400" b="1" dirty="0" smtClean="0">
                 <a:solidFill>
                   <a:srgbClr val="FF0000"/>
                 </a:solidFill>
+                <a:latin typeface="+mn-lt"/>
               </a:rPr>
               <a:t> expression)</a:t>
             </a:r>
@@ -9879,6 +10374,7 @@
               <a:solidFill>
                 <a:srgbClr val="FF0000"/>
               </a:solidFill>
+              <a:latin typeface="+mn-lt"/>
             </a:endParaRPr>
           </a:p>
         </p:txBody>
@@ -9893,8 +10389,8 @@
         </p:nvSpPr>
         <p:spPr bwMode="auto">
           <a:xfrm>
-            <a:off x="395536" y="1464461"/>
-            <a:ext cx="8748464" cy="2862322"/>
+            <a:off x="395536" y="1110224"/>
+            <a:ext cx="7344816" cy="4401205"/>
           </a:xfrm>
           <a:prstGeom prst="rect">
             <a:avLst/>
@@ -10051,7 +10547,7 @@
               <a:tabLst/>
             </a:pPr>
             <a:r>
-              <a:rPr kumimoji="0" lang="en-US" altLang="en-US" sz="2000" b="1" i="0" u="none" strike="noStrike" cap="none" normalizeH="0" baseline="0" dirty="0" err="1" smtClean="0">
+              <a:rPr kumimoji="0" lang="en-US" altLang="en-US" sz="2000" b="1" i="0" u="sng" strike="noStrike" cap="none" normalizeH="0" baseline="0" dirty="0" err="1" smtClean="0">
                 <a:ln>
                   <a:noFill/>
                 </a:ln>
@@ -10065,7 +10561,7 @@
               <a:t>Exemple</a:t>
             </a:r>
             <a:r>
-              <a:rPr kumimoji="0" lang="en-US" altLang="en-US" sz="2000" b="1" i="0" u="none" strike="noStrike" cap="none" normalizeH="0" baseline="0" dirty="0" smtClean="0">
+              <a:rPr kumimoji="0" lang="en-US" altLang="en-US" sz="2000" b="1" i="0" u="sng" strike="noStrike" cap="none" normalizeH="0" baseline="0" dirty="0" smtClean="0">
                 <a:ln>
                   <a:noFill/>
                 </a:ln>
@@ -10109,9 +10605,9 @@
             </a:endParaRPr>
           </a:p>
           <a:p>
-            <a:pPr marL="0" marR="0" lvl="0" indent="0" algn="l" defTabSz="914400" rtl="0" eaLnBrk="0" fontAlgn="base" latinLnBrk="0" hangingPunct="0">
+            <a:pPr marL="0" marR="0" lvl="0" indent="0" algn="just" defTabSz="914400" rtl="0" eaLnBrk="0" fontAlgn="base" latinLnBrk="0" hangingPunct="0">
               <a:lnSpc>
-                <a:spcPct val="100000"/>
+                <a:spcPct val="150000"/>
               </a:lnSpc>
               <a:spcBef>
                 <a:spcPct val="0"/>
@@ -10318,38 +10814,6 @@
               <a:latin typeface="Times New Roman" panose="02020603050405020304" pitchFamily="18" charset="0"/>
               <a:cs typeface="Times New Roman" panose="02020603050405020304" pitchFamily="18" charset="0"/>
             </a:endParaRPr>
-          </a:p>
-          <a:p>
-            <a:pPr marL="0" marR="0" lvl="0" indent="0" algn="l" defTabSz="914400" rtl="0" eaLnBrk="0" fontAlgn="base" latinLnBrk="0" hangingPunct="0">
-              <a:lnSpc>
-                <a:spcPct val="100000"/>
-              </a:lnSpc>
-              <a:spcBef>
-                <a:spcPct val="0"/>
-              </a:spcBef>
-              <a:spcAft>
-                <a:spcPct val="0"/>
-              </a:spcAft>
-              <a:buClrTx/>
-              <a:buSzTx/>
-              <a:buFontTx/>
-              <a:buNone/>
-              <a:tabLst/>
-            </a:pPr>
-            <a:r>
-              <a:rPr kumimoji="0" lang="en-US" altLang="en-US" sz="2000" b="0" i="0" u="none" strike="noStrike" cap="none" normalizeH="0" baseline="0" dirty="0" smtClean="0">
-                <a:ln>
-                  <a:noFill/>
-                </a:ln>
-                <a:solidFill>
-                  <a:srgbClr val="0A0A0A"/>
-                </a:solidFill>
-                <a:effectLst/>
-                <a:latin typeface="Times New Roman" panose="02020603050405020304" pitchFamily="18" charset="0"/>
-                <a:cs typeface="Times New Roman" panose="02020603050405020304" pitchFamily="18" charset="0"/>
-              </a:rPr>
-              <a:t>Java</a:t>
-            </a:r>
           </a:p>
           <a:p>
             <a:pPr marL="0" marR="0" lvl="0" indent="0" algn="l" defTabSz="914400" rtl="0" eaLnBrk="0" fontAlgn="base" latinLnBrk="0" hangingPunct="0">
@@ -10396,60 +10860,40 @@
                 <a:latin typeface="Times New Roman" panose="02020603050405020304" pitchFamily="18" charset="0"/>
                 <a:cs typeface="Times New Roman" panose="02020603050405020304" pitchFamily="18" charset="0"/>
               </a:rPr>
-              <a:t>     </a:t>
-            </a:r>
-            <a:r>
-              <a:rPr lang="en-US" altLang="en-US" sz="2000" dirty="0" err="1" smtClean="0">
+              <a:t>  </a:t>
+            </a:r>
+            <a:r>
+              <a:rPr lang="en-US" altLang="en-US" sz="2000" dirty="0" smtClean="0">
                 <a:solidFill>
                   <a:srgbClr val="0A0A0A"/>
                 </a:solidFill>
                 <a:latin typeface="Times New Roman" panose="02020603050405020304" pitchFamily="18" charset="0"/>
                 <a:cs typeface="Times New Roman" panose="02020603050405020304" pitchFamily="18" charset="0"/>
               </a:rPr>
-              <a:t>noms</a:t>
-            </a:r>
-            <a:r>
-              <a:rPr lang="en-US" altLang="en-US" sz="2000" dirty="0" smtClean="0">
+              <a:t>noms </a:t>
+            </a:r>
+            <a:r>
+              <a:rPr lang="en-US" altLang="en-US" sz="2000" dirty="0">
                 <a:solidFill>
                   <a:srgbClr val="0A0A0A"/>
                 </a:solidFill>
                 <a:latin typeface="Times New Roman" panose="02020603050405020304" pitchFamily="18" charset="0"/>
                 <a:cs typeface="Times New Roman" panose="02020603050405020304" pitchFamily="18" charset="0"/>
               </a:rPr>
-              <a:t> </a:t>
-            </a:r>
-            <a:r>
-              <a:rPr lang="en-US" altLang="en-US" sz="2000" dirty="0">
+              <a:t>= </a:t>
+            </a:r>
+            <a:r>
+              <a:rPr lang="en-US" altLang="en-US" sz="2000" b="1" dirty="0">
                 <a:solidFill>
                   <a:srgbClr val="0A0A0A"/>
                 </a:solidFill>
                 <a:latin typeface="Times New Roman" panose="02020603050405020304" pitchFamily="18" charset="0"/>
                 <a:cs typeface="Times New Roman" panose="02020603050405020304" pitchFamily="18" charset="0"/>
               </a:rPr>
-              <a:t>= </a:t>
-            </a:r>
-            <a:r>
-              <a:rPr lang="en-US" altLang="en-US" sz="2000" dirty="0" err="1">
-                <a:solidFill>
-                  <a:srgbClr val="0A0A0A"/>
-                </a:solidFill>
-                <a:latin typeface="Times New Roman" panose="02020603050405020304" pitchFamily="18" charset="0"/>
-                <a:cs typeface="Times New Roman" panose="02020603050405020304" pitchFamily="18" charset="0"/>
-              </a:rPr>
-              <a:t>Arrays.asList</a:t>
-            </a:r>
-            <a:r>
-              <a:rPr lang="en-US" altLang="en-US" sz="2000" dirty="0">
-                <a:solidFill>
-                  <a:srgbClr val="0A0A0A"/>
-                </a:solidFill>
-                <a:latin typeface="Times New Roman" panose="02020603050405020304" pitchFamily="18" charset="0"/>
-                <a:cs typeface="Times New Roman" panose="02020603050405020304" pitchFamily="18" charset="0"/>
-              </a:rPr>
-              <a:t>("Alice", "Bob", "Charlie</a:t>
-            </a:r>
-            <a:r>
-              <a:rPr lang="en-US" altLang="en-US" sz="2000" dirty="0" smtClean="0">
+              <a:t>Arrays.asList("Alice", "Bob", "Charlie</a:t>
+            </a:r>
+            <a:r>
+              <a:rPr lang="en-US" altLang="en-US" sz="2000" b="1" dirty="0" smtClean="0">
                 <a:solidFill>
                   <a:srgbClr val="0A0A0A"/>
                 </a:solidFill>
@@ -10470,16 +10914,74 @@
             </a:endParaRPr>
           </a:p>
           <a:p>
-            <a:pPr lvl="0"/>
+            <a:pPr lvl="0">
+              <a:lnSpc>
+                <a:spcPct val="150000"/>
+              </a:lnSpc>
+            </a:pPr>
             <a:r>
               <a:rPr lang="en-US" altLang="en-US" sz="2000" b="1" dirty="0" err="1" smtClean="0">
                 <a:solidFill>
+                  <a:srgbClr val="FF0000"/>
+                </a:solidFill>
+                <a:latin typeface="Times New Roman" panose="02020603050405020304" pitchFamily="18" charset="0"/>
+                <a:cs typeface="Times New Roman" panose="02020603050405020304" pitchFamily="18" charset="0"/>
+              </a:rPr>
+              <a:t>noms.stream</a:t>
+            </a:r>
+            <a:r>
+              <a:rPr lang="en-US" altLang="en-US" sz="2000" b="1" dirty="0">
+                <a:solidFill>
+                  <a:srgbClr val="FF0000"/>
+                </a:solidFill>
+                <a:latin typeface="Times New Roman" panose="02020603050405020304" pitchFamily="18" charset="0"/>
+                <a:cs typeface="Times New Roman" panose="02020603050405020304" pitchFamily="18" charset="0"/>
+              </a:rPr>
+              <a:t>() </a:t>
+            </a:r>
+            <a:endParaRPr lang="en-US" altLang="en-US" sz="2000" b="1" dirty="0" smtClean="0">
+              <a:solidFill>
+                <a:srgbClr val="FF0000"/>
+              </a:solidFill>
+              <a:latin typeface="Times New Roman" panose="02020603050405020304" pitchFamily="18" charset="0"/>
+              <a:cs typeface="Times New Roman" panose="02020603050405020304" pitchFamily="18" charset="0"/>
+            </a:endParaRPr>
+          </a:p>
+          <a:p>
+            <a:pPr lvl="0">
+              <a:lnSpc>
+                <a:spcPct val="150000"/>
+              </a:lnSpc>
+            </a:pPr>
+            <a:r>
+              <a:rPr lang="en-US" altLang="en-US" sz="2000" b="1" dirty="0" smtClean="0">
+                <a:solidFill>
+                  <a:srgbClr val="FF0000"/>
+                </a:solidFill>
+                <a:latin typeface="Times New Roman" panose="02020603050405020304" pitchFamily="18" charset="0"/>
+                <a:cs typeface="Times New Roman" panose="02020603050405020304" pitchFamily="18" charset="0"/>
+              </a:rPr>
+              <a:t> </a:t>
+            </a:r>
+            <a:r>
+              <a:rPr lang="en-US" altLang="en-US" sz="2000" b="1" dirty="0">
+                <a:solidFill>
                   <a:srgbClr val="0A0A0A"/>
                 </a:solidFill>
                 <a:latin typeface="Times New Roman" panose="02020603050405020304" pitchFamily="18" charset="0"/>
                 <a:cs typeface="Times New Roman" panose="02020603050405020304" pitchFamily="18" charset="0"/>
               </a:rPr>
-              <a:t>noms.stream</a:t>
+              <a:t>.filter(nom -&gt; </a:t>
+            </a:r>
+            <a:r>
+              <a:rPr lang="en-US" altLang="en-US" sz="2000" b="1" dirty="0" err="1">
+                <a:solidFill>
+                  <a:srgbClr val="0A0A0A"/>
+                </a:solidFill>
+                <a:latin typeface="Times New Roman" panose="02020603050405020304" pitchFamily="18" charset="0"/>
+                <a:cs typeface="Times New Roman" panose="02020603050405020304" pitchFamily="18" charset="0"/>
+              </a:rPr>
+              <a:t>nom.startsWith</a:t>
             </a:r>
             <a:r>
               <a:rPr lang="en-US" altLang="en-US" sz="2000" b="1" dirty="0">
@@ -10489,7 +10991,7 @@
                 <a:latin typeface="Times New Roman" panose="02020603050405020304" pitchFamily="18" charset="0"/>
                 <a:cs typeface="Times New Roman" panose="02020603050405020304" pitchFamily="18" charset="0"/>
               </a:rPr>
-              <a:t>() </a:t>
+              <a:t>("A</a:t>
             </a:r>
             <a:r>
               <a:rPr lang="en-US" altLang="en-US" sz="2000" b="1" dirty="0" smtClean="0">
@@ -10499,7 +11001,24 @@
                 <a:latin typeface="Times New Roman" panose="02020603050405020304" pitchFamily="18" charset="0"/>
                 <a:cs typeface="Times New Roman" panose="02020603050405020304" pitchFamily="18" charset="0"/>
               </a:rPr>
-              <a:t> </a:t>
+              <a:t>"))</a:t>
+            </a:r>
+          </a:p>
+          <a:p>
+            <a:pPr lvl="0">
+              <a:lnSpc>
+                <a:spcPct val="150000"/>
+              </a:lnSpc>
+            </a:pPr>
+            <a:r>
+              <a:rPr lang="en-US" altLang="en-US" sz="2000" b="1" dirty="0" smtClean="0">
+                <a:solidFill>
+                  <a:srgbClr val="0A0A0A"/>
+                </a:solidFill>
+                <a:latin typeface="Times New Roman" panose="02020603050405020304" pitchFamily="18" charset="0"/>
+                <a:cs typeface="Times New Roman" panose="02020603050405020304" pitchFamily="18" charset="0"/>
+              </a:rPr>
+              <a:t>.</a:t>
             </a:r>
             <a:r>
               <a:rPr lang="en-US" altLang="en-US" sz="2000" b="1" dirty="0">
@@ -10509,7 +11028,7 @@
                 <a:latin typeface="Times New Roman" panose="02020603050405020304" pitchFamily="18" charset="0"/>
                 <a:cs typeface="Times New Roman" panose="02020603050405020304" pitchFamily="18" charset="0"/>
               </a:rPr>
-              <a:t>.filter(nom -&gt; </a:t>
+              <a:t>map(nom -&gt; </a:t>
             </a:r>
             <a:r>
               <a:rPr lang="en-US" altLang="en-US" sz="2000" b="1" dirty="0" err="1">
@@ -10519,18 +11038,25 @@
                 <a:latin typeface="Times New Roman" panose="02020603050405020304" pitchFamily="18" charset="0"/>
                 <a:cs typeface="Times New Roman" panose="02020603050405020304" pitchFamily="18" charset="0"/>
               </a:rPr>
-              <a:t>nom.startsWith</a:t>
-            </a:r>
-            <a:r>
-              <a:rPr lang="en-US" altLang="en-US" sz="2000" b="1" dirty="0">
+              <a:t>nom.toUpperCase</a:t>
+            </a:r>
+            <a:r>
+              <a:rPr lang="en-US" altLang="en-US" sz="2000" b="1" dirty="0" smtClean="0">
                 <a:solidFill>
                   <a:srgbClr val="0A0A0A"/>
                 </a:solidFill>
                 <a:latin typeface="Times New Roman" panose="02020603050405020304" pitchFamily="18" charset="0"/>
                 <a:cs typeface="Times New Roman" panose="02020603050405020304" pitchFamily="18" charset="0"/>
               </a:rPr>
-              <a:t>("A</a:t>
-            </a:r>
+              <a:t>())</a:t>
+            </a:r>
+          </a:p>
+          <a:p>
+            <a:pPr lvl="0">
+              <a:lnSpc>
+                <a:spcPct val="150000"/>
+              </a:lnSpc>
+            </a:pPr>
             <a:r>
               <a:rPr lang="en-US" altLang="en-US" sz="2000" b="1" dirty="0" smtClean="0">
                 <a:solidFill>
@@ -10539,37 +11065,7 @@
                 <a:latin typeface="Times New Roman" panose="02020603050405020304" pitchFamily="18" charset="0"/>
                 <a:cs typeface="Times New Roman" panose="02020603050405020304" pitchFamily="18" charset="0"/>
               </a:rPr>
-              <a:t>")).</a:t>
-            </a:r>
-            <a:r>
-              <a:rPr lang="en-US" altLang="en-US" sz="2000" b="1" dirty="0">
-                <a:solidFill>
-                  <a:srgbClr val="0A0A0A"/>
-                </a:solidFill>
-                <a:latin typeface="Times New Roman" panose="02020603050405020304" pitchFamily="18" charset="0"/>
-                <a:cs typeface="Times New Roman" panose="02020603050405020304" pitchFamily="18" charset="0"/>
-              </a:rPr>
-              <a:t>map(nom -&gt; </a:t>
-            </a:r>
-            <a:r>
-              <a:rPr lang="en-US" altLang="en-US" sz="2000" b="1" dirty="0" err="1">
-                <a:solidFill>
-                  <a:srgbClr val="0A0A0A"/>
-                </a:solidFill>
-                <a:latin typeface="Times New Roman" panose="02020603050405020304" pitchFamily="18" charset="0"/>
-                <a:cs typeface="Times New Roman" panose="02020603050405020304" pitchFamily="18" charset="0"/>
-              </a:rPr>
-              <a:t>nom.toUpperCase</a:t>
-            </a:r>
-            <a:r>
-              <a:rPr lang="en-US" altLang="en-US" sz="2000" b="1" dirty="0" smtClean="0">
-                <a:solidFill>
-                  <a:srgbClr val="0A0A0A"/>
-                </a:solidFill>
-                <a:latin typeface="Times New Roman" panose="02020603050405020304" pitchFamily="18" charset="0"/>
-                <a:cs typeface="Times New Roman" panose="02020603050405020304" pitchFamily="18" charset="0"/>
-              </a:rPr>
-              <a:t>()).</a:t>
+              <a:t>.</a:t>
             </a:r>
             <a:r>
               <a:rPr lang="en-US" altLang="en-US" sz="2000" b="1" dirty="0" err="1">
@@ -10727,7 +11223,7 @@
         <p:spPr>
           <a:xfrm>
             <a:off x="827584" y="332656"/>
-            <a:ext cx="5878532" cy="461665"/>
+            <a:ext cx="7661072" cy="461665"/>
           </a:xfrm>
           <a:prstGeom prst="rect">
             <a:avLst/>
@@ -10740,26 +11236,29 @@
           <a:lstStyle/>
           <a:p>
             <a:r>
-              <a:rPr lang="fr-CI" b="1" dirty="0" smtClean="0">
+              <a:rPr lang="fr-CI" sz="2400" b="1" dirty="0" smtClean="0">
                 <a:solidFill>
                   <a:srgbClr val="FF0000"/>
                 </a:solidFill>
+                <a:latin typeface="+mn-lt"/>
               </a:rPr>
               <a:t>III. Programmation fonctionnelle (</a:t>
             </a:r>
             <a:r>
-              <a:rPr lang="fr-CI" b="1" dirty="0" err="1" smtClean="0">
+              <a:rPr lang="fr-CI" sz="2400" b="1" dirty="0" err="1" smtClean="0">
                 <a:solidFill>
                   <a:srgbClr val="FF0000"/>
                 </a:solidFill>
+                <a:latin typeface="+mn-lt"/>
               </a:rPr>
               <a:t>lamda</a:t>
             </a:r>
             <a:r>
-              <a:rPr lang="fr-CI" b="1" dirty="0" smtClean="0">
+              <a:rPr lang="fr-CI" sz="2400" b="1" dirty="0" smtClean="0">
                 <a:solidFill>
                   <a:srgbClr val="FF0000"/>
                 </a:solidFill>
+                <a:latin typeface="+mn-lt"/>
               </a:rPr>
               <a:t> expression)</a:t>
             </a:r>
@@ -10767,1007 +11266,11 @@
               <a:solidFill>
                 <a:srgbClr val="FF0000"/>
               </a:solidFill>
+              <a:latin typeface="+mn-lt"/>
             </a:endParaRPr>
           </a:p>
         </p:txBody>
       </p:sp>
-      <p:graphicFrame>
-        <p:nvGraphicFramePr>
-          <p:cNvPr id="4" name="Table 3"/>
-          <p:cNvGraphicFramePr>
-            <a:graphicFrameLocks noGrp="1"/>
-          </p:cNvGraphicFramePr>
-          <p:nvPr>
-            <p:extLst>
-              <p:ext uri="{D42A27DB-BD31-4B8C-83A1-F6EECF244321}">
-                <p14:modId xmlns:p14="http://schemas.microsoft.com/office/powerpoint/2010/main" val="4266263096"/>
-              </p:ext>
-            </p:extLst>
-          </p:nvPr>
-        </p:nvGraphicFramePr>
-        <p:xfrm>
-          <a:off x="1331640" y="1654017"/>
-          <a:ext cx="6696748" cy="3987540"/>
-        </p:xfrm>
-        <a:graphic>
-          <a:graphicData uri="http://schemas.openxmlformats.org/drawingml/2006/table">
-            <a:tbl>
-              <a:tblPr/>
-              <a:tblGrid>
-                <a:gridCol w="1674187">
-                  <a:extLst>
-                    <a:ext uri="{9D8B030D-6E8A-4147-A177-3AD203B41FA5}">
-                      <a16:colId xmlns:a16="http://schemas.microsoft.com/office/drawing/2014/main" val="3886729575"/>
-                    </a:ext>
-                  </a:extLst>
-                </a:gridCol>
-                <a:gridCol w="1674187">
-                  <a:extLst>
-                    <a:ext uri="{9D8B030D-6E8A-4147-A177-3AD203B41FA5}">
-                      <a16:colId xmlns:a16="http://schemas.microsoft.com/office/drawing/2014/main" val="647650561"/>
-                    </a:ext>
-                  </a:extLst>
-                </a:gridCol>
-                <a:gridCol w="1674187">
-                  <a:extLst>
-                    <a:ext uri="{9D8B030D-6E8A-4147-A177-3AD203B41FA5}">
-                      <a16:colId xmlns:a16="http://schemas.microsoft.com/office/drawing/2014/main" val="1767356684"/>
-                    </a:ext>
-                  </a:extLst>
-                </a:gridCol>
-                <a:gridCol w="1674187">
-                  <a:extLst>
-                    <a:ext uri="{9D8B030D-6E8A-4147-A177-3AD203B41FA5}">
-                      <a16:colId xmlns:a16="http://schemas.microsoft.com/office/drawing/2014/main" val="2444873677"/>
-                    </a:ext>
-                  </a:extLst>
-                </a:gridCol>
-              </a:tblGrid>
-              <a:tr h="530809">
-                <a:tc>
-                  <a:txBody>
-                    <a:bodyPr/>
-                    <a:lstStyle/>
-                    <a:p>
-                      <a:r>
-                        <a:rPr lang="en-US" sz="1500" b="1" dirty="0">
-                          <a:solidFill>
-                            <a:srgbClr val="000000"/>
-                          </a:solidFill>
-                          <a:effectLst/>
-                        </a:rPr>
-                        <a:t>Interface</a:t>
-                      </a:r>
-                    </a:p>
-                  </a:txBody>
-                  <a:tcPr marL="70127" marR="70127" marT="32366" marB="32366" anchor="ctr">
-                    <a:lnL w="6350" cap="flat" cmpd="sng" algn="ctr">
-                      <a:solidFill>
-                        <a:srgbClr val="D6D6D6"/>
-                      </a:solidFill>
-                      <a:prstDash val="solid"/>
-                      <a:round/>
-                      <a:headEnd type="none" w="med" len="med"/>
-                      <a:tailEnd type="none" w="med" len="med"/>
-                    </a:lnL>
-                    <a:lnR w="6350" cap="flat" cmpd="sng" algn="ctr">
-                      <a:solidFill>
-                        <a:srgbClr val="D6D6D6"/>
-                      </a:solidFill>
-                      <a:prstDash val="solid"/>
-                      <a:round/>
-                      <a:headEnd type="none" w="med" len="med"/>
-                      <a:tailEnd type="none" w="med" len="med"/>
-                    </a:lnR>
-                    <a:lnT w="6350" cap="flat" cmpd="sng" algn="ctr">
-                      <a:solidFill>
-                        <a:srgbClr val="D6D6D6"/>
-                      </a:solidFill>
-                      <a:prstDash val="solid"/>
-                      <a:round/>
-                      <a:headEnd type="none" w="med" len="med"/>
-                      <a:tailEnd type="none" w="med" len="med"/>
-                    </a:lnT>
-                    <a:lnB w="6350" cap="flat" cmpd="sng" algn="ctr">
-                      <a:solidFill>
-                        <a:srgbClr val="D6D6D6"/>
-                      </a:solidFill>
-                      <a:prstDash val="solid"/>
-                      <a:round/>
-                      <a:headEnd type="none" w="med" len="med"/>
-                      <a:tailEnd type="none" w="med" len="med"/>
-                    </a:lnB>
-                    <a:solidFill>
-                      <a:srgbClr val="FFFFFF"/>
-                    </a:solidFill>
-                  </a:tcPr>
-                </a:tc>
-                <a:tc>
-                  <a:txBody>
-                    <a:bodyPr/>
-                    <a:lstStyle/>
-                    <a:p>
-                      <a:r>
-                        <a:rPr lang="en-US" sz="1500" b="1">
-                          <a:solidFill>
-                            <a:srgbClr val="000000"/>
-                          </a:solidFill>
-                          <a:effectLst/>
-                        </a:rPr>
-                        <a:t>Entrée</a:t>
-                      </a:r>
-                    </a:p>
-                  </a:txBody>
-                  <a:tcPr marL="70127" marR="70127" marT="32366" marB="32366" anchor="ctr">
-                    <a:lnL w="6350" cap="flat" cmpd="sng" algn="ctr">
-                      <a:solidFill>
-                        <a:srgbClr val="D6D6D6"/>
-                      </a:solidFill>
-                      <a:prstDash val="solid"/>
-                      <a:round/>
-                      <a:headEnd type="none" w="med" len="med"/>
-                      <a:tailEnd type="none" w="med" len="med"/>
-                    </a:lnL>
-                    <a:lnR w="6350" cap="flat" cmpd="sng" algn="ctr">
-                      <a:solidFill>
-                        <a:srgbClr val="D6D6D6"/>
-                      </a:solidFill>
-                      <a:prstDash val="solid"/>
-                      <a:round/>
-                      <a:headEnd type="none" w="med" len="med"/>
-                      <a:tailEnd type="none" w="med" len="med"/>
-                    </a:lnR>
-                    <a:lnT w="6350" cap="flat" cmpd="sng" algn="ctr">
-                      <a:solidFill>
-                        <a:srgbClr val="D6D6D6"/>
-                      </a:solidFill>
-                      <a:prstDash val="solid"/>
-                      <a:round/>
-                      <a:headEnd type="none" w="med" len="med"/>
-                      <a:tailEnd type="none" w="med" len="med"/>
-                    </a:lnT>
-                    <a:lnB w="6350" cap="flat" cmpd="sng" algn="ctr">
-                      <a:solidFill>
-                        <a:srgbClr val="D6D6D6"/>
-                      </a:solidFill>
-                      <a:prstDash val="solid"/>
-                      <a:round/>
-                      <a:headEnd type="none" w="med" len="med"/>
-                      <a:tailEnd type="none" w="med" len="med"/>
-                    </a:lnB>
-                    <a:solidFill>
-                      <a:srgbClr val="FFFFFF"/>
-                    </a:solidFill>
-                  </a:tcPr>
-                </a:tc>
-                <a:tc>
-                  <a:txBody>
-                    <a:bodyPr/>
-                    <a:lstStyle/>
-                    <a:p>
-                      <a:r>
-                        <a:rPr lang="en-US" sz="1500" b="1">
-                          <a:solidFill>
-                            <a:srgbClr val="000000"/>
-                          </a:solidFill>
-                          <a:effectLst/>
-                        </a:rPr>
-                        <a:t>Sortie</a:t>
-                      </a:r>
-                    </a:p>
-                  </a:txBody>
-                  <a:tcPr marL="70127" marR="70127" marT="32366" marB="32366" anchor="ctr">
-                    <a:lnL w="6350" cap="flat" cmpd="sng" algn="ctr">
-                      <a:solidFill>
-                        <a:srgbClr val="D6D6D6"/>
-                      </a:solidFill>
-                      <a:prstDash val="solid"/>
-                      <a:round/>
-                      <a:headEnd type="none" w="med" len="med"/>
-                      <a:tailEnd type="none" w="med" len="med"/>
-                    </a:lnL>
-                    <a:lnR w="6350" cap="flat" cmpd="sng" algn="ctr">
-                      <a:solidFill>
-                        <a:srgbClr val="D6D6D6"/>
-                      </a:solidFill>
-                      <a:prstDash val="solid"/>
-                      <a:round/>
-                      <a:headEnd type="none" w="med" len="med"/>
-                      <a:tailEnd type="none" w="med" len="med"/>
-                    </a:lnR>
-                    <a:lnT w="6350" cap="flat" cmpd="sng" algn="ctr">
-                      <a:solidFill>
-                        <a:srgbClr val="D6D6D6"/>
-                      </a:solidFill>
-                      <a:prstDash val="solid"/>
-                      <a:round/>
-                      <a:headEnd type="none" w="med" len="med"/>
-                      <a:tailEnd type="none" w="med" len="med"/>
-                    </a:lnT>
-                    <a:lnB w="6350" cap="flat" cmpd="sng" algn="ctr">
-                      <a:solidFill>
-                        <a:srgbClr val="D6D6D6"/>
-                      </a:solidFill>
-                      <a:prstDash val="solid"/>
-                      <a:round/>
-                      <a:headEnd type="none" w="med" len="med"/>
-                      <a:tailEnd type="none" w="med" len="med"/>
-                    </a:lnB>
-                    <a:solidFill>
-                      <a:srgbClr val="FFFFFF"/>
-                    </a:solidFill>
-                  </a:tcPr>
-                </a:tc>
-                <a:tc>
-                  <a:txBody>
-                    <a:bodyPr/>
-                    <a:lstStyle/>
-                    <a:p>
-                      <a:r>
-                        <a:rPr lang="en-US" sz="1500" b="1">
-                          <a:solidFill>
-                            <a:srgbClr val="000000"/>
-                          </a:solidFill>
-                          <a:effectLst/>
-                        </a:rPr>
-                        <a:t>Usage</a:t>
-                      </a:r>
-                    </a:p>
-                  </a:txBody>
-                  <a:tcPr marL="70127" marR="70127" marT="32366" marB="32366" anchor="ctr">
-                    <a:lnL w="6350" cap="flat" cmpd="sng" algn="ctr">
-                      <a:solidFill>
-                        <a:srgbClr val="D6D6D6"/>
-                      </a:solidFill>
-                      <a:prstDash val="solid"/>
-                      <a:round/>
-                      <a:headEnd type="none" w="med" len="med"/>
-                      <a:tailEnd type="none" w="med" len="med"/>
-                    </a:lnL>
-                    <a:lnR w="6350" cap="flat" cmpd="sng" algn="ctr">
-                      <a:solidFill>
-                        <a:srgbClr val="D6D6D6"/>
-                      </a:solidFill>
-                      <a:prstDash val="solid"/>
-                      <a:round/>
-                      <a:headEnd type="none" w="med" len="med"/>
-                      <a:tailEnd type="none" w="med" len="med"/>
-                    </a:lnR>
-                    <a:lnT w="6350" cap="flat" cmpd="sng" algn="ctr">
-                      <a:solidFill>
-                        <a:srgbClr val="D6D6D6"/>
-                      </a:solidFill>
-                      <a:prstDash val="solid"/>
-                      <a:round/>
-                      <a:headEnd type="none" w="med" len="med"/>
-                      <a:tailEnd type="none" w="med" len="med"/>
-                    </a:lnT>
-                    <a:lnB w="6350" cap="flat" cmpd="sng" algn="ctr">
-                      <a:solidFill>
-                        <a:srgbClr val="D6D6D6"/>
-                      </a:solidFill>
-                      <a:prstDash val="solid"/>
-                      <a:round/>
-                      <a:headEnd type="none" w="med" len="med"/>
-                      <a:tailEnd type="none" w="med" len="med"/>
-                    </a:lnB>
-                    <a:solidFill>
-                      <a:srgbClr val="FFFFFF"/>
-                    </a:solidFill>
-                  </a:tcPr>
-                </a:tc>
-                <a:extLst>
-                  <a:ext uri="{0D108BD9-81ED-4DB2-BD59-A6C34878D82A}">
-                    <a16:rowId xmlns:a16="http://schemas.microsoft.com/office/drawing/2014/main" val="347353883"/>
-                  </a:ext>
-                </a:extLst>
-              </a:tr>
-              <a:tr h="996885">
-                <a:tc>
-                  <a:txBody>
-                    <a:bodyPr/>
-                    <a:lstStyle/>
-                    <a:p>
-                      <a:r>
-                        <a:rPr lang="en-US" sz="1500" b="1" dirty="0">
-                          <a:effectLst/>
-                        </a:rPr>
-                        <a:t>Predicate&lt;T&gt;</a:t>
-                      </a:r>
-                    </a:p>
-                  </a:txBody>
-                  <a:tcPr marL="70127" marR="70127" marT="32366" marB="32366" anchor="ctr">
-                    <a:lnL w="6350" cap="flat" cmpd="sng" algn="ctr">
-                      <a:solidFill>
-                        <a:srgbClr val="D6D6D6"/>
-                      </a:solidFill>
-                      <a:prstDash val="solid"/>
-                      <a:round/>
-                      <a:headEnd type="none" w="med" len="med"/>
-                      <a:tailEnd type="none" w="med" len="med"/>
-                    </a:lnL>
-                    <a:lnR w="6350" cap="flat" cmpd="sng" algn="ctr">
-                      <a:solidFill>
-                        <a:srgbClr val="D6D6D6"/>
-                      </a:solidFill>
-                      <a:prstDash val="solid"/>
-                      <a:round/>
-                      <a:headEnd type="none" w="med" len="med"/>
-                      <a:tailEnd type="none" w="med" len="med"/>
-                    </a:lnR>
-                    <a:lnT w="6350" cap="flat" cmpd="sng" algn="ctr">
-                      <a:solidFill>
-                        <a:srgbClr val="D6D6D6"/>
-                      </a:solidFill>
-                      <a:prstDash val="solid"/>
-                      <a:round/>
-                      <a:headEnd type="none" w="med" len="med"/>
-                      <a:tailEnd type="none" w="med" len="med"/>
-                    </a:lnT>
-                    <a:lnB w="6350" cap="flat" cmpd="sng" algn="ctr">
-                      <a:solidFill>
-                        <a:srgbClr val="D6D6D6"/>
-                      </a:solidFill>
-                      <a:prstDash val="solid"/>
-                      <a:round/>
-                      <a:headEnd type="none" w="med" len="med"/>
-                      <a:tailEnd type="none" w="med" len="med"/>
-                    </a:lnB>
-                    <a:solidFill>
-                      <a:srgbClr val="FFFFFF"/>
-                    </a:solidFill>
-                  </a:tcPr>
-                </a:tc>
-                <a:tc>
-                  <a:txBody>
-                    <a:bodyPr/>
-                    <a:lstStyle/>
-                    <a:p>
-                      <a:r>
-                        <a:rPr lang="en-US" sz="1500" dirty="0">
-                          <a:effectLst/>
-                        </a:rPr>
-                        <a:t>T</a:t>
-                      </a:r>
-                    </a:p>
-                  </a:txBody>
-                  <a:tcPr marL="70127" marR="70127" marT="32366" marB="32366" anchor="ctr">
-                    <a:lnL w="6350" cap="flat" cmpd="sng" algn="ctr">
-                      <a:solidFill>
-                        <a:srgbClr val="D6D6D6"/>
-                      </a:solidFill>
-                      <a:prstDash val="solid"/>
-                      <a:round/>
-                      <a:headEnd type="none" w="med" len="med"/>
-                      <a:tailEnd type="none" w="med" len="med"/>
-                    </a:lnL>
-                    <a:lnR w="6350" cap="flat" cmpd="sng" algn="ctr">
-                      <a:solidFill>
-                        <a:srgbClr val="D6D6D6"/>
-                      </a:solidFill>
-                      <a:prstDash val="solid"/>
-                      <a:round/>
-                      <a:headEnd type="none" w="med" len="med"/>
-                      <a:tailEnd type="none" w="med" len="med"/>
-                    </a:lnR>
-                    <a:lnT w="6350" cap="flat" cmpd="sng" algn="ctr">
-                      <a:solidFill>
-                        <a:srgbClr val="D6D6D6"/>
-                      </a:solidFill>
-                      <a:prstDash val="solid"/>
-                      <a:round/>
-                      <a:headEnd type="none" w="med" len="med"/>
-                      <a:tailEnd type="none" w="med" len="med"/>
-                    </a:lnT>
-                    <a:lnB w="6350" cap="flat" cmpd="sng" algn="ctr">
-                      <a:solidFill>
-                        <a:srgbClr val="D6D6D6"/>
-                      </a:solidFill>
-                      <a:prstDash val="solid"/>
-                      <a:round/>
-                      <a:headEnd type="none" w="med" len="med"/>
-                      <a:tailEnd type="none" w="med" len="med"/>
-                    </a:lnB>
-                    <a:solidFill>
-                      <a:srgbClr val="FFFFFF"/>
-                    </a:solidFill>
-                  </a:tcPr>
-                </a:tc>
-                <a:tc>
-                  <a:txBody>
-                    <a:bodyPr/>
-                    <a:lstStyle/>
-                    <a:p>
-                      <a:r>
-                        <a:rPr lang="en-US" sz="1500" dirty="0" err="1">
-                          <a:effectLst/>
-                        </a:rPr>
-                        <a:t>boolean</a:t>
-                      </a:r>
-                      <a:endParaRPr lang="en-US" sz="1500" dirty="0">
-                        <a:effectLst/>
-                      </a:endParaRPr>
-                    </a:p>
-                  </a:txBody>
-                  <a:tcPr marL="70127" marR="70127" marT="32366" marB="32366" anchor="ctr">
-                    <a:lnL w="6350" cap="flat" cmpd="sng" algn="ctr">
-                      <a:solidFill>
-                        <a:srgbClr val="D6D6D6"/>
-                      </a:solidFill>
-                      <a:prstDash val="solid"/>
-                      <a:round/>
-                      <a:headEnd type="none" w="med" len="med"/>
-                      <a:tailEnd type="none" w="med" len="med"/>
-                    </a:lnL>
-                    <a:lnR w="6350" cap="flat" cmpd="sng" algn="ctr">
-                      <a:solidFill>
-                        <a:srgbClr val="D6D6D6"/>
-                      </a:solidFill>
-                      <a:prstDash val="solid"/>
-                      <a:round/>
-                      <a:headEnd type="none" w="med" len="med"/>
-                      <a:tailEnd type="none" w="med" len="med"/>
-                    </a:lnR>
-                    <a:lnT w="6350" cap="flat" cmpd="sng" algn="ctr">
-                      <a:solidFill>
-                        <a:srgbClr val="D6D6D6"/>
-                      </a:solidFill>
-                      <a:prstDash val="solid"/>
-                      <a:round/>
-                      <a:headEnd type="none" w="med" len="med"/>
-                      <a:tailEnd type="none" w="med" len="med"/>
-                    </a:lnT>
-                    <a:lnB w="6350" cap="flat" cmpd="sng" algn="ctr">
-                      <a:solidFill>
-                        <a:srgbClr val="D6D6D6"/>
-                      </a:solidFill>
-                      <a:prstDash val="solid"/>
-                      <a:round/>
-                      <a:headEnd type="none" w="med" len="med"/>
-                      <a:tailEnd type="none" w="med" len="med"/>
-                    </a:lnB>
-                    <a:solidFill>
-                      <a:srgbClr val="FFFFFF"/>
-                    </a:solidFill>
-                  </a:tcPr>
-                </a:tc>
-                <a:tc>
-                  <a:txBody>
-                    <a:bodyPr/>
-                    <a:lstStyle/>
-                    <a:p>
-                      <a:r>
-                        <a:rPr lang="en-US" sz="1500">
-                          <a:effectLst/>
-                        </a:rPr>
-                        <a:t>Tester une condition</a:t>
-                      </a:r>
-                    </a:p>
-                  </a:txBody>
-                  <a:tcPr marL="70127" marR="70127" marT="32366" marB="32366" anchor="ctr">
-                    <a:lnL w="6350" cap="flat" cmpd="sng" algn="ctr">
-                      <a:solidFill>
-                        <a:srgbClr val="D6D6D6"/>
-                      </a:solidFill>
-                      <a:prstDash val="solid"/>
-                      <a:round/>
-                      <a:headEnd type="none" w="med" len="med"/>
-                      <a:tailEnd type="none" w="med" len="med"/>
-                    </a:lnL>
-                    <a:lnR w="6350" cap="flat" cmpd="sng" algn="ctr">
-                      <a:solidFill>
-                        <a:srgbClr val="D6D6D6"/>
-                      </a:solidFill>
-                      <a:prstDash val="solid"/>
-                      <a:round/>
-                      <a:headEnd type="none" w="med" len="med"/>
-                      <a:tailEnd type="none" w="med" len="med"/>
-                    </a:lnR>
-                    <a:lnT w="6350" cap="flat" cmpd="sng" algn="ctr">
-                      <a:solidFill>
-                        <a:srgbClr val="D6D6D6"/>
-                      </a:solidFill>
-                      <a:prstDash val="solid"/>
-                      <a:round/>
-                      <a:headEnd type="none" w="med" len="med"/>
-                      <a:tailEnd type="none" w="med" len="med"/>
-                    </a:lnT>
-                    <a:lnB w="6350" cap="flat" cmpd="sng" algn="ctr">
-                      <a:solidFill>
-                        <a:srgbClr val="D6D6D6"/>
-                      </a:solidFill>
-                      <a:prstDash val="solid"/>
-                      <a:round/>
-                      <a:headEnd type="none" w="med" len="med"/>
-                      <a:tailEnd type="none" w="med" len="med"/>
-                    </a:lnB>
-                    <a:solidFill>
-                      <a:srgbClr val="FFFFFF"/>
-                    </a:solidFill>
-                  </a:tcPr>
-                </a:tc>
-                <a:extLst>
-                  <a:ext uri="{0D108BD9-81ED-4DB2-BD59-A6C34878D82A}">
-                    <a16:rowId xmlns:a16="http://schemas.microsoft.com/office/drawing/2014/main" val="3226352889"/>
-                  </a:ext>
-                </a:extLst>
-              </a:tr>
-              <a:tr h="1229923">
-                <a:tc>
-                  <a:txBody>
-                    <a:bodyPr/>
-                    <a:lstStyle/>
-                    <a:p>
-                      <a:r>
-                        <a:rPr lang="en-US" sz="1500" b="1" dirty="0">
-                          <a:effectLst/>
-                        </a:rPr>
-                        <a:t>Function&lt;T,R&gt;</a:t>
-                      </a:r>
-                    </a:p>
-                  </a:txBody>
-                  <a:tcPr marL="70127" marR="70127" marT="32366" marB="32366" anchor="ctr">
-                    <a:lnL w="6350" cap="flat" cmpd="sng" algn="ctr">
-                      <a:solidFill>
-                        <a:srgbClr val="D6D6D6"/>
-                      </a:solidFill>
-                      <a:prstDash val="solid"/>
-                      <a:round/>
-                      <a:headEnd type="none" w="med" len="med"/>
-                      <a:tailEnd type="none" w="med" len="med"/>
-                    </a:lnL>
-                    <a:lnR w="6350" cap="flat" cmpd="sng" algn="ctr">
-                      <a:solidFill>
-                        <a:srgbClr val="D6D6D6"/>
-                      </a:solidFill>
-                      <a:prstDash val="solid"/>
-                      <a:round/>
-                      <a:headEnd type="none" w="med" len="med"/>
-                      <a:tailEnd type="none" w="med" len="med"/>
-                    </a:lnR>
-                    <a:lnT w="6350" cap="flat" cmpd="sng" algn="ctr">
-                      <a:solidFill>
-                        <a:srgbClr val="D6D6D6"/>
-                      </a:solidFill>
-                      <a:prstDash val="solid"/>
-                      <a:round/>
-                      <a:headEnd type="none" w="med" len="med"/>
-                      <a:tailEnd type="none" w="med" len="med"/>
-                    </a:lnT>
-                    <a:lnB w="6350" cap="flat" cmpd="sng" algn="ctr">
-                      <a:solidFill>
-                        <a:srgbClr val="D6D6D6"/>
-                      </a:solidFill>
-                      <a:prstDash val="solid"/>
-                      <a:round/>
-                      <a:headEnd type="none" w="med" len="med"/>
-                      <a:tailEnd type="none" w="med" len="med"/>
-                    </a:lnB>
-                    <a:solidFill>
-                      <a:srgbClr val="FFFFFF"/>
-                    </a:solidFill>
-                  </a:tcPr>
-                </a:tc>
-                <a:tc>
-                  <a:txBody>
-                    <a:bodyPr/>
-                    <a:lstStyle/>
-                    <a:p>
-                      <a:r>
-                        <a:rPr lang="en-US" sz="1500" dirty="0">
-                          <a:effectLst/>
-                        </a:rPr>
-                        <a:t>T</a:t>
-                      </a:r>
-                    </a:p>
-                  </a:txBody>
-                  <a:tcPr marL="70127" marR="70127" marT="32366" marB="32366" anchor="ctr">
-                    <a:lnL w="6350" cap="flat" cmpd="sng" algn="ctr">
-                      <a:solidFill>
-                        <a:srgbClr val="D6D6D6"/>
-                      </a:solidFill>
-                      <a:prstDash val="solid"/>
-                      <a:round/>
-                      <a:headEnd type="none" w="med" len="med"/>
-                      <a:tailEnd type="none" w="med" len="med"/>
-                    </a:lnL>
-                    <a:lnR w="6350" cap="flat" cmpd="sng" algn="ctr">
-                      <a:solidFill>
-                        <a:srgbClr val="D6D6D6"/>
-                      </a:solidFill>
-                      <a:prstDash val="solid"/>
-                      <a:round/>
-                      <a:headEnd type="none" w="med" len="med"/>
-                      <a:tailEnd type="none" w="med" len="med"/>
-                    </a:lnR>
-                    <a:lnT w="6350" cap="flat" cmpd="sng" algn="ctr">
-                      <a:solidFill>
-                        <a:srgbClr val="D6D6D6"/>
-                      </a:solidFill>
-                      <a:prstDash val="solid"/>
-                      <a:round/>
-                      <a:headEnd type="none" w="med" len="med"/>
-                      <a:tailEnd type="none" w="med" len="med"/>
-                    </a:lnT>
-                    <a:lnB w="6350" cap="flat" cmpd="sng" algn="ctr">
-                      <a:solidFill>
-                        <a:srgbClr val="D6D6D6"/>
-                      </a:solidFill>
-                      <a:prstDash val="solid"/>
-                      <a:round/>
-                      <a:headEnd type="none" w="med" len="med"/>
-                      <a:tailEnd type="none" w="med" len="med"/>
-                    </a:lnB>
-                    <a:solidFill>
-                      <a:srgbClr val="FFFFFF"/>
-                    </a:solidFill>
-                  </a:tcPr>
-                </a:tc>
-                <a:tc>
-                  <a:txBody>
-                    <a:bodyPr/>
-                    <a:lstStyle/>
-                    <a:p>
-                      <a:r>
-                        <a:rPr lang="en-US" sz="1500" dirty="0">
-                          <a:effectLst/>
-                        </a:rPr>
-                        <a:t>R</a:t>
-                      </a:r>
-                    </a:p>
-                  </a:txBody>
-                  <a:tcPr marL="70127" marR="70127" marT="32366" marB="32366" anchor="ctr">
-                    <a:lnL w="6350" cap="flat" cmpd="sng" algn="ctr">
-                      <a:solidFill>
-                        <a:srgbClr val="D6D6D6"/>
-                      </a:solidFill>
-                      <a:prstDash val="solid"/>
-                      <a:round/>
-                      <a:headEnd type="none" w="med" len="med"/>
-                      <a:tailEnd type="none" w="med" len="med"/>
-                    </a:lnL>
-                    <a:lnR w="6350" cap="flat" cmpd="sng" algn="ctr">
-                      <a:solidFill>
-                        <a:srgbClr val="D6D6D6"/>
-                      </a:solidFill>
-                      <a:prstDash val="solid"/>
-                      <a:round/>
-                      <a:headEnd type="none" w="med" len="med"/>
-                      <a:tailEnd type="none" w="med" len="med"/>
-                    </a:lnR>
-                    <a:lnT w="6350" cap="flat" cmpd="sng" algn="ctr">
-                      <a:solidFill>
-                        <a:srgbClr val="D6D6D6"/>
-                      </a:solidFill>
-                      <a:prstDash val="solid"/>
-                      <a:round/>
-                      <a:headEnd type="none" w="med" len="med"/>
-                      <a:tailEnd type="none" w="med" len="med"/>
-                    </a:lnT>
-                    <a:lnB w="6350" cap="flat" cmpd="sng" algn="ctr">
-                      <a:solidFill>
-                        <a:srgbClr val="D6D6D6"/>
-                      </a:solidFill>
-                      <a:prstDash val="solid"/>
-                      <a:round/>
-                      <a:headEnd type="none" w="med" len="med"/>
-                      <a:tailEnd type="none" w="med" len="med"/>
-                    </a:lnB>
-                    <a:solidFill>
-                      <a:srgbClr val="FFFFFF"/>
-                    </a:solidFill>
-                  </a:tcPr>
-                </a:tc>
-                <a:tc>
-                  <a:txBody>
-                    <a:bodyPr/>
-                    <a:lstStyle/>
-                    <a:p>
-                      <a:r>
-                        <a:rPr lang="en-US" sz="1500">
-                          <a:effectLst/>
-                        </a:rPr>
-                        <a:t>Transformer un élément</a:t>
-                      </a:r>
-                    </a:p>
-                  </a:txBody>
-                  <a:tcPr marL="70127" marR="70127" marT="32366" marB="32366" anchor="ctr">
-                    <a:lnL w="6350" cap="flat" cmpd="sng" algn="ctr">
-                      <a:solidFill>
-                        <a:srgbClr val="D6D6D6"/>
-                      </a:solidFill>
-                      <a:prstDash val="solid"/>
-                      <a:round/>
-                      <a:headEnd type="none" w="med" len="med"/>
-                      <a:tailEnd type="none" w="med" len="med"/>
-                    </a:lnL>
-                    <a:lnR w="6350" cap="flat" cmpd="sng" algn="ctr">
-                      <a:solidFill>
-                        <a:srgbClr val="D6D6D6"/>
-                      </a:solidFill>
-                      <a:prstDash val="solid"/>
-                      <a:round/>
-                      <a:headEnd type="none" w="med" len="med"/>
-                      <a:tailEnd type="none" w="med" len="med"/>
-                    </a:lnR>
-                    <a:lnT w="6350" cap="flat" cmpd="sng" algn="ctr">
-                      <a:solidFill>
-                        <a:srgbClr val="D6D6D6"/>
-                      </a:solidFill>
-                      <a:prstDash val="solid"/>
-                      <a:round/>
-                      <a:headEnd type="none" w="med" len="med"/>
-                      <a:tailEnd type="none" w="med" len="med"/>
-                    </a:lnT>
-                    <a:lnB w="6350" cap="flat" cmpd="sng" algn="ctr">
-                      <a:solidFill>
-                        <a:srgbClr val="D6D6D6"/>
-                      </a:solidFill>
-                      <a:prstDash val="solid"/>
-                      <a:round/>
-                      <a:headEnd type="none" w="med" len="med"/>
-                      <a:tailEnd type="none" w="med" len="med"/>
-                    </a:lnB>
-                    <a:solidFill>
-                      <a:srgbClr val="FFFFFF"/>
-                    </a:solidFill>
-                  </a:tcPr>
-                </a:tc>
-                <a:extLst>
-                  <a:ext uri="{0D108BD9-81ED-4DB2-BD59-A6C34878D82A}">
-                    <a16:rowId xmlns:a16="http://schemas.microsoft.com/office/drawing/2014/main" val="3343540537"/>
-                  </a:ext>
-                </a:extLst>
-              </a:tr>
-              <a:tr h="1229923">
-                <a:tc>
-                  <a:txBody>
-                    <a:bodyPr/>
-                    <a:lstStyle/>
-                    <a:p>
-                      <a:r>
-                        <a:rPr lang="en-US" sz="1500" b="1" dirty="0">
-                          <a:effectLst/>
-                        </a:rPr>
-                        <a:t>Consumer&lt;T&gt;</a:t>
-                      </a:r>
-                    </a:p>
-                  </a:txBody>
-                  <a:tcPr marL="70127" marR="70127" marT="32366" marB="32366" anchor="ctr">
-                    <a:lnL w="6350" cap="flat" cmpd="sng" algn="ctr">
-                      <a:solidFill>
-                        <a:srgbClr val="D6D6D6"/>
-                      </a:solidFill>
-                      <a:prstDash val="solid"/>
-                      <a:round/>
-                      <a:headEnd type="none" w="med" len="med"/>
-                      <a:tailEnd type="none" w="med" len="med"/>
-                    </a:lnL>
-                    <a:lnR w="6350" cap="flat" cmpd="sng" algn="ctr">
-                      <a:solidFill>
-                        <a:srgbClr val="D6D6D6"/>
-                      </a:solidFill>
-                      <a:prstDash val="solid"/>
-                      <a:round/>
-                      <a:headEnd type="none" w="med" len="med"/>
-                      <a:tailEnd type="none" w="med" len="med"/>
-                    </a:lnR>
-                    <a:lnT w="6350" cap="flat" cmpd="sng" algn="ctr">
-                      <a:solidFill>
-                        <a:srgbClr val="D6D6D6"/>
-                      </a:solidFill>
-                      <a:prstDash val="solid"/>
-                      <a:round/>
-                      <a:headEnd type="none" w="med" len="med"/>
-                      <a:tailEnd type="none" w="med" len="med"/>
-                    </a:lnT>
-                    <a:lnB w="6350" cap="flat" cmpd="sng" algn="ctr">
-                      <a:solidFill>
-                        <a:srgbClr val="D6D6D6"/>
-                      </a:solidFill>
-                      <a:prstDash val="solid"/>
-                      <a:round/>
-                      <a:headEnd type="none" w="med" len="med"/>
-                      <a:tailEnd type="none" w="med" len="med"/>
-                    </a:lnB>
-                    <a:solidFill>
-                      <a:srgbClr val="FFFFFF"/>
-                    </a:solidFill>
-                  </a:tcPr>
-                </a:tc>
-                <a:tc>
-                  <a:txBody>
-                    <a:bodyPr/>
-                    <a:lstStyle/>
-                    <a:p>
-                      <a:r>
-                        <a:rPr lang="en-US" sz="1500">
-                          <a:effectLst/>
-                        </a:rPr>
-                        <a:t>T</a:t>
-                      </a:r>
-                    </a:p>
-                  </a:txBody>
-                  <a:tcPr marL="70127" marR="70127" marT="32366" marB="32366" anchor="ctr">
-                    <a:lnL w="6350" cap="flat" cmpd="sng" algn="ctr">
-                      <a:solidFill>
-                        <a:srgbClr val="D6D6D6"/>
-                      </a:solidFill>
-                      <a:prstDash val="solid"/>
-                      <a:round/>
-                      <a:headEnd type="none" w="med" len="med"/>
-                      <a:tailEnd type="none" w="med" len="med"/>
-                    </a:lnL>
-                    <a:lnR w="6350" cap="flat" cmpd="sng" algn="ctr">
-                      <a:solidFill>
-                        <a:srgbClr val="D6D6D6"/>
-                      </a:solidFill>
-                      <a:prstDash val="solid"/>
-                      <a:round/>
-                      <a:headEnd type="none" w="med" len="med"/>
-                      <a:tailEnd type="none" w="med" len="med"/>
-                    </a:lnR>
-                    <a:lnT w="6350" cap="flat" cmpd="sng" algn="ctr">
-                      <a:solidFill>
-                        <a:srgbClr val="D6D6D6"/>
-                      </a:solidFill>
-                      <a:prstDash val="solid"/>
-                      <a:round/>
-                      <a:headEnd type="none" w="med" len="med"/>
-                      <a:tailEnd type="none" w="med" len="med"/>
-                    </a:lnT>
-                    <a:lnB w="6350" cap="flat" cmpd="sng" algn="ctr">
-                      <a:solidFill>
-                        <a:srgbClr val="D6D6D6"/>
-                      </a:solidFill>
-                      <a:prstDash val="solid"/>
-                      <a:round/>
-                      <a:headEnd type="none" w="med" len="med"/>
-                      <a:tailEnd type="none" w="med" len="med"/>
-                    </a:lnB>
-                    <a:solidFill>
-                      <a:srgbClr val="FFFFFF"/>
-                    </a:solidFill>
-                  </a:tcPr>
-                </a:tc>
-                <a:tc>
-                  <a:txBody>
-                    <a:bodyPr/>
-                    <a:lstStyle/>
-                    <a:p>
-                      <a:r>
-                        <a:rPr lang="en-US" sz="1500" dirty="0">
-                          <a:effectLst/>
-                        </a:rPr>
-                        <a:t>void</a:t>
-                      </a:r>
-                    </a:p>
-                  </a:txBody>
-                  <a:tcPr marL="70127" marR="70127" marT="32366" marB="32366" anchor="ctr">
-                    <a:lnL w="6350" cap="flat" cmpd="sng" algn="ctr">
-                      <a:solidFill>
-                        <a:srgbClr val="D6D6D6"/>
-                      </a:solidFill>
-                      <a:prstDash val="solid"/>
-                      <a:round/>
-                      <a:headEnd type="none" w="med" len="med"/>
-                      <a:tailEnd type="none" w="med" len="med"/>
-                    </a:lnL>
-                    <a:lnR w="6350" cap="flat" cmpd="sng" algn="ctr">
-                      <a:solidFill>
-                        <a:srgbClr val="D6D6D6"/>
-                      </a:solidFill>
-                      <a:prstDash val="solid"/>
-                      <a:round/>
-                      <a:headEnd type="none" w="med" len="med"/>
-                      <a:tailEnd type="none" w="med" len="med"/>
-                    </a:lnR>
-                    <a:lnT w="6350" cap="flat" cmpd="sng" algn="ctr">
-                      <a:solidFill>
-                        <a:srgbClr val="D6D6D6"/>
-                      </a:solidFill>
-                      <a:prstDash val="solid"/>
-                      <a:round/>
-                      <a:headEnd type="none" w="med" len="med"/>
-                      <a:tailEnd type="none" w="med" len="med"/>
-                    </a:lnT>
-                    <a:lnB w="6350" cap="flat" cmpd="sng" algn="ctr">
-                      <a:solidFill>
-                        <a:srgbClr val="D6D6D6"/>
-                      </a:solidFill>
-                      <a:prstDash val="solid"/>
-                      <a:round/>
-                      <a:headEnd type="none" w="med" len="med"/>
-                      <a:tailEnd type="none" w="med" len="med"/>
-                    </a:lnB>
-                    <a:solidFill>
-                      <a:srgbClr val="FFFFFF"/>
-                    </a:solidFill>
-                  </a:tcPr>
-                </a:tc>
-                <a:tc>
-                  <a:txBody>
-                    <a:bodyPr/>
-                    <a:lstStyle/>
-                    <a:p>
-                      <a:r>
-                        <a:rPr lang="en-US" sz="1500" dirty="0" err="1">
-                          <a:effectLst/>
-                        </a:rPr>
-                        <a:t>Consommer</a:t>
-                      </a:r>
-                      <a:r>
-                        <a:rPr lang="en-US" sz="1500" dirty="0">
-                          <a:effectLst/>
-                        </a:rPr>
-                        <a:t> (ex: </a:t>
-                      </a:r>
-                      <a:r>
-                        <a:rPr lang="en-US" sz="1500" dirty="0" err="1">
-                          <a:effectLst/>
-                        </a:rPr>
-                        <a:t>afficher</a:t>
-                      </a:r>
-                      <a:r>
-                        <a:rPr lang="en-US" sz="1500" dirty="0">
-                          <a:effectLst/>
-                        </a:rPr>
-                        <a:t>)</a:t>
-                      </a:r>
-                    </a:p>
-                  </a:txBody>
-                  <a:tcPr marL="70127" marR="70127" marT="32366" marB="32366" anchor="ctr">
-                    <a:lnL w="6350" cap="flat" cmpd="sng" algn="ctr">
-                      <a:solidFill>
-                        <a:srgbClr val="D6D6D6"/>
-                      </a:solidFill>
-                      <a:prstDash val="solid"/>
-                      <a:round/>
-                      <a:headEnd type="none" w="med" len="med"/>
-                      <a:tailEnd type="none" w="med" len="med"/>
-                    </a:lnL>
-                    <a:lnR w="6350" cap="flat" cmpd="sng" algn="ctr">
-                      <a:solidFill>
-                        <a:srgbClr val="D6D6D6"/>
-                      </a:solidFill>
-                      <a:prstDash val="solid"/>
-                      <a:round/>
-                      <a:headEnd type="none" w="med" len="med"/>
-                      <a:tailEnd type="none" w="med" len="med"/>
-                    </a:lnR>
-                    <a:lnT w="6350" cap="flat" cmpd="sng" algn="ctr">
-                      <a:solidFill>
-                        <a:srgbClr val="D6D6D6"/>
-                      </a:solidFill>
-                      <a:prstDash val="solid"/>
-                      <a:round/>
-                      <a:headEnd type="none" w="med" len="med"/>
-                      <a:tailEnd type="none" w="med" len="med"/>
-                    </a:lnT>
-                    <a:lnB w="6350" cap="flat" cmpd="sng" algn="ctr">
-                      <a:solidFill>
-                        <a:srgbClr val="D6D6D6"/>
-                      </a:solidFill>
-                      <a:prstDash val="solid"/>
-                      <a:round/>
-                      <a:headEnd type="none" w="med" len="med"/>
-                      <a:tailEnd type="none" w="med" len="med"/>
-                    </a:lnB>
-                    <a:solidFill>
-                      <a:srgbClr val="FFFFFF"/>
-                    </a:solidFill>
-                  </a:tcPr>
-                </a:tc>
-                <a:extLst>
-                  <a:ext uri="{0D108BD9-81ED-4DB2-BD59-A6C34878D82A}">
-                    <a16:rowId xmlns:a16="http://schemas.microsoft.com/office/drawing/2014/main" val="1292434906"/>
-                  </a:ext>
-                </a:extLst>
-              </a:tr>
-            </a:tbl>
-          </a:graphicData>
-        </a:graphic>
-      </p:graphicFrame>
       <p:sp>
         <p:nvSpPr>
           <p:cNvPr id="5" name="TextBox 4"/>
@@ -11777,7 +11280,7 @@
         <p:spPr>
           <a:xfrm>
             <a:off x="826316" y="910461"/>
-            <a:ext cx="8064896" cy="646331"/>
+            <a:ext cx="8064896" cy="1015663"/>
           </a:xfrm>
           <a:prstGeom prst="rect">
             <a:avLst/>
@@ -11790,93 +11293,171 @@
           </a:bodyPr>
           <a:lstStyle/>
           <a:p>
-            <a:r>
-              <a:rPr lang="en-US" b="1" dirty="0" smtClean="0"/>
+            <a:pPr algn="just"/>
+            <a:r>
+              <a:rPr lang="en-US" sz="2000" b="1" dirty="0" smtClean="0">
+                <a:latin typeface="Times New Roman" panose="02020603050405020304" pitchFamily="18" charset="0"/>
+                <a:cs typeface="Times New Roman" panose="02020603050405020304" pitchFamily="18" charset="0"/>
+              </a:rPr>
               <a:t>Interface </a:t>
             </a:r>
             <a:r>
-              <a:rPr lang="en-US" b="1" dirty="0" err="1" smtClean="0"/>
+              <a:rPr lang="en-US" sz="2000" b="1" dirty="0" err="1" smtClean="0">
+                <a:latin typeface="Times New Roman" panose="02020603050405020304" pitchFamily="18" charset="0"/>
+                <a:cs typeface="Times New Roman" panose="02020603050405020304" pitchFamily="18" charset="0"/>
+              </a:rPr>
               <a:t>Fonctionelles</a:t>
             </a:r>
             <a:r>
-              <a:rPr lang="en-US" b="1" dirty="0" smtClean="0"/>
+              <a:rPr lang="en-US" sz="2000" b="1" dirty="0" smtClean="0">
+                <a:latin typeface="Times New Roman" panose="02020603050405020304" pitchFamily="18" charset="0"/>
+                <a:cs typeface="Times New Roman" panose="02020603050405020304" pitchFamily="18" charset="0"/>
+              </a:rPr>
               <a:t> (</a:t>
             </a:r>
             <a:r>
-              <a:rPr lang="en-US" b="1" dirty="0" err="1" smtClean="0"/>
+              <a:rPr lang="en-US" sz="2000" b="1" dirty="0" err="1" smtClean="0">
+                <a:latin typeface="Times New Roman" panose="02020603050405020304" pitchFamily="18" charset="0"/>
+                <a:cs typeface="Times New Roman" panose="02020603050405020304" pitchFamily="18" charset="0"/>
+              </a:rPr>
               <a:t>possede</a:t>
             </a:r>
             <a:r>
-              <a:rPr lang="en-US" b="1" dirty="0" smtClean="0"/>
+              <a:rPr lang="en-US" sz="2000" b="1" dirty="0" smtClean="0">
+                <a:latin typeface="Times New Roman" panose="02020603050405020304" pitchFamily="18" charset="0"/>
+                <a:cs typeface="Times New Roman" panose="02020603050405020304" pitchFamily="18" charset="0"/>
+              </a:rPr>
               <a:t> </a:t>
             </a:r>
             <a:r>
-              <a:rPr lang="en-US" b="1" dirty="0" err="1" smtClean="0"/>
+              <a:rPr lang="en-US" sz="2000" b="1" dirty="0" err="1" smtClean="0">
+                <a:latin typeface="Times New Roman" panose="02020603050405020304" pitchFamily="18" charset="0"/>
+                <a:cs typeface="Times New Roman" panose="02020603050405020304" pitchFamily="18" charset="0"/>
+              </a:rPr>
               <a:t>une</a:t>
             </a:r>
             <a:r>
-              <a:rPr lang="en-US" b="1" dirty="0" smtClean="0"/>
+              <a:rPr lang="en-US" sz="2000" b="1" dirty="0" smtClean="0">
+                <a:latin typeface="Times New Roman" panose="02020603050405020304" pitchFamily="18" charset="0"/>
+                <a:cs typeface="Times New Roman" panose="02020603050405020304" pitchFamily="18" charset="0"/>
+              </a:rPr>
               <a:t> </a:t>
             </a:r>
             <a:r>
-              <a:rPr lang="en-US" b="1" dirty="0" err="1" smtClean="0"/>
+              <a:rPr lang="en-US" sz="2000" b="1" dirty="0" err="1" smtClean="0">
+                <a:latin typeface="Times New Roman" panose="02020603050405020304" pitchFamily="18" charset="0"/>
+                <a:cs typeface="Times New Roman" panose="02020603050405020304" pitchFamily="18" charset="0"/>
+              </a:rPr>
               <a:t>seule</a:t>
             </a:r>
             <a:r>
-              <a:rPr lang="en-US" b="1" dirty="0" smtClean="0"/>
+              <a:rPr lang="en-US" sz="2000" b="1" dirty="0" smtClean="0">
+                <a:latin typeface="Times New Roman" panose="02020603050405020304" pitchFamily="18" charset="0"/>
+                <a:cs typeface="Times New Roman" panose="02020603050405020304" pitchFamily="18" charset="0"/>
+              </a:rPr>
               <a:t> </a:t>
             </a:r>
             <a:r>
-              <a:rPr lang="en-US" b="1" dirty="0" err="1" smtClean="0"/>
+              <a:rPr lang="en-US" sz="2000" b="1" dirty="0" err="1" smtClean="0">
+                <a:latin typeface="Times New Roman" panose="02020603050405020304" pitchFamily="18" charset="0"/>
+                <a:cs typeface="Times New Roman" panose="02020603050405020304" pitchFamily="18" charset="0"/>
+              </a:rPr>
               <a:t>methode</a:t>
             </a:r>
             <a:r>
-              <a:rPr lang="en-US" b="1" dirty="0" smtClean="0"/>
+              <a:rPr lang="en-US" sz="2000" b="1" dirty="0" smtClean="0">
+                <a:latin typeface="Times New Roman" panose="02020603050405020304" pitchFamily="18" charset="0"/>
+                <a:cs typeface="Times New Roman" panose="02020603050405020304" pitchFamily="18" charset="0"/>
+              </a:rPr>
               <a:t> </a:t>
             </a:r>
             <a:r>
-              <a:rPr lang="en-US" b="1" dirty="0" err="1" smtClean="0"/>
+              <a:rPr lang="en-US" sz="2000" b="1" dirty="0" err="1" smtClean="0">
+                <a:latin typeface="Times New Roman" panose="02020603050405020304" pitchFamily="18" charset="0"/>
+                <a:cs typeface="Times New Roman" panose="02020603050405020304" pitchFamily="18" charset="0"/>
+              </a:rPr>
               <a:t>abstariate</a:t>
             </a:r>
             <a:r>
-              <a:rPr lang="en-US" b="1" dirty="0" smtClean="0"/>
-              <a:t>) </a:t>
-            </a:r>
-          </a:p>
-          <a:p>
-            <a:r>
-              <a:rPr lang="en-US" dirty="0" smtClean="0"/>
+              <a:rPr lang="en-US" sz="2000" b="1" dirty="0" smtClean="0">
+                <a:latin typeface="Times New Roman" panose="02020603050405020304" pitchFamily="18" charset="0"/>
+                <a:cs typeface="Times New Roman" panose="02020603050405020304" pitchFamily="18" charset="0"/>
+              </a:rPr>
+              <a:t>)</a:t>
+            </a:r>
+          </a:p>
+          <a:p>
+            <a:pPr algn="just"/>
+            <a:r>
+              <a:rPr lang="en-US" sz="2000" b="1" dirty="0" smtClean="0">
+                <a:latin typeface="Times New Roman" panose="02020603050405020304" pitchFamily="18" charset="0"/>
+                <a:cs typeface="Times New Roman" panose="02020603050405020304" pitchFamily="18" charset="0"/>
+              </a:rPr>
+              <a:t> </a:t>
+            </a:r>
+          </a:p>
+          <a:p>
+            <a:pPr algn="just"/>
+            <a:r>
+              <a:rPr lang="en-US" sz="2000" dirty="0" smtClean="0">
+                <a:latin typeface="Times New Roman" panose="02020603050405020304" pitchFamily="18" charset="0"/>
+                <a:cs typeface="Times New Roman" panose="02020603050405020304" pitchFamily="18" charset="0"/>
+              </a:rPr>
               <a:t>Java 8 </a:t>
             </a:r>
             <a:r>
-              <a:rPr lang="en-US" dirty="0" err="1" smtClean="0"/>
+              <a:rPr lang="en-US" sz="2000" dirty="0" err="1" smtClean="0">
+                <a:latin typeface="Times New Roman" panose="02020603050405020304" pitchFamily="18" charset="0"/>
+                <a:cs typeface="Times New Roman" panose="02020603050405020304" pitchFamily="18" charset="0"/>
+              </a:rPr>
               <a:t>fournit</a:t>
             </a:r>
             <a:r>
-              <a:rPr lang="en-US" dirty="0" smtClean="0"/>
+              <a:rPr lang="en-US" sz="2000" dirty="0" smtClean="0">
+                <a:latin typeface="Times New Roman" panose="02020603050405020304" pitchFamily="18" charset="0"/>
+                <a:cs typeface="Times New Roman" panose="02020603050405020304" pitchFamily="18" charset="0"/>
+              </a:rPr>
               <a:t> des interfaces </a:t>
             </a:r>
             <a:r>
-              <a:rPr lang="en-US" dirty="0" err="1" smtClean="0"/>
+              <a:rPr lang="en-US" sz="2000" dirty="0" err="1" smtClean="0">
+                <a:latin typeface="Times New Roman" panose="02020603050405020304" pitchFamily="18" charset="0"/>
+                <a:cs typeface="Times New Roman" panose="02020603050405020304" pitchFamily="18" charset="0"/>
+              </a:rPr>
               <a:t>pretes</a:t>
             </a:r>
             <a:r>
-              <a:rPr lang="en-US" dirty="0" smtClean="0"/>
+              <a:rPr lang="en-US" sz="2000" dirty="0" smtClean="0">
+                <a:latin typeface="Times New Roman" panose="02020603050405020304" pitchFamily="18" charset="0"/>
+                <a:cs typeface="Times New Roman" panose="02020603050405020304" pitchFamily="18" charset="0"/>
+              </a:rPr>
               <a:t> a </a:t>
             </a:r>
             <a:r>
-              <a:rPr lang="en-US" dirty="0" err="1" smtClean="0"/>
+              <a:rPr lang="en-US" sz="2000" dirty="0" err="1" smtClean="0">
+                <a:latin typeface="Times New Roman" panose="02020603050405020304" pitchFamily="18" charset="0"/>
+                <a:cs typeface="Times New Roman" panose="02020603050405020304" pitchFamily="18" charset="0"/>
+              </a:rPr>
               <a:t>etre</a:t>
             </a:r>
             <a:r>
-              <a:rPr lang="en-US" dirty="0" smtClean="0"/>
+              <a:rPr lang="en-US" sz="2000" dirty="0" smtClean="0">
+                <a:latin typeface="Times New Roman" panose="02020603050405020304" pitchFamily="18" charset="0"/>
+                <a:cs typeface="Times New Roman" panose="02020603050405020304" pitchFamily="18" charset="0"/>
+              </a:rPr>
               <a:t> employees avec </a:t>
             </a:r>
             <a:r>
-              <a:rPr lang="en-US" dirty="0" err="1" smtClean="0"/>
+              <a:rPr lang="en-US" sz="2000" dirty="0" err="1" smtClean="0">
+                <a:latin typeface="Times New Roman" panose="02020603050405020304" pitchFamily="18" charset="0"/>
+                <a:cs typeface="Times New Roman" panose="02020603050405020304" pitchFamily="18" charset="0"/>
+              </a:rPr>
               <a:t>lamda</a:t>
             </a:r>
-            <a:endParaRPr lang="en-US" dirty="0"/>
+            <a:endParaRPr lang="en-US" sz="2000" dirty="0">
+              <a:latin typeface="Times New Roman" panose="02020603050405020304" pitchFamily="18" charset="0"/>
+              <a:cs typeface="Times New Roman" panose="02020603050405020304" pitchFamily="18" charset="0"/>
+            </a:endParaRPr>
           </a:p>
         </p:txBody>
       </p:sp>
@@ -11895,7 +11476,7 @@
           <p:nvPr/>
         </p:nvPicPr>
         <p:blipFill>
-          <a:blip r:embed="rId2" cstate="print">
+          <a:blip r:embed="rId3" cstate="print">
             <a:extLst>
               <a:ext uri="{28A0092B-C50C-407E-A947-70E740481C1C}">
                 <a14:useLocalDpi xmlns:a14="http://schemas.microsoft.com/office/drawing/2010/main" val="0"/>
@@ -11916,6 +11497,661 @@
           </a:prstGeom>
         </p:spPr>
       </p:pic>
+      <p:graphicFrame>
+        <p:nvGraphicFramePr>
+          <p:cNvPr id="7" name="Table 6"/>
+          <p:cNvGraphicFramePr>
+            <a:graphicFrameLocks noGrp="1"/>
+          </p:cNvGraphicFramePr>
+          <p:nvPr>
+            <p:extLst>
+              <p:ext uri="{D42A27DB-BD31-4B8C-83A1-F6EECF244321}">
+                <p14:modId xmlns:p14="http://schemas.microsoft.com/office/powerpoint/2010/main" val="3201951205"/>
+              </p:ext>
+            </p:extLst>
+          </p:nvPr>
+        </p:nvGraphicFramePr>
+        <p:xfrm>
+          <a:off x="956620" y="2348880"/>
+          <a:ext cx="7287788" cy="3744416"/>
+        </p:xfrm>
+        <a:graphic>
+          <a:graphicData uri="http://schemas.openxmlformats.org/drawingml/2006/table">
+            <a:tbl>
+              <a:tblPr/>
+              <a:tblGrid>
+                <a:gridCol w="1821947">
+                  <a:extLst>
+                    <a:ext uri="{9D8B030D-6E8A-4147-A177-3AD203B41FA5}">
+                      <a16:colId xmlns:a16="http://schemas.microsoft.com/office/drawing/2014/main" val="1600148068"/>
+                    </a:ext>
+                  </a:extLst>
+                </a:gridCol>
+                <a:gridCol w="1821947">
+                  <a:extLst>
+                    <a:ext uri="{9D8B030D-6E8A-4147-A177-3AD203B41FA5}">
+                      <a16:colId xmlns:a16="http://schemas.microsoft.com/office/drawing/2014/main" val="2655763201"/>
+                    </a:ext>
+                  </a:extLst>
+                </a:gridCol>
+                <a:gridCol w="1821947">
+                  <a:extLst>
+                    <a:ext uri="{9D8B030D-6E8A-4147-A177-3AD203B41FA5}">
+                      <a16:colId xmlns:a16="http://schemas.microsoft.com/office/drawing/2014/main" val="4015933991"/>
+                    </a:ext>
+                  </a:extLst>
+                </a:gridCol>
+                <a:gridCol w="1821947">
+                  <a:extLst>
+                    <a:ext uri="{9D8B030D-6E8A-4147-A177-3AD203B41FA5}">
+                      <a16:colId xmlns:a16="http://schemas.microsoft.com/office/drawing/2014/main" val="1168528271"/>
+                    </a:ext>
+                  </a:extLst>
+                </a:gridCol>
+              </a:tblGrid>
+              <a:tr h="468052">
+                <a:tc>
+                  <a:txBody>
+                    <a:bodyPr/>
+                    <a:lstStyle/>
+                    <a:p>
+                      <a:r>
+                        <a:rPr lang="en-US" b="1" dirty="0"/>
+                        <a:t>Interface</a:t>
+                      </a:r>
+                    </a:p>
+                  </a:txBody>
+                  <a:tcPr anchor="ctr">
+                    <a:lnL>
+                      <a:noFill/>
+                    </a:lnL>
+                    <a:lnR>
+                      <a:noFill/>
+                    </a:lnR>
+                    <a:lnT>
+                      <a:noFill/>
+                    </a:lnT>
+                    <a:lnB>
+                      <a:noFill/>
+                    </a:lnB>
+                  </a:tcPr>
+                </a:tc>
+                <a:tc>
+                  <a:txBody>
+                    <a:bodyPr/>
+                    <a:lstStyle/>
+                    <a:p>
+                      <a:r>
+                        <a:rPr lang="en-US" b="1"/>
+                        <a:t>Entrée</a:t>
+                      </a:r>
+                    </a:p>
+                  </a:txBody>
+                  <a:tcPr anchor="ctr">
+                    <a:lnL>
+                      <a:noFill/>
+                    </a:lnL>
+                    <a:lnR>
+                      <a:noFill/>
+                    </a:lnR>
+                    <a:lnT>
+                      <a:noFill/>
+                    </a:lnT>
+                    <a:lnB>
+                      <a:noFill/>
+                    </a:lnB>
+                  </a:tcPr>
+                </a:tc>
+                <a:tc>
+                  <a:txBody>
+                    <a:bodyPr/>
+                    <a:lstStyle/>
+                    <a:p>
+                      <a:r>
+                        <a:rPr lang="en-US" b="1"/>
+                        <a:t>Sortie</a:t>
+                      </a:r>
+                    </a:p>
+                  </a:txBody>
+                  <a:tcPr anchor="ctr">
+                    <a:lnL>
+                      <a:noFill/>
+                    </a:lnL>
+                    <a:lnR>
+                      <a:noFill/>
+                    </a:lnR>
+                    <a:lnT>
+                      <a:noFill/>
+                    </a:lnT>
+                    <a:lnB>
+                      <a:noFill/>
+                    </a:lnB>
+                  </a:tcPr>
+                </a:tc>
+                <a:tc>
+                  <a:txBody>
+                    <a:bodyPr/>
+                    <a:lstStyle/>
+                    <a:p>
+                      <a:r>
+                        <a:rPr lang="en-US" b="1" dirty="0"/>
+                        <a:t>Usage</a:t>
+                      </a:r>
+                    </a:p>
+                  </a:txBody>
+                  <a:tcPr anchor="ctr">
+                    <a:lnL>
+                      <a:noFill/>
+                    </a:lnL>
+                    <a:lnR>
+                      <a:noFill/>
+                    </a:lnR>
+                    <a:lnT>
+                      <a:noFill/>
+                    </a:lnT>
+                    <a:lnB>
+                      <a:noFill/>
+                    </a:lnB>
+                  </a:tcPr>
+                </a:tc>
+                <a:extLst>
+                  <a:ext uri="{0D108BD9-81ED-4DB2-BD59-A6C34878D82A}">
+                    <a16:rowId xmlns:a16="http://schemas.microsoft.com/office/drawing/2014/main" val="4151235679"/>
+                  </a:ext>
+                </a:extLst>
+              </a:tr>
+              <a:tr h="819091">
+                <a:tc>
+                  <a:txBody>
+                    <a:bodyPr/>
+                    <a:lstStyle/>
+                    <a:p>
+                      <a:r>
+                        <a:rPr lang="en-US" b="1" dirty="0"/>
+                        <a:t>Predicate&lt;T&gt;</a:t>
+                      </a:r>
+                    </a:p>
+                  </a:txBody>
+                  <a:tcPr anchor="ctr">
+                    <a:lnL>
+                      <a:noFill/>
+                    </a:lnL>
+                    <a:lnR>
+                      <a:noFill/>
+                    </a:lnR>
+                    <a:lnT>
+                      <a:noFill/>
+                    </a:lnT>
+                    <a:lnB>
+                      <a:noFill/>
+                    </a:lnB>
+                  </a:tcPr>
+                </a:tc>
+                <a:tc>
+                  <a:txBody>
+                    <a:bodyPr/>
+                    <a:lstStyle/>
+                    <a:p>
+                      <a:r>
+                        <a:rPr lang="en-US" dirty="0"/>
+                        <a:t>T</a:t>
+                      </a:r>
+                    </a:p>
+                  </a:txBody>
+                  <a:tcPr anchor="ctr">
+                    <a:lnL>
+                      <a:noFill/>
+                    </a:lnL>
+                    <a:lnR>
+                      <a:noFill/>
+                    </a:lnR>
+                    <a:lnT>
+                      <a:noFill/>
+                    </a:lnT>
+                    <a:lnB>
+                      <a:noFill/>
+                    </a:lnB>
+                  </a:tcPr>
+                </a:tc>
+                <a:tc>
+                  <a:txBody>
+                    <a:bodyPr/>
+                    <a:lstStyle/>
+                    <a:p>
+                      <a:r>
+                        <a:rPr lang="en-US" dirty="0" err="1"/>
+                        <a:t>boolean</a:t>
+                      </a:r>
+                      <a:endParaRPr lang="en-US" dirty="0"/>
+                    </a:p>
+                  </a:txBody>
+                  <a:tcPr anchor="ctr">
+                    <a:lnL>
+                      <a:noFill/>
+                    </a:lnL>
+                    <a:lnR>
+                      <a:noFill/>
+                    </a:lnR>
+                    <a:lnT>
+                      <a:noFill/>
+                    </a:lnT>
+                    <a:lnB>
+                      <a:noFill/>
+                    </a:lnB>
+                  </a:tcPr>
+                </a:tc>
+                <a:tc>
+                  <a:txBody>
+                    <a:bodyPr/>
+                    <a:lstStyle/>
+                    <a:p>
+                      <a:r>
+                        <a:rPr lang="en-US" b="1" dirty="0"/>
+                        <a:t>Tester </a:t>
+                      </a:r>
+                      <a:r>
+                        <a:rPr lang="en-US" b="1" dirty="0" err="1"/>
+                        <a:t>une</a:t>
+                      </a:r>
+                      <a:r>
+                        <a:rPr lang="en-US" b="1" dirty="0"/>
+                        <a:t> condition</a:t>
+                      </a:r>
+                    </a:p>
+                  </a:txBody>
+                  <a:tcPr anchor="ctr">
+                    <a:lnL>
+                      <a:noFill/>
+                    </a:lnL>
+                    <a:lnR>
+                      <a:noFill/>
+                    </a:lnR>
+                    <a:lnT>
+                      <a:noFill/>
+                    </a:lnT>
+                    <a:lnB>
+                      <a:noFill/>
+                    </a:lnB>
+                  </a:tcPr>
+                </a:tc>
+                <a:extLst>
+                  <a:ext uri="{0D108BD9-81ED-4DB2-BD59-A6C34878D82A}">
+                    <a16:rowId xmlns:a16="http://schemas.microsoft.com/office/drawing/2014/main" val="785003703"/>
+                  </a:ext>
+                </a:extLst>
+              </a:tr>
+              <a:tr h="819091">
+                <a:tc>
+                  <a:txBody>
+                    <a:bodyPr/>
+                    <a:lstStyle/>
+                    <a:p>
+                      <a:r>
+                        <a:rPr lang="en-US" b="1" dirty="0"/>
+                        <a:t>Function&lt;T,R&gt;</a:t>
+                      </a:r>
+                    </a:p>
+                  </a:txBody>
+                  <a:tcPr anchor="ctr">
+                    <a:lnL>
+                      <a:noFill/>
+                    </a:lnL>
+                    <a:lnR>
+                      <a:noFill/>
+                    </a:lnR>
+                    <a:lnT>
+                      <a:noFill/>
+                    </a:lnT>
+                    <a:lnB>
+                      <a:noFill/>
+                    </a:lnB>
+                  </a:tcPr>
+                </a:tc>
+                <a:tc>
+                  <a:txBody>
+                    <a:bodyPr/>
+                    <a:lstStyle/>
+                    <a:p>
+                      <a:r>
+                        <a:rPr lang="en-US" b="1" dirty="0"/>
+                        <a:t>T</a:t>
+                      </a:r>
+                    </a:p>
+                  </a:txBody>
+                  <a:tcPr anchor="ctr">
+                    <a:lnL>
+                      <a:noFill/>
+                    </a:lnL>
+                    <a:lnR>
+                      <a:noFill/>
+                    </a:lnR>
+                    <a:lnT>
+                      <a:noFill/>
+                    </a:lnT>
+                    <a:lnB>
+                      <a:noFill/>
+                    </a:lnB>
+                  </a:tcPr>
+                </a:tc>
+                <a:tc>
+                  <a:txBody>
+                    <a:bodyPr/>
+                    <a:lstStyle/>
+                    <a:p>
+                      <a:r>
+                        <a:rPr lang="en-US" b="1" dirty="0"/>
+                        <a:t>R</a:t>
+                      </a:r>
+                    </a:p>
+                  </a:txBody>
+                  <a:tcPr anchor="ctr">
+                    <a:lnL>
+                      <a:noFill/>
+                    </a:lnL>
+                    <a:lnR>
+                      <a:noFill/>
+                    </a:lnR>
+                    <a:lnT>
+                      <a:noFill/>
+                    </a:lnT>
+                    <a:lnB>
+                      <a:noFill/>
+                    </a:lnB>
+                  </a:tcPr>
+                </a:tc>
+                <a:tc>
+                  <a:txBody>
+                    <a:bodyPr/>
+                    <a:lstStyle/>
+                    <a:p>
+                      <a:r>
+                        <a:rPr lang="en-US" b="1" dirty="0"/>
+                        <a:t>Transformer un </a:t>
+                      </a:r>
+                      <a:r>
+                        <a:rPr lang="en-US" b="1" dirty="0" err="1"/>
+                        <a:t>élément</a:t>
+                      </a:r>
+                      <a:endParaRPr lang="en-US" b="1" dirty="0"/>
+                    </a:p>
+                  </a:txBody>
+                  <a:tcPr anchor="ctr">
+                    <a:lnL>
+                      <a:noFill/>
+                    </a:lnL>
+                    <a:lnR>
+                      <a:noFill/>
+                    </a:lnR>
+                    <a:lnT>
+                      <a:noFill/>
+                    </a:lnT>
+                    <a:lnB>
+                      <a:noFill/>
+                    </a:lnB>
+                  </a:tcPr>
+                </a:tc>
+                <a:extLst>
+                  <a:ext uri="{0D108BD9-81ED-4DB2-BD59-A6C34878D82A}">
+                    <a16:rowId xmlns:a16="http://schemas.microsoft.com/office/drawing/2014/main" val="1599097691"/>
+                  </a:ext>
+                </a:extLst>
+              </a:tr>
+              <a:tr h="819091">
+                <a:tc>
+                  <a:txBody>
+                    <a:bodyPr/>
+                    <a:lstStyle/>
+                    <a:p>
+                      <a:r>
+                        <a:rPr lang="en-US" b="1" dirty="0"/>
+                        <a:t>Consumer&lt;T&gt;</a:t>
+                      </a:r>
+                    </a:p>
+                  </a:txBody>
+                  <a:tcPr anchor="ctr">
+                    <a:lnL>
+                      <a:noFill/>
+                    </a:lnL>
+                    <a:lnR>
+                      <a:noFill/>
+                    </a:lnR>
+                    <a:lnT>
+                      <a:noFill/>
+                    </a:lnT>
+                    <a:lnB>
+                      <a:noFill/>
+                    </a:lnB>
+                  </a:tcPr>
+                </a:tc>
+                <a:tc>
+                  <a:txBody>
+                    <a:bodyPr/>
+                    <a:lstStyle/>
+                    <a:p>
+                      <a:r>
+                        <a:rPr lang="en-US" dirty="0"/>
+                        <a:t>T</a:t>
+                      </a:r>
+                    </a:p>
+                  </a:txBody>
+                  <a:tcPr anchor="ctr">
+                    <a:lnL>
+                      <a:noFill/>
+                    </a:lnL>
+                    <a:lnR>
+                      <a:noFill/>
+                    </a:lnR>
+                    <a:lnT>
+                      <a:noFill/>
+                    </a:lnT>
+                    <a:lnB>
+                      <a:noFill/>
+                    </a:lnB>
+                  </a:tcPr>
+                </a:tc>
+                <a:tc>
+                  <a:txBody>
+                    <a:bodyPr/>
+                    <a:lstStyle/>
+                    <a:p>
+                      <a:r>
+                        <a:rPr lang="en-US" dirty="0"/>
+                        <a:t>void</a:t>
+                      </a:r>
+                    </a:p>
+                  </a:txBody>
+                  <a:tcPr anchor="ctr">
+                    <a:lnL>
+                      <a:noFill/>
+                    </a:lnL>
+                    <a:lnR>
+                      <a:noFill/>
+                    </a:lnR>
+                    <a:lnT>
+                      <a:noFill/>
+                    </a:lnT>
+                    <a:lnB>
+                      <a:noFill/>
+                    </a:lnB>
+                  </a:tcPr>
+                </a:tc>
+                <a:tc>
+                  <a:txBody>
+                    <a:bodyPr/>
+                    <a:lstStyle/>
+                    <a:p>
+                      <a:r>
+                        <a:rPr lang="en-US" b="1" dirty="0" err="1"/>
+                        <a:t>Consommer</a:t>
+                      </a:r>
+                      <a:r>
+                        <a:rPr lang="en-US" b="1" dirty="0"/>
+                        <a:t> (ex: </a:t>
+                      </a:r>
+                      <a:r>
+                        <a:rPr lang="en-US" b="1" dirty="0" err="1"/>
+                        <a:t>afficher</a:t>
+                      </a:r>
+                      <a:r>
+                        <a:rPr lang="en-US" b="1" dirty="0"/>
+                        <a:t>)</a:t>
+                      </a:r>
+                    </a:p>
+                  </a:txBody>
+                  <a:tcPr anchor="ctr">
+                    <a:lnL>
+                      <a:noFill/>
+                    </a:lnL>
+                    <a:lnR>
+                      <a:noFill/>
+                    </a:lnR>
+                    <a:lnT>
+                      <a:noFill/>
+                    </a:lnT>
+                    <a:lnB>
+                      <a:noFill/>
+                    </a:lnB>
+                  </a:tcPr>
+                </a:tc>
+                <a:extLst>
+                  <a:ext uri="{0D108BD9-81ED-4DB2-BD59-A6C34878D82A}">
+                    <a16:rowId xmlns:a16="http://schemas.microsoft.com/office/drawing/2014/main" val="1868978152"/>
+                  </a:ext>
+                </a:extLst>
+              </a:tr>
+              <a:tr h="819091">
+                <a:tc>
+                  <a:txBody>
+                    <a:bodyPr/>
+                    <a:lstStyle/>
+                    <a:p>
+                      <a:r>
+                        <a:rPr lang="en-US" b="1" dirty="0"/>
+                        <a:t>Supplier&lt;T&gt;</a:t>
+                      </a:r>
+                    </a:p>
+                  </a:txBody>
+                  <a:tcPr anchor="ctr">
+                    <a:lnL>
+                      <a:noFill/>
+                    </a:lnL>
+                    <a:lnR>
+                      <a:noFill/>
+                    </a:lnR>
+                    <a:lnT>
+                      <a:noFill/>
+                    </a:lnT>
+                    <a:lnB>
+                      <a:noFill/>
+                    </a:lnB>
+                  </a:tcPr>
+                </a:tc>
+                <a:tc>
+                  <a:txBody>
+                    <a:bodyPr/>
+                    <a:lstStyle/>
+                    <a:p>
+                      <a:r>
+                        <a:rPr lang="en-US" dirty="0" err="1"/>
+                        <a:t>rien</a:t>
+                      </a:r>
+                      <a:endParaRPr lang="en-US" dirty="0"/>
+                    </a:p>
+                  </a:txBody>
+                  <a:tcPr anchor="ctr">
+                    <a:lnL>
+                      <a:noFill/>
+                    </a:lnL>
+                    <a:lnR>
+                      <a:noFill/>
+                    </a:lnR>
+                    <a:lnT>
+                      <a:noFill/>
+                    </a:lnT>
+                    <a:lnB>
+                      <a:noFill/>
+                    </a:lnB>
+                  </a:tcPr>
+                </a:tc>
+                <a:tc>
+                  <a:txBody>
+                    <a:bodyPr/>
+                    <a:lstStyle/>
+                    <a:p>
+                      <a:r>
+                        <a:rPr lang="en-US"/>
+                        <a:t>T</a:t>
+                      </a:r>
+                    </a:p>
+                  </a:txBody>
+                  <a:tcPr anchor="ctr">
+                    <a:lnL>
+                      <a:noFill/>
+                    </a:lnL>
+                    <a:lnR>
+                      <a:noFill/>
+                    </a:lnR>
+                    <a:lnT>
+                      <a:noFill/>
+                    </a:lnT>
+                    <a:lnB>
+                      <a:noFill/>
+                    </a:lnB>
+                  </a:tcPr>
+                </a:tc>
+                <a:tc>
+                  <a:txBody>
+                    <a:bodyPr/>
+                    <a:lstStyle/>
+                    <a:p>
+                      <a:r>
+                        <a:rPr lang="en-US" b="1" dirty="0" err="1"/>
+                        <a:t>Fournir</a:t>
+                      </a:r>
+                      <a:r>
+                        <a:rPr lang="en-US" b="1" dirty="0"/>
+                        <a:t> </a:t>
+                      </a:r>
+                      <a:r>
+                        <a:rPr lang="en-US" b="1" dirty="0" err="1"/>
+                        <a:t>une</a:t>
+                      </a:r>
+                      <a:r>
+                        <a:rPr lang="en-US" b="1" dirty="0"/>
+                        <a:t> </a:t>
+                      </a:r>
+                      <a:r>
+                        <a:rPr lang="en-US" b="1" dirty="0" err="1"/>
+                        <a:t>valeur</a:t>
+                      </a:r>
+                      <a:endParaRPr lang="en-US" b="1" dirty="0"/>
+                    </a:p>
+                  </a:txBody>
+                  <a:tcPr anchor="ctr">
+                    <a:lnL>
+                      <a:noFill/>
+                    </a:lnL>
+                    <a:lnR>
+                      <a:noFill/>
+                    </a:lnR>
+                    <a:lnT>
+                      <a:noFill/>
+                    </a:lnT>
+                    <a:lnB>
+                      <a:noFill/>
+                    </a:lnB>
+                  </a:tcPr>
+                </a:tc>
+                <a:extLst>
+                  <a:ext uri="{0D108BD9-81ED-4DB2-BD59-A6C34878D82A}">
+                    <a16:rowId xmlns:a16="http://schemas.microsoft.com/office/drawing/2014/main" val="531498561"/>
+                  </a:ext>
+                </a:extLst>
+              </a:tr>
+            </a:tbl>
+          </a:graphicData>
+        </a:graphic>
+      </p:graphicFrame>
     </p:spTree>
     <p:extLst>
       <p:ext uri="{BB962C8B-B14F-4D97-AF65-F5344CB8AC3E}">

--- a/Osis_Presentation_Ibrahim_SAVADOGO_2 [Autosaved].pptx
+++ b/Osis_Presentation_Ibrahim_SAVADOGO_2 [Autosaved].pptx
@@ -1317,10 +1317,10 @@
               <a:t>programmes</a:t>
             </a:r>
             <a:r>
-              <a:rPr lang="en-US" baseline="0" smtClean="0"/>
+              <a:rPr lang="en-US" baseline="0" dirty="0" smtClean="0"/>
               <a:t> </a:t>
             </a:r>
-            <a:endParaRPr lang="en-US"/>
+            <a:endParaRPr lang="en-US" dirty="0"/>
           </a:p>
         </p:txBody>
       </p:sp>
@@ -4654,8 +4654,8 @@
         </p:nvSpPr>
         <p:spPr>
           <a:xfrm>
-            <a:off x="1899453" y="2276872"/>
-            <a:ext cx="5472608" cy="2520280"/>
+            <a:off x="683568" y="2276872"/>
+            <a:ext cx="7344816" cy="2520280"/>
           </a:xfrm>
         </p:spPr>
         <p:txBody>
@@ -4665,7 +4665,7 @@
             <a:pPr algn="ctr"/>
             <a:r>
               <a:rPr lang="fr-FR" sz="4800" dirty="0" smtClean="0"/>
-              <a:t>THEME: </a:t>
+              <a:t>THÈME Java 8 nouveauté et tour d’horizon d’un IDE </a:t>
             </a:r>
             <a:endParaRPr lang="fr-FR" sz="4800" dirty="0"/>
           </a:p>
@@ -10063,8 +10063,8 @@
         </p:nvSpPr>
         <p:spPr>
           <a:xfrm>
-            <a:off x="633314" y="1870394"/>
-            <a:ext cx="5184576" cy="707886"/>
+            <a:off x="683568" y="1571672"/>
+            <a:ext cx="5184576" cy="1015663"/>
           </a:xfrm>
           <a:prstGeom prst="rect">
             <a:avLst/>
@@ -10091,6 +10091,12 @@
               </a:rPr>
               <a:t> </a:t>
             </a:r>
+            <a:endParaRPr lang="en-US" sz="2000" b="1" dirty="0">
+              <a:latin typeface="Times New Roman" panose="02020603050405020304" pitchFamily="18" charset="0"/>
+              <a:cs typeface="Times New Roman" panose="02020603050405020304" pitchFamily="18" charset="0"/>
+            </a:endParaRPr>
+          </a:p>
+          <a:p>
             <a:endParaRPr lang="en-US" sz="2000" dirty="0" smtClean="0">
               <a:latin typeface="Times New Roman" panose="02020603050405020304" pitchFamily="18" charset="0"/>
               <a:cs typeface="Times New Roman" panose="02020603050405020304" pitchFamily="18" charset="0"/>
@@ -10098,27 +10104,27 @@
           </a:p>
           <a:p>
             <a:r>
-              <a:rPr lang="en-US" sz="2000" dirty="0" smtClean="0">
+              <a:rPr lang="en-US" sz="2000" b="1" dirty="0" smtClean="0">
                 <a:latin typeface="Times New Roman" panose="02020603050405020304" pitchFamily="18" charset="0"/>
                 <a:cs typeface="Times New Roman" panose="02020603050405020304" pitchFamily="18" charset="0"/>
               </a:rPr>
               <a:t>(</a:t>
             </a:r>
             <a:r>
-              <a:rPr lang="en-US" sz="2000" dirty="0" err="1" smtClean="0">
+              <a:rPr lang="en-US" sz="2000" b="1" dirty="0" err="1" smtClean="0">
                 <a:latin typeface="Times New Roman" panose="02020603050405020304" pitchFamily="18" charset="0"/>
                 <a:cs typeface="Times New Roman" panose="02020603050405020304" pitchFamily="18" charset="0"/>
               </a:rPr>
               <a:t>parametres</a:t>
             </a:r>
             <a:r>
-              <a:rPr lang="en-US" sz="2000" dirty="0" smtClean="0">
+              <a:rPr lang="en-US" sz="2000" b="1" dirty="0" smtClean="0">
                 <a:latin typeface="Times New Roman" panose="02020603050405020304" pitchFamily="18" charset="0"/>
                 <a:cs typeface="Times New Roman" panose="02020603050405020304" pitchFamily="18" charset="0"/>
               </a:rPr>
               <a:t>)-&gt; {corps}</a:t>
             </a:r>
-            <a:endParaRPr lang="en-US" sz="2000" dirty="0">
+            <a:endParaRPr lang="en-US" sz="2000" b="1" dirty="0">
               <a:latin typeface="Times New Roman" panose="02020603050405020304" pitchFamily="18" charset="0"/>
               <a:cs typeface="Times New Roman" panose="02020603050405020304" pitchFamily="18" charset="0"/>
             </a:endParaRPr>
@@ -10134,14 +10140,14 @@
         <p:spPr>
           <a:xfrm>
             <a:off x="611560" y="3573016"/>
-            <a:ext cx="4572000" cy="1631216"/>
+            <a:ext cx="4752528" cy="2554545"/>
           </a:xfrm>
           <a:prstGeom prst="rect">
             <a:avLst/>
           </a:prstGeom>
         </p:spPr>
         <p:txBody>
-          <a:bodyPr>
+          <a:bodyPr wrap="square">
             <a:spAutoFit/>
           </a:bodyPr>
           <a:lstStyle/>
@@ -10163,6 +10169,11 @@
             </a:endParaRPr>
           </a:p>
           <a:p>
+            <a:pPr>
+              <a:lnSpc>
+                <a:spcPct val="150000"/>
+              </a:lnSpc>
+            </a:pPr>
             <a:r>
               <a:rPr lang="en-US" sz="2000" dirty="0" smtClean="0">
                 <a:latin typeface="+mn-lt"/>
@@ -10173,7 +10184,70 @@
               <a:rPr lang="en-US" sz="2000" dirty="0">
                 <a:latin typeface="+mn-lt"/>
               </a:rPr>
-              <a:t>r = new Runnable() {    @Override    public void run() {        </a:t>
+              <a:t>r = new Runnable() </a:t>
+            </a:r>
+            <a:r>
+              <a:rPr lang="en-US" sz="2000" dirty="0" smtClean="0">
+                <a:latin typeface="+mn-lt"/>
+              </a:rPr>
+              <a:t>{</a:t>
+            </a:r>
+          </a:p>
+          <a:p>
+            <a:pPr>
+              <a:lnSpc>
+                <a:spcPct val="150000"/>
+              </a:lnSpc>
+            </a:pPr>
+            <a:r>
+              <a:rPr lang="en-US" sz="2000" dirty="0" smtClean="0">
+                <a:latin typeface="+mn-lt"/>
+              </a:rPr>
+              <a:t>    </a:t>
+            </a:r>
+            <a:r>
+              <a:rPr lang="en-US" sz="2000" dirty="0">
+                <a:latin typeface="+mn-lt"/>
+              </a:rPr>
+              <a:t>@Override  </a:t>
+            </a:r>
+            <a:endParaRPr lang="en-US" sz="2000" dirty="0" smtClean="0">
+              <a:latin typeface="+mn-lt"/>
+            </a:endParaRPr>
+          </a:p>
+          <a:p>
+            <a:pPr>
+              <a:lnSpc>
+                <a:spcPct val="150000"/>
+              </a:lnSpc>
+            </a:pPr>
+            <a:r>
+              <a:rPr lang="en-US" sz="2000" dirty="0" smtClean="0">
+                <a:latin typeface="+mn-lt"/>
+              </a:rPr>
+              <a:t>  </a:t>
+            </a:r>
+            <a:r>
+              <a:rPr lang="en-US" sz="2000" dirty="0">
+                <a:latin typeface="+mn-lt"/>
+              </a:rPr>
+              <a:t>public void run() { </a:t>
+            </a:r>
+            <a:endParaRPr lang="en-US" sz="2000" dirty="0" smtClean="0">
+              <a:latin typeface="+mn-lt"/>
+            </a:endParaRPr>
+          </a:p>
+          <a:p>
+            <a:pPr>
+              <a:lnSpc>
+                <a:spcPct val="150000"/>
+              </a:lnSpc>
+            </a:pPr>
+            <a:r>
+              <a:rPr lang="en-US" sz="2000" dirty="0" smtClean="0">
+                <a:latin typeface="+mn-lt"/>
+              </a:rPr>
+              <a:t>       </a:t>
             </a:r>
             <a:r>
               <a:rPr lang="en-US" sz="2000" dirty="0" err="1">

--- a/Osis_Presentation_Ibrahim_SAVADOGO_2 [Autosaved].pptx
+++ b/Osis_Presentation_Ibrahim_SAVADOGO_2 [Autosaved].pptx
@@ -10934,17 +10934,7 @@
                 <a:latin typeface="Times New Roman" panose="02020603050405020304" pitchFamily="18" charset="0"/>
                 <a:cs typeface="Times New Roman" panose="02020603050405020304" pitchFamily="18" charset="0"/>
               </a:rPr>
-              <a:t>  </a:t>
-            </a:r>
-            <a:r>
-              <a:rPr lang="en-US" altLang="en-US" sz="2000" dirty="0" smtClean="0">
-                <a:solidFill>
-                  <a:srgbClr val="0A0A0A"/>
-                </a:solidFill>
-                <a:latin typeface="Times New Roman" panose="02020603050405020304" pitchFamily="18" charset="0"/>
-                <a:cs typeface="Times New Roman" panose="02020603050405020304" pitchFamily="18" charset="0"/>
-              </a:rPr>
-              <a:t>noms </a:t>
+              <a:t>  noms </a:t>
             </a:r>
             <a:r>
               <a:rPr lang="en-US" altLang="en-US" sz="2000" dirty="0">
@@ -11580,42 +11570,42 @@
           <p:nvPr>
             <p:extLst>
               <p:ext uri="{D42A27DB-BD31-4B8C-83A1-F6EECF244321}">
-                <p14:modId xmlns:p14="http://schemas.microsoft.com/office/powerpoint/2010/main" val="3201951205"/>
+                <p14:modId xmlns:p14="http://schemas.microsoft.com/office/powerpoint/2010/main" val="625952863"/>
               </p:ext>
             </p:extLst>
           </p:nvPr>
         </p:nvGraphicFramePr>
         <p:xfrm>
-          <a:off x="956620" y="2348880"/>
-          <a:ext cx="7287788" cy="3744416"/>
+          <a:off x="996042" y="2359478"/>
+          <a:ext cx="7248364" cy="3733815"/>
         </p:xfrm>
         <a:graphic>
           <a:graphicData uri="http://schemas.openxmlformats.org/drawingml/2006/table">
             <a:tbl>
               <a:tblPr/>
               <a:tblGrid>
-                <a:gridCol w="1821947">
+                <a:gridCol w="1812091">
                   <a:extLst>
                     <a:ext uri="{9D8B030D-6E8A-4147-A177-3AD203B41FA5}">
                       <a16:colId xmlns:a16="http://schemas.microsoft.com/office/drawing/2014/main" val="1600148068"/>
                     </a:ext>
                   </a:extLst>
                 </a:gridCol>
-                <a:gridCol w="1821947">
+                <a:gridCol w="1812091">
                   <a:extLst>
                     <a:ext uri="{9D8B030D-6E8A-4147-A177-3AD203B41FA5}">
                       <a16:colId xmlns:a16="http://schemas.microsoft.com/office/drawing/2014/main" val="2655763201"/>
                     </a:ext>
                   </a:extLst>
                 </a:gridCol>
-                <a:gridCol w="1821947">
+                <a:gridCol w="1812091">
                   <a:extLst>
                     <a:ext uri="{9D8B030D-6E8A-4147-A177-3AD203B41FA5}">
                       <a16:colId xmlns:a16="http://schemas.microsoft.com/office/drawing/2014/main" val="4015933991"/>
                     </a:ext>
                   </a:extLst>
                 </a:gridCol>
-                <a:gridCol w="1821947">
+                <a:gridCol w="1812091">
                   <a:extLst>
                     <a:ext uri="{9D8B030D-6E8A-4147-A177-3AD203B41FA5}">
                       <a16:colId xmlns:a16="http://schemas.microsoft.com/office/drawing/2014/main" val="1168528271"/>
@@ -11623,7 +11613,7 @@
                   </a:extLst>
                 </a:gridCol>
               </a:tblGrid>
-              <a:tr h="468052">
+              <a:tr h="466727">
                 <a:tc>
                   <a:txBody>
                     <a:bodyPr/>
@@ -11734,7 +11724,7 @@
                   </a:ext>
                 </a:extLst>
               </a:tr>
-              <a:tr h="819091">
+              <a:tr h="816772">
                 <a:tc>
                   <a:txBody>
                     <a:bodyPr/>
@@ -11854,7 +11844,7 @@
                   </a:ext>
                 </a:extLst>
               </a:tr>
-              <a:tr h="819091">
+              <a:tr h="816772">
                 <a:tc>
                   <a:txBody>
                     <a:bodyPr/>
@@ -11970,7 +11960,7 @@
                   </a:ext>
                 </a:extLst>
               </a:tr>
-              <a:tr h="819091">
+              <a:tr h="816772">
                 <a:tc>
                   <a:txBody>
                     <a:bodyPr/>
@@ -12093,7 +12083,7 @@
                   </a:ext>
                 </a:extLst>
               </a:tr>
-              <a:tr h="819091">
+              <a:tr h="816772">
                 <a:tc>
                   <a:txBody>
                     <a:bodyPr/>
